--- a/lectures/lecture22/binary_search_trees.pptx
+++ b/lectures/lecture22/binary_search_trees.pptx
@@ -211,7 +211,7 @@
   <pc:docChgLst>
     <pc:chgData name="Toby Donaldson" userId="2e6e5431-bb17-4c41-9985-d39c50d83c73" providerId="ADAL" clId="{7F9681A8-EEE2-56F4-9B39-ECCBEE0471AC}"/>
     <pc:docChg chg="undo redo custSel addSld delSld modSld sldOrd">
-      <pc:chgData name="Toby Donaldson" userId="2e6e5431-bb17-4c41-9985-d39c50d83c73" providerId="ADAL" clId="{7F9681A8-EEE2-56F4-9B39-ECCBEE0471AC}" dt="2026-07-06T22:39:18.433" v="22528" actId="113"/>
+      <pc:chgData name="Toby Donaldson" userId="2e6e5431-bb17-4c41-9985-d39c50d83c73" providerId="ADAL" clId="{7F9681A8-EEE2-56F4-9B39-ECCBEE0471AC}" dt="2026-07-07T04:37:39.190" v="22756" actId="20577"/>
       <pc:docMkLst>
         <pc:docMk/>
       </pc:docMkLst>
@@ -4325,7 +4325,7 @@
         </pc:spChg>
       </pc:sldChg>
       <pc:sldChg chg="modSp new mod">
-        <pc:chgData name="Toby Donaldson" userId="2e6e5431-bb17-4c41-9985-d39c50d83c73" providerId="ADAL" clId="{7F9681A8-EEE2-56F4-9B39-ECCBEE0471AC}" dt="2026-07-06T22:39:18.433" v="22528" actId="113"/>
+        <pc:chgData name="Toby Donaldson" userId="2e6e5431-bb17-4c41-9985-d39c50d83c73" providerId="ADAL" clId="{7F9681A8-EEE2-56F4-9B39-ECCBEE0471AC}" dt="2026-07-07T04:37:39.190" v="22756" actId="20577"/>
         <pc:sldMkLst>
           <pc:docMk/>
           <pc:sldMk cId="1535305635" sldId="328"/>
@@ -4339,7 +4339,7 @@
           </ac:spMkLst>
         </pc:spChg>
         <pc:spChg chg="mod">
-          <ac:chgData name="Toby Donaldson" userId="2e6e5431-bb17-4c41-9985-d39c50d83c73" providerId="ADAL" clId="{7F9681A8-EEE2-56F4-9B39-ECCBEE0471AC}" dt="2026-07-06T22:39:18.433" v="22528" actId="113"/>
+          <ac:chgData name="Toby Donaldson" userId="2e6e5431-bb17-4c41-9985-d39c50d83c73" providerId="ADAL" clId="{7F9681A8-EEE2-56F4-9B39-ECCBEE0471AC}" dt="2026-07-07T04:37:39.190" v="22756" actId="20577"/>
           <ac:spMkLst>
             <pc:docMk/>
             <pc:sldMk cId="1535305635" sldId="328"/>
@@ -7588,7 +7588,7 @@
           <a:lstStyle/>
           <a:p>
             <a:r>
-              <a:rPr lang="en-US"/>
+              <a:rPr lang="en-US" dirty="0"/>
               <a:t>Binary Search Trees</a:t>
             </a:r>
           </a:p>
@@ -7616,13 +7616,13 @@
           <a:lstStyle/>
           <a:p>
             <a:r>
-              <a:rPr lang="en-US"/>
+              <a:rPr lang="en-US" dirty="0"/>
               <a:t>Chapter 10.1, 10.2</a:t>
             </a:r>
             <a:br>
-              <a:rPr lang="en-US"/>
+              <a:rPr lang="en-US" dirty="0"/>
             </a:br>
-            <a:endParaRPr lang="en-US"/>
+            <a:endParaRPr lang="en-US" dirty="0"/>
           </a:p>
         </p:txBody>
       </p:sp>
@@ -7689,7 +7689,7 @@
           <a:lstStyle/>
           <a:p>
             <a:r>
-              <a:rPr lang="en-US"/>
+              <a:rPr lang="en-US" dirty="0"/>
               <a:t>Binary Search Tree Examples</a:t>
             </a:r>
           </a:p>
@@ -7747,7 +7747,7 @@
             <a:lstStyle/>
             <a:p>
               <a:r>
-                <a:rPr lang="en-US" sz="2800" b="1"/>
+                <a:rPr lang="en-US" sz="2800" b="1" dirty="0"/>
                 <a:t>5</a:t>
               </a:r>
             </a:p>
@@ -7801,7 +7801,7 @@
             <a:lstStyle/>
             <a:p>
               <a:pPr algn="ctr"/>
-              <a:endParaRPr lang="en-US"/>
+              <a:endParaRPr lang="en-US" dirty="0"/>
             </a:p>
           </p:txBody>
         </p:sp>
@@ -7878,7 +7878,7 @@
               <a:lstStyle/>
               <a:p>
                 <a:r>
-                  <a:rPr lang="en-US" sz="2800" b="1"/>
+                  <a:rPr lang="en-US" sz="2800" b="1" dirty="0"/>
                   <a:t>5</a:t>
                 </a:r>
               </a:p>
@@ -7932,7 +7932,7 @@
               <a:lstStyle/>
               <a:p>
                 <a:pPr algn="ctr"/>
-                <a:endParaRPr lang="en-US"/>
+                <a:endParaRPr lang="en-US" dirty="0"/>
               </a:p>
             </p:txBody>
           </p:sp>
@@ -7989,7 +7989,7 @@
               <a:lstStyle/>
               <a:p>
                 <a:r>
-                  <a:rPr lang="en-US" sz="2800" b="1"/>
+                  <a:rPr lang="en-US" sz="2800" b="1" dirty="0"/>
                   <a:t>2</a:t>
                 </a:r>
               </a:p>
@@ -8043,7 +8043,7 @@
               <a:lstStyle/>
               <a:p>
                 <a:pPr algn="ctr"/>
-                <a:endParaRPr lang="en-US"/>
+                <a:endParaRPr lang="en-US" dirty="0"/>
               </a:p>
             </p:txBody>
           </p:sp>
@@ -8141,7 +8141,7 @@
             <a:lstStyle/>
             <a:p>
               <a:r>
-                <a:rPr lang="en-US" sz="2800" b="1"/>
+                <a:rPr lang="en-US" sz="2800" b="1" dirty="0"/>
                 <a:t>5</a:t>
               </a:r>
             </a:p>
@@ -8195,7 +8195,7 @@
             <a:lstStyle/>
             <a:p>
               <a:pPr algn="ctr"/>
-              <a:endParaRPr lang="en-US"/>
+              <a:endParaRPr lang="en-US" dirty="0"/>
             </a:p>
           </p:txBody>
         </p:sp>
@@ -8252,7 +8252,7 @@
             <a:lstStyle/>
             <a:p>
               <a:r>
-                <a:rPr lang="en-US" sz="2800" b="1"/>
+                <a:rPr lang="en-US" sz="2800" b="1" dirty="0"/>
                 <a:t>2</a:t>
               </a:r>
             </a:p>
@@ -8306,7 +8306,7 @@
             <a:lstStyle/>
             <a:p>
               <a:pPr algn="ctr"/>
-              <a:endParaRPr lang="en-US"/>
+              <a:endParaRPr lang="en-US" dirty="0"/>
             </a:p>
           </p:txBody>
         </p:sp>
@@ -8403,7 +8403,7 @@
             <a:lstStyle/>
             <a:p>
               <a:r>
-                <a:rPr lang="en-US" sz="2800" b="1"/>
+                <a:rPr lang="en-US" sz="2800" b="1" dirty="0"/>
                 <a:t>4</a:t>
               </a:r>
             </a:p>
@@ -8457,7 +8457,7 @@
             <a:lstStyle/>
             <a:p>
               <a:pPr algn="ctr"/>
-              <a:endParaRPr lang="en-US"/>
+              <a:endParaRPr lang="en-US" dirty="0"/>
             </a:p>
           </p:txBody>
         </p:sp>
@@ -8556,7 +8556,7 @@
             <a:lstStyle/>
             <a:p>
               <a:r>
-                <a:rPr lang="en-US"/>
+                <a:rPr lang="en-US" dirty="0"/>
                 <a:t> a BST</a:t>
               </a:r>
             </a:p>
@@ -8653,7 +8653,7 @@
             <a:lstStyle/>
             <a:p>
               <a:r>
-                <a:rPr lang="en-US"/>
+                <a:rPr lang="en-US" dirty="0"/>
                 <a:t> a BST</a:t>
               </a:r>
             </a:p>
@@ -8730,7 +8730,7 @@
           <a:lstStyle/>
           <a:p>
             <a:r>
-              <a:rPr lang="en-US"/>
+              <a:rPr lang="en-US" dirty="0"/>
               <a:t> a BST?</a:t>
             </a:r>
           </a:p>
@@ -8799,7 +8799,7 @@
           <a:lstStyle/>
           <a:p>
             <a:r>
-              <a:rPr lang="en-US"/>
+              <a:rPr lang="en-US" dirty="0"/>
               <a:t>Binary Search Tree Examples</a:t>
             </a:r>
           </a:p>
@@ -8857,7 +8857,7 @@
             <a:lstStyle/>
             <a:p>
               <a:r>
-                <a:rPr lang="en-US" sz="2800" b="1"/>
+                <a:rPr lang="en-US" sz="2800" b="1" dirty="0"/>
                 <a:t>5</a:t>
               </a:r>
             </a:p>
@@ -8911,7 +8911,7 @@
             <a:lstStyle/>
             <a:p>
               <a:pPr algn="ctr"/>
-              <a:endParaRPr lang="en-US"/>
+              <a:endParaRPr lang="en-US" dirty="0"/>
             </a:p>
           </p:txBody>
         </p:sp>
@@ -8988,7 +8988,7 @@
               <a:lstStyle/>
               <a:p>
                 <a:r>
-                  <a:rPr lang="en-US" sz="2800" b="1"/>
+                  <a:rPr lang="en-US" sz="2800" b="1" dirty="0"/>
                   <a:t>5</a:t>
                 </a:r>
               </a:p>
@@ -9042,7 +9042,7 @@
               <a:lstStyle/>
               <a:p>
                 <a:pPr algn="ctr"/>
-                <a:endParaRPr lang="en-US"/>
+                <a:endParaRPr lang="en-US" dirty="0"/>
               </a:p>
             </p:txBody>
           </p:sp>
@@ -9099,7 +9099,7 @@
               <a:lstStyle/>
               <a:p>
                 <a:r>
-                  <a:rPr lang="en-US" sz="2800" b="1"/>
+                  <a:rPr lang="en-US" sz="2800" b="1" dirty="0"/>
                   <a:t>2</a:t>
                 </a:r>
               </a:p>
@@ -9153,7 +9153,7 @@
               <a:lstStyle/>
               <a:p>
                 <a:pPr algn="ctr"/>
-                <a:endParaRPr lang="en-US"/>
+                <a:endParaRPr lang="en-US" dirty="0"/>
               </a:p>
             </p:txBody>
           </p:sp>
@@ -9251,7 +9251,7 @@
             <a:lstStyle/>
             <a:p>
               <a:r>
-                <a:rPr lang="en-US" sz="2800" b="1"/>
+                <a:rPr lang="en-US" sz="2800" b="1" dirty="0"/>
                 <a:t>5</a:t>
               </a:r>
             </a:p>
@@ -9305,7 +9305,7 @@
             <a:lstStyle/>
             <a:p>
               <a:pPr algn="ctr"/>
-              <a:endParaRPr lang="en-US"/>
+              <a:endParaRPr lang="en-US" dirty="0"/>
             </a:p>
           </p:txBody>
         </p:sp>
@@ -9362,7 +9362,7 @@
             <a:lstStyle/>
             <a:p>
               <a:r>
-                <a:rPr lang="en-US" sz="2800" b="1"/>
+                <a:rPr lang="en-US" sz="2800" b="1" dirty="0"/>
                 <a:t>2</a:t>
               </a:r>
             </a:p>
@@ -9416,7 +9416,7 @@
             <a:lstStyle/>
             <a:p>
               <a:pPr algn="ctr"/>
-              <a:endParaRPr lang="en-US"/>
+              <a:endParaRPr lang="en-US" dirty="0"/>
             </a:p>
           </p:txBody>
         </p:sp>
@@ -9513,7 +9513,7 @@
             <a:lstStyle/>
             <a:p>
               <a:r>
-                <a:rPr lang="en-US" sz="2800" b="1"/>
+                <a:rPr lang="en-US" sz="2800" b="1" dirty="0"/>
                 <a:t>4</a:t>
               </a:r>
             </a:p>
@@ -9567,7 +9567,7 @@
             <a:lstStyle/>
             <a:p>
               <a:pPr algn="ctr"/>
-              <a:endParaRPr lang="en-US"/>
+              <a:endParaRPr lang="en-US" dirty="0"/>
             </a:p>
           </p:txBody>
         </p:sp>
@@ -9666,7 +9666,7 @@
             <a:lstStyle/>
             <a:p>
               <a:r>
-                <a:rPr lang="en-US"/>
+                <a:rPr lang="en-US" dirty="0"/>
                 <a:t> a BST</a:t>
               </a:r>
             </a:p>
@@ -9763,7 +9763,7 @@
             <a:lstStyle/>
             <a:p>
               <a:r>
-                <a:rPr lang="en-US"/>
+                <a:rPr lang="en-US" dirty="0"/>
                 <a:t> a BST</a:t>
               </a:r>
             </a:p>
@@ -9860,7 +9860,7 @@
             <a:lstStyle/>
             <a:p>
               <a:r>
-                <a:rPr lang="en-US"/>
+                <a:rPr lang="en-US" dirty="0"/>
                 <a:t> a BST</a:t>
               </a:r>
             </a:p>
@@ -9966,7 +9966,7 @@
           <a:lstStyle/>
           <a:p>
             <a:r>
-              <a:rPr lang="en-US"/>
+              <a:rPr lang="en-US" dirty="0"/>
               <a:t>Binary Search Tree Examples</a:t>
             </a:r>
           </a:p>
@@ -10024,7 +10024,7 @@
             <a:lstStyle/>
             <a:p>
               <a:r>
-                <a:rPr lang="en-US" sz="2800" b="1"/>
+                <a:rPr lang="en-US" sz="2800" b="1" dirty="0"/>
                 <a:t>5</a:t>
               </a:r>
             </a:p>
@@ -10078,7 +10078,7 @@
             <a:lstStyle/>
             <a:p>
               <a:pPr algn="ctr"/>
-              <a:endParaRPr lang="en-US"/>
+              <a:endParaRPr lang="en-US" dirty="0"/>
             </a:p>
           </p:txBody>
         </p:sp>
@@ -10155,7 +10155,7 @@
               <a:lstStyle/>
               <a:p>
                 <a:r>
-                  <a:rPr lang="en-US" sz="2800" b="1"/>
+                  <a:rPr lang="en-US" sz="2800" b="1" dirty="0"/>
                   <a:t>5</a:t>
                 </a:r>
               </a:p>
@@ -10209,7 +10209,7 @@
               <a:lstStyle/>
               <a:p>
                 <a:pPr algn="ctr"/>
-                <a:endParaRPr lang="en-US"/>
+                <a:endParaRPr lang="en-US" dirty="0"/>
               </a:p>
             </p:txBody>
           </p:sp>
@@ -10266,7 +10266,7 @@
               <a:lstStyle/>
               <a:p>
                 <a:r>
-                  <a:rPr lang="en-US" sz="2800" b="1"/>
+                  <a:rPr lang="en-US" sz="2800" b="1" dirty="0"/>
                   <a:t>2</a:t>
                 </a:r>
               </a:p>
@@ -10320,7 +10320,7 @@
               <a:lstStyle/>
               <a:p>
                 <a:pPr algn="ctr"/>
-                <a:endParaRPr lang="en-US"/>
+                <a:endParaRPr lang="en-US" dirty="0"/>
               </a:p>
             </p:txBody>
           </p:sp>
@@ -10418,7 +10418,7 @@
             <a:lstStyle/>
             <a:p>
               <a:r>
-                <a:rPr lang="en-US" sz="2800" b="1"/>
+                <a:rPr lang="en-US" sz="2800" b="1" dirty="0"/>
                 <a:t>5</a:t>
               </a:r>
             </a:p>
@@ -10472,7 +10472,7 @@
             <a:lstStyle/>
             <a:p>
               <a:pPr algn="ctr"/>
-              <a:endParaRPr lang="en-US"/>
+              <a:endParaRPr lang="en-US" dirty="0"/>
             </a:p>
           </p:txBody>
         </p:sp>
@@ -10529,7 +10529,7 @@
             <a:lstStyle/>
             <a:p>
               <a:r>
-                <a:rPr lang="en-US" sz="2800" b="1"/>
+                <a:rPr lang="en-US" sz="2800" b="1" dirty="0"/>
                 <a:t>2</a:t>
               </a:r>
             </a:p>
@@ -10583,7 +10583,7 @@
             <a:lstStyle/>
             <a:p>
               <a:pPr algn="ctr"/>
-              <a:endParaRPr lang="en-US"/>
+              <a:endParaRPr lang="en-US" dirty="0"/>
             </a:p>
           </p:txBody>
         </p:sp>
@@ -10680,7 +10680,7 @@
             <a:lstStyle/>
             <a:p>
               <a:r>
-                <a:rPr lang="en-US" sz="2800" b="1"/>
+                <a:rPr lang="en-US" sz="2800" b="1" dirty="0"/>
                 <a:t>4</a:t>
               </a:r>
             </a:p>
@@ -10734,7 +10734,7 @@
             <a:lstStyle/>
             <a:p>
               <a:pPr algn="ctr"/>
-              <a:endParaRPr lang="en-US"/>
+              <a:endParaRPr lang="en-US" dirty="0"/>
             </a:p>
           </p:txBody>
         </p:sp>
@@ -10833,7 +10833,7 @@
             <a:lstStyle/>
             <a:p>
               <a:r>
-                <a:rPr lang="en-US"/>
+                <a:rPr lang="en-US" dirty="0"/>
                 <a:t> a BST</a:t>
               </a:r>
             </a:p>
@@ -10930,7 +10930,7 @@
             <a:lstStyle/>
             <a:p>
               <a:r>
-                <a:rPr lang="en-US"/>
+                <a:rPr lang="en-US" dirty="0"/>
                 <a:t> a BST</a:t>
               </a:r>
             </a:p>
@@ -11027,7 +11027,7 @@
             <a:lstStyle/>
             <a:p>
               <a:r>
-                <a:rPr lang="en-US"/>
+                <a:rPr lang="en-US" dirty="0"/>
                 <a:t> a BST</a:t>
               </a:r>
             </a:p>
@@ -11142,7 +11142,7 @@
               <a:lstStyle/>
               <a:p>
                 <a:r>
-                  <a:rPr lang="en-US" sz="2800" b="1"/>
+                  <a:rPr lang="en-US" sz="2800" b="1" dirty="0"/>
                   <a:t>5</a:t>
                 </a:r>
               </a:p>
@@ -11196,7 +11196,7 @@
               <a:lstStyle/>
               <a:p>
                 <a:pPr algn="ctr"/>
-                <a:endParaRPr lang="en-US"/>
+                <a:endParaRPr lang="en-US" dirty="0"/>
               </a:p>
             </p:txBody>
           </p:sp>
@@ -11253,7 +11253,7 @@
               <a:lstStyle/>
               <a:p>
                 <a:r>
-                  <a:rPr lang="en-US" sz="2800" b="1"/>
+                  <a:rPr lang="en-US" sz="2800" b="1" dirty="0"/>
                   <a:t>8</a:t>
                 </a:r>
               </a:p>
@@ -11307,7 +11307,7 @@
               <a:lstStyle/>
               <a:p>
                 <a:pPr algn="ctr"/>
-                <a:endParaRPr lang="en-US"/>
+                <a:endParaRPr lang="en-US" dirty="0"/>
               </a:p>
             </p:txBody>
           </p:sp>
@@ -11387,7 +11387,7 @@
           <a:lstStyle/>
           <a:p>
             <a:r>
-              <a:rPr lang="en-US"/>
+              <a:rPr lang="en-US" dirty="0"/>
               <a:t> a BST?</a:t>
             </a:r>
           </a:p>
@@ -11456,7 +11456,7 @@
           <a:lstStyle/>
           <a:p>
             <a:r>
-              <a:rPr lang="en-US"/>
+              <a:rPr lang="en-US" dirty="0"/>
               <a:t>Binary Search Tree Examples</a:t>
             </a:r>
           </a:p>
@@ -11514,7 +11514,7 @@
             <a:lstStyle/>
             <a:p>
               <a:r>
-                <a:rPr lang="en-US" sz="2800" b="1"/>
+                <a:rPr lang="en-US" sz="2800" b="1" dirty="0"/>
                 <a:t>5</a:t>
               </a:r>
             </a:p>
@@ -11568,7 +11568,7 @@
             <a:lstStyle/>
             <a:p>
               <a:pPr algn="ctr"/>
-              <a:endParaRPr lang="en-US"/>
+              <a:endParaRPr lang="en-US" dirty="0"/>
             </a:p>
           </p:txBody>
         </p:sp>
@@ -11645,7 +11645,7 @@
               <a:lstStyle/>
               <a:p>
                 <a:r>
-                  <a:rPr lang="en-US" sz="2800" b="1"/>
+                  <a:rPr lang="en-US" sz="2800" b="1" dirty="0"/>
                   <a:t>5</a:t>
                 </a:r>
               </a:p>
@@ -11699,7 +11699,7 @@
               <a:lstStyle/>
               <a:p>
                 <a:pPr algn="ctr"/>
-                <a:endParaRPr lang="en-US"/>
+                <a:endParaRPr lang="en-US" dirty="0"/>
               </a:p>
             </p:txBody>
           </p:sp>
@@ -11756,7 +11756,7 @@
               <a:lstStyle/>
               <a:p>
                 <a:r>
-                  <a:rPr lang="en-US" sz="2800" b="1"/>
+                  <a:rPr lang="en-US" sz="2800" b="1" dirty="0"/>
                   <a:t>2</a:t>
                 </a:r>
               </a:p>
@@ -11810,7 +11810,7 @@
               <a:lstStyle/>
               <a:p>
                 <a:pPr algn="ctr"/>
-                <a:endParaRPr lang="en-US"/>
+                <a:endParaRPr lang="en-US" dirty="0"/>
               </a:p>
             </p:txBody>
           </p:sp>
@@ -11908,7 +11908,7 @@
             <a:lstStyle/>
             <a:p>
               <a:r>
-                <a:rPr lang="en-US" sz="2800" b="1"/>
+                <a:rPr lang="en-US" sz="2800" b="1" dirty="0"/>
                 <a:t>5</a:t>
               </a:r>
             </a:p>
@@ -11962,7 +11962,7 @@
             <a:lstStyle/>
             <a:p>
               <a:pPr algn="ctr"/>
-              <a:endParaRPr lang="en-US"/>
+              <a:endParaRPr lang="en-US" dirty="0"/>
             </a:p>
           </p:txBody>
         </p:sp>
@@ -12019,7 +12019,7 @@
             <a:lstStyle/>
             <a:p>
               <a:r>
-                <a:rPr lang="en-US" sz="2800" b="1"/>
+                <a:rPr lang="en-US" sz="2800" b="1" dirty="0"/>
                 <a:t>2</a:t>
               </a:r>
             </a:p>
@@ -12073,7 +12073,7 @@
             <a:lstStyle/>
             <a:p>
               <a:pPr algn="ctr"/>
-              <a:endParaRPr lang="en-US"/>
+              <a:endParaRPr lang="en-US" dirty="0"/>
             </a:p>
           </p:txBody>
         </p:sp>
@@ -12170,7 +12170,7 @@
             <a:lstStyle/>
             <a:p>
               <a:r>
-                <a:rPr lang="en-US" sz="2800" b="1"/>
+                <a:rPr lang="en-US" sz="2800" b="1" dirty="0"/>
                 <a:t>4</a:t>
               </a:r>
             </a:p>
@@ -12224,7 +12224,7 @@
             <a:lstStyle/>
             <a:p>
               <a:pPr algn="ctr"/>
-              <a:endParaRPr lang="en-US"/>
+              <a:endParaRPr lang="en-US" dirty="0"/>
             </a:p>
           </p:txBody>
         </p:sp>
@@ -12323,7 +12323,7 @@
             <a:lstStyle/>
             <a:p>
               <a:r>
-                <a:rPr lang="en-US"/>
+                <a:rPr lang="en-US" dirty="0"/>
                 <a:t> a BST</a:t>
               </a:r>
             </a:p>
@@ -12420,7 +12420,7 @@
             <a:lstStyle/>
             <a:p>
               <a:r>
-                <a:rPr lang="en-US"/>
+                <a:rPr lang="en-US" dirty="0"/>
                 <a:t> a BST</a:t>
               </a:r>
             </a:p>
@@ -12517,7 +12517,7 @@
             <a:lstStyle/>
             <a:p>
               <a:r>
-                <a:rPr lang="en-US"/>
+                <a:rPr lang="en-US" dirty="0"/>
                 <a:t> a BST</a:t>
               </a:r>
             </a:p>
@@ -12632,7 +12632,7 @@
               <a:lstStyle/>
               <a:p>
                 <a:r>
-                  <a:rPr lang="en-US" sz="2800" b="1"/>
+                  <a:rPr lang="en-US" sz="2800" b="1" dirty="0"/>
                   <a:t>5</a:t>
                 </a:r>
               </a:p>
@@ -12686,7 +12686,7 @@
               <a:lstStyle/>
               <a:p>
                 <a:pPr algn="ctr"/>
-                <a:endParaRPr lang="en-US"/>
+                <a:endParaRPr lang="en-US" dirty="0"/>
               </a:p>
             </p:txBody>
           </p:sp>
@@ -12743,7 +12743,7 @@
               <a:lstStyle/>
               <a:p>
                 <a:r>
-                  <a:rPr lang="en-US" sz="2800" b="1"/>
+                  <a:rPr lang="en-US" sz="2800" b="1" dirty="0"/>
                   <a:t>8</a:t>
                 </a:r>
               </a:p>
@@ -12797,7 +12797,7 @@
               <a:lstStyle/>
               <a:p>
                 <a:pPr algn="ctr"/>
-                <a:endParaRPr lang="en-US"/>
+                <a:endParaRPr lang="en-US" dirty="0"/>
               </a:p>
             </p:txBody>
           </p:sp>
@@ -12897,11 +12897,11 @@
             <a:lstStyle/>
             <a:p>
               <a:r>
-                <a:rPr lang="en-US"/>
+                <a:rPr lang="en-US" dirty="0"/>
                 <a:t> </a:t>
               </a:r>
               <a:r>
-                <a:rPr lang="en-US">
+                <a:rPr lang="en-US" dirty="0">
                   <a:solidFill>
                     <a:srgbClr val="FF0000"/>
                   </a:solidFill>
@@ -12909,7 +12909,7 @@
                 <a:t>NOT</a:t>
               </a:r>
               <a:r>
-                <a:rPr lang="en-US"/>
+                <a:rPr lang="en-US" dirty="0"/>
                 <a:t> a BST</a:t>
               </a:r>
             </a:p>
@@ -13015,7 +13015,7 @@
           <a:lstStyle/>
           <a:p>
             <a:r>
-              <a:rPr lang="en-US"/>
+              <a:rPr lang="en-US" dirty="0"/>
               <a:t>Binary Search Tree Examples</a:t>
             </a:r>
           </a:p>
@@ -13073,7 +13073,7 @@
             <a:lstStyle/>
             <a:p>
               <a:r>
-                <a:rPr lang="en-US" sz="2800" b="1"/>
+                <a:rPr lang="en-US" sz="2800" b="1" dirty="0"/>
                 <a:t>5</a:t>
               </a:r>
             </a:p>
@@ -13127,7 +13127,7 @@
             <a:lstStyle/>
             <a:p>
               <a:pPr algn="ctr"/>
-              <a:endParaRPr lang="en-US"/>
+              <a:endParaRPr lang="en-US" dirty="0"/>
             </a:p>
           </p:txBody>
         </p:sp>
@@ -13204,7 +13204,7 @@
               <a:lstStyle/>
               <a:p>
                 <a:r>
-                  <a:rPr lang="en-US" sz="2800" b="1"/>
+                  <a:rPr lang="en-US" sz="2800" b="1" dirty="0"/>
                   <a:t>5</a:t>
                 </a:r>
               </a:p>
@@ -13258,7 +13258,7 @@
               <a:lstStyle/>
               <a:p>
                 <a:pPr algn="ctr"/>
-                <a:endParaRPr lang="en-US"/>
+                <a:endParaRPr lang="en-US" dirty="0"/>
               </a:p>
             </p:txBody>
           </p:sp>
@@ -13315,7 +13315,7 @@
               <a:lstStyle/>
               <a:p>
                 <a:r>
-                  <a:rPr lang="en-US" sz="2800" b="1"/>
+                  <a:rPr lang="en-US" sz="2800" b="1" dirty="0"/>
                   <a:t>2</a:t>
                 </a:r>
               </a:p>
@@ -13369,7 +13369,7 @@
               <a:lstStyle/>
               <a:p>
                 <a:pPr algn="ctr"/>
-                <a:endParaRPr lang="en-US"/>
+                <a:endParaRPr lang="en-US" dirty="0"/>
               </a:p>
             </p:txBody>
           </p:sp>
@@ -13467,7 +13467,7 @@
             <a:lstStyle/>
             <a:p>
               <a:r>
-                <a:rPr lang="en-US" sz="2800" b="1"/>
+                <a:rPr lang="en-US" sz="2800" b="1" dirty="0"/>
                 <a:t>5</a:t>
               </a:r>
             </a:p>
@@ -13521,7 +13521,7 @@
             <a:lstStyle/>
             <a:p>
               <a:pPr algn="ctr"/>
-              <a:endParaRPr lang="en-US"/>
+              <a:endParaRPr lang="en-US" dirty="0"/>
             </a:p>
           </p:txBody>
         </p:sp>
@@ -13578,7 +13578,7 @@
             <a:lstStyle/>
             <a:p>
               <a:r>
-                <a:rPr lang="en-US" sz="2800" b="1"/>
+                <a:rPr lang="en-US" sz="2800" b="1" dirty="0"/>
                 <a:t>2</a:t>
               </a:r>
             </a:p>
@@ -13632,7 +13632,7 @@
             <a:lstStyle/>
             <a:p>
               <a:pPr algn="ctr"/>
-              <a:endParaRPr lang="en-US"/>
+              <a:endParaRPr lang="en-US" dirty="0"/>
             </a:p>
           </p:txBody>
         </p:sp>
@@ -13729,7 +13729,7 @@
             <a:lstStyle/>
             <a:p>
               <a:r>
-                <a:rPr lang="en-US" sz="2800" b="1"/>
+                <a:rPr lang="en-US" sz="2800" b="1" dirty="0"/>
                 <a:t>4</a:t>
               </a:r>
             </a:p>
@@ -13783,7 +13783,7 @@
             <a:lstStyle/>
             <a:p>
               <a:pPr algn="ctr"/>
-              <a:endParaRPr lang="en-US"/>
+              <a:endParaRPr lang="en-US" dirty="0"/>
             </a:p>
           </p:txBody>
         </p:sp>
@@ -13882,7 +13882,7 @@
             <a:lstStyle/>
             <a:p>
               <a:r>
-                <a:rPr lang="en-US"/>
+                <a:rPr lang="en-US" dirty="0"/>
                 <a:t> a BST</a:t>
               </a:r>
             </a:p>
@@ -13979,7 +13979,7 @@
             <a:lstStyle/>
             <a:p>
               <a:r>
-                <a:rPr lang="en-US"/>
+                <a:rPr lang="en-US" dirty="0"/>
                 <a:t> a BST</a:t>
               </a:r>
             </a:p>
@@ -14076,7 +14076,7 @@
             <a:lstStyle/>
             <a:p>
               <a:r>
-                <a:rPr lang="en-US"/>
+                <a:rPr lang="en-US" dirty="0"/>
                 <a:t> a BST</a:t>
               </a:r>
             </a:p>
@@ -14191,7 +14191,7 @@
               <a:lstStyle/>
               <a:p>
                 <a:r>
-                  <a:rPr lang="en-US" sz="2800" b="1"/>
+                  <a:rPr lang="en-US" sz="2800" b="1" dirty="0"/>
                   <a:t>5</a:t>
                 </a:r>
               </a:p>
@@ -14245,7 +14245,7 @@
               <a:lstStyle/>
               <a:p>
                 <a:pPr algn="ctr"/>
-                <a:endParaRPr lang="en-US"/>
+                <a:endParaRPr lang="en-US" dirty="0"/>
               </a:p>
             </p:txBody>
           </p:sp>
@@ -14302,7 +14302,7 @@
               <a:lstStyle/>
               <a:p>
                 <a:r>
-                  <a:rPr lang="en-US" sz="2800" b="1"/>
+                  <a:rPr lang="en-US" sz="2800" b="1" dirty="0"/>
                   <a:t>8</a:t>
                 </a:r>
               </a:p>
@@ -14356,7 +14356,7 @@
               <a:lstStyle/>
               <a:p>
                 <a:pPr algn="ctr"/>
-                <a:endParaRPr lang="en-US"/>
+                <a:endParaRPr lang="en-US" dirty="0"/>
               </a:p>
             </p:txBody>
           </p:sp>
@@ -14456,11 +14456,11 @@
             <a:lstStyle/>
             <a:p>
               <a:r>
-                <a:rPr lang="en-US"/>
+                <a:rPr lang="en-US" dirty="0"/>
                 <a:t> </a:t>
               </a:r>
               <a:r>
-                <a:rPr lang="en-US">
+                <a:rPr lang="en-US" dirty="0">
                   <a:solidFill>
                     <a:srgbClr val="FF0000"/>
                   </a:solidFill>
@@ -14468,7 +14468,7 @@
                 <a:t>NOT</a:t>
               </a:r>
               <a:r>
-                <a:rPr lang="en-US"/>
+                <a:rPr lang="en-US" dirty="0"/>
                 <a:t> a BST</a:t>
               </a:r>
             </a:p>
@@ -14563,7 +14563,7 @@
             <a:lstStyle/>
             <a:p>
               <a:r>
-                <a:rPr lang="en-US" sz="2800" b="1"/>
+                <a:rPr lang="en-US" sz="2800" b="1" dirty="0"/>
                 <a:t>5</a:t>
               </a:r>
             </a:p>
@@ -14617,7 +14617,7 @@
             <a:lstStyle/>
             <a:p>
               <a:pPr algn="ctr"/>
-              <a:endParaRPr lang="en-US"/>
+              <a:endParaRPr lang="en-US" dirty="0"/>
             </a:p>
           </p:txBody>
         </p:sp>
@@ -14674,7 +14674,7 @@
             <a:lstStyle/>
             <a:p>
               <a:r>
-                <a:rPr lang="en-US" sz="2800" b="1"/>
+                <a:rPr lang="en-US" sz="2800" b="1" dirty="0"/>
                 <a:t>2</a:t>
               </a:r>
             </a:p>
@@ -14728,7 +14728,7 @@
             <a:lstStyle/>
             <a:p>
               <a:pPr algn="ctr"/>
-              <a:endParaRPr lang="en-US"/>
+              <a:endParaRPr lang="en-US" dirty="0"/>
             </a:p>
           </p:txBody>
         </p:sp>
@@ -14807,7 +14807,7 @@
           <a:lstStyle/>
           <a:p>
             <a:r>
-              <a:rPr lang="en-US"/>
+              <a:rPr lang="en-US" dirty="0"/>
               <a:t>a BST?</a:t>
             </a:r>
           </a:p>
@@ -14876,7 +14876,7 @@
           <a:lstStyle/>
           <a:p>
             <a:r>
-              <a:rPr lang="en-US"/>
+              <a:rPr lang="en-US" dirty="0"/>
               <a:t>Binary Search Tree Examples</a:t>
             </a:r>
           </a:p>
@@ -14934,7 +14934,7 @@
             <a:lstStyle/>
             <a:p>
               <a:r>
-                <a:rPr lang="en-US" sz="2800" b="1"/>
+                <a:rPr lang="en-US" sz="2800" b="1" dirty="0"/>
                 <a:t>5</a:t>
               </a:r>
             </a:p>
@@ -14988,7 +14988,7 @@
             <a:lstStyle/>
             <a:p>
               <a:pPr algn="ctr"/>
-              <a:endParaRPr lang="en-US"/>
+              <a:endParaRPr lang="en-US" dirty="0"/>
             </a:p>
           </p:txBody>
         </p:sp>
@@ -15065,7 +15065,7 @@
               <a:lstStyle/>
               <a:p>
                 <a:r>
-                  <a:rPr lang="en-US" sz="2800" b="1"/>
+                  <a:rPr lang="en-US" sz="2800" b="1" dirty="0"/>
                   <a:t>5</a:t>
                 </a:r>
               </a:p>
@@ -15119,7 +15119,7 @@
               <a:lstStyle/>
               <a:p>
                 <a:pPr algn="ctr"/>
-                <a:endParaRPr lang="en-US"/>
+                <a:endParaRPr lang="en-US" dirty="0"/>
               </a:p>
             </p:txBody>
           </p:sp>
@@ -15176,7 +15176,7 @@
               <a:lstStyle/>
               <a:p>
                 <a:r>
-                  <a:rPr lang="en-US" sz="2800" b="1"/>
+                  <a:rPr lang="en-US" sz="2800" b="1" dirty="0"/>
                   <a:t>2</a:t>
                 </a:r>
               </a:p>
@@ -15230,7 +15230,7 @@
               <a:lstStyle/>
               <a:p>
                 <a:pPr algn="ctr"/>
-                <a:endParaRPr lang="en-US"/>
+                <a:endParaRPr lang="en-US" dirty="0"/>
               </a:p>
             </p:txBody>
           </p:sp>
@@ -15328,7 +15328,7 @@
             <a:lstStyle/>
             <a:p>
               <a:r>
-                <a:rPr lang="en-US" sz="2800" b="1"/>
+                <a:rPr lang="en-US" sz="2800" b="1" dirty="0"/>
                 <a:t>5</a:t>
               </a:r>
             </a:p>
@@ -15382,7 +15382,7 @@
             <a:lstStyle/>
             <a:p>
               <a:pPr algn="ctr"/>
-              <a:endParaRPr lang="en-US"/>
+              <a:endParaRPr lang="en-US" dirty="0"/>
             </a:p>
           </p:txBody>
         </p:sp>
@@ -15439,7 +15439,7 @@
             <a:lstStyle/>
             <a:p>
               <a:r>
-                <a:rPr lang="en-US" sz="2800" b="1"/>
+                <a:rPr lang="en-US" sz="2800" b="1" dirty="0"/>
                 <a:t>2</a:t>
               </a:r>
             </a:p>
@@ -15493,7 +15493,7 @@
             <a:lstStyle/>
             <a:p>
               <a:pPr algn="ctr"/>
-              <a:endParaRPr lang="en-US"/>
+              <a:endParaRPr lang="en-US" dirty="0"/>
             </a:p>
           </p:txBody>
         </p:sp>
@@ -15590,7 +15590,7 @@
             <a:lstStyle/>
             <a:p>
               <a:r>
-                <a:rPr lang="en-US" sz="2800" b="1"/>
+                <a:rPr lang="en-US" sz="2800" b="1" dirty="0"/>
                 <a:t>4</a:t>
               </a:r>
             </a:p>
@@ -15644,7 +15644,7 @@
             <a:lstStyle/>
             <a:p>
               <a:pPr algn="ctr"/>
-              <a:endParaRPr lang="en-US"/>
+              <a:endParaRPr lang="en-US" dirty="0"/>
             </a:p>
           </p:txBody>
         </p:sp>
@@ -15743,7 +15743,7 @@
             <a:lstStyle/>
             <a:p>
               <a:r>
-                <a:rPr lang="en-US"/>
+                <a:rPr lang="en-US" dirty="0"/>
                 <a:t> a BST</a:t>
               </a:r>
             </a:p>
@@ -15840,7 +15840,7 @@
             <a:lstStyle/>
             <a:p>
               <a:r>
-                <a:rPr lang="en-US"/>
+                <a:rPr lang="en-US" dirty="0"/>
                 <a:t> a BST</a:t>
               </a:r>
             </a:p>
@@ -15937,7 +15937,7 @@
             <a:lstStyle/>
             <a:p>
               <a:r>
-                <a:rPr lang="en-US"/>
+                <a:rPr lang="en-US" dirty="0"/>
                 <a:t> a BST</a:t>
               </a:r>
             </a:p>
@@ -16052,7 +16052,7 @@
               <a:lstStyle/>
               <a:p>
                 <a:r>
-                  <a:rPr lang="en-US" sz="2800" b="1"/>
+                  <a:rPr lang="en-US" sz="2800" b="1" dirty="0"/>
                   <a:t>5</a:t>
                 </a:r>
               </a:p>
@@ -16106,7 +16106,7 @@
               <a:lstStyle/>
               <a:p>
                 <a:pPr algn="ctr"/>
-                <a:endParaRPr lang="en-US"/>
+                <a:endParaRPr lang="en-US" dirty="0"/>
               </a:p>
             </p:txBody>
           </p:sp>
@@ -16163,7 +16163,7 @@
               <a:lstStyle/>
               <a:p>
                 <a:r>
-                  <a:rPr lang="en-US" sz="2800" b="1"/>
+                  <a:rPr lang="en-US" sz="2800" b="1" dirty="0"/>
                   <a:t>8</a:t>
                 </a:r>
               </a:p>
@@ -16217,7 +16217,7 @@
               <a:lstStyle/>
               <a:p>
                 <a:pPr algn="ctr"/>
-                <a:endParaRPr lang="en-US"/>
+                <a:endParaRPr lang="en-US" dirty="0"/>
               </a:p>
             </p:txBody>
           </p:sp>
@@ -16317,11 +16317,11 @@
             <a:lstStyle/>
             <a:p>
               <a:r>
-                <a:rPr lang="en-US"/>
+                <a:rPr lang="en-US" dirty="0"/>
                 <a:t> </a:t>
               </a:r>
               <a:r>
-                <a:rPr lang="en-US">
+                <a:rPr lang="en-US" dirty="0">
                   <a:solidFill>
                     <a:srgbClr val="FF0000"/>
                   </a:solidFill>
@@ -16329,7 +16329,7 @@
                 <a:t>NOT</a:t>
               </a:r>
               <a:r>
-                <a:rPr lang="en-US"/>
+                <a:rPr lang="en-US" dirty="0"/>
                 <a:t> a BST</a:t>
               </a:r>
             </a:p>
@@ -16424,7 +16424,7 @@
             <a:lstStyle/>
             <a:p>
               <a:r>
-                <a:rPr lang="en-US" sz="2800" b="1"/>
+                <a:rPr lang="en-US" sz="2800" b="1" dirty="0"/>
                 <a:t>5</a:t>
               </a:r>
             </a:p>
@@ -16478,7 +16478,7 @@
             <a:lstStyle/>
             <a:p>
               <a:pPr algn="ctr"/>
-              <a:endParaRPr lang="en-US"/>
+              <a:endParaRPr lang="en-US" dirty="0"/>
             </a:p>
           </p:txBody>
         </p:sp>
@@ -16535,7 +16535,7 @@
             <a:lstStyle/>
             <a:p>
               <a:r>
-                <a:rPr lang="en-US" sz="2800" b="1"/>
+                <a:rPr lang="en-US" sz="2800" b="1" dirty="0"/>
                 <a:t>2</a:t>
               </a:r>
             </a:p>
@@ -16589,7 +16589,7 @@
             <a:lstStyle/>
             <a:p>
               <a:pPr algn="ctr"/>
-              <a:endParaRPr lang="en-US"/>
+              <a:endParaRPr lang="en-US" dirty="0"/>
             </a:p>
           </p:txBody>
         </p:sp>
@@ -16688,11 +16688,11 @@
             <a:lstStyle/>
             <a:p>
               <a:r>
-                <a:rPr lang="en-US"/>
+                <a:rPr lang="en-US" dirty="0"/>
                 <a:t> </a:t>
               </a:r>
               <a:r>
-                <a:rPr lang="en-US">
+                <a:rPr lang="en-US" dirty="0">
                   <a:solidFill>
                     <a:srgbClr val="FF0000"/>
                   </a:solidFill>
@@ -16700,7 +16700,7 @@
                 <a:t>NOT</a:t>
               </a:r>
               <a:r>
-                <a:rPr lang="en-US"/>
+                <a:rPr lang="en-US" dirty="0"/>
                 <a:t> a BST</a:t>
               </a:r>
             </a:p>
@@ -16806,7 +16806,7 @@
           <a:lstStyle/>
           <a:p>
             <a:r>
-              <a:rPr lang="en-US"/>
+              <a:rPr lang="en-US" dirty="0"/>
               <a:t>Binary Search Tree Examples</a:t>
             </a:r>
           </a:p>
@@ -16864,7 +16864,7 @@
             <a:lstStyle/>
             <a:p>
               <a:r>
-                <a:rPr lang="en-US" sz="2800" b="1"/>
+                <a:rPr lang="en-US" sz="2800" b="1" dirty="0"/>
                 <a:t>5</a:t>
               </a:r>
             </a:p>
@@ -16918,7 +16918,7 @@
             <a:lstStyle/>
             <a:p>
               <a:pPr algn="ctr"/>
-              <a:endParaRPr lang="en-US"/>
+              <a:endParaRPr lang="en-US" dirty="0"/>
             </a:p>
           </p:txBody>
         </p:sp>
@@ -16995,7 +16995,7 @@
               <a:lstStyle/>
               <a:p>
                 <a:r>
-                  <a:rPr lang="en-US" sz="2800" b="1"/>
+                  <a:rPr lang="en-US" sz="2800" b="1" dirty="0"/>
                   <a:t>5</a:t>
                 </a:r>
               </a:p>
@@ -17049,7 +17049,7 @@
               <a:lstStyle/>
               <a:p>
                 <a:pPr algn="ctr"/>
-                <a:endParaRPr lang="en-US"/>
+                <a:endParaRPr lang="en-US" dirty="0"/>
               </a:p>
             </p:txBody>
           </p:sp>
@@ -17106,7 +17106,7 @@
               <a:lstStyle/>
               <a:p>
                 <a:r>
-                  <a:rPr lang="en-US" sz="2800" b="1"/>
+                  <a:rPr lang="en-US" sz="2800" b="1" dirty="0"/>
                   <a:t>2</a:t>
                 </a:r>
               </a:p>
@@ -17160,7 +17160,7 @@
               <a:lstStyle/>
               <a:p>
                 <a:pPr algn="ctr"/>
-                <a:endParaRPr lang="en-US"/>
+                <a:endParaRPr lang="en-US" dirty="0"/>
               </a:p>
             </p:txBody>
           </p:sp>
@@ -17258,7 +17258,7 @@
             <a:lstStyle/>
             <a:p>
               <a:r>
-                <a:rPr lang="en-US" sz="2800" b="1"/>
+                <a:rPr lang="en-US" sz="2800" b="1" dirty="0"/>
                 <a:t>5</a:t>
               </a:r>
             </a:p>
@@ -17312,7 +17312,7 @@
             <a:lstStyle/>
             <a:p>
               <a:pPr algn="ctr"/>
-              <a:endParaRPr lang="en-US"/>
+              <a:endParaRPr lang="en-US" dirty="0"/>
             </a:p>
           </p:txBody>
         </p:sp>
@@ -17369,7 +17369,7 @@
             <a:lstStyle/>
             <a:p>
               <a:r>
-                <a:rPr lang="en-US" sz="2800" b="1"/>
+                <a:rPr lang="en-US" sz="2800" b="1" dirty="0"/>
                 <a:t>2</a:t>
               </a:r>
             </a:p>
@@ -17423,7 +17423,7 @@
             <a:lstStyle/>
             <a:p>
               <a:pPr algn="ctr"/>
-              <a:endParaRPr lang="en-US"/>
+              <a:endParaRPr lang="en-US" dirty="0"/>
             </a:p>
           </p:txBody>
         </p:sp>
@@ -17520,7 +17520,7 @@
             <a:lstStyle/>
             <a:p>
               <a:r>
-                <a:rPr lang="en-US" sz="2800" b="1"/>
+                <a:rPr lang="en-US" sz="2800" b="1" dirty="0"/>
                 <a:t>4</a:t>
               </a:r>
             </a:p>
@@ -17574,7 +17574,7 @@
             <a:lstStyle/>
             <a:p>
               <a:pPr algn="ctr"/>
-              <a:endParaRPr lang="en-US"/>
+              <a:endParaRPr lang="en-US" dirty="0"/>
             </a:p>
           </p:txBody>
         </p:sp>
@@ -17673,7 +17673,7 @@
             <a:lstStyle/>
             <a:p>
               <a:r>
-                <a:rPr lang="en-US"/>
+                <a:rPr lang="en-US" dirty="0"/>
                 <a:t> a BST</a:t>
               </a:r>
             </a:p>
@@ -17770,7 +17770,7 @@
             <a:lstStyle/>
             <a:p>
               <a:r>
-                <a:rPr lang="en-US"/>
+                <a:rPr lang="en-US" dirty="0"/>
                 <a:t> a BST</a:t>
               </a:r>
             </a:p>
@@ -17867,7 +17867,7 @@
             <a:lstStyle/>
             <a:p>
               <a:r>
-                <a:rPr lang="en-US"/>
+                <a:rPr lang="en-US" dirty="0"/>
                 <a:t> a BST</a:t>
               </a:r>
             </a:p>
@@ -17982,7 +17982,7 @@
               <a:lstStyle/>
               <a:p>
                 <a:r>
-                  <a:rPr lang="en-US" sz="2800" b="1"/>
+                  <a:rPr lang="en-US" sz="2800" b="1" dirty="0"/>
                   <a:t>5</a:t>
                 </a:r>
               </a:p>
@@ -18036,7 +18036,7 @@
               <a:lstStyle/>
               <a:p>
                 <a:pPr algn="ctr"/>
-                <a:endParaRPr lang="en-US"/>
+                <a:endParaRPr lang="en-US" dirty="0"/>
               </a:p>
             </p:txBody>
           </p:sp>
@@ -18093,7 +18093,7 @@
               <a:lstStyle/>
               <a:p>
                 <a:r>
-                  <a:rPr lang="en-US" sz="2800" b="1"/>
+                  <a:rPr lang="en-US" sz="2800" b="1" dirty="0"/>
                   <a:t>8</a:t>
                 </a:r>
               </a:p>
@@ -18147,7 +18147,7 @@
               <a:lstStyle/>
               <a:p>
                 <a:pPr algn="ctr"/>
-                <a:endParaRPr lang="en-US"/>
+                <a:endParaRPr lang="en-US" dirty="0"/>
               </a:p>
             </p:txBody>
           </p:sp>
@@ -18247,11 +18247,11 @@
             <a:lstStyle/>
             <a:p>
               <a:r>
-                <a:rPr lang="en-US"/>
+                <a:rPr lang="en-US" dirty="0"/>
                 <a:t> </a:t>
               </a:r>
               <a:r>
-                <a:rPr lang="en-US">
+                <a:rPr lang="en-US" dirty="0">
                   <a:solidFill>
                     <a:srgbClr val="FF0000"/>
                   </a:solidFill>
@@ -18259,7 +18259,7 @@
                 <a:t>NOT</a:t>
               </a:r>
               <a:r>
-                <a:rPr lang="en-US"/>
+                <a:rPr lang="en-US" dirty="0"/>
                 <a:t> a BST</a:t>
               </a:r>
             </a:p>
@@ -18354,7 +18354,7 @@
             <a:lstStyle/>
             <a:p>
               <a:r>
-                <a:rPr lang="en-US" sz="2800" b="1"/>
+                <a:rPr lang="en-US" sz="2800" b="1" dirty="0"/>
                 <a:t>5</a:t>
               </a:r>
             </a:p>
@@ -18408,7 +18408,7 @@
             <a:lstStyle/>
             <a:p>
               <a:pPr algn="ctr"/>
-              <a:endParaRPr lang="en-US"/>
+              <a:endParaRPr lang="en-US" dirty="0"/>
             </a:p>
           </p:txBody>
         </p:sp>
@@ -18465,7 +18465,7 @@
             <a:lstStyle/>
             <a:p>
               <a:r>
-                <a:rPr lang="en-US" sz="2800" b="1"/>
+                <a:rPr lang="en-US" sz="2800" b="1" dirty="0"/>
                 <a:t>2</a:t>
               </a:r>
             </a:p>
@@ -18519,7 +18519,7 @@
             <a:lstStyle/>
             <a:p>
               <a:pPr algn="ctr"/>
-              <a:endParaRPr lang="en-US"/>
+              <a:endParaRPr lang="en-US" dirty="0"/>
             </a:p>
           </p:txBody>
         </p:sp>
@@ -18618,11 +18618,11 @@
             <a:lstStyle/>
             <a:p>
               <a:r>
-                <a:rPr lang="en-US"/>
+                <a:rPr lang="en-US" dirty="0"/>
                 <a:t> </a:t>
               </a:r>
               <a:r>
-                <a:rPr lang="en-US">
+                <a:rPr lang="en-US" dirty="0">
                   <a:solidFill>
                     <a:srgbClr val="FF0000"/>
                   </a:solidFill>
@@ -18630,7 +18630,7 @@
                 <a:t>NOT</a:t>
               </a:r>
               <a:r>
-                <a:rPr lang="en-US"/>
+                <a:rPr lang="en-US" dirty="0"/>
                 <a:t> a BST</a:t>
               </a:r>
             </a:p>
@@ -18725,7 +18725,7 @@
             <a:lstStyle/>
             <a:p>
               <a:r>
-                <a:rPr lang="en-US" sz="2800" b="1"/>
+                <a:rPr lang="en-US" sz="2800" b="1" dirty="0"/>
                 <a:t>5</a:t>
               </a:r>
             </a:p>
@@ -18779,7 +18779,7 @@
             <a:lstStyle/>
             <a:p>
               <a:pPr algn="ctr"/>
-              <a:endParaRPr lang="en-US"/>
+              <a:endParaRPr lang="en-US" dirty="0"/>
             </a:p>
           </p:txBody>
         </p:sp>
@@ -18836,7 +18836,7 @@
             <a:lstStyle/>
             <a:p>
               <a:r>
-                <a:rPr lang="en-US" sz="2800" b="1"/>
+                <a:rPr lang="en-US" sz="2800" b="1" dirty="0"/>
                 <a:t>2</a:t>
               </a:r>
             </a:p>
@@ -18890,7 +18890,7 @@
             <a:lstStyle/>
             <a:p>
               <a:pPr algn="ctr"/>
-              <a:endParaRPr lang="en-US"/>
+              <a:endParaRPr lang="en-US" dirty="0"/>
             </a:p>
           </p:txBody>
         </p:sp>
@@ -18987,7 +18987,7 @@
             <a:lstStyle/>
             <a:p>
               <a:r>
-                <a:rPr lang="en-US" sz="2800" b="1"/>
+                <a:rPr lang="en-US" sz="2800" b="1" dirty="0"/>
                 <a:t>7</a:t>
               </a:r>
             </a:p>
@@ -19041,7 +19041,7 @@
             <a:lstStyle/>
             <a:p>
               <a:pPr algn="ctr"/>
-              <a:endParaRPr lang="en-US"/>
+              <a:endParaRPr lang="en-US" dirty="0"/>
             </a:p>
           </p:txBody>
         </p:sp>
@@ -19120,7 +19120,7 @@
           <a:lstStyle/>
           <a:p>
             <a:r>
-              <a:rPr lang="en-US"/>
+              <a:rPr lang="en-US" dirty="0"/>
               <a:t> a BST?</a:t>
             </a:r>
           </a:p>
@@ -19189,7 +19189,7 @@
           <a:lstStyle/>
           <a:p>
             <a:r>
-              <a:rPr lang="en-US"/>
+              <a:rPr lang="en-US" dirty="0"/>
               <a:t>Binary Search Tree Examples</a:t>
             </a:r>
           </a:p>
@@ -19247,7 +19247,7 @@
             <a:lstStyle/>
             <a:p>
               <a:r>
-                <a:rPr lang="en-US" sz="2800" b="1"/>
+                <a:rPr lang="en-US" sz="2800" b="1" dirty="0"/>
                 <a:t>5</a:t>
               </a:r>
             </a:p>
@@ -19301,7 +19301,7 @@
             <a:lstStyle/>
             <a:p>
               <a:pPr algn="ctr"/>
-              <a:endParaRPr lang="en-US"/>
+              <a:endParaRPr lang="en-US" dirty="0"/>
             </a:p>
           </p:txBody>
         </p:sp>
@@ -19378,7 +19378,7 @@
               <a:lstStyle/>
               <a:p>
                 <a:r>
-                  <a:rPr lang="en-US" sz="2800" b="1"/>
+                  <a:rPr lang="en-US" sz="2800" b="1" dirty="0"/>
                   <a:t>5</a:t>
                 </a:r>
               </a:p>
@@ -19432,7 +19432,7 @@
               <a:lstStyle/>
               <a:p>
                 <a:pPr algn="ctr"/>
-                <a:endParaRPr lang="en-US"/>
+                <a:endParaRPr lang="en-US" dirty="0"/>
               </a:p>
             </p:txBody>
           </p:sp>
@@ -19489,7 +19489,7 @@
               <a:lstStyle/>
               <a:p>
                 <a:r>
-                  <a:rPr lang="en-US" sz="2800" b="1"/>
+                  <a:rPr lang="en-US" sz="2800" b="1" dirty="0"/>
                   <a:t>2</a:t>
                 </a:r>
               </a:p>
@@ -19543,7 +19543,7 @@
               <a:lstStyle/>
               <a:p>
                 <a:pPr algn="ctr"/>
-                <a:endParaRPr lang="en-US"/>
+                <a:endParaRPr lang="en-US" dirty="0"/>
               </a:p>
             </p:txBody>
           </p:sp>
@@ -19641,7 +19641,7 @@
             <a:lstStyle/>
             <a:p>
               <a:r>
-                <a:rPr lang="en-US" sz="2800" b="1"/>
+                <a:rPr lang="en-US" sz="2800" b="1" dirty="0"/>
                 <a:t>5</a:t>
               </a:r>
             </a:p>
@@ -19695,7 +19695,7 @@
             <a:lstStyle/>
             <a:p>
               <a:pPr algn="ctr"/>
-              <a:endParaRPr lang="en-US"/>
+              <a:endParaRPr lang="en-US" dirty="0"/>
             </a:p>
           </p:txBody>
         </p:sp>
@@ -19752,7 +19752,7 @@
             <a:lstStyle/>
             <a:p>
               <a:r>
-                <a:rPr lang="en-US" sz="2800" b="1"/>
+                <a:rPr lang="en-US" sz="2800" b="1" dirty="0"/>
                 <a:t>2</a:t>
               </a:r>
             </a:p>
@@ -19806,7 +19806,7 @@
             <a:lstStyle/>
             <a:p>
               <a:pPr algn="ctr"/>
-              <a:endParaRPr lang="en-US"/>
+              <a:endParaRPr lang="en-US" dirty="0"/>
             </a:p>
           </p:txBody>
         </p:sp>
@@ -19903,7 +19903,7 @@
             <a:lstStyle/>
             <a:p>
               <a:r>
-                <a:rPr lang="en-US" sz="2800" b="1"/>
+                <a:rPr lang="en-US" sz="2800" b="1" dirty="0"/>
                 <a:t>4</a:t>
               </a:r>
             </a:p>
@@ -19957,7 +19957,7 @@
             <a:lstStyle/>
             <a:p>
               <a:pPr algn="ctr"/>
-              <a:endParaRPr lang="en-US"/>
+              <a:endParaRPr lang="en-US" dirty="0"/>
             </a:p>
           </p:txBody>
         </p:sp>
@@ -20056,7 +20056,7 @@
             <a:lstStyle/>
             <a:p>
               <a:r>
-                <a:rPr lang="en-US"/>
+                <a:rPr lang="en-US" dirty="0"/>
                 <a:t> a BST</a:t>
               </a:r>
             </a:p>
@@ -20153,7 +20153,7 @@
             <a:lstStyle/>
             <a:p>
               <a:r>
-                <a:rPr lang="en-US"/>
+                <a:rPr lang="en-US" dirty="0"/>
                 <a:t> a BST</a:t>
               </a:r>
             </a:p>
@@ -20250,7 +20250,7 @@
             <a:lstStyle/>
             <a:p>
               <a:r>
-                <a:rPr lang="en-US"/>
+                <a:rPr lang="en-US" dirty="0"/>
                 <a:t> a BST</a:t>
               </a:r>
             </a:p>
@@ -20365,7 +20365,7 @@
               <a:lstStyle/>
               <a:p>
                 <a:r>
-                  <a:rPr lang="en-US" sz="2800" b="1"/>
+                  <a:rPr lang="en-US" sz="2800" b="1" dirty="0"/>
                   <a:t>5</a:t>
                 </a:r>
               </a:p>
@@ -20419,7 +20419,7 @@
               <a:lstStyle/>
               <a:p>
                 <a:pPr algn="ctr"/>
-                <a:endParaRPr lang="en-US"/>
+                <a:endParaRPr lang="en-US" dirty="0"/>
               </a:p>
             </p:txBody>
           </p:sp>
@@ -20476,7 +20476,7 @@
               <a:lstStyle/>
               <a:p>
                 <a:r>
-                  <a:rPr lang="en-US" sz="2800" b="1"/>
+                  <a:rPr lang="en-US" sz="2800" b="1" dirty="0"/>
                   <a:t>8</a:t>
                 </a:r>
               </a:p>
@@ -20530,7 +20530,7 @@
               <a:lstStyle/>
               <a:p>
                 <a:pPr algn="ctr"/>
-                <a:endParaRPr lang="en-US"/>
+                <a:endParaRPr lang="en-US" dirty="0"/>
               </a:p>
             </p:txBody>
           </p:sp>
@@ -20630,11 +20630,11 @@
             <a:lstStyle/>
             <a:p>
               <a:r>
-                <a:rPr lang="en-US"/>
+                <a:rPr lang="en-US" dirty="0"/>
                 <a:t> </a:t>
               </a:r>
               <a:r>
-                <a:rPr lang="en-US">
+                <a:rPr lang="en-US" dirty="0">
                   <a:solidFill>
                     <a:srgbClr val="FF0000"/>
                   </a:solidFill>
@@ -20642,7 +20642,7 @@
                 <a:t>NOT</a:t>
               </a:r>
               <a:r>
-                <a:rPr lang="en-US"/>
+                <a:rPr lang="en-US" dirty="0"/>
                 <a:t> a BST</a:t>
               </a:r>
             </a:p>
@@ -20737,7 +20737,7 @@
             <a:lstStyle/>
             <a:p>
               <a:r>
-                <a:rPr lang="en-US" sz="2800" b="1"/>
+                <a:rPr lang="en-US" sz="2800" b="1" dirty="0"/>
                 <a:t>5</a:t>
               </a:r>
             </a:p>
@@ -20791,7 +20791,7 @@
             <a:lstStyle/>
             <a:p>
               <a:pPr algn="ctr"/>
-              <a:endParaRPr lang="en-US"/>
+              <a:endParaRPr lang="en-US" dirty="0"/>
             </a:p>
           </p:txBody>
         </p:sp>
@@ -20848,7 +20848,7 @@
             <a:lstStyle/>
             <a:p>
               <a:r>
-                <a:rPr lang="en-US" sz="2800" b="1"/>
+                <a:rPr lang="en-US" sz="2800" b="1" dirty="0"/>
                 <a:t>2</a:t>
               </a:r>
             </a:p>
@@ -20902,7 +20902,7 @@
             <a:lstStyle/>
             <a:p>
               <a:pPr algn="ctr"/>
-              <a:endParaRPr lang="en-US"/>
+              <a:endParaRPr lang="en-US" dirty="0"/>
             </a:p>
           </p:txBody>
         </p:sp>
@@ -21001,11 +21001,11 @@
             <a:lstStyle/>
             <a:p>
               <a:r>
-                <a:rPr lang="en-US"/>
+                <a:rPr lang="en-US" dirty="0"/>
                 <a:t> </a:t>
               </a:r>
               <a:r>
-                <a:rPr lang="en-US">
+                <a:rPr lang="en-US" dirty="0">
                   <a:solidFill>
                     <a:srgbClr val="FF0000"/>
                   </a:solidFill>
@@ -21013,7 +21013,7 @@
                 <a:t>NOT</a:t>
               </a:r>
               <a:r>
-                <a:rPr lang="en-US"/>
+                <a:rPr lang="en-US" dirty="0"/>
                 <a:t> a BST</a:t>
               </a:r>
             </a:p>
@@ -21108,7 +21108,7 @@
             <a:lstStyle/>
             <a:p>
               <a:r>
-                <a:rPr lang="en-US" sz="2800" b="1"/>
+                <a:rPr lang="en-US" sz="2800" b="1" dirty="0"/>
                 <a:t>5</a:t>
               </a:r>
             </a:p>
@@ -21162,7 +21162,7 @@
             <a:lstStyle/>
             <a:p>
               <a:pPr algn="ctr"/>
-              <a:endParaRPr lang="en-US"/>
+              <a:endParaRPr lang="en-US" dirty="0"/>
             </a:p>
           </p:txBody>
         </p:sp>
@@ -21219,7 +21219,7 @@
             <a:lstStyle/>
             <a:p>
               <a:r>
-                <a:rPr lang="en-US" sz="2800" b="1"/>
+                <a:rPr lang="en-US" sz="2800" b="1" dirty="0"/>
                 <a:t>2</a:t>
               </a:r>
             </a:p>
@@ -21273,7 +21273,7 @@
             <a:lstStyle/>
             <a:p>
               <a:pPr algn="ctr"/>
-              <a:endParaRPr lang="en-US"/>
+              <a:endParaRPr lang="en-US" dirty="0"/>
             </a:p>
           </p:txBody>
         </p:sp>
@@ -21370,7 +21370,7 @@
             <a:lstStyle/>
             <a:p>
               <a:r>
-                <a:rPr lang="en-US" sz="2800" b="1"/>
+                <a:rPr lang="en-US" sz="2800" b="1" dirty="0"/>
                 <a:t>7</a:t>
               </a:r>
             </a:p>
@@ -21424,7 +21424,7 @@
             <a:lstStyle/>
             <a:p>
               <a:pPr algn="ctr"/>
-              <a:endParaRPr lang="en-US"/>
+              <a:endParaRPr lang="en-US" dirty="0"/>
             </a:p>
           </p:txBody>
         </p:sp>
@@ -21523,11 +21523,11 @@
             <a:lstStyle/>
             <a:p>
               <a:r>
-                <a:rPr lang="en-US"/>
+                <a:rPr lang="en-US" dirty="0"/>
                 <a:t> </a:t>
               </a:r>
               <a:r>
-                <a:rPr lang="en-US">
+                <a:rPr lang="en-US" dirty="0">
                   <a:solidFill>
                     <a:srgbClr val="FF0000"/>
                   </a:solidFill>
@@ -21535,7 +21535,7 @@
                 <a:t>NOT</a:t>
               </a:r>
               <a:r>
-                <a:rPr lang="en-US"/>
+                <a:rPr lang="en-US" dirty="0"/>
                 <a:t> a BST</a:t>
               </a:r>
             </a:p>
@@ -21641,7 +21641,7 @@
           <a:lstStyle/>
           <a:p>
             <a:r>
-              <a:rPr lang="en-US"/>
+              <a:rPr lang="en-US" dirty="0"/>
               <a:t>Binary Search Tree Examples</a:t>
             </a:r>
           </a:p>
@@ -21699,7 +21699,7 @@
             <a:lstStyle/>
             <a:p>
               <a:r>
-                <a:rPr lang="en-US" sz="2800" b="1"/>
+                <a:rPr lang="en-US" sz="2800" b="1" dirty="0"/>
                 <a:t>5</a:t>
               </a:r>
             </a:p>
@@ -21753,7 +21753,7 @@
             <a:lstStyle/>
             <a:p>
               <a:pPr algn="ctr"/>
-              <a:endParaRPr lang="en-US"/>
+              <a:endParaRPr lang="en-US" dirty="0"/>
             </a:p>
           </p:txBody>
         </p:sp>
@@ -21830,7 +21830,7 @@
               <a:lstStyle/>
               <a:p>
                 <a:r>
-                  <a:rPr lang="en-US" sz="2800" b="1"/>
+                  <a:rPr lang="en-US" sz="2800" b="1" dirty="0"/>
                   <a:t>5</a:t>
                 </a:r>
               </a:p>
@@ -21884,7 +21884,7 @@
               <a:lstStyle/>
               <a:p>
                 <a:pPr algn="ctr"/>
-                <a:endParaRPr lang="en-US"/>
+                <a:endParaRPr lang="en-US" dirty="0"/>
               </a:p>
             </p:txBody>
           </p:sp>
@@ -21941,7 +21941,7 @@
               <a:lstStyle/>
               <a:p>
                 <a:r>
-                  <a:rPr lang="en-US" sz="2800" b="1"/>
+                  <a:rPr lang="en-US" sz="2800" b="1" dirty="0"/>
                   <a:t>2</a:t>
                 </a:r>
               </a:p>
@@ -21995,7 +21995,7 @@
               <a:lstStyle/>
               <a:p>
                 <a:pPr algn="ctr"/>
-                <a:endParaRPr lang="en-US"/>
+                <a:endParaRPr lang="en-US" dirty="0"/>
               </a:p>
             </p:txBody>
           </p:sp>
@@ -22093,7 +22093,7 @@
             <a:lstStyle/>
             <a:p>
               <a:r>
-                <a:rPr lang="en-US" sz="2800" b="1"/>
+                <a:rPr lang="en-US" sz="2800" b="1" dirty="0"/>
                 <a:t>5</a:t>
               </a:r>
             </a:p>
@@ -22147,7 +22147,7 @@
             <a:lstStyle/>
             <a:p>
               <a:pPr algn="ctr"/>
-              <a:endParaRPr lang="en-US"/>
+              <a:endParaRPr lang="en-US" dirty="0"/>
             </a:p>
           </p:txBody>
         </p:sp>
@@ -22204,7 +22204,7 @@
             <a:lstStyle/>
             <a:p>
               <a:r>
-                <a:rPr lang="en-US" sz="2800" b="1"/>
+                <a:rPr lang="en-US" sz="2800" b="1" dirty="0"/>
                 <a:t>2</a:t>
               </a:r>
             </a:p>
@@ -22258,7 +22258,7 @@
             <a:lstStyle/>
             <a:p>
               <a:pPr algn="ctr"/>
-              <a:endParaRPr lang="en-US"/>
+              <a:endParaRPr lang="en-US" dirty="0"/>
             </a:p>
           </p:txBody>
         </p:sp>
@@ -22355,7 +22355,7 @@
             <a:lstStyle/>
             <a:p>
               <a:r>
-                <a:rPr lang="en-US" sz="2800" b="1"/>
+                <a:rPr lang="en-US" sz="2800" b="1" dirty="0"/>
                 <a:t>4</a:t>
               </a:r>
             </a:p>
@@ -22409,7 +22409,7 @@
             <a:lstStyle/>
             <a:p>
               <a:pPr algn="ctr"/>
-              <a:endParaRPr lang="en-US"/>
+              <a:endParaRPr lang="en-US" dirty="0"/>
             </a:p>
           </p:txBody>
         </p:sp>
@@ -22508,7 +22508,7 @@
             <a:lstStyle/>
             <a:p>
               <a:r>
-                <a:rPr lang="en-US"/>
+                <a:rPr lang="en-US" dirty="0"/>
                 <a:t> a BST</a:t>
               </a:r>
             </a:p>
@@ -22605,7 +22605,7 @@
             <a:lstStyle/>
             <a:p>
               <a:r>
-                <a:rPr lang="en-US"/>
+                <a:rPr lang="en-US" dirty="0"/>
                 <a:t> a BST</a:t>
               </a:r>
             </a:p>
@@ -22702,7 +22702,7 @@
             <a:lstStyle/>
             <a:p>
               <a:r>
-                <a:rPr lang="en-US"/>
+                <a:rPr lang="en-US" dirty="0"/>
                 <a:t> a BST</a:t>
               </a:r>
             </a:p>
@@ -22817,7 +22817,7 @@
               <a:lstStyle/>
               <a:p>
                 <a:r>
-                  <a:rPr lang="en-US" sz="2800" b="1"/>
+                  <a:rPr lang="en-US" sz="2800" b="1" dirty="0"/>
                   <a:t>5</a:t>
                 </a:r>
               </a:p>
@@ -22871,7 +22871,7 @@
               <a:lstStyle/>
               <a:p>
                 <a:pPr algn="ctr"/>
-                <a:endParaRPr lang="en-US"/>
+                <a:endParaRPr lang="en-US" dirty="0"/>
               </a:p>
             </p:txBody>
           </p:sp>
@@ -22928,7 +22928,7 @@
               <a:lstStyle/>
               <a:p>
                 <a:r>
-                  <a:rPr lang="en-US" sz="2800" b="1"/>
+                  <a:rPr lang="en-US" sz="2800" b="1" dirty="0"/>
                   <a:t>8</a:t>
                 </a:r>
               </a:p>
@@ -22982,7 +22982,7 @@
               <a:lstStyle/>
               <a:p>
                 <a:pPr algn="ctr"/>
-                <a:endParaRPr lang="en-US"/>
+                <a:endParaRPr lang="en-US" dirty="0"/>
               </a:p>
             </p:txBody>
           </p:sp>
@@ -23082,11 +23082,11 @@
             <a:lstStyle/>
             <a:p>
               <a:r>
-                <a:rPr lang="en-US"/>
+                <a:rPr lang="en-US" dirty="0"/>
                 <a:t> </a:t>
               </a:r>
               <a:r>
-                <a:rPr lang="en-US">
+                <a:rPr lang="en-US" dirty="0">
                   <a:solidFill>
                     <a:srgbClr val="FF0000"/>
                   </a:solidFill>
@@ -23094,7 +23094,7 @@
                 <a:t>NOT</a:t>
               </a:r>
               <a:r>
-                <a:rPr lang="en-US"/>
+                <a:rPr lang="en-US" dirty="0"/>
                 <a:t> a BST</a:t>
               </a:r>
             </a:p>
@@ -23189,7 +23189,7 @@
             <a:lstStyle/>
             <a:p>
               <a:r>
-                <a:rPr lang="en-US" sz="2800" b="1"/>
+                <a:rPr lang="en-US" sz="2800" b="1" dirty="0"/>
                 <a:t>5</a:t>
               </a:r>
             </a:p>
@@ -23243,7 +23243,7 @@
             <a:lstStyle/>
             <a:p>
               <a:pPr algn="ctr"/>
-              <a:endParaRPr lang="en-US"/>
+              <a:endParaRPr lang="en-US" dirty="0"/>
             </a:p>
           </p:txBody>
         </p:sp>
@@ -23300,7 +23300,7 @@
             <a:lstStyle/>
             <a:p>
               <a:r>
-                <a:rPr lang="en-US" sz="2800" b="1"/>
+                <a:rPr lang="en-US" sz="2800" b="1" dirty="0"/>
                 <a:t>2</a:t>
               </a:r>
             </a:p>
@@ -23354,7 +23354,7 @@
             <a:lstStyle/>
             <a:p>
               <a:pPr algn="ctr"/>
-              <a:endParaRPr lang="en-US"/>
+              <a:endParaRPr lang="en-US" dirty="0"/>
             </a:p>
           </p:txBody>
         </p:sp>
@@ -23453,11 +23453,11 @@
             <a:lstStyle/>
             <a:p>
               <a:r>
-                <a:rPr lang="en-US"/>
+                <a:rPr lang="en-US" dirty="0"/>
                 <a:t> </a:t>
               </a:r>
               <a:r>
-                <a:rPr lang="en-US">
+                <a:rPr lang="en-US" dirty="0">
                   <a:solidFill>
                     <a:srgbClr val="FF0000"/>
                   </a:solidFill>
@@ -23465,7 +23465,7 @@
                 <a:t>NOT</a:t>
               </a:r>
               <a:r>
-                <a:rPr lang="en-US"/>
+                <a:rPr lang="en-US" dirty="0"/>
                 <a:t> a BST</a:t>
               </a:r>
             </a:p>
@@ -23560,7 +23560,7 @@
             <a:lstStyle/>
             <a:p>
               <a:r>
-                <a:rPr lang="en-US" sz="2800" b="1"/>
+                <a:rPr lang="en-US" sz="2800" b="1" dirty="0"/>
                 <a:t>5</a:t>
               </a:r>
             </a:p>
@@ -23614,7 +23614,7 @@
             <a:lstStyle/>
             <a:p>
               <a:pPr algn="ctr"/>
-              <a:endParaRPr lang="en-US"/>
+              <a:endParaRPr lang="en-US" dirty="0"/>
             </a:p>
           </p:txBody>
         </p:sp>
@@ -23671,7 +23671,7 @@
             <a:lstStyle/>
             <a:p>
               <a:r>
-                <a:rPr lang="en-US" sz="2800" b="1"/>
+                <a:rPr lang="en-US" sz="2800" b="1" dirty="0"/>
                 <a:t>2</a:t>
               </a:r>
             </a:p>
@@ -23725,7 +23725,7 @@
             <a:lstStyle/>
             <a:p>
               <a:pPr algn="ctr"/>
-              <a:endParaRPr lang="en-US"/>
+              <a:endParaRPr lang="en-US" dirty="0"/>
             </a:p>
           </p:txBody>
         </p:sp>
@@ -23822,7 +23822,7 @@
             <a:lstStyle/>
             <a:p>
               <a:r>
-                <a:rPr lang="en-US" sz="2800" b="1"/>
+                <a:rPr lang="en-US" sz="2800" b="1" dirty="0"/>
                 <a:t>7</a:t>
               </a:r>
             </a:p>
@@ -23876,7 +23876,7 @@
             <a:lstStyle/>
             <a:p>
               <a:pPr algn="ctr"/>
-              <a:endParaRPr lang="en-US"/>
+              <a:endParaRPr lang="en-US" dirty="0"/>
             </a:p>
           </p:txBody>
         </p:sp>
@@ -23975,11 +23975,11 @@
             <a:lstStyle/>
             <a:p>
               <a:r>
-                <a:rPr lang="en-US"/>
+                <a:rPr lang="en-US" dirty="0"/>
                 <a:t> </a:t>
               </a:r>
               <a:r>
-                <a:rPr lang="en-US">
+                <a:rPr lang="en-US" dirty="0">
                   <a:solidFill>
                     <a:srgbClr val="FF0000"/>
                   </a:solidFill>
@@ -23987,7 +23987,7 @@
                 <a:t>NOT</a:t>
               </a:r>
               <a:r>
-                <a:rPr lang="en-US"/>
+                <a:rPr lang="en-US" dirty="0"/>
                 <a:t> a BST</a:t>
               </a:r>
             </a:p>
@@ -24093,7 +24093,7 @@
           <a:lstStyle/>
           <a:p>
             <a:r>
-              <a:rPr lang="en-US"/>
+              <a:rPr lang="en-US" dirty="0"/>
               <a:t>Binary Search Tree Examples</a:t>
             </a:r>
           </a:p>
@@ -24151,7 +24151,7 @@
             <a:lstStyle/>
             <a:p>
               <a:r>
-                <a:rPr lang="en-US" sz="2800" b="1"/>
+                <a:rPr lang="en-US" sz="2800" b="1" dirty="0"/>
                 <a:t>9</a:t>
               </a:r>
             </a:p>
@@ -24205,7 +24205,7 @@
             <a:lstStyle/>
             <a:p>
               <a:pPr algn="ctr"/>
-              <a:endParaRPr lang="en-US"/>
+              <a:endParaRPr lang="en-US" dirty="0"/>
             </a:p>
           </p:txBody>
         </p:sp>
@@ -24262,7 +24262,7 @@
             <a:lstStyle/>
             <a:p>
               <a:r>
-                <a:rPr lang="en-US" sz="2800" b="1"/>
+                <a:rPr lang="en-US" sz="2800" b="1" dirty="0"/>
                 <a:t>6</a:t>
               </a:r>
             </a:p>
@@ -24316,7 +24316,7 @@
             <a:lstStyle/>
             <a:p>
               <a:pPr algn="ctr"/>
-              <a:endParaRPr lang="en-US"/>
+              <a:endParaRPr lang="en-US" dirty="0"/>
             </a:p>
           </p:txBody>
         </p:sp>
@@ -24395,7 +24395,7 @@
           <a:lstStyle/>
           <a:p>
             <a:r>
-              <a:rPr lang="en-US"/>
+              <a:rPr lang="en-US" dirty="0"/>
               <a:t> a BST?</a:t>
             </a:r>
           </a:p>
@@ -24433,7 +24433,7 @@
           <a:lstStyle/>
           <a:p>
             <a:r>
-              <a:rPr lang="en-US" sz="2800" b="1"/>
+              <a:rPr lang="en-US" sz="2800" b="1" dirty="0"/>
               <a:t>5</a:t>
             </a:r>
           </a:p>
@@ -24487,7 +24487,7 @@
           <a:lstStyle/>
           <a:p>
             <a:pPr algn="ctr"/>
-            <a:endParaRPr lang="en-US"/>
+            <a:endParaRPr lang="en-US" dirty="0"/>
           </a:p>
         </p:txBody>
       </p:sp>
@@ -24523,7 +24523,7 @@
           <a:lstStyle/>
           <a:p>
             <a:r>
-              <a:rPr lang="en-US" sz="2800" b="1"/>
+              <a:rPr lang="en-US" sz="2800" b="1" dirty="0"/>
               <a:t>2</a:t>
             </a:r>
           </a:p>
@@ -24577,7 +24577,7 @@
           <a:lstStyle/>
           <a:p>
             <a:pPr algn="ctr"/>
-            <a:endParaRPr lang="en-US"/>
+            <a:endParaRPr lang="en-US" dirty="0"/>
           </a:p>
         </p:txBody>
       </p:sp>
@@ -24653,7 +24653,7 @@
           <a:lstStyle/>
           <a:p>
             <a:r>
-              <a:rPr lang="en-US" sz="2800" b="1"/>
+              <a:rPr lang="en-US" sz="2800" b="1" dirty="0"/>
               <a:t>1</a:t>
             </a:r>
           </a:p>
@@ -24707,7 +24707,7 @@
           <a:lstStyle/>
           <a:p>
             <a:pPr algn="ctr"/>
-            <a:endParaRPr lang="en-US"/>
+            <a:endParaRPr lang="en-US" dirty="0"/>
           </a:p>
         </p:txBody>
       </p:sp>
@@ -24843,7 +24843,7 @@
           <a:lstStyle/>
           <a:p>
             <a:r>
-              <a:rPr lang="en-US"/>
+              <a:rPr lang="en-US" dirty="0"/>
               <a:t>Binary Search Trees (BSTs)</a:t>
             </a:r>
           </a:p>
@@ -24871,13 +24871,13 @@
           <a:lstStyle/>
           <a:p>
             <a:r>
-              <a:rPr lang="en-US"/>
+              <a:rPr lang="en-US" dirty="0"/>
               <a:t>Binary search trees (BSTs) area a variation of binary trees designed for storing date.</a:t>
             </a:r>
           </a:p>
           <a:p>
             <a:r>
-              <a:rPr lang="en-US"/>
+              <a:rPr lang="en-US" dirty="0"/>
               <a:t>If implemented well, they can be efficient ways to store ordered data as a map.</a:t>
             </a:r>
           </a:p>
@@ -24946,7 +24946,7 @@
           <a:lstStyle/>
           <a:p>
             <a:r>
-              <a:rPr lang="en-US"/>
+              <a:rPr lang="en-US" dirty="0"/>
               <a:t>Binary Search Tree Examples</a:t>
             </a:r>
           </a:p>
@@ -25004,7 +25004,7 @@
             <a:lstStyle/>
             <a:p>
               <a:r>
-                <a:rPr lang="en-US" sz="2800" b="1"/>
+                <a:rPr lang="en-US" sz="2800" b="1" dirty="0"/>
                 <a:t>9</a:t>
               </a:r>
             </a:p>
@@ -25058,7 +25058,7 @@
             <a:lstStyle/>
             <a:p>
               <a:pPr algn="ctr"/>
-              <a:endParaRPr lang="en-US"/>
+              <a:endParaRPr lang="en-US" dirty="0"/>
             </a:p>
           </p:txBody>
         </p:sp>
@@ -25115,7 +25115,7 @@
             <a:lstStyle/>
             <a:p>
               <a:r>
-                <a:rPr lang="en-US" sz="2800" b="1"/>
+                <a:rPr lang="en-US" sz="2800" b="1" dirty="0"/>
                 <a:t>6</a:t>
               </a:r>
             </a:p>
@@ -25169,7 +25169,7 @@
             <a:lstStyle/>
             <a:p>
               <a:pPr algn="ctr"/>
-              <a:endParaRPr lang="en-US"/>
+              <a:endParaRPr lang="en-US" dirty="0"/>
             </a:p>
           </p:txBody>
         </p:sp>
@@ -25268,7 +25268,7 @@
             <a:lstStyle/>
             <a:p>
               <a:r>
-                <a:rPr lang="en-US"/>
+                <a:rPr lang="en-US" dirty="0"/>
                 <a:t> a BST</a:t>
               </a:r>
             </a:p>
@@ -25343,7 +25343,7 @@
           <a:lstStyle/>
           <a:p>
             <a:r>
-              <a:rPr lang="en-US" sz="2800" b="1"/>
+              <a:rPr lang="en-US" sz="2800" b="1" dirty="0"/>
               <a:t>5</a:t>
             </a:r>
           </a:p>
@@ -25397,7 +25397,7 @@
           <a:lstStyle/>
           <a:p>
             <a:pPr algn="ctr"/>
-            <a:endParaRPr lang="en-US"/>
+            <a:endParaRPr lang="en-US" dirty="0"/>
           </a:p>
         </p:txBody>
       </p:sp>
@@ -25433,7 +25433,7 @@
           <a:lstStyle/>
           <a:p>
             <a:r>
-              <a:rPr lang="en-US" sz="2800" b="1"/>
+              <a:rPr lang="en-US" sz="2800" b="1" dirty="0"/>
               <a:t>2</a:t>
             </a:r>
           </a:p>
@@ -25487,7 +25487,7 @@
           <a:lstStyle/>
           <a:p>
             <a:pPr algn="ctr"/>
-            <a:endParaRPr lang="en-US"/>
+            <a:endParaRPr lang="en-US" dirty="0"/>
           </a:p>
         </p:txBody>
       </p:sp>
@@ -25563,7 +25563,7 @@
           <a:lstStyle/>
           <a:p>
             <a:r>
-              <a:rPr lang="en-US" sz="2800" b="1"/>
+              <a:rPr lang="en-US" sz="2800" b="1" dirty="0"/>
               <a:t>1</a:t>
             </a:r>
           </a:p>
@@ -25617,7 +25617,7 @@
           <a:lstStyle/>
           <a:p>
             <a:pPr algn="ctr"/>
-            <a:endParaRPr lang="en-US"/>
+            <a:endParaRPr lang="en-US" dirty="0"/>
           </a:p>
         </p:txBody>
       </p:sp>
@@ -25701,8 +25701,8 @@
           </a:fontRef>
         </p:style>
       </p:cxnSp>
-      <mc:AlternateContent xmlns:mc="http://schemas.openxmlformats.org/markup-compatibility/2006">
-        <mc:Choice xmlns:a14="http://schemas.microsoft.com/office/drawing/2010/main" Requires="a14">
+      <mc:AlternateContent xmlns:mc="http://schemas.openxmlformats.org/markup-compatibility/2006" xmlns:a14="http://schemas.microsoft.com/office/drawing/2010/main">
+        <mc:Choice Requires="a14">
           <p:sp>
             <p:nvSpPr>
               <p:cNvPr id="60" name="TextBox 59">
@@ -25738,7 +25738,7 @@
               <a:p>
                 <a:pPr algn="ctr"/>
                 <a:r>
-                  <a:rPr lang="en-US"/>
+                  <a:rPr lang="en-US" dirty="0"/>
                   <a:t>This shows that a BST with </a:t>
                 </a:r>
                 <a14:m>
@@ -25752,7 +25752,7 @@
                   </m:oMath>
                 </a14:m>
                 <a:r>
-                  <a:rPr lang="en-US"/>
+                  <a:rPr lang="en-US" dirty="0"/>
                   <a:t> nodes can have height </a:t>
                 </a:r>
                 <a14:m>
@@ -25784,14 +25784,14 @@
                   </m:oMath>
                 </a14:m>
                 <a:r>
-                  <a:rPr lang="en-US"/>
+                  <a:rPr lang="en-US" dirty="0"/>
                   <a:t>.</a:t>
                 </a:r>
               </a:p>
             </p:txBody>
           </p:sp>
         </mc:Choice>
-        <mc:Fallback>
+        <mc:Fallback xmlns="">
           <p:sp>
             <p:nvSpPr>
               <p:cNvPr id="60" name="TextBox 59">
@@ -25899,7 +25899,7 @@
           <a:lstStyle/>
           <a:p>
             <a:r>
-              <a:rPr lang="en-US"/>
+              <a:rPr lang="en-US" dirty="0"/>
               <a:t>Binary Search Tree Examples</a:t>
             </a:r>
           </a:p>
@@ -25957,7 +25957,7 @@
             <a:lstStyle/>
             <a:p>
               <a:r>
-                <a:rPr lang="en-US" sz="2800" b="1"/>
+                <a:rPr lang="en-US" sz="2800" b="1" dirty="0"/>
                 <a:t>9</a:t>
               </a:r>
             </a:p>
@@ -26011,7 +26011,7 @@
             <a:lstStyle/>
             <a:p>
               <a:pPr algn="ctr"/>
-              <a:endParaRPr lang="en-US"/>
+              <a:endParaRPr lang="en-US" dirty="0"/>
             </a:p>
           </p:txBody>
         </p:sp>
@@ -26068,7 +26068,7 @@
             <a:lstStyle/>
             <a:p>
               <a:r>
-                <a:rPr lang="en-US" sz="2800" b="1"/>
+                <a:rPr lang="en-US" sz="2800" b="1" dirty="0"/>
                 <a:t>6</a:t>
               </a:r>
             </a:p>
@@ -26122,7 +26122,7 @@
             <a:lstStyle/>
             <a:p>
               <a:pPr algn="ctr"/>
-              <a:endParaRPr lang="en-US"/>
+              <a:endParaRPr lang="en-US" dirty="0"/>
             </a:p>
           </p:txBody>
         </p:sp>
@@ -26221,7 +26221,7 @@
             <a:lstStyle/>
             <a:p>
               <a:r>
-                <a:rPr lang="en-US"/>
+                <a:rPr lang="en-US" dirty="0"/>
                 <a:t> a BST</a:t>
               </a:r>
             </a:p>
@@ -26296,7 +26296,7 @@
           <a:lstStyle/>
           <a:p>
             <a:r>
-              <a:rPr lang="en-US" sz="2800" b="1"/>
+              <a:rPr lang="en-US" sz="2800" b="1" dirty="0"/>
               <a:t>5</a:t>
             </a:r>
           </a:p>
@@ -26350,7 +26350,7 @@
           <a:lstStyle/>
           <a:p>
             <a:pPr algn="ctr"/>
-            <a:endParaRPr lang="en-US"/>
+            <a:endParaRPr lang="en-US" dirty="0"/>
           </a:p>
         </p:txBody>
       </p:sp>
@@ -26386,7 +26386,7 @@
           <a:lstStyle/>
           <a:p>
             <a:r>
-              <a:rPr lang="en-US" sz="2800" b="1"/>
+              <a:rPr lang="en-US" sz="2800" b="1" dirty="0"/>
               <a:t>2</a:t>
             </a:r>
           </a:p>
@@ -26440,7 +26440,7 @@
           <a:lstStyle/>
           <a:p>
             <a:pPr algn="ctr"/>
-            <a:endParaRPr lang="en-US"/>
+            <a:endParaRPr lang="en-US" dirty="0"/>
           </a:p>
         </p:txBody>
       </p:sp>
@@ -26516,7 +26516,7 @@
           <a:lstStyle/>
           <a:p>
             <a:r>
-              <a:rPr lang="en-US" sz="2800" b="1"/>
+              <a:rPr lang="en-US" sz="2800" b="1" dirty="0"/>
               <a:t>1</a:t>
             </a:r>
           </a:p>
@@ -26570,7 +26570,7 @@
           <a:lstStyle/>
           <a:p>
             <a:pPr algn="ctr"/>
-            <a:endParaRPr lang="en-US"/>
+            <a:endParaRPr lang="en-US" dirty="0"/>
           </a:p>
         </p:txBody>
       </p:sp>
@@ -26654,8 +26654,8 @@
           </a:fontRef>
         </p:style>
       </p:cxnSp>
-      <mc:AlternateContent xmlns:mc="http://schemas.openxmlformats.org/markup-compatibility/2006">
-        <mc:Choice xmlns:a14="http://schemas.microsoft.com/office/drawing/2010/main" Requires="a14">
+      <mc:AlternateContent xmlns:mc="http://schemas.openxmlformats.org/markup-compatibility/2006" xmlns:a14="http://schemas.microsoft.com/office/drawing/2010/main">
+        <mc:Choice Requires="a14">
           <p:sp>
             <p:nvSpPr>
               <p:cNvPr id="60" name="TextBox 59">
@@ -26691,7 +26691,7 @@
               <a:p>
                 <a:pPr algn="ctr"/>
                 <a:r>
-                  <a:rPr lang="en-US"/>
+                  <a:rPr lang="en-US" dirty="0"/>
                   <a:t>This shows that a BST with </a:t>
                 </a:r>
                 <a14:m>
@@ -26705,7 +26705,7 @@
                   </m:oMath>
                 </a14:m>
                 <a:r>
-                  <a:rPr lang="en-US"/>
+                  <a:rPr lang="en-US" dirty="0"/>
                   <a:t> nodes can have height </a:t>
                 </a:r>
                 <a14:m>
@@ -26737,14 +26737,14 @@
                   </m:oMath>
                 </a14:m>
                 <a:r>
-                  <a:rPr lang="en-US"/>
+                  <a:rPr lang="en-US" dirty="0"/>
                   <a:t>.</a:t>
                 </a:r>
               </a:p>
             </p:txBody>
           </p:sp>
         </mc:Choice>
-        <mc:Fallback>
+        <mc:Fallback xmlns="">
           <p:sp>
             <p:nvSpPr>
               <p:cNvPr id="60" name="TextBox 59">
@@ -26841,7 +26841,7 @@
             <a:lstStyle/>
             <a:p>
               <a:r>
-                <a:rPr lang="en-US" sz="2800" b="1"/>
+                <a:rPr lang="en-US" sz="2800" b="1" dirty="0"/>
                 <a:t>1</a:t>
               </a:r>
             </a:p>
@@ -26895,7 +26895,7 @@
             <a:lstStyle/>
             <a:p>
               <a:pPr algn="ctr"/>
-              <a:endParaRPr lang="en-US"/>
+              <a:endParaRPr lang="en-US" dirty="0"/>
             </a:p>
           </p:txBody>
         </p:sp>
@@ -26952,7 +26952,7 @@
             <a:lstStyle/>
             <a:p>
               <a:r>
-                <a:rPr lang="en-US" sz="2800" b="1"/>
+                <a:rPr lang="en-US" sz="2800" b="1" dirty="0"/>
                 <a:t>9</a:t>
               </a:r>
             </a:p>
@@ -27006,7 +27006,7 @@
             <a:lstStyle/>
             <a:p>
               <a:pPr algn="ctr"/>
-              <a:endParaRPr lang="en-US"/>
+              <a:endParaRPr lang="en-US" dirty="0"/>
             </a:p>
           </p:txBody>
         </p:sp>
@@ -27105,7 +27105,7 @@
             <a:lstStyle/>
             <a:p>
               <a:r>
-                <a:rPr lang="en-US"/>
+                <a:rPr lang="en-US" dirty="0"/>
                 <a:t> a BST</a:t>
               </a:r>
             </a:p>
@@ -27200,7 +27200,7 @@
             <a:lstStyle/>
             <a:p>
               <a:r>
-                <a:rPr lang="en-US" sz="2800" b="1"/>
+                <a:rPr lang="en-US" sz="2800" b="1" dirty="0"/>
                 <a:t>2</a:t>
               </a:r>
             </a:p>
@@ -27254,7 +27254,7 @@
             <a:lstStyle/>
             <a:p>
               <a:pPr algn="ctr"/>
-              <a:endParaRPr lang="en-US"/>
+              <a:endParaRPr lang="en-US" dirty="0"/>
             </a:p>
           </p:txBody>
         </p:sp>
@@ -27311,7 +27311,7 @@
             <a:lstStyle/>
             <a:p>
               <a:r>
-                <a:rPr lang="en-US" sz="2800" b="1"/>
+                <a:rPr lang="en-US" sz="2800" b="1" dirty="0"/>
                 <a:t>6</a:t>
               </a:r>
             </a:p>
@@ -27365,7 +27365,7 @@
             <a:lstStyle/>
             <a:p>
               <a:pPr algn="ctr"/>
-              <a:endParaRPr lang="en-US"/>
+              <a:endParaRPr lang="en-US" dirty="0"/>
             </a:p>
           </p:txBody>
         </p:sp>
@@ -27462,7 +27462,7 @@
             <a:lstStyle/>
             <a:p>
               <a:r>
-                <a:rPr lang="en-US" sz="2800" b="1"/>
+                <a:rPr lang="en-US" sz="2800" b="1" dirty="0"/>
                 <a:t>5</a:t>
               </a:r>
             </a:p>
@@ -27516,7 +27516,7 @@
             <a:lstStyle/>
             <a:p>
               <a:pPr algn="ctr"/>
-              <a:endParaRPr lang="en-US"/>
+              <a:endParaRPr lang="en-US" dirty="0"/>
             </a:p>
           </p:txBody>
         </p:sp>
@@ -27653,7 +27653,7 @@
             <a:lstStyle/>
             <a:p>
               <a:r>
-                <a:rPr lang="en-US" sz="2800" b="1"/>
+                <a:rPr lang="en-US" sz="2800" b="1" dirty="0"/>
                 <a:t>9</a:t>
               </a:r>
             </a:p>
@@ -27707,7 +27707,7 @@
             <a:lstStyle/>
             <a:p>
               <a:pPr algn="ctr"/>
-              <a:endParaRPr lang="en-US"/>
+              <a:endParaRPr lang="en-US" dirty="0"/>
             </a:p>
           </p:txBody>
         </p:sp>
@@ -27764,7 +27764,7 @@
             <a:lstStyle/>
             <a:p>
               <a:r>
-                <a:rPr lang="en-US" sz="2800" b="1"/>
+                <a:rPr lang="en-US" sz="2800" b="1" dirty="0"/>
                 <a:t>6</a:t>
               </a:r>
             </a:p>
@@ -27818,7 +27818,7 @@
             <a:lstStyle/>
             <a:p>
               <a:pPr algn="ctr"/>
-              <a:endParaRPr lang="en-US"/>
+              <a:endParaRPr lang="en-US" dirty="0"/>
             </a:p>
           </p:txBody>
         </p:sp>
@@ -27917,7 +27917,7 @@
             <a:lstStyle/>
             <a:p>
               <a:r>
-                <a:rPr lang="en-US"/>
+                <a:rPr lang="en-US" dirty="0"/>
                 <a:t> a BST</a:t>
               </a:r>
             </a:p>
@@ -27992,7 +27992,7 @@
           <a:lstStyle/>
           <a:p>
             <a:r>
-              <a:rPr lang="en-US" sz="2800" b="1"/>
+              <a:rPr lang="en-US" sz="2800" b="1" dirty="0"/>
               <a:t>5</a:t>
             </a:r>
           </a:p>
@@ -28046,7 +28046,7 @@
           <a:lstStyle/>
           <a:p>
             <a:pPr algn="ctr"/>
-            <a:endParaRPr lang="en-US"/>
+            <a:endParaRPr lang="en-US" dirty="0"/>
           </a:p>
         </p:txBody>
       </p:sp>
@@ -28082,7 +28082,7 @@
           <a:lstStyle/>
           <a:p>
             <a:r>
-              <a:rPr lang="en-US" sz="2800" b="1"/>
+              <a:rPr lang="en-US" sz="2800" b="1" dirty="0"/>
               <a:t>2</a:t>
             </a:r>
           </a:p>
@@ -28136,7 +28136,7 @@
           <a:lstStyle/>
           <a:p>
             <a:pPr algn="ctr"/>
-            <a:endParaRPr lang="en-US"/>
+            <a:endParaRPr lang="en-US" dirty="0"/>
           </a:p>
         </p:txBody>
       </p:sp>
@@ -28212,7 +28212,7 @@
           <a:lstStyle/>
           <a:p>
             <a:r>
-              <a:rPr lang="en-US" sz="2800" b="1"/>
+              <a:rPr lang="en-US" sz="2800" b="1" dirty="0"/>
               <a:t>1</a:t>
             </a:r>
           </a:p>
@@ -28266,7 +28266,7 @@
           <a:lstStyle/>
           <a:p>
             <a:pPr algn="ctr"/>
-            <a:endParaRPr lang="en-US"/>
+            <a:endParaRPr lang="en-US" dirty="0"/>
           </a:p>
         </p:txBody>
       </p:sp>
@@ -28350,8 +28350,8 @@
           </a:fontRef>
         </p:style>
       </p:cxnSp>
-      <mc:AlternateContent xmlns:mc="http://schemas.openxmlformats.org/markup-compatibility/2006">
-        <mc:Choice xmlns:a14="http://schemas.microsoft.com/office/drawing/2010/main" Requires="a14">
+      <mc:AlternateContent xmlns:mc="http://schemas.openxmlformats.org/markup-compatibility/2006" xmlns:a14="http://schemas.microsoft.com/office/drawing/2010/main">
+        <mc:Choice Requires="a14">
           <p:sp>
             <p:nvSpPr>
               <p:cNvPr id="64" name="TextBox 63">
@@ -28387,7 +28387,7 @@
               <a:p>
                 <a:pPr algn="ctr"/>
                 <a:r>
-                  <a:rPr lang="en-US"/>
+                  <a:rPr lang="en-US" dirty="0"/>
                   <a:t>A BST with </a:t>
                 </a:r>
                 <a14:m>
@@ -28401,7 +28401,7 @@
                   </m:oMath>
                 </a14:m>
                 <a:r>
-                  <a:rPr lang="en-US"/>
+                  <a:rPr lang="en-US" dirty="0"/>
                   <a:t> nodes can have </a:t>
                 </a:r>
                 <a14:m>
@@ -28421,7 +28421,7 @@
                     <m:func>
                       <m:funcPr>
                         <m:ctrlPr>
-                          <a:rPr lang="en-US" b="0" i="0" smtClean="0">
+                          <a:rPr lang="en-US" b="0" i="1" smtClean="0">
                             <a:latin typeface="Cambria Math" panose="02040503050406030204" pitchFamily="18" charset="0"/>
                           </a:rPr>
                         </m:ctrlPr>
@@ -28455,14 +28455,14 @@
                   </m:oMath>
                 </a14:m>
                 <a:r>
-                  <a:rPr lang="en-US"/>
+                  <a:rPr lang="en-US" dirty="0"/>
                   <a:t> height</a:t>
                 </a:r>
               </a:p>
             </p:txBody>
           </p:sp>
         </mc:Choice>
-        <mc:Fallback>
+        <mc:Fallback xmlns="">
           <p:sp>
             <p:nvSpPr>
               <p:cNvPr id="64" name="TextBox 63">
@@ -28564,7 +28564,7 @@
           <a:lstStyle/>
           <a:p>
             <a:r>
-              <a:rPr lang="en-US"/>
+              <a:rPr lang="en-US" dirty="0"/>
               <a:t>BST Example</a:t>
             </a:r>
           </a:p>
@@ -28635,7 +28635,7 @@
           <a:p>
             <a:pPr algn="ctr"/>
             <a:r>
-              <a:rPr lang="en-US"/>
+              <a:rPr lang="en-US" dirty="0"/>
               <a:t>This tree shows the leaf nodes explicitly. We often implement those as null points and don’t show them in drawings.</a:t>
             </a:r>
           </a:p>
@@ -28704,7 +28704,7 @@
           <a:lstStyle/>
           <a:p>
             <a:r>
-              <a:rPr lang="en-US"/>
+              <a:rPr lang="en-US" dirty="0"/>
               <a:t>BST Example</a:t>
             </a:r>
           </a:p>
@@ -28775,15 +28775,15 @@
           <a:p>
             <a:pPr algn="ctr"/>
             <a:r>
-              <a:rPr lang="en-US"/>
+              <a:rPr lang="en-US" dirty="0"/>
               <a:t>Where is the </a:t>
             </a:r>
             <a:r>
-              <a:rPr lang="en-US" b="1"/>
+              <a:rPr lang="en-US" b="1" dirty="0"/>
               <a:t>min value </a:t>
             </a:r>
             <a:r>
-              <a:rPr lang="en-US"/>
+              <a:rPr lang="en-US" dirty="0"/>
               <a:t>of a BST?</a:t>
             </a:r>
           </a:p>
@@ -28876,23 +28876,23 @@
           <a:p>
             <a:pPr algn="ctr"/>
             <a:r>
-              <a:rPr lang="en-US"/>
+              <a:rPr lang="en-US" dirty="0"/>
               <a:t>To find the </a:t>
             </a:r>
             <a:r>
-              <a:rPr lang="en-US" b="1"/>
+              <a:rPr lang="en-US" b="1" dirty="0"/>
               <a:t>min value </a:t>
             </a:r>
             <a:r>
-              <a:rPr lang="en-US"/>
+              <a:rPr lang="en-US" dirty="0"/>
               <a:t>of a BST, start at the root and “</a:t>
             </a:r>
             <a:r>
-              <a:rPr lang="en-US" b="1"/>
+              <a:rPr lang="en-US" b="1" dirty="0"/>
               <a:t>keep going left</a:t>
             </a:r>
             <a:r>
-              <a:rPr lang="en-US"/>
+              <a:rPr lang="en-US" dirty="0"/>
               <a:t>” to the left-most leaf.</a:t>
             </a:r>
           </a:p>
@@ -28935,11 +28935,11 @@
               <a:p>
                 <a:pPr algn="ctr"/>
                 <a:r>
-                  <a:rPr lang="en-US" b="1"/>
+                  <a:rPr lang="en-US" b="1" dirty="0"/>
                   <a:t>Finding the min </a:t>
                 </a:r>
                 <a:r>
-                  <a:rPr lang="en-US"/>
+                  <a:rPr lang="en-US" dirty="0"/>
                   <a:t>takes is </a:t>
                 </a:r>
                 <a14:m>
@@ -28960,7 +28960,7 @@
                       <a:rPr lang="en-US" i="1" dirty="0" smtClean="0">
                         <a:latin typeface="Cambria Math" panose="02040503050406030204" pitchFamily="18" charset="0"/>
                       </a:rPr>
-                      <m:t>ℎ𝑒𝑖𝑔ℎ𝑡</m:t>
+                      <m:t>h𝑒𝑖𝑔h𝑡</m:t>
                     </m:r>
                     <m:r>
                       <a:rPr lang="en-US" i="1" dirty="0" smtClean="0">
@@ -28971,7 +28971,7 @@
                   </m:oMath>
                 </a14:m>
                 <a:r>
-                  <a:rPr lang="en-US"/>
+                  <a:rPr lang="en-US" dirty="0"/>
                   <a:t> time, i.e. between </a:t>
                 </a:r>
                 <a14:m>
@@ -28991,7 +28991,7 @@
                     <m:func>
                       <m:funcPr>
                         <m:ctrlPr>
-                          <a:rPr lang="en-US" i="0" dirty="0" smtClean="0">
+                          <a:rPr lang="en-US" i="1" dirty="0" smtClean="0">
                             <a:latin typeface="Cambria Math" panose="02040503050406030204" pitchFamily="18" charset="0"/>
                           </a:rPr>
                         </m:ctrlPr>
@@ -29025,7 +29025,7 @@
                   </m:oMath>
                 </a14:m>
                 <a:r>
-                  <a:rPr lang="en-US"/>
+                  <a:rPr lang="en-US" dirty="0"/>
                   <a:t> and </a:t>
                 </a:r>
                 <a14:m>
@@ -29057,7 +29057,7 @@
                   </m:oMath>
                 </a14:m>
                 <a:r>
-                  <a:rPr lang="en-US"/>
+                  <a:rPr lang="en-US" dirty="0"/>
                   <a:t> depending on tree shape.</a:t>
                 </a:r>
               </a:p>
@@ -29172,7 +29172,7 @@
           <a:lstStyle/>
           <a:p>
             <a:r>
-              <a:rPr lang="en-US"/>
+              <a:rPr lang="en-US" dirty="0"/>
               <a:t>BST Example</a:t>
             </a:r>
           </a:p>
@@ -29295,15 +29295,15 @@
           <a:p>
             <a:pPr algn="ctr"/>
             <a:r>
-              <a:rPr lang="en-US"/>
+              <a:rPr lang="en-US" dirty="0"/>
               <a:t>Where is the </a:t>
             </a:r>
             <a:r>
-              <a:rPr lang="en-US" b="1"/>
+              <a:rPr lang="en-US" b="1" dirty="0"/>
               <a:t>max value </a:t>
             </a:r>
             <a:r>
-              <a:rPr lang="en-US"/>
+              <a:rPr lang="en-US" dirty="0"/>
               <a:t>of a BST?</a:t>
             </a:r>
           </a:p>
@@ -29344,23 +29344,23 @@
           <a:p>
             <a:pPr algn="ctr"/>
             <a:r>
-              <a:rPr lang="en-US"/>
+              <a:rPr lang="en-US" dirty="0"/>
               <a:t>To find the </a:t>
             </a:r>
             <a:r>
-              <a:rPr lang="en-US" b="1"/>
+              <a:rPr lang="en-US" b="1" dirty="0"/>
               <a:t>max value </a:t>
             </a:r>
             <a:r>
-              <a:rPr lang="en-US"/>
+              <a:rPr lang="en-US" dirty="0"/>
               <a:t>of a BST, start at the root and “</a:t>
             </a:r>
             <a:r>
-              <a:rPr lang="en-US" b="1"/>
+              <a:rPr lang="en-US" b="1" dirty="0"/>
               <a:t>keep going right</a:t>
             </a:r>
             <a:r>
-              <a:rPr lang="en-US"/>
+              <a:rPr lang="en-US" dirty="0"/>
               <a:t>” to the right-most leaf.</a:t>
             </a:r>
           </a:p>
@@ -29403,11 +29403,11 @@
               <a:p>
                 <a:pPr algn="ctr"/>
                 <a:r>
-                  <a:rPr lang="en-US" b="1"/>
+                  <a:rPr lang="en-US" b="1" dirty="0"/>
                   <a:t>Finding the max </a:t>
                 </a:r>
                 <a:r>
-                  <a:rPr lang="en-US"/>
+                  <a:rPr lang="en-US" dirty="0"/>
                   <a:t>takes is </a:t>
                 </a:r>
                 <a14:m>
@@ -29428,7 +29428,7 @@
                       <a:rPr lang="en-US" i="1" dirty="0" smtClean="0">
                         <a:latin typeface="Cambria Math" panose="02040503050406030204" pitchFamily="18" charset="0"/>
                       </a:rPr>
-                      <m:t>ℎ𝑒𝑖𝑔ℎ𝑡</m:t>
+                      <m:t>h𝑒𝑖𝑔h𝑡</m:t>
                     </m:r>
                     <m:r>
                       <a:rPr lang="en-US" i="1" dirty="0" smtClean="0">
@@ -29439,7 +29439,7 @@
                   </m:oMath>
                 </a14:m>
                 <a:r>
-                  <a:rPr lang="en-US"/>
+                  <a:rPr lang="en-US" dirty="0"/>
                   <a:t> time, i.e. between </a:t>
                 </a:r>
                 <a14:m>
@@ -29459,7 +29459,7 @@
                     <m:func>
                       <m:funcPr>
                         <m:ctrlPr>
-                          <a:rPr lang="en-US" i="0" dirty="0" smtClean="0">
+                          <a:rPr lang="en-US" i="1" dirty="0" smtClean="0">
                             <a:latin typeface="Cambria Math" panose="02040503050406030204" pitchFamily="18" charset="0"/>
                           </a:rPr>
                         </m:ctrlPr>
@@ -29493,7 +29493,7 @@
                   </m:oMath>
                 </a14:m>
                 <a:r>
-                  <a:rPr lang="en-US"/>
+                  <a:rPr lang="en-US" dirty="0"/>
                   <a:t> and </a:t>
                 </a:r>
                 <a14:m>
@@ -29525,7 +29525,7 @@
                   </m:oMath>
                 </a14:m>
                 <a:r>
-                  <a:rPr lang="en-US"/>
+                  <a:rPr lang="en-US" dirty="0"/>
                   <a:t> depending on tree shape.</a:t>
                 </a:r>
               </a:p>
@@ -29640,7 +29640,7 @@
           <a:lstStyle/>
           <a:p>
             <a:r>
-              <a:rPr lang="en-US"/>
+              <a:rPr lang="en-US" dirty="0"/>
               <a:t>Binary Search Tree Examples</a:t>
             </a:r>
           </a:p>
@@ -29698,7 +29698,7 @@
             <a:lstStyle/>
             <a:p>
               <a:r>
-                <a:rPr lang="en-US" sz="2800" b="1"/>
+                <a:rPr lang="en-US" sz="2800" b="1" dirty="0"/>
                 <a:t>10</a:t>
               </a:r>
             </a:p>
@@ -29752,7 +29752,7 @@
             <a:lstStyle/>
             <a:p>
               <a:pPr algn="ctr"/>
-              <a:endParaRPr lang="en-US"/>
+              <a:endParaRPr lang="en-US" dirty="0"/>
             </a:p>
           </p:txBody>
         </p:sp>
@@ -29809,7 +29809,7 @@
             <a:lstStyle/>
             <a:p>
               <a:r>
-                <a:rPr lang="en-US" sz="2800" b="1"/>
+                <a:rPr lang="en-US" sz="2800" b="1" dirty="0"/>
                 <a:t>4</a:t>
               </a:r>
             </a:p>
@@ -29863,7 +29863,7 @@
             <a:lstStyle/>
             <a:p>
               <a:pPr algn="ctr"/>
-              <a:endParaRPr lang="en-US"/>
+              <a:endParaRPr lang="en-US" dirty="0"/>
             </a:p>
           </p:txBody>
         </p:sp>
@@ -29940,7 +29940,7 @@
           <a:lstStyle/>
           <a:p>
             <a:r>
-              <a:rPr lang="en-US" sz="2800" b="1"/>
+              <a:rPr lang="en-US" sz="2800" b="1" dirty="0"/>
               <a:t>5</a:t>
             </a:r>
           </a:p>
@@ -29994,7 +29994,7 @@
           <a:lstStyle/>
           <a:p>
             <a:pPr algn="ctr"/>
-            <a:endParaRPr lang="en-US"/>
+            <a:endParaRPr lang="en-US" dirty="0"/>
           </a:p>
         </p:txBody>
       </p:sp>
@@ -30030,7 +30030,7 @@
           <a:lstStyle/>
           <a:p>
             <a:r>
-              <a:rPr lang="en-US" sz="2800" b="1"/>
+              <a:rPr lang="en-US" sz="2800" b="1" dirty="0"/>
               <a:t>2</a:t>
             </a:r>
           </a:p>
@@ -30084,7 +30084,7 @@
           <a:lstStyle/>
           <a:p>
             <a:pPr algn="ctr"/>
-            <a:endParaRPr lang="en-US"/>
+            <a:endParaRPr lang="en-US" dirty="0"/>
           </a:p>
         </p:txBody>
       </p:sp>
@@ -30180,7 +30180,7 @@
             <a:lstStyle/>
             <a:p>
               <a:r>
-                <a:rPr lang="en-US" sz="2800" b="1"/>
+                <a:rPr lang="en-US" sz="2800" b="1" dirty="0"/>
                 <a:t>1</a:t>
               </a:r>
             </a:p>
@@ -30234,7 +30234,7 @@
             <a:lstStyle/>
             <a:p>
               <a:pPr algn="ctr"/>
-              <a:endParaRPr lang="en-US"/>
+              <a:endParaRPr lang="en-US" dirty="0"/>
             </a:p>
           </p:txBody>
         </p:sp>
@@ -30371,7 +30371,7 @@
             <a:lstStyle/>
             <a:p>
               <a:r>
-                <a:rPr lang="en-US" sz="2800" b="1"/>
+                <a:rPr lang="en-US" sz="2800" b="1" dirty="0"/>
                 <a:t>3</a:t>
               </a:r>
             </a:p>
@@ -30425,7 +30425,7 @@
             <a:lstStyle/>
             <a:p>
               <a:pPr algn="ctr"/>
-              <a:endParaRPr lang="en-US"/>
+              <a:endParaRPr lang="en-US" dirty="0"/>
             </a:p>
           </p:txBody>
         </p:sp>
@@ -30561,7 +30561,7 @@
             <a:lstStyle/>
             <a:p>
               <a:r>
-                <a:rPr lang="en-US" sz="2800" b="1"/>
+                <a:rPr lang="en-US" sz="2800" b="1" dirty="0"/>
                 <a:t>8</a:t>
               </a:r>
             </a:p>
@@ -30615,7 +30615,7 @@
             <a:lstStyle/>
             <a:p>
               <a:pPr algn="ctr"/>
-              <a:endParaRPr lang="en-US"/>
+              <a:endParaRPr lang="en-US" dirty="0"/>
             </a:p>
           </p:txBody>
         </p:sp>
@@ -30672,7 +30672,7 @@
             <a:lstStyle/>
             <a:p>
               <a:r>
-                <a:rPr lang="en-US" sz="2800" b="1"/>
+                <a:rPr lang="en-US" sz="2800" b="1" dirty="0"/>
                 <a:t>15</a:t>
               </a:r>
             </a:p>
@@ -30726,7 +30726,7 @@
             <a:lstStyle/>
             <a:p>
               <a:pPr algn="ctr"/>
-              <a:endParaRPr lang="en-US"/>
+              <a:endParaRPr lang="en-US" dirty="0"/>
             </a:p>
           </p:txBody>
         </p:sp>
@@ -30823,7 +30823,7 @@
             <a:lstStyle/>
             <a:p>
               <a:r>
-                <a:rPr lang="en-US" sz="2800" b="1"/>
+                <a:rPr lang="en-US" sz="2800" b="1" dirty="0"/>
                 <a:t>18</a:t>
               </a:r>
             </a:p>
@@ -30877,7 +30877,7 @@
             <a:lstStyle/>
             <a:p>
               <a:pPr algn="ctr"/>
-              <a:endParaRPr lang="en-US"/>
+              <a:endParaRPr lang="en-US" dirty="0"/>
             </a:p>
           </p:txBody>
         </p:sp>
@@ -30974,7 +30974,7 @@
             <a:lstStyle/>
             <a:p>
               <a:r>
-                <a:rPr lang="en-US" sz="2800" b="1"/>
+                <a:rPr lang="en-US" sz="2800" b="1" dirty="0"/>
                 <a:t>7</a:t>
               </a:r>
             </a:p>
@@ -31028,7 +31028,7 @@
             <a:lstStyle/>
             <a:p>
               <a:pPr algn="ctr"/>
-              <a:endParaRPr lang="en-US"/>
+              <a:endParaRPr lang="en-US" dirty="0"/>
             </a:p>
           </p:txBody>
         </p:sp>
@@ -31164,7 +31164,7 @@
             <a:lstStyle/>
             <a:p>
               <a:r>
-                <a:rPr lang="en-US" sz="2800" b="1"/>
+                <a:rPr lang="en-US" sz="2800" b="1" dirty="0"/>
                 <a:t>9</a:t>
               </a:r>
             </a:p>
@@ -31218,7 +31218,7 @@
             <a:lstStyle/>
             <a:p>
               <a:pPr algn="ctr"/>
-              <a:endParaRPr lang="en-US"/>
+              <a:endParaRPr lang="en-US" dirty="0"/>
             </a:p>
           </p:txBody>
         </p:sp>
@@ -31257,7 +31257,7 @@
           <a:lstStyle/>
           <a:p>
             <a:r>
-              <a:rPr lang="en-US"/>
+              <a:rPr lang="en-US" dirty="0"/>
               <a:t> a BST?</a:t>
             </a:r>
           </a:p>
@@ -31326,7 +31326,7 @@
           <a:lstStyle/>
           <a:p>
             <a:r>
-              <a:rPr lang="en-US"/>
+              <a:rPr lang="en-US" dirty="0"/>
               <a:t>Binary Search Tree Examples</a:t>
             </a:r>
           </a:p>
@@ -31384,7 +31384,7 @@
             <a:lstStyle/>
             <a:p>
               <a:r>
-                <a:rPr lang="en-US" sz="2800" b="1"/>
+                <a:rPr lang="en-US" sz="2800" b="1" dirty="0"/>
                 <a:t>10</a:t>
               </a:r>
             </a:p>
@@ -31438,7 +31438,7 @@
             <a:lstStyle/>
             <a:p>
               <a:pPr algn="ctr"/>
-              <a:endParaRPr lang="en-US"/>
+              <a:endParaRPr lang="en-US" dirty="0"/>
             </a:p>
           </p:txBody>
         </p:sp>
@@ -31495,7 +31495,7 @@
             <a:lstStyle/>
             <a:p>
               <a:r>
-                <a:rPr lang="en-US" sz="2800" b="1"/>
+                <a:rPr lang="en-US" sz="2800" b="1" dirty="0"/>
                 <a:t>4</a:t>
               </a:r>
             </a:p>
@@ -31549,7 +31549,7 @@
             <a:lstStyle/>
             <a:p>
               <a:pPr algn="ctr"/>
-              <a:endParaRPr lang="en-US"/>
+              <a:endParaRPr lang="en-US" dirty="0"/>
             </a:p>
           </p:txBody>
         </p:sp>
@@ -31626,7 +31626,7 @@
           <a:lstStyle/>
           <a:p>
             <a:r>
-              <a:rPr lang="en-US" sz="2800" b="1"/>
+              <a:rPr lang="en-US" sz="2800" b="1" dirty="0"/>
               <a:t>5</a:t>
             </a:r>
           </a:p>
@@ -31680,7 +31680,7 @@
           <a:lstStyle/>
           <a:p>
             <a:pPr algn="ctr"/>
-            <a:endParaRPr lang="en-US"/>
+            <a:endParaRPr lang="en-US" dirty="0"/>
           </a:p>
         </p:txBody>
       </p:sp>
@@ -31716,7 +31716,7 @@
           <a:lstStyle/>
           <a:p>
             <a:r>
-              <a:rPr lang="en-US" sz="2800" b="1"/>
+              <a:rPr lang="en-US" sz="2800" b="1" dirty="0"/>
               <a:t>2</a:t>
             </a:r>
           </a:p>
@@ -31770,7 +31770,7 @@
           <a:lstStyle/>
           <a:p>
             <a:pPr algn="ctr"/>
-            <a:endParaRPr lang="en-US"/>
+            <a:endParaRPr lang="en-US" dirty="0"/>
           </a:p>
         </p:txBody>
       </p:sp>
@@ -31866,7 +31866,7 @@
             <a:lstStyle/>
             <a:p>
               <a:r>
-                <a:rPr lang="en-US" sz="2800" b="1"/>
+                <a:rPr lang="en-US" sz="2800" b="1" dirty="0"/>
                 <a:t>1</a:t>
               </a:r>
             </a:p>
@@ -31920,7 +31920,7 @@
             <a:lstStyle/>
             <a:p>
               <a:pPr algn="ctr"/>
-              <a:endParaRPr lang="en-US"/>
+              <a:endParaRPr lang="en-US" dirty="0"/>
             </a:p>
           </p:txBody>
         </p:sp>
@@ -32057,7 +32057,7 @@
             <a:lstStyle/>
             <a:p>
               <a:r>
-                <a:rPr lang="en-US" sz="2800" b="1"/>
+                <a:rPr lang="en-US" sz="2800" b="1" dirty="0"/>
                 <a:t>3</a:t>
               </a:r>
             </a:p>
@@ -32111,7 +32111,7 @@
             <a:lstStyle/>
             <a:p>
               <a:pPr algn="ctr"/>
-              <a:endParaRPr lang="en-US"/>
+              <a:endParaRPr lang="en-US" dirty="0"/>
             </a:p>
           </p:txBody>
         </p:sp>
@@ -32247,7 +32247,7 @@
             <a:lstStyle/>
             <a:p>
               <a:r>
-                <a:rPr lang="en-US" sz="2800" b="1"/>
+                <a:rPr lang="en-US" sz="2800" b="1" dirty="0"/>
                 <a:t>8</a:t>
               </a:r>
             </a:p>
@@ -32301,7 +32301,7 @@
             <a:lstStyle/>
             <a:p>
               <a:pPr algn="ctr"/>
-              <a:endParaRPr lang="en-US"/>
+              <a:endParaRPr lang="en-US" dirty="0"/>
             </a:p>
           </p:txBody>
         </p:sp>
@@ -32358,7 +32358,7 @@
             <a:lstStyle/>
             <a:p>
               <a:r>
-                <a:rPr lang="en-US" sz="2800" b="1"/>
+                <a:rPr lang="en-US" sz="2800" b="1" dirty="0"/>
                 <a:t>15</a:t>
               </a:r>
             </a:p>
@@ -32412,7 +32412,7 @@
             <a:lstStyle/>
             <a:p>
               <a:pPr algn="ctr"/>
-              <a:endParaRPr lang="en-US"/>
+              <a:endParaRPr lang="en-US" dirty="0"/>
             </a:p>
           </p:txBody>
         </p:sp>
@@ -32509,7 +32509,7 @@
             <a:lstStyle/>
             <a:p>
               <a:r>
-                <a:rPr lang="en-US" sz="2800" b="1"/>
+                <a:rPr lang="en-US" sz="2800" b="1" dirty="0"/>
                 <a:t>18</a:t>
               </a:r>
             </a:p>
@@ -32563,7 +32563,7 @@
             <a:lstStyle/>
             <a:p>
               <a:pPr algn="ctr"/>
-              <a:endParaRPr lang="en-US"/>
+              <a:endParaRPr lang="en-US" dirty="0"/>
             </a:p>
           </p:txBody>
         </p:sp>
@@ -32660,7 +32660,7 @@
             <a:lstStyle/>
             <a:p>
               <a:r>
-                <a:rPr lang="en-US" sz="2800" b="1"/>
+                <a:rPr lang="en-US" sz="2800" b="1" dirty="0"/>
                 <a:t>7</a:t>
               </a:r>
             </a:p>
@@ -32714,7 +32714,7 @@
             <a:lstStyle/>
             <a:p>
               <a:pPr algn="ctr"/>
-              <a:endParaRPr lang="en-US"/>
+              <a:endParaRPr lang="en-US" dirty="0"/>
             </a:p>
           </p:txBody>
         </p:sp>
@@ -32850,7 +32850,7 @@
             <a:lstStyle/>
             <a:p>
               <a:r>
-                <a:rPr lang="en-US" sz="2800" b="1"/>
+                <a:rPr lang="en-US" sz="2800" b="1" dirty="0"/>
                 <a:t>9</a:t>
               </a:r>
             </a:p>
@@ -32904,7 +32904,7 @@
             <a:lstStyle/>
             <a:p>
               <a:pPr algn="ctr"/>
-              <a:endParaRPr lang="en-US"/>
+              <a:endParaRPr lang="en-US" dirty="0"/>
             </a:p>
           </p:txBody>
         </p:sp>
@@ -32963,11 +32963,11 @@
             <a:lstStyle/>
             <a:p>
               <a:r>
-                <a:rPr lang="en-US"/>
+                <a:rPr lang="en-US" dirty="0"/>
                 <a:t> </a:t>
               </a:r>
               <a:r>
-                <a:rPr lang="en-US">
+                <a:rPr lang="en-US" dirty="0">
                   <a:solidFill>
                     <a:srgbClr val="FF0000"/>
                   </a:solidFill>
@@ -32975,7 +32975,7 @@
                 <a:t>NOT</a:t>
               </a:r>
               <a:r>
-                <a:rPr lang="en-US"/>
+                <a:rPr lang="en-US" dirty="0"/>
                 <a:t> a BST</a:t>
               </a:r>
             </a:p>
@@ -33066,7 +33066,7 @@
           <a:lstStyle/>
           <a:p>
             <a:pPr algn="ctr"/>
-            <a:endParaRPr lang="en-US"/>
+            <a:endParaRPr lang="en-US" dirty="0"/>
           </a:p>
         </p:txBody>
       </p:sp>
@@ -33105,7 +33105,7 @@
           <a:p>
             <a:pPr algn="ctr"/>
             <a:r>
-              <a:rPr lang="en-US"/>
+              <a:rPr lang="en-US" dirty="0"/>
               <a:t>3 and 4 are less than the root key 5</a:t>
             </a:r>
           </a:p>
@@ -33174,7 +33174,7 @@
           <a:lstStyle/>
           <a:p>
             <a:r>
-              <a:rPr lang="en-US"/>
+              <a:rPr lang="en-US" dirty="0"/>
               <a:t>Binary Search Tree Examples</a:t>
             </a:r>
           </a:p>
@@ -33232,7 +33232,7 @@
             <a:lstStyle/>
             <a:p>
               <a:r>
-                <a:rPr lang="en-US" sz="2800" b="1"/>
+                <a:rPr lang="en-US" sz="2800" b="1" dirty="0"/>
                 <a:t>10</a:t>
               </a:r>
             </a:p>
@@ -33286,7 +33286,7 @@
             <a:lstStyle/>
             <a:p>
               <a:pPr algn="ctr"/>
-              <a:endParaRPr lang="en-US"/>
+              <a:endParaRPr lang="en-US" dirty="0"/>
             </a:p>
           </p:txBody>
         </p:sp>
@@ -33343,7 +33343,7 @@
             <a:lstStyle/>
             <a:p>
               <a:r>
-                <a:rPr lang="en-US" sz="2800" b="1"/>
+                <a:rPr lang="en-US" sz="2800" b="1" dirty="0"/>
                 <a:t>4</a:t>
               </a:r>
             </a:p>
@@ -33397,7 +33397,7 @@
             <a:lstStyle/>
             <a:p>
               <a:pPr algn="ctr"/>
-              <a:endParaRPr lang="en-US"/>
+              <a:endParaRPr lang="en-US" dirty="0"/>
             </a:p>
           </p:txBody>
         </p:sp>
@@ -33474,7 +33474,7 @@
           <a:lstStyle/>
           <a:p>
             <a:r>
-              <a:rPr lang="en-US" sz="2800" b="1"/>
+              <a:rPr lang="en-US" sz="2800" b="1" dirty="0"/>
               <a:t>5</a:t>
             </a:r>
           </a:p>
@@ -33528,7 +33528,7 @@
           <a:lstStyle/>
           <a:p>
             <a:pPr algn="ctr"/>
-            <a:endParaRPr lang="en-US"/>
+            <a:endParaRPr lang="en-US" dirty="0"/>
           </a:p>
         </p:txBody>
       </p:sp>
@@ -33564,7 +33564,7 @@
           <a:lstStyle/>
           <a:p>
             <a:r>
-              <a:rPr lang="en-US" sz="2800" b="1"/>
+              <a:rPr lang="en-US" sz="2800" b="1" dirty="0"/>
               <a:t>2</a:t>
             </a:r>
           </a:p>
@@ -33618,7 +33618,7 @@
           <a:lstStyle/>
           <a:p>
             <a:pPr algn="ctr"/>
-            <a:endParaRPr lang="en-US"/>
+            <a:endParaRPr lang="en-US" dirty="0"/>
           </a:p>
         </p:txBody>
       </p:sp>
@@ -33714,7 +33714,7 @@
             <a:lstStyle/>
             <a:p>
               <a:r>
-                <a:rPr lang="en-US" sz="2800" b="1"/>
+                <a:rPr lang="en-US" sz="2800" b="1" dirty="0"/>
                 <a:t>1</a:t>
               </a:r>
             </a:p>
@@ -33768,7 +33768,7 @@
             <a:lstStyle/>
             <a:p>
               <a:pPr algn="ctr"/>
-              <a:endParaRPr lang="en-US"/>
+              <a:endParaRPr lang="en-US" dirty="0"/>
             </a:p>
           </p:txBody>
         </p:sp>
@@ -33905,7 +33905,7 @@
             <a:lstStyle/>
             <a:p>
               <a:r>
-                <a:rPr lang="en-US" sz="2800" b="1"/>
+                <a:rPr lang="en-US" sz="2800" b="1" dirty="0"/>
                 <a:t>3</a:t>
               </a:r>
             </a:p>
@@ -33959,7 +33959,7 @@
             <a:lstStyle/>
             <a:p>
               <a:pPr algn="ctr"/>
-              <a:endParaRPr lang="en-US"/>
+              <a:endParaRPr lang="en-US" dirty="0"/>
             </a:p>
           </p:txBody>
         </p:sp>
@@ -34095,7 +34095,7 @@
             <a:lstStyle/>
             <a:p>
               <a:r>
-                <a:rPr lang="en-US" sz="2800" b="1"/>
+                <a:rPr lang="en-US" sz="2800" b="1" dirty="0"/>
                 <a:t>8</a:t>
               </a:r>
             </a:p>
@@ -34149,7 +34149,7 @@
             <a:lstStyle/>
             <a:p>
               <a:pPr algn="ctr"/>
-              <a:endParaRPr lang="en-US"/>
+              <a:endParaRPr lang="en-US" dirty="0"/>
             </a:p>
           </p:txBody>
         </p:sp>
@@ -34206,7 +34206,7 @@
             <a:lstStyle/>
             <a:p>
               <a:r>
-                <a:rPr lang="en-US" sz="2800" b="1"/>
+                <a:rPr lang="en-US" sz="2800" b="1" dirty="0"/>
                 <a:t>15</a:t>
               </a:r>
             </a:p>
@@ -34260,7 +34260,7 @@
             <a:lstStyle/>
             <a:p>
               <a:pPr algn="ctr"/>
-              <a:endParaRPr lang="en-US"/>
+              <a:endParaRPr lang="en-US" dirty="0"/>
             </a:p>
           </p:txBody>
         </p:sp>
@@ -34357,7 +34357,7 @@
             <a:lstStyle/>
             <a:p>
               <a:r>
-                <a:rPr lang="en-US" sz="2800" b="1"/>
+                <a:rPr lang="en-US" sz="2800" b="1" dirty="0"/>
                 <a:t>18</a:t>
               </a:r>
             </a:p>
@@ -34411,7 +34411,7 @@
             <a:lstStyle/>
             <a:p>
               <a:pPr algn="ctr"/>
-              <a:endParaRPr lang="en-US"/>
+              <a:endParaRPr lang="en-US" dirty="0"/>
             </a:p>
           </p:txBody>
         </p:sp>
@@ -34508,7 +34508,7 @@
             <a:lstStyle/>
             <a:p>
               <a:r>
-                <a:rPr lang="en-US" sz="2800" b="1"/>
+                <a:rPr lang="en-US" sz="2800" b="1" dirty="0"/>
                 <a:t>7</a:t>
               </a:r>
             </a:p>
@@ -34562,7 +34562,7 @@
             <a:lstStyle/>
             <a:p>
               <a:pPr algn="ctr"/>
-              <a:endParaRPr lang="en-US"/>
+              <a:endParaRPr lang="en-US" dirty="0"/>
             </a:p>
           </p:txBody>
         </p:sp>
@@ -34698,7 +34698,7 @@
             <a:lstStyle/>
             <a:p>
               <a:r>
-                <a:rPr lang="en-US" sz="2800" b="1"/>
+                <a:rPr lang="en-US" sz="2800" b="1" dirty="0"/>
                 <a:t>9</a:t>
               </a:r>
             </a:p>
@@ -34752,7 +34752,7 @@
             <a:lstStyle/>
             <a:p>
               <a:pPr algn="ctr"/>
-              <a:endParaRPr lang="en-US"/>
+              <a:endParaRPr lang="en-US" dirty="0"/>
             </a:p>
           </p:txBody>
         </p:sp>
@@ -34811,11 +34811,11 @@
             <a:lstStyle/>
             <a:p>
               <a:r>
-                <a:rPr lang="en-US"/>
+                <a:rPr lang="en-US" dirty="0"/>
                 <a:t> </a:t>
               </a:r>
               <a:r>
-                <a:rPr lang="en-US">
+                <a:rPr lang="en-US" dirty="0">
                   <a:solidFill>
                     <a:srgbClr val="FF0000"/>
                   </a:solidFill>
@@ -34823,7 +34823,7 @@
                 <a:t>NOT</a:t>
               </a:r>
               <a:r>
-                <a:rPr lang="en-US"/>
+                <a:rPr lang="en-US" dirty="0"/>
                 <a:t> a BST</a:t>
               </a:r>
             </a:p>
@@ -34914,7 +34914,7 @@
           <a:lstStyle/>
           <a:p>
             <a:pPr algn="ctr"/>
-            <a:endParaRPr lang="en-US"/>
+            <a:endParaRPr lang="en-US" dirty="0"/>
           </a:p>
         </p:txBody>
       </p:sp>
@@ -34970,7 +34970,7 @@
             <a:lstStyle/>
             <a:p>
               <a:r>
-                <a:rPr lang="en-US" sz="2800" b="1"/>
+                <a:rPr lang="en-US" sz="2800" b="1" dirty="0"/>
                 <a:t>10</a:t>
               </a:r>
             </a:p>
@@ -35024,7 +35024,7 @@
             <a:lstStyle/>
             <a:p>
               <a:pPr algn="ctr"/>
-              <a:endParaRPr lang="en-US"/>
+              <a:endParaRPr lang="en-US" dirty="0"/>
             </a:p>
           </p:txBody>
         </p:sp>
@@ -35081,7 +35081,7 @@
             <a:lstStyle/>
             <a:p>
               <a:r>
-                <a:rPr lang="en-US" sz="2800" b="1"/>
+                <a:rPr lang="en-US" sz="2800" b="1" dirty="0"/>
                 <a:t>5</a:t>
               </a:r>
             </a:p>
@@ -35135,7 +35135,7 @@
             <a:lstStyle/>
             <a:p>
               <a:pPr algn="ctr"/>
-              <a:endParaRPr lang="en-US"/>
+              <a:endParaRPr lang="en-US" dirty="0"/>
             </a:p>
           </p:txBody>
         </p:sp>
@@ -35212,7 +35212,7 @@
           <a:lstStyle/>
           <a:p>
             <a:r>
-              <a:rPr lang="en-US" sz="2800" b="1"/>
+              <a:rPr lang="en-US" sz="2800" b="1" dirty="0"/>
               <a:t>3</a:t>
             </a:r>
           </a:p>
@@ -35266,7 +35266,7 @@
           <a:lstStyle/>
           <a:p>
             <a:pPr algn="ctr"/>
-            <a:endParaRPr lang="en-US"/>
+            <a:endParaRPr lang="en-US" dirty="0"/>
           </a:p>
         </p:txBody>
       </p:sp>
@@ -35302,7 +35302,7 @@
           <a:lstStyle/>
           <a:p>
             <a:r>
-              <a:rPr lang="en-US" sz="2800" b="1"/>
+              <a:rPr lang="en-US" sz="2800" b="1" dirty="0"/>
               <a:t>2</a:t>
             </a:r>
           </a:p>
@@ -35356,7 +35356,7 @@
           <a:lstStyle/>
           <a:p>
             <a:pPr algn="ctr"/>
-            <a:endParaRPr lang="en-US"/>
+            <a:endParaRPr lang="en-US" dirty="0"/>
           </a:p>
         </p:txBody>
       </p:sp>
@@ -35452,7 +35452,7 @@
             <a:lstStyle/>
             <a:p>
               <a:r>
-                <a:rPr lang="en-US" sz="2800" b="1"/>
+                <a:rPr lang="en-US" sz="2800" b="1" dirty="0"/>
                 <a:t>1</a:t>
               </a:r>
             </a:p>
@@ -35506,7 +35506,7 @@
             <a:lstStyle/>
             <a:p>
               <a:pPr algn="ctr"/>
-              <a:endParaRPr lang="en-US"/>
+              <a:endParaRPr lang="en-US" dirty="0"/>
             </a:p>
           </p:txBody>
         </p:sp>
@@ -35643,7 +35643,7 @@
             <a:lstStyle/>
             <a:p>
               <a:r>
-                <a:rPr lang="en-US" sz="2800" b="1"/>
+                <a:rPr lang="en-US" sz="2800" b="1" dirty="0"/>
                 <a:t>4</a:t>
               </a:r>
             </a:p>
@@ -35697,7 +35697,7 @@
             <a:lstStyle/>
             <a:p>
               <a:pPr algn="ctr"/>
-              <a:endParaRPr lang="en-US"/>
+              <a:endParaRPr lang="en-US" dirty="0"/>
             </a:p>
           </p:txBody>
         </p:sp>
@@ -35833,7 +35833,7 @@
             <a:lstStyle/>
             <a:p>
               <a:r>
-                <a:rPr lang="en-US" sz="2800" b="1"/>
+                <a:rPr lang="en-US" sz="2800" b="1" dirty="0"/>
                 <a:t>8</a:t>
               </a:r>
             </a:p>
@@ -35887,7 +35887,7 @@
             <a:lstStyle/>
             <a:p>
               <a:pPr algn="ctr"/>
-              <a:endParaRPr lang="en-US"/>
+              <a:endParaRPr lang="en-US" dirty="0"/>
             </a:p>
           </p:txBody>
         </p:sp>
@@ -35944,7 +35944,7 @@
             <a:lstStyle/>
             <a:p>
               <a:r>
-                <a:rPr lang="en-US" sz="2800" b="1"/>
+                <a:rPr lang="en-US" sz="2800" b="1" dirty="0"/>
                 <a:t>15</a:t>
               </a:r>
             </a:p>
@@ -35998,7 +35998,7 @@
             <a:lstStyle/>
             <a:p>
               <a:pPr algn="ctr"/>
-              <a:endParaRPr lang="en-US"/>
+              <a:endParaRPr lang="en-US" dirty="0"/>
             </a:p>
           </p:txBody>
         </p:sp>
@@ -36095,7 +36095,7 @@
             <a:lstStyle/>
             <a:p>
               <a:r>
-                <a:rPr lang="en-US" sz="2800" b="1"/>
+                <a:rPr lang="en-US" sz="2800" b="1" dirty="0"/>
                 <a:t>18</a:t>
               </a:r>
             </a:p>
@@ -36149,7 +36149,7 @@
             <a:lstStyle/>
             <a:p>
               <a:pPr algn="ctr"/>
-              <a:endParaRPr lang="en-US"/>
+              <a:endParaRPr lang="en-US" dirty="0"/>
             </a:p>
           </p:txBody>
         </p:sp>
@@ -36246,7 +36246,7 @@
             <a:lstStyle/>
             <a:p>
               <a:r>
-                <a:rPr lang="en-US" sz="2800" b="1"/>
+                <a:rPr lang="en-US" sz="2800" b="1" dirty="0"/>
                 <a:t>7</a:t>
               </a:r>
             </a:p>
@@ -36300,7 +36300,7 @@
             <a:lstStyle/>
             <a:p>
               <a:pPr algn="ctr"/>
-              <a:endParaRPr lang="en-US"/>
+              <a:endParaRPr lang="en-US" dirty="0"/>
             </a:p>
           </p:txBody>
         </p:sp>
@@ -36436,7 +36436,7 @@
             <a:lstStyle/>
             <a:p>
               <a:r>
-                <a:rPr lang="en-US" sz="2800" b="1"/>
+                <a:rPr lang="en-US" sz="2800" b="1" dirty="0"/>
                 <a:t>9</a:t>
               </a:r>
             </a:p>
@@ -36490,7 +36490,7 @@
             <a:lstStyle/>
             <a:p>
               <a:pPr algn="ctr"/>
-              <a:endParaRPr lang="en-US"/>
+              <a:endParaRPr lang="en-US" dirty="0"/>
             </a:p>
           </p:txBody>
         </p:sp>
@@ -36549,7 +36549,7 @@
             <a:lstStyle/>
             <a:p>
               <a:r>
-                <a:rPr lang="en-US"/>
+                <a:rPr lang="en-US" dirty="0"/>
                 <a:t> a BST</a:t>
               </a:r>
             </a:p>
@@ -36674,7 +36674,7 @@
           <a:lstStyle/>
           <a:p>
             <a:r>
-              <a:rPr lang="en-US"/>
+              <a:rPr lang="en-US" dirty="0"/>
               <a:t>Searching a BST</a:t>
             </a:r>
           </a:p>
@@ -36705,145 +36705,145 @@
               <a:buNone/>
             </a:pPr>
             <a:r>
-              <a:rPr lang="en-US" err="1"/>
+              <a:rPr lang="en-US" dirty="0" err="1"/>
               <a:t>RecursiveSearch</a:t>
             </a:r>
             <a:r>
-              <a:rPr lang="en-US"/>
+              <a:rPr lang="en-US" dirty="0"/>
               <a:t>(v, k)</a:t>
             </a:r>
             <a:br>
-              <a:rPr lang="en-US"/>
+              <a:rPr lang="en-US" dirty="0"/>
             </a:br>
             <a:r>
-              <a:rPr lang="en-US"/>
+              <a:rPr lang="en-US" dirty="0"/>
               <a:t>   if </a:t>
             </a:r>
             <a:r>
-              <a:rPr lang="en-US" err="1"/>
+              <a:rPr lang="en-US" dirty="0" err="1"/>
               <a:t>isLeaf</a:t>
             </a:r>
             <a:r>
-              <a:rPr lang="en-US"/>
+              <a:rPr lang="en-US" dirty="0"/>
               <a:t>(v):</a:t>
             </a:r>
             <a:br>
-              <a:rPr lang="en-US"/>
+              <a:rPr lang="en-US" dirty="0"/>
             </a:br>
             <a:r>
-              <a:rPr lang="en-US"/>
+              <a:rPr lang="en-US" dirty="0"/>
               <a:t>       return v if </a:t>
             </a:r>
             <a:r>
-              <a:rPr lang="en-US" err="1"/>
+              <a:rPr lang="en-US" dirty="0" err="1"/>
               <a:t>v.key</a:t>
             </a:r>
             <a:r>
-              <a:rPr lang="en-US"/>
+              <a:rPr lang="en-US" dirty="0"/>
               <a:t> == k, otherwise null</a:t>
             </a:r>
             <a:br>
-              <a:rPr lang="en-US"/>
+              <a:rPr lang="en-US" dirty="0"/>
             </a:br>
             <a:r>
-              <a:rPr lang="en-US"/>
+              <a:rPr lang="en-US" dirty="0"/>
               <a:t>   else if </a:t>
             </a:r>
             <a:r>
-              <a:rPr lang="en-US" b="1"/>
+              <a:rPr lang="en-US" b="1" dirty="0"/>
               <a:t>k &lt; </a:t>
             </a:r>
             <a:r>
-              <a:rPr lang="en-US" b="1" err="1"/>
+              <a:rPr lang="en-US" b="1" dirty="0" err="1"/>
               <a:t>v.key</a:t>
             </a:r>
             <a:r>
-              <a:rPr lang="en-US"/>
+              <a:rPr lang="en-US" dirty="0"/>
               <a:t>:</a:t>
             </a:r>
             <a:br>
-              <a:rPr lang="en-US"/>
+              <a:rPr lang="en-US" dirty="0"/>
             </a:br>
             <a:r>
-              <a:rPr lang="en-US"/>
+              <a:rPr lang="en-US" dirty="0"/>
               <a:t>       return </a:t>
             </a:r>
             <a:r>
-              <a:rPr lang="en-US" err="1"/>
+              <a:rPr lang="en-US" dirty="0" err="1"/>
               <a:t>RecursiveSearch</a:t>
             </a:r>
             <a:r>
-              <a:rPr lang="en-US"/>
+              <a:rPr lang="en-US" dirty="0"/>
               <a:t>(k, </a:t>
             </a:r>
             <a:r>
-              <a:rPr lang="en-US" b="1" err="1"/>
+              <a:rPr lang="en-US" b="1" dirty="0" err="1"/>
               <a:t>left_subtree</a:t>
             </a:r>
             <a:r>
-              <a:rPr lang="en-US"/>
+              <a:rPr lang="en-US" dirty="0"/>
               <a:t>(v))</a:t>
             </a:r>
             <a:br>
-              <a:rPr lang="en-US"/>
+              <a:rPr lang="en-US" dirty="0"/>
             </a:br>
             <a:r>
-              <a:rPr lang="en-US"/>
+              <a:rPr lang="en-US" dirty="0"/>
               <a:t>   else if </a:t>
             </a:r>
             <a:r>
-              <a:rPr lang="en-US" b="1"/>
+              <a:rPr lang="en-US" b="1" dirty="0"/>
               <a:t>k &gt; </a:t>
             </a:r>
             <a:r>
-              <a:rPr lang="en-US" b="1" err="1"/>
+              <a:rPr lang="en-US" b="1" dirty="0" err="1"/>
               <a:t>v.key</a:t>
             </a:r>
             <a:r>
-              <a:rPr lang="en-US"/>
+              <a:rPr lang="en-US" dirty="0"/>
               <a:t>:</a:t>
             </a:r>
             <a:br>
-              <a:rPr lang="en-US"/>
+              <a:rPr lang="en-US" dirty="0"/>
             </a:br>
             <a:r>
-              <a:rPr lang="en-US"/>
+              <a:rPr lang="en-US" dirty="0"/>
               <a:t>       return </a:t>
             </a:r>
             <a:r>
-              <a:rPr lang="en-US" err="1"/>
+              <a:rPr lang="en-US" dirty="0" err="1"/>
               <a:t>RecursiveSearch</a:t>
             </a:r>
             <a:r>
-              <a:rPr lang="en-US"/>
+              <a:rPr lang="en-US" dirty="0"/>
               <a:t>(k, </a:t>
             </a:r>
             <a:r>
-              <a:rPr lang="en-US" b="1" err="1"/>
+              <a:rPr lang="en-US" b="1" dirty="0" err="1"/>
               <a:t>right_subtree</a:t>
             </a:r>
             <a:r>
-              <a:rPr lang="en-US"/>
+              <a:rPr lang="en-US" dirty="0"/>
               <a:t>(v))</a:t>
             </a:r>
             <a:br>
-              <a:rPr lang="en-US"/>
+              <a:rPr lang="en-US" dirty="0"/>
             </a:br>
             <a:r>
-              <a:rPr lang="en-US"/>
+              <a:rPr lang="en-US" dirty="0"/>
               <a:t>   else:</a:t>
             </a:r>
             <a:br>
-              <a:rPr lang="en-US"/>
+              <a:rPr lang="en-US" dirty="0"/>
             </a:br>
             <a:r>
-              <a:rPr lang="en-US"/>
+              <a:rPr lang="en-US" dirty="0"/>
               <a:t>       return v  // found it</a:t>
             </a:r>
             <a:br>
-              <a:rPr lang="en-US"/>
+              <a:rPr lang="en-US" dirty="0"/>
             </a:br>
-            <a:endParaRPr lang="en-US"/>
+            <a:endParaRPr lang="en-US" dirty="0"/>
           </a:p>
         </p:txBody>
       </p:sp>
@@ -36935,7 +36935,7 @@
           <a:lstStyle/>
           <a:p>
             <a:r>
-              <a:rPr lang="en-US"/>
+              <a:rPr lang="en-US" dirty="0"/>
               <a:t>Searching a BST</a:t>
             </a:r>
           </a:p>
@@ -36966,150 +36966,150 @@
               <a:buNone/>
             </a:pPr>
             <a:r>
-              <a:rPr lang="en-US" err="1"/>
+              <a:rPr lang="en-US" dirty="0" err="1"/>
               <a:t>RecursiveSearch</a:t>
             </a:r>
             <a:r>
-              <a:rPr lang="en-US"/>
+              <a:rPr lang="en-US" dirty="0"/>
               <a:t>(v, k)</a:t>
             </a:r>
             <a:br>
-              <a:rPr lang="en-US"/>
+              <a:rPr lang="en-US" dirty="0"/>
             </a:br>
             <a:r>
-              <a:rPr lang="en-US"/>
+              <a:rPr lang="en-US" dirty="0"/>
               <a:t>   if </a:t>
             </a:r>
             <a:r>
-              <a:rPr lang="en-US" err="1"/>
+              <a:rPr lang="en-US" dirty="0" err="1"/>
               <a:t>isLeaf</a:t>
             </a:r>
             <a:r>
-              <a:rPr lang="en-US"/>
+              <a:rPr lang="en-US" dirty="0"/>
               <a:t>(v):</a:t>
             </a:r>
             <a:br>
-              <a:rPr lang="en-US"/>
+              <a:rPr lang="en-US" dirty="0"/>
             </a:br>
             <a:r>
-              <a:rPr lang="en-US"/>
+              <a:rPr lang="en-US" dirty="0"/>
               <a:t>       return v if </a:t>
             </a:r>
             <a:r>
-              <a:rPr lang="en-US" err="1"/>
+              <a:rPr lang="en-US" dirty="0" err="1"/>
               <a:t>v.key</a:t>
             </a:r>
             <a:r>
-              <a:rPr lang="en-US"/>
+              <a:rPr lang="en-US" dirty="0"/>
               <a:t> == k, otherwise null</a:t>
             </a:r>
             <a:br>
-              <a:rPr lang="en-US"/>
+              <a:rPr lang="en-US" dirty="0"/>
             </a:br>
             <a:r>
-              <a:rPr lang="en-US"/>
+              <a:rPr lang="en-US" dirty="0"/>
               <a:t>   else if </a:t>
             </a:r>
             <a:r>
-              <a:rPr lang="en-US" b="1"/>
+              <a:rPr lang="en-US" b="1" dirty="0"/>
               <a:t>k &lt; </a:t>
             </a:r>
             <a:r>
-              <a:rPr lang="en-US" b="1" err="1"/>
+              <a:rPr lang="en-US" b="1" dirty="0" err="1"/>
               <a:t>v.key</a:t>
             </a:r>
             <a:r>
-              <a:rPr lang="en-US"/>
+              <a:rPr lang="en-US" dirty="0"/>
               <a:t>:</a:t>
             </a:r>
             <a:br>
-              <a:rPr lang="en-US"/>
+              <a:rPr lang="en-US" dirty="0"/>
             </a:br>
             <a:r>
-              <a:rPr lang="en-US"/>
+              <a:rPr lang="en-US" dirty="0"/>
               <a:t>       return </a:t>
             </a:r>
             <a:r>
-              <a:rPr lang="en-US" err="1"/>
+              <a:rPr lang="en-US" dirty="0" err="1"/>
               <a:t>RecursiveSearch</a:t>
             </a:r>
             <a:r>
-              <a:rPr lang="en-US"/>
+              <a:rPr lang="en-US" dirty="0"/>
               <a:t>(k, </a:t>
             </a:r>
             <a:r>
-              <a:rPr lang="en-US" b="1" err="1"/>
+              <a:rPr lang="en-US" b="1" dirty="0" err="1"/>
               <a:t>left_subtree</a:t>
             </a:r>
             <a:r>
-              <a:rPr lang="en-US"/>
+              <a:rPr lang="en-US" dirty="0"/>
               <a:t>(v))</a:t>
             </a:r>
             <a:br>
-              <a:rPr lang="en-US"/>
+              <a:rPr lang="en-US" dirty="0"/>
             </a:br>
             <a:r>
-              <a:rPr lang="en-US"/>
+              <a:rPr lang="en-US" dirty="0"/>
               <a:t>   else if </a:t>
             </a:r>
             <a:r>
-              <a:rPr lang="en-US" b="1"/>
+              <a:rPr lang="en-US" b="1" dirty="0"/>
               <a:t>k &gt; </a:t>
             </a:r>
             <a:r>
-              <a:rPr lang="en-US" b="1" err="1"/>
+              <a:rPr lang="en-US" b="1" dirty="0" err="1"/>
               <a:t>v.key</a:t>
             </a:r>
             <a:r>
-              <a:rPr lang="en-US"/>
+              <a:rPr lang="en-US" dirty="0"/>
               <a:t>:</a:t>
             </a:r>
             <a:br>
-              <a:rPr lang="en-US"/>
+              <a:rPr lang="en-US" dirty="0"/>
             </a:br>
             <a:r>
-              <a:rPr lang="en-US"/>
+              <a:rPr lang="en-US" dirty="0"/>
               <a:t>       return </a:t>
             </a:r>
             <a:r>
-              <a:rPr lang="en-US" err="1"/>
+              <a:rPr lang="en-US" dirty="0" err="1"/>
               <a:t>RecursiveSearch</a:t>
             </a:r>
             <a:r>
-              <a:rPr lang="en-US"/>
+              <a:rPr lang="en-US" dirty="0"/>
               <a:t>(k, </a:t>
             </a:r>
             <a:r>
-              <a:rPr lang="en-US" b="1" err="1"/>
+              <a:rPr lang="en-US" b="1" dirty="0" err="1"/>
               <a:t>right_subtree</a:t>
             </a:r>
             <a:r>
-              <a:rPr lang="en-US"/>
+              <a:rPr lang="en-US" dirty="0"/>
               <a:t>(v))</a:t>
             </a:r>
             <a:br>
-              <a:rPr lang="en-US"/>
+              <a:rPr lang="en-US" dirty="0"/>
             </a:br>
             <a:r>
-              <a:rPr lang="en-US"/>
+              <a:rPr lang="en-US" dirty="0"/>
               <a:t>   else:</a:t>
             </a:r>
             <a:br>
-              <a:rPr lang="en-US"/>
+              <a:rPr lang="en-US" dirty="0"/>
             </a:br>
             <a:r>
-              <a:rPr lang="en-US"/>
+              <a:rPr lang="en-US" dirty="0"/>
               <a:t>       return v  // found it</a:t>
             </a:r>
             <a:br>
-              <a:rPr lang="en-US"/>
+              <a:rPr lang="en-US" dirty="0"/>
             </a:br>
-            <a:endParaRPr lang="en-US"/>
+            <a:endParaRPr lang="en-US" dirty="0"/>
           </a:p>
         </p:txBody>
       </p:sp>
-      <mc:AlternateContent xmlns:mc="http://schemas.openxmlformats.org/markup-compatibility/2006">
-        <mc:Choice xmlns:a14="http://schemas.microsoft.com/office/drawing/2010/main" Requires="a14">
+      <mc:AlternateContent xmlns:mc="http://schemas.openxmlformats.org/markup-compatibility/2006" xmlns:a14="http://schemas.microsoft.com/office/drawing/2010/main">
+        <mc:Choice Requires="a14">
           <p:sp>
             <p:nvSpPr>
               <p:cNvPr id="5" name="TextBox 4">
@@ -37145,11 +37145,11 @@
               <a:p>
                 <a:pPr algn="ctr"/>
                 <a:r>
-                  <a:rPr lang="en-US" b="1"/>
+                  <a:rPr lang="en-US" b="1" dirty="0"/>
                   <a:t>Finding a given value </a:t>
                 </a:r>
                 <a:r>
-                  <a:rPr lang="en-US"/>
+                  <a:rPr lang="en-US" dirty="0"/>
                   <a:t>takes </a:t>
                 </a:r>
                 <a14:m>
@@ -37170,7 +37170,7 @@
                       <a:rPr lang="en-US" i="1" dirty="0" smtClean="0">
                         <a:latin typeface="Cambria Math" panose="02040503050406030204" pitchFamily="18" charset="0"/>
                       </a:rPr>
-                      <m:t>ℎ𝑒𝑖𝑔ℎ𝑡</m:t>
+                      <m:t>h𝑒𝑖𝑔h𝑡</m:t>
                     </m:r>
                     <m:r>
                       <a:rPr lang="en-US" i="1" dirty="0" smtClean="0">
@@ -37181,7 +37181,7 @@
                   </m:oMath>
                 </a14:m>
                 <a:r>
-                  <a:rPr lang="en-US"/>
+                  <a:rPr lang="en-US" dirty="0"/>
                   <a:t> time, i.e. between </a:t>
                 </a:r>
                 <a14:m>
@@ -37201,7 +37201,7 @@
                     <m:func>
                       <m:funcPr>
                         <m:ctrlPr>
-                          <a:rPr lang="en-US" i="0" dirty="0" smtClean="0">
+                          <a:rPr lang="en-US" i="1" dirty="0" smtClean="0">
                             <a:latin typeface="Cambria Math" panose="02040503050406030204" pitchFamily="18" charset="0"/>
                           </a:rPr>
                         </m:ctrlPr>
@@ -37235,7 +37235,7 @@
                   </m:oMath>
                 </a14:m>
                 <a:r>
-                  <a:rPr lang="en-US"/>
+                  <a:rPr lang="en-US" dirty="0"/>
                   <a:t> and </a:t>
                 </a:r>
                 <a14:m>
@@ -37267,14 +37267,14 @@
                   </m:oMath>
                 </a14:m>
                 <a:r>
-                  <a:rPr lang="en-US"/>
+                  <a:rPr lang="en-US" dirty="0"/>
                   <a:t> depending on tree shape.</a:t>
                 </a:r>
               </a:p>
             </p:txBody>
           </p:sp>
         </mc:Choice>
-        <mc:Fallback>
+        <mc:Fallback xmlns="">
           <p:sp>
             <p:nvSpPr>
               <p:cNvPr id="5" name="TextBox 4">
@@ -37371,7 +37371,7 @@
           <a:lstStyle/>
           <a:p>
             <a:r>
-              <a:rPr lang="en-US"/>
+              <a:rPr lang="en-US" dirty="0"/>
               <a:t>Definition of a Tree</a:t>
             </a:r>
           </a:p>
@@ -37404,113 +37404,113 @@
               <a:buNone/>
             </a:pPr>
             <a:r>
-              <a:rPr lang="en-US"/>
+              <a:rPr lang="en-US" dirty="0"/>
               <a:t>A </a:t>
             </a:r>
             <a:r>
-              <a:rPr lang="en-US" b="1"/>
+              <a:rPr lang="en-US" b="1" dirty="0"/>
               <a:t>tree</a:t>
             </a:r>
             <a:r>
-              <a:rPr lang="en-US"/>
+              <a:rPr lang="en-US" dirty="0"/>
               <a:t> T is a set of nodes storing elements in a parent-child relationship with the following properties:</a:t>
             </a:r>
           </a:p>
           <a:p>
             <a:r>
-              <a:rPr lang="en-CA"/>
+              <a:rPr lang="en-CA" dirty="0"/>
               <a:t>If T</a:t>
             </a:r>
             <a:r>
-              <a:rPr lang="en-CA" i="1"/>
+              <a:rPr lang="en-CA" i="1" dirty="0"/>
               <a:t> </a:t>
             </a:r>
             <a:r>
-              <a:rPr lang="en-CA"/>
+              <a:rPr lang="en-CA" dirty="0"/>
               <a:t>is nonempty, it has a special node, called the </a:t>
             </a:r>
             <a:r>
-              <a:rPr lang="en-CA" b="1"/>
+              <a:rPr lang="en-CA" b="1" dirty="0"/>
               <a:t>root</a:t>
             </a:r>
             <a:r>
-              <a:rPr lang="en-CA" b="1" i="1"/>
+              <a:rPr lang="en-CA" b="1" i="1" dirty="0"/>
               <a:t> </a:t>
             </a:r>
             <a:r>
-              <a:rPr lang="en-CA"/>
+              <a:rPr lang="en-CA" dirty="0"/>
               <a:t>of T</a:t>
             </a:r>
             <a:r>
-              <a:rPr lang="en-CA" i="1"/>
+              <a:rPr lang="en-CA" i="1" dirty="0"/>
               <a:t> </a:t>
             </a:r>
             <a:r>
-              <a:rPr lang="en-CA"/>
+              <a:rPr lang="en-CA" dirty="0"/>
               <a:t>, that has no parent.</a:t>
             </a:r>
           </a:p>
           <a:p>
             <a:r>
-              <a:rPr lang="en-CA"/>
+              <a:rPr lang="en-CA" dirty="0"/>
               <a:t>Each node v</a:t>
             </a:r>
             <a:r>
-              <a:rPr lang="en-CA" i="1"/>
+              <a:rPr lang="en-CA" i="1" dirty="0"/>
               <a:t> </a:t>
             </a:r>
             <a:r>
-              <a:rPr lang="en-CA"/>
+              <a:rPr lang="en-CA" dirty="0"/>
               <a:t>of T</a:t>
             </a:r>
             <a:r>
-              <a:rPr lang="en-CA" i="1"/>
+              <a:rPr lang="en-CA" i="1" dirty="0"/>
               <a:t> </a:t>
             </a:r>
             <a:r>
-              <a:rPr lang="en-CA"/>
+              <a:rPr lang="en-CA" dirty="0"/>
               <a:t>different from the root has a unique </a:t>
             </a:r>
             <a:r>
-              <a:rPr lang="en-CA" b="1"/>
+              <a:rPr lang="en-CA" b="1" dirty="0"/>
               <a:t>parent</a:t>
             </a:r>
             <a:r>
-              <a:rPr lang="en-CA" b="1" i="1"/>
+              <a:rPr lang="en-CA" b="1" i="1" dirty="0"/>
               <a:t> </a:t>
             </a:r>
             <a:r>
-              <a:rPr lang="en-CA"/>
+              <a:rPr lang="en-CA" dirty="0"/>
               <a:t>node w; every node with parent w</a:t>
             </a:r>
             <a:r>
-              <a:rPr lang="en-CA" i="1"/>
+              <a:rPr lang="en-CA" i="1" dirty="0"/>
               <a:t> </a:t>
             </a:r>
             <a:r>
-              <a:rPr lang="en-CA"/>
+              <a:rPr lang="en-CA" dirty="0"/>
               <a:t>is a </a:t>
             </a:r>
             <a:r>
-              <a:rPr lang="en-CA" b="1"/>
+              <a:rPr lang="en-CA" b="1" dirty="0"/>
               <a:t>child</a:t>
             </a:r>
             <a:r>
-              <a:rPr lang="en-CA" b="1" i="1"/>
+              <a:rPr lang="en-CA" b="1" i="1" dirty="0"/>
               <a:t> </a:t>
             </a:r>
             <a:r>
-              <a:rPr lang="en-CA"/>
+              <a:rPr lang="en-CA" dirty="0"/>
               <a:t>of w.</a:t>
             </a:r>
-            <a:endParaRPr lang="en-US"/>
+            <a:endParaRPr lang="en-US" dirty="0"/>
           </a:p>
           <a:p>
             <a:pPr marL="0" indent="0">
               <a:buNone/>
             </a:pPr>
             <a:r>
-              <a:rPr lang="en-US"/>
+              <a:rPr lang="en-US" dirty="0"/>
               <a:t>(textbook p. 269)</a:t>
             </a:r>
           </a:p>
@@ -37551,15 +37551,15 @@
           <a:p>
             <a:pPr algn="ctr"/>
             <a:r>
-              <a:rPr lang="en-US"/>
+              <a:rPr lang="en-US" dirty="0"/>
               <a:t>This is the definition of a </a:t>
             </a:r>
             <a:r>
-              <a:rPr lang="en-US" b="1"/>
+              <a:rPr lang="en-US" b="1" dirty="0"/>
               <a:t>tree </a:t>
             </a:r>
             <a:r>
-              <a:rPr lang="en-US"/>
+              <a:rPr lang="en-US" dirty="0"/>
               <a:t>(not yet binary, not yet a BST).</a:t>
             </a:r>
           </a:p>
@@ -37622,14 +37622,14 @@
           <a:lstStyle/>
           <a:p>
             <a:r>
-              <a:rPr lang="en-US"/>
+              <a:rPr lang="en-US" dirty="0"/>
               <a:t>Inserting Into a BST</a:t>
             </a:r>
           </a:p>
         </p:txBody>
       </p:sp>
-      <mc:AlternateContent xmlns:mc="http://schemas.openxmlformats.org/markup-compatibility/2006">
-        <mc:Choice xmlns:a14="http://schemas.microsoft.com/office/drawing/2010/main" Requires="a14">
+      <mc:AlternateContent xmlns:mc="http://schemas.openxmlformats.org/markup-compatibility/2006" xmlns:a14="http://schemas.microsoft.com/office/drawing/2010/main">
+        <mc:Choice Requires="a14">
           <p:sp>
             <p:nvSpPr>
               <p:cNvPr id="3" name="Content Placeholder 2">
@@ -37662,27 +37662,27 @@
                   <a:buNone/>
                 </a:pPr>
                 <a:r>
-                  <a:rPr lang="en-US"/>
+                  <a:rPr lang="en-US" dirty="0"/>
                   <a:t>Basic </a:t>
                 </a:r>
                 <a:r>
-                  <a:rPr lang="en-US" b="1"/>
+                  <a:rPr lang="en-US" b="1" dirty="0"/>
                   <a:t>BST insertion </a:t>
                 </a:r>
                 <a:r>
-                  <a:rPr lang="en-US"/>
+                  <a:rPr lang="en-US" dirty="0"/>
                   <a:t>inserts a new key at the top and traces form the root down to the leaf where the key goes</a:t>
                 </a:r>
               </a:p>
               <a:p>
                 <a:r>
-                  <a:rPr lang="en-US"/>
+                  <a:rPr lang="en-US" dirty="0"/>
                   <a:t>After insertion, it must still be a BST</a:t>
                 </a:r>
               </a:p>
               <a:p>
                 <a:r>
-                  <a:rPr lang="en-US"/>
+                  <a:rPr lang="en-US" dirty="0"/>
                   <a:t>Like search, this is a root-to-leaf operation, so </a:t>
                 </a:r>
                 <a14:m>
@@ -37703,7 +37703,7 @@
                       <a:rPr lang="en-US" i="1" dirty="0" smtClean="0">
                         <a:latin typeface="Cambria Math" panose="02040503050406030204" pitchFamily="18" charset="0"/>
                       </a:rPr>
-                      <m:t>ℎ𝑒𝑖𝑔ℎ𝑡</m:t>
+                      <m:t>h𝑒𝑖𝑔h𝑡</m:t>
                     </m:r>
                     <m:r>
                       <a:rPr lang="en-US" i="1" dirty="0" smtClean="0">
@@ -37714,14 +37714,14 @@
                   </m:oMath>
                 </a14:m>
                 <a:r>
-                  <a:rPr lang="en-US"/>
+                  <a:rPr lang="en-US" dirty="0"/>
                   <a:t> time in the worst case</a:t>
                 </a:r>
               </a:p>
             </p:txBody>
           </p:sp>
         </mc:Choice>
-        <mc:Fallback>
+        <mc:Fallback xmlns="">
           <p:sp>
             <p:nvSpPr>
               <p:cNvPr id="3" name="Content Placeholder 2">
@@ -37817,7 +37817,7 @@
             <a:lstStyle/>
             <a:p>
               <a:r>
-                <a:rPr lang="en-US" sz="2800" b="1"/>
+                <a:rPr lang="en-US" sz="2800" b="1" dirty="0"/>
                 <a:t>10</a:t>
               </a:r>
             </a:p>
@@ -37871,7 +37871,7 @@
             <a:lstStyle/>
             <a:p>
               <a:pPr algn="ctr"/>
-              <a:endParaRPr lang="en-US"/>
+              <a:endParaRPr lang="en-US" dirty="0"/>
             </a:p>
           </p:txBody>
         </p:sp>
@@ -37928,7 +37928,7 @@
             <a:lstStyle/>
             <a:p>
               <a:r>
-                <a:rPr lang="en-US" sz="2800" b="1"/>
+                <a:rPr lang="en-US" sz="2800" b="1" dirty="0"/>
                 <a:t>5</a:t>
               </a:r>
             </a:p>
@@ -37982,7 +37982,7 @@
             <a:lstStyle/>
             <a:p>
               <a:pPr algn="ctr"/>
-              <a:endParaRPr lang="en-US"/>
+              <a:endParaRPr lang="en-US" dirty="0"/>
             </a:p>
           </p:txBody>
         </p:sp>
@@ -38059,7 +38059,7 @@
           <a:lstStyle/>
           <a:p>
             <a:r>
-              <a:rPr lang="en-US" sz="2800" b="1"/>
+              <a:rPr lang="en-US" sz="2800" b="1" dirty="0"/>
               <a:t>3</a:t>
             </a:r>
           </a:p>
@@ -38113,7 +38113,7 @@
           <a:lstStyle/>
           <a:p>
             <a:pPr algn="ctr"/>
-            <a:endParaRPr lang="en-US"/>
+            <a:endParaRPr lang="en-US" dirty="0"/>
           </a:p>
         </p:txBody>
       </p:sp>
@@ -38149,7 +38149,7 @@
           <a:lstStyle/>
           <a:p>
             <a:r>
-              <a:rPr lang="en-US" sz="2800" b="1"/>
+              <a:rPr lang="en-US" sz="2800" b="1" dirty="0"/>
               <a:t>2</a:t>
             </a:r>
           </a:p>
@@ -38203,7 +38203,7 @@
           <a:lstStyle/>
           <a:p>
             <a:pPr algn="ctr"/>
-            <a:endParaRPr lang="en-US"/>
+            <a:endParaRPr lang="en-US" dirty="0"/>
           </a:p>
         </p:txBody>
       </p:sp>
@@ -38299,7 +38299,7 @@
             <a:lstStyle/>
             <a:p>
               <a:r>
-                <a:rPr lang="en-US" sz="2800" b="1"/>
+                <a:rPr lang="en-US" sz="2800" b="1" dirty="0"/>
                 <a:t>1</a:t>
               </a:r>
             </a:p>
@@ -38353,7 +38353,7 @@
             <a:lstStyle/>
             <a:p>
               <a:pPr algn="ctr"/>
-              <a:endParaRPr lang="en-US"/>
+              <a:endParaRPr lang="en-US" dirty="0"/>
             </a:p>
           </p:txBody>
         </p:sp>
@@ -38490,7 +38490,7 @@
             <a:lstStyle/>
             <a:p>
               <a:r>
-                <a:rPr lang="en-US" sz="2800" b="1"/>
+                <a:rPr lang="en-US" sz="2800" b="1" dirty="0"/>
                 <a:t>4</a:t>
               </a:r>
             </a:p>
@@ -38544,7 +38544,7 @@
             <a:lstStyle/>
             <a:p>
               <a:pPr algn="ctr"/>
-              <a:endParaRPr lang="en-US"/>
+              <a:endParaRPr lang="en-US" dirty="0"/>
             </a:p>
           </p:txBody>
         </p:sp>
@@ -38680,7 +38680,7 @@
             <a:lstStyle/>
             <a:p>
               <a:r>
-                <a:rPr lang="en-US" sz="2800" b="1"/>
+                <a:rPr lang="en-US" sz="2800" b="1" dirty="0"/>
                 <a:t>8</a:t>
               </a:r>
             </a:p>
@@ -38734,7 +38734,7 @@
             <a:lstStyle/>
             <a:p>
               <a:pPr algn="ctr"/>
-              <a:endParaRPr lang="en-US"/>
+              <a:endParaRPr lang="en-US" dirty="0"/>
             </a:p>
           </p:txBody>
         </p:sp>
@@ -38791,7 +38791,7 @@
             <a:lstStyle/>
             <a:p>
               <a:r>
-                <a:rPr lang="en-US" sz="2800" b="1"/>
+                <a:rPr lang="en-US" sz="2800" b="1" dirty="0"/>
                 <a:t>15</a:t>
               </a:r>
             </a:p>
@@ -38845,7 +38845,7 @@
             <a:lstStyle/>
             <a:p>
               <a:pPr algn="ctr"/>
-              <a:endParaRPr lang="en-US"/>
+              <a:endParaRPr lang="en-US" dirty="0"/>
             </a:p>
           </p:txBody>
         </p:sp>
@@ -38942,7 +38942,7 @@
             <a:lstStyle/>
             <a:p>
               <a:r>
-                <a:rPr lang="en-US" sz="2800" b="1"/>
+                <a:rPr lang="en-US" sz="2800" b="1" dirty="0"/>
                 <a:t>18</a:t>
               </a:r>
             </a:p>
@@ -38996,7 +38996,7 @@
             <a:lstStyle/>
             <a:p>
               <a:pPr algn="ctr"/>
-              <a:endParaRPr lang="en-US"/>
+              <a:endParaRPr lang="en-US" dirty="0"/>
             </a:p>
           </p:txBody>
         </p:sp>
@@ -39093,7 +39093,7 @@
             <a:lstStyle/>
             <a:p>
               <a:r>
-                <a:rPr lang="en-US" sz="2800" b="1"/>
+                <a:rPr lang="en-US" sz="2800" b="1" dirty="0"/>
                 <a:t>7</a:t>
               </a:r>
             </a:p>
@@ -39147,7 +39147,7 @@
             <a:lstStyle/>
             <a:p>
               <a:pPr algn="ctr"/>
-              <a:endParaRPr lang="en-US"/>
+              <a:endParaRPr lang="en-US" dirty="0"/>
             </a:p>
           </p:txBody>
         </p:sp>
@@ -39283,7 +39283,7 @@
             <a:lstStyle/>
             <a:p>
               <a:r>
-                <a:rPr lang="en-US" sz="2800" b="1"/>
+                <a:rPr lang="en-US" sz="2800" b="1" dirty="0"/>
                 <a:t>9</a:t>
               </a:r>
             </a:p>
@@ -39337,7 +39337,7 @@
             <a:lstStyle/>
             <a:p>
               <a:pPr algn="ctr"/>
-              <a:endParaRPr lang="en-US"/>
+              <a:endParaRPr lang="en-US" dirty="0"/>
             </a:p>
           </p:txBody>
         </p:sp>
@@ -39371,11 +39371,11 @@
           <a:lstStyle/>
           <a:p>
             <a:r>
-              <a:rPr lang="en-US" sz="3200"/>
+              <a:rPr lang="en-US" sz="3200" dirty="0"/>
               <a:t>insert </a:t>
             </a:r>
             <a:r>
-              <a:rPr lang="en-US" sz="3200" b="1"/>
+              <a:rPr lang="en-US" sz="3200" b="1" dirty="0"/>
               <a:t>6</a:t>
             </a:r>
           </a:p>
@@ -39444,14 +39444,14 @@
           <a:lstStyle/>
           <a:p>
             <a:r>
-              <a:rPr lang="en-US"/>
+              <a:rPr lang="en-US" dirty="0"/>
               <a:t>Inserting Into a BST</a:t>
             </a:r>
           </a:p>
         </p:txBody>
       </p:sp>
-      <mc:AlternateContent xmlns:mc="http://schemas.openxmlformats.org/markup-compatibility/2006">
-        <mc:Choice xmlns:a14="http://schemas.microsoft.com/office/drawing/2010/main" Requires="a14">
+      <mc:AlternateContent xmlns:mc="http://schemas.openxmlformats.org/markup-compatibility/2006" xmlns:a14="http://schemas.microsoft.com/office/drawing/2010/main">
+        <mc:Choice Requires="a14">
           <p:sp>
             <p:nvSpPr>
               <p:cNvPr id="3" name="Content Placeholder 2">
@@ -39484,27 +39484,27 @@
                   <a:buNone/>
                 </a:pPr>
                 <a:r>
-                  <a:rPr lang="en-US"/>
+                  <a:rPr lang="en-US" dirty="0"/>
                   <a:t>Basic </a:t>
                 </a:r>
                 <a:r>
-                  <a:rPr lang="en-US" b="1"/>
+                  <a:rPr lang="en-US" b="1" dirty="0"/>
                   <a:t>BST insertion </a:t>
                 </a:r>
                 <a:r>
-                  <a:rPr lang="en-US"/>
+                  <a:rPr lang="en-US" dirty="0"/>
                   <a:t>inserts a new key at the top and traces form the root down to the leaf where the key goes</a:t>
                 </a:r>
               </a:p>
               <a:p>
                 <a:r>
-                  <a:rPr lang="en-US"/>
+                  <a:rPr lang="en-US" dirty="0"/>
                   <a:t>After insertion, it must still be a BST</a:t>
                 </a:r>
               </a:p>
               <a:p>
                 <a:r>
-                  <a:rPr lang="en-US"/>
+                  <a:rPr lang="en-US" dirty="0"/>
                   <a:t>Like search, this is a root-to-leaf operation, so </a:t>
                 </a:r>
                 <a14:m>
@@ -39525,7 +39525,7 @@
                       <a:rPr lang="en-US" i="1" dirty="0">
                         <a:latin typeface="Cambria Math" panose="02040503050406030204" pitchFamily="18" charset="0"/>
                       </a:rPr>
-                      <m:t>ℎ𝑒𝑖𝑔ℎ𝑡</m:t>
+                      <m:t>h𝑒𝑖𝑔h𝑡</m:t>
                     </m:r>
                     <m:r>
                       <a:rPr lang="en-US" i="1" dirty="0">
@@ -39536,14 +39536,14 @@
                   </m:oMath>
                 </a14:m>
                 <a:r>
-                  <a:rPr lang="en-US"/>
+                  <a:rPr lang="en-US" dirty="0"/>
                   <a:t> time in the worst case</a:t>
                 </a:r>
               </a:p>
             </p:txBody>
           </p:sp>
         </mc:Choice>
-        <mc:Fallback>
+        <mc:Fallback xmlns="">
           <p:sp>
             <p:nvSpPr>
               <p:cNvPr id="3" name="Content Placeholder 2">
@@ -39639,7 +39639,7 @@
             <a:lstStyle/>
             <a:p>
               <a:r>
-                <a:rPr lang="en-US" sz="2800" b="1"/>
+                <a:rPr lang="en-US" sz="2800" b="1" dirty="0"/>
                 <a:t>10</a:t>
               </a:r>
             </a:p>
@@ -39693,7 +39693,7 @@
             <a:lstStyle/>
             <a:p>
               <a:pPr algn="ctr"/>
-              <a:endParaRPr lang="en-US"/>
+              <a:endParaRPr lang="en-US" dirty="0"/>
             </a:p>
           </p:txBody>
         </p:sp>
@@ -39750,7 +39750,7 @@
             <a:lstStyle/>
             <a:p>
               <a:r>
-                <a:rPr lang="en-US" sz="2800" b="1"/>
+                <a:rPr lang="en-US" sz="2800" b="1" dirty="0"/>
                 <a:t>5</a:t>
               </a:r>
             </a:p>
@@ -39804,7 +39804,7 @@
             <a:lstStyle/>
             <a:p>
               <a:pPr algn="ctr"/>
-              <a:endParaRPr lang="en-US"/>
+              <a:endParaRPr lang="en-US" dirty="0"/>
             </a:p>
           </p:txBody>
         </p:sp>
@@ -39881,7 +39881,7 @@
           <a:lstStyle/>
           <a:p>
             <a:r>
-              <a:rPr lang="en-US" sz="2800" b="1"/>
+              <a:rPr lang="en-US" sz="2800" b="1" dirty="0"/>
               <a:t>3</a:t>
             </a:r>
           </a:p>
@@ -39935,7 +39935,7 @@
           <a:lstStyle/>
           <a:p>
             <a:pPr algn="ctr"/>
-            <a:endParaRPr lang="en-US"/>
+            <a:endParaRPr lang="en-US" dirty="0"/>
           </a:p>
         </p:txBody>
       </p:sp>
@@ -39971,7 +39971,7 @@
           <a:lstStyle/>
           <a:p>
             <a:r>
-              <a:rPr lang="en-US" sz="2800" b="1"/>
+              <a:rPr lang="en-US" sz="2800" b="1" dirty="0"/>
               <a:t>2</a:t>
             </a:r>
           </a:p>
@@ -40025,7 +40025,7 @@
           <a:lstStyle/>
           <a:p>
             <a:pPr algn="ctr"/>
-            <a:endParaRPr lang="en-US"/>
+            <a:endParaRPr lang="en-US" dirty="0"/>
           </a:p>
         </p:txBody>
       </p:sp>
@@ -40121,7 +40121,7 @@
             <a:lstStyle/>
             <a:p>
               <a:r>
-                <a:rPr lang="en-US" sz="2800" b="1"/>
+                <a:rPr lang="en-US" sz="2800" b="1" dirty="0"/>
                 <a:t>1</a:t>
               </a:r>
             </a:p>
@@ -40175,7 +40175,7 @@
             <a:lstStyle/>
             <a:p>
               <a:pPr algn="ctr"/>
-              <a:endParaRPr lang="en-US"/>
+              <a:endParaRPr lang="en-US" dirty="0"/>
             </a:p>
           </p:txBody>
         </p:sp>
@@ -40312,7 +40312,7 @@
             <a:lstStyle/>
             <a:p>
               <a:r>
-                <a:rPr lang="en-US" sz="2800" b="1"/>
+                <a:rPr lang="en-US" sz="2800" b="1" dirty="0"/>
                 <a:t>4</a:t>
               </a:r>
             </a:p>
@@ -40366,7 +40366,7 @@
             <a:lstStyle/>
             <a:p>
               <a:pPr algn="ctr"/>
-              <a:endParaRPr lang="en-US"/>
+              <a:endParaRPr lang="en-US" dirty="0"/>
             </a:p>
           </p:txBody>
         </p:sp>
@@ -40502,7 +40502,7 @@
             <a:lstStyle/>
             <a:p>
               <a:r>
-                <a:rPr lang="en-US" sz="2800" b="1"/>
+                <a:rPr lang="en-US" sz="2800" b="1" dirty="0"/>
                 <a:t>8</a:t>
               </a:r>
             </a:p>
@@ -40556,7 +40556,7 @@
             <a:lstStyle/>
             <a:p>
               <a:pPr algn="ctr"/>
-              <a:endParaRPr lang="en-US"/>
+              <a:endParaRPr lang="en-US" dirty="0"/>
             </a:p>
           </p:txBody>
         </p:sp>
@@ -40613,7 +40613,7 @@
             <a:lstStyle/>
             <a:p>
               <a:r>
-                <a:rPr lang="en-US" sz="2800" b="1"/>
+                <a:rPr lang="en-US" sz="2800" b="1" dirty="0"/>
                 <a:t>15</a:t>
               </a:r>
             </a:p>
@@ -40667,7 +40667,7 @@
             <a:lstStyle/>
             <a:p>
               <a:pPr algn="ctr"/>
-              <a:endParaRPr lang="en-US"/>
+              <a:endParaRPr lang="en-US" dirty="0"/>
             </a:p>
           </p:txBody>
         </p:sp>
@@ -40764,7 +40764,7 @@
             <a:lstStyle/>
             <a:p>
               <a:r>
-                <a:rPr lang="en-US" sz="2800" b="1"/>
+                <a:rPr lang="en-US" sz="2800" b="1" dirty="0"/>
                 <a:t>18</a:t>
               </a:r>
             </a:p>
@@ -40818,7 +40818,7 @@
             <a:lstStyle/>
             <a:p>
               <a:pPr algn="ctr"/>
-              <a:endParaRPr lang="en-US"/>
+              <a:endParaRPr lang="en-US" dirty="0"/>
             </a:p>
           </p:txBody>
         </p:sp>
@@ -40915,7 +40915,7 @@
             <a:lstStyle/>
             <a:p>
               <a:r>
-                <a:rPr lang="en-US" sz="2800" b="1"/>
+                <a:rPr lang="en-US" sz="2800" b="1" dirty="0"/>
                 <a:t>7</a:t>
               </a:r>
             </a:p>
@@ -40969,7 +40969,7 @@
             <a:lstStyle/>
             <a:p>
               <a:pPr algn="ctr"/>
-              <a:endParaRPr lang="en-US"/>
+              <a:endParaRPr lang="en-US" dirty="0"/>
             </a:p>
           </p:txBody>
         </p:sp>
@@ -41105,7 +41105,7 @@
             <a:lstStyle/>
             <a:p>
               <a:r>
-                <a:rPr lang="en-US" sz="2800" b="1"/>
+                <a:rPr lang="en-US" sz="2800" b="1" dirty="0"/>
                 <a:t>9</a:t>
               </a:r>
             </a:p>
@@ -41159,7 +41159,7 @@
             <a:lstStyle/>
             <a:p>
               <a:pPr algn="ctr"/>
-              <a:endParaRPr lang="en-US"/>
+              <a:endParaRPr lang="en-US" dirty="0"/>
             </a:p>
           </p:txBody>
         </p:sp>
@@ -41193,11 +41193,11 @@
           <a:lstStyle/>
           <a:p>
             <a:r>
-              <a:rPr lang="en-US" sz="3200"/>
+              <a:rPr lang="en-US" sz="3200" dirty="0"/>
               <a:t>insert </a:t>
             </a:r>
             <a:r>
-              <a:rPr lang="en-US" sz="3200" b="1"/>
+              <a:rPr lang="en-US" sz="3200" b="1" dirty="0"/>
               <a:t>6</a:t>
             </a:r>
           </a:p>
@@ -41367,7 +41367,7 @@
           <a:lstStyle/>
           <a:p>
             <a:r>
-              <a:rPr lang="en-US" sz="2800" b="1">
+              <a:rPr lang="en-US" sz="2800" b="1" dirty="0">
                 <a:solidFill>
                   <a:srgbClr val="FF0000"/>
                 </a:solidFill>
@@ -41425,7 +41425,7 @@
           <a:lstStyle/>
           <a:p>
             <a:pPr algn="ctr"/>
-            <a:endParaRPr lang="en-US"/>
+            <a:endParaRPr lang="en-US" dirty="0"/>
           </a:p>
         </p:txBody>
       </p:sp>
@@ -41521,7 +41521,7 @@
           <a:lstStyle/>
           <a:p>
             <a:r>
-              <a:rPr lang="en-US"/>
+              <a:rPr lang="en-US" dirty="0"/>
               <a:t>BST Performance summary</a:t>
             </a:r>
           </a:p>
@@ -41551,27 +41551,27 @@
               <a:lstStyle/>
               <a:p>
                 <a:r>
-                  <a:rPr lang="en-US" b="1"/>
+                  <a:rPr lang="en-US" b="1" dirty="0"/>
                   <a:t>Find</a:t>
                 </a:r>
                 <a:r>
-                  <a:rPr lang="en-US"/>
+                  <a:rPr lang="en-US" dirty="0"/>
                   <a:t>, </a:t>
                 </a:r>
                 <a:r>
-                  <a:rPr lang="en-US" b="1"/>
+                  <a:rPr lang="en-US" b="1" dirty="0"/>
                   <a:t>insert</a:t>
                 </a:r>
                 <a:r>
-                  <a:rPr lang="en-US"/>
+                  <a:rPr lang="en-US" dirty="0"/>
                   <a:t>, </a:t>
                 </a:r>
                 <a:r>
-                  <a:rPr lang="en-US" b="1"/>
+                  <a:rPr lang="en-US" b="1" dirty="0"/>
                   <a:t>remove</a:t>
                 </a:r>
                 <a:r>
-                  <a:rPr lang="en-US"/>
+                  <a:rPr lang="en-US" dirty="0"/>
                   <a:t>: </a:t>
                 </a:r>
                 <a14:m>
@@ -41592,7 +41592,7 @@
                       <a:rPr lang="en-US" i="1" dirty="0" smtClean="0">
                         <a:latin typeface="Cambria Math" panose="02040503050406030204" pitchFamily="18" charset="0"/>
                       </a:rPr>
-                      <m:t>ℎ𝑒𝑖𝑔ℎ𝑡</m:t>
+                      <m:t>h𝑒𝑖𝑔h𝑡</m:t>
                     </m:r>
                     <m:r>
                       <a:rPr lang="en-US" i="1" dirty="0" smtClean="0">
@@ -41602,11 +41602,10 @@
                     </m:r>
                   </m:oMath>
                 </a14:m>
-                <a:endParaRPr lang="en-US"/>
               </a:p>
               <a:p>
                 <a:r>
-                  <a:rPr lang="en-US"/>
+                  <a:rPr lang="en-US" dirty="0"/>
                   <a:t>Since a binary tree height can range form </a:t>
                 </a:r>
                 <a14:m>
@@ -41626,7 +41625,7 @@
                     <m:func>
                       <m:funcPr>
                         <m:ctrlPr>
-                          <a:rPr lang="en-US" i="0" dirty="0" smtClean="0">
+                          <a:rPr lang="en-US" i="1" dirty="0" smtClean="0">
                             <a:latin typeface="Cambria Math" panose="02040503050406030204" pitchFamily="18" charset="0"/>
                           </a:rPr>
                         </m:ctrlPr>
@@ -41660,7 +41659,7 @@
                   </m:oMath>
                 </a14:m>
                 <a:r>
-                  <a:rPr lang="en-US"/>
+                  <a:rPr lang="en-US" dirty="0"/>
                   <a:t> to </a:t>
                 </a:r>
                 <a14:m>
@@ -41692,7 +41691,7 @@
                   </m:oMath>
                 </a14:m>
                 <a:r>
-                  <a:rPr lang="en-US"/>
+                  <a:rPr lang="en-US" dirty="0"/>
                   <a:t>, these are worst-case </a:t>
                 </a:r>
                 <a14:m>
@@ -41724,47 +41723,65 @@
                   </m:oMath>
                 </a14:m>
                 <a:r>
-                  <a:rPr lang="en-US"/>
+                  <a:rPr lang="en-US" dirty="0"/>
                   <a:t> operations</a:t>
                 </a:r>
               </a:p>
               <a:p>
                 <a:pPr lvl="1"/>
                 <a:r>
-                  <a:rPr lang="en-US"/>
+                  <a:rPr lang="en-US" dirty="0"/>
                   <a:t>If the tree is </a:t>
                 </a:r>
                 <a:r>
-                  <a:rPr lang="en-US" b="1"/>
+                  <a:rPr lang="en-US" b="1" dirty="0"/>
                   <a:t>short</a:t>
                 </a:r>
                 <a:r>
-                  <a:rPr lang="en-US"/>
+                  <a:rPr lang="en-US" dirty="0"/>
                   <a:t>, they’re </a:t>
                 </a:r>
                 <a:r>
-                  <a:rPr lang="en-US" b="1"/>
+                  <a:rPr lang="en-US" b="1" dirty="0"/>
                   <a:t>fast</a:t>
                 </a:r>
               </a:p>
               <a:p>
                 <a:pPr lvl="1"/>
                 <a:r>
-                  <a:rPr lang="en-US"/>
+                  <a:rPr lang="en-US" dirty="0"/>
                   <a:t>if the tree is </a:t>
                 </a:r>
                 <a:r>
-                  <a:rPr lang="en-US" b="1"/>
+                  <a:rPr lang="en-US" b="1" dirty="0"/>
                   <a:t>tall</a:t>
                 </a:r>
                 <a:r>
-                  <a:rPr lang="en-US"/>
+                  <a:rPr lang="en-US" dirty="0"/>
                   <a:t>, they’re </a:t>
                 </a:r>
                 <a:r>
-                  <a:rPr lang="en-US" b="1"/>
+                  <a:rPr lang="en-US" b="1" dirty="0"/>
                   <a:t>slow</a:t>
                 </a:r>
+              </a:p>
+              <a:p>
+                <a:r>
+                  <a:rPr lang="en-US" dirty="0"/>
+                  <a:t>The trick is to find ways to ensure the BST stays short</a:t>
+                </a:r>
+              </a:p>
+              <a:p>
+                <a:pPr lvl="1"/>
+                <a:r>
+                  <a:rPr lang="en-US" dirty="0"/>
+                  <a:t>We’ll see how to do this by modifying insert to re-balance the tree after each insertion (</a:t>
+                </a:r>
+                <a:r>
+                  <a:rPr lang="en-US"/>
+                  <a:t>AVL trees)</a:t>
+                </a:r>
+                <a:endParaRPr lang="en-US" dirty="0"/>
               </a:p>
             </p:txBody>
           </p:sp>
@@ -41861,7 +41878,7 @@
           <a:lstStyle/>
           <a:p>
             <a:r>
-              <a:rPr lang="en-US"/>
+              <a:rPr lang="en-US" dirty="0"/>
               <a:t>Binary Trees</a:t>
             </a:r>
           </a:p>
@@ -41897,15 +41914,15 @@
               <a:buNone/>
             </a:pPr>
             <a:r>
-              <a:rPr lang="en-US"/>
+              <a:rPr lang="en-US" dirty="0"/>
               <a:t>A </a:t>
             </a:r>
             <a:r>
-              <a:rPr lang="en-US" b="1"/>
+              <a:rPr lang="en-US" b="1" dirty="0"/>
               <a:t>binary tree </a:t>
             </a:r>
             <a:r>
-              <a:rPr lang="en-US"/>
+              <a:rPr lang="en-US" dirty="0"/>
               <a:t>is an ordered tree where each node has:</a:t>
             </a:r>
           </a:p>
@@ -41915,7 +41932,7 @@
               <a:buAutoNum type="arabicPeriod"/>
             </a:pPr>
             <a:r>
-              <a:rPr lang="en-US"/>
+              <a:rPr lang="en-US" dirty="0"/>
               <a:t>Every node has at most children</a:t>
             </a:r>
           </a:p>
@@ -41925,7 +41942,7 @@
               <a:buAutoNum type="arabicPeriod"/>
             </a:pPr>
             <a:r>
-              <a:rPr lang="en-US"/>
+              <a:rPr lang="en-US" dirty="0"/>
               <a:t>Each child is labelled as left or right</a:t>
             </a:r>
           </a:p>
@@ -41935,7 +41952,7 @@
               <a:buAutoNum type="arabicPeriod"/>
             </a:pPr>
             <a:r>
-              <a:rPr lang="en-US"/>
+              <a:rPr lang="en-US" dirty="0"/>
               <a:t>The left child comes before the right child in the ordering of nodes</a:t>
             </a:r>
           </a:p>
@@ -42006,11 +42023,11 @@
           <a:p>
             <a:pPr algn="ctr"/>
             <a:r>
-              <a:rPr lang="en-US" b="1"/>
+              <a:rPr lang="en-US" b="1" dirty="0"/>
               <a:t>Ordered</a:t>
             </a:r>
             <a:r>
-              <a:rPr lang="en-US"/>
+              <a:rPr lang="en-US" dirty="0"/>
               <a:t> means that the order of the children of a node matters.</a:t>
             </a:r>
           </a:p>
@@ -42090,11 +42107,11 @@
           <a:p>
             <a:pPr algn="ctr"/>
             <a:r>
-              <a:rPr lang="en-US"/>
+              <a:rPr lang="en-US" dirty="0"/>
               <a:t>This is not binary search tree yet. It’s just </a:t>
             </a:r>
             <a:r>
-              <a:rPr lang="en-US" b="1"/>
+              <a:rPr lang="en-US" b="1" dirty="0"/>
               <a:t>a binary tree.</a:t>
             </a:r>
           </a:p>
@@ -42163,14 +42180,14 @@
           <a:lstStyle/>
           <a:p>
             <a:r>
-              <a:rPr lang="en-US"/>
+              <a:rPr lang="en-US" dirty="0"/>
               <a:t>Binary Search Trees</a:t>
             </a:r>
           </a:p>
         </p:txBody>
       </p:sp>
-      <mc:AlternateContent xmlns:mc="http://schemas.openxmlformats.org/markup-compatibility/2006">
-        <mc:Choice xmlns:a14="http://schemas.microsoft.com/office/drawing/2010/main" Requires="a14">
+      <mc:AlternateContent xmlns:mc="http://schemas.openxmlformats.org/markup-compatibility/2006" xmlns:a14="http://schemas.microsoft.com/office/drawing/2010/main">
+        <mc:Choice Requires="a14">
           <p:sp>
             <p:nvSpPr>
               <p:cNvPr id="3" name="Content Placeholder 2">
@@ -42203,61 +42220,61 @@
                   <a:buNone/>
                 </a:pPr>
                 <a:r>
-                  <a:rPr lang="en-US"/>
+                  <a:rPr lang="en-US" dirty="0"/>
                   <a:t>A </a:t>
                 </a:r>
                 <a:r>
-                  <a:rPr lang="en-US" b="1"/>
+                  <a:rPr lang="en-US" b="1" dirty="0"/>
                   <a:t>binary search tree</a:t>
                 </a:r>
                 <a:r>
-                  <a:rPr lang="en-US"/>
+                  <a:rPr lang="en-US" dirty="0"/>
                   <a:t> (</a:t>
                 </a:r>
                 <a:r>
-                  <a:rPr lang="en-US" b="1"/>
+                  <a:rPr lang="en-US" b="1" dirty="0"/>
                   <a:t>BST</a:t>
                 </a:r>
                 <a:r>
-                  <a:rPr lang="en-US"/>
+                  <a:rPr lang="en-US" dirty="0"/>
                   <a:t>) is a binary tree </a:t>
                 </a:r>
                 <a:r>
-                  <a:rPr lang="en-US" b="1"/>
+                  <a:rPr lang="en-US" b="1" dirty="0"/>
                   <a:t>T</a:t>
                 </a:r>
                 <a:r>
-                  <a:rPr lang="en-US"/>
+                  <a:rPr lang="en-US" dirty="0"/>
                   <a:t> where each node </a:t>
                 </a:r>
                 <a:r>
-                  <a:rPr lang="en-US" b="1"/>
+                  <a:rPr lang="en-US" b="1" dirty="0"/>
                   <a:t>v</a:t>
                 </a:r>
                 <a:r>
-                  <a:rPr lang="en-US"/>
+                  <a:rPr lang="en-US" dirty="0"/>
                   <a:t> has a </a:t>
                 </a:r>
                 <a:r>
-                  <a:rPr lang="en-US" b="1"/>
+                  <a:rPr lang="en-US" b="1" dirty="0"/>
                   <a:t>k</a:t>
                 </a:r>
                 <a:r>
-                  <a:rPr lang="en-US"/>
+                  <a:rPr lang="en-US" dirty="0"/>
                   <a:t> with these properties:</a:t>
                 </a:r>
               </a:p>
               <a:p>
                 <a:r>
-                  <a:rPr lang="en-US"/>
+                  <a:rPr lang="en-US" dirty="0"/>
                   <a:t>All keys in the left subtree of </a:t>
                 </a:r>
                 <a:r>
-                  <a:rPr lang="en-US" b="1"/>
+                  <a:rPr lang="en-US" b="1" dirty="0"/>
                   <a:t>v</a:t>
                 </a:r>
                 <a:r>
-                  <a:rPr lang="en-US"/>
+                  <a:rPr lang="en-US" dirty="0"/>
                   <a:t> are </a:t>
                 </a:r>
                 <a14:m>
@@ -42271,25 +42288,25 @@
                   </m:oMath>
                 </a14:m>
                 <a:r>
-                  <a:rPr lang="en-US"/>
+                  <a:rPr lang="en-US" dirty="0"/>
                   <a:t> </a:t>
                 </a:r>
                 <a:r>
-                  <a:rPr lang="en-US" b="1"/>
+                  <a:rPr lang="en-US" b="1" dirty="0"/>
                   <a:t>k</a:t>
                 </a:r>
               </a:p>
               <a:p>
                 <a:r>
-                  <a:rPr lang="en-US"/>
+                  <a:rPr lang="en-US" dirty="0"/>
                   <a:t>All keys in the right subtree of </a:t>
                 </a:r>
                 <a:r>
-                  <a:rPr lang="en-US" b="1"/>
+                  <a:rPr lang="en-US" b="1" dirty="0"/>
                   <a:t>v</a:t>
                 </a:r>
                 <a:r>
-                  <a:rPr lang="en-US"/>
+                  <a:rPr lang="en-US" dirty="0"/>
                   <a:t> are </a:t>
                 </a:r>
                 <a14:m>
@@ -42303,19 +42320,19 @@
                   </m:oMath>
                 </a14:m>
                 <a:r>
-                  <a:rPr lang="en-US"/>
+                  <a:rPr lang="en-US" dirty="0"/>
                   <a:t> </a:t>
                 </a:r>
                 <a:r>
-                  <a:rPr lang="en-US" b="1"/>
+                  <a:rPr lang="en-US" b="1" dirty="0"/>
                   <a:t>k</a:t>
                 </a:r>
-                <a:endParaRPr lang="en-US"/>
+                <a:endParaRPr lang="en-US" dirty="0"/>
               </a:p>
             </p:txBody>
           </p:sp>
         </mc:Choice>
-        <mc:Fallback>
+        <mc:Fallback xmlns="">
           <p:sp>
             <p:nvSpPr>
               <p:cNvPr id="3" name="Content Placeholder 2">
@@ -42411,7 +42428,7 @@
             <a:lstStyle/>
             <a:p>
               <a:r>
-                <a:rPr lang="en-US" sz="2800" b="1"/>
+                <a:rPr lang="en-US" sz="2800" b="1" dirty="0"/>
                 <a:t>k</a:t>
               </a:r>
             </a:p>
@@ -42465,7 +42482,7 @@
             <a:lstStyle/>
             <a:p>
               <a:pPr algn="ctr"/>
-              <a:endParaRPr lang="en-US"/>
+              <a:endParaRPr lang="en-US" dirty="0"/>
             </a:p>
           </p:txBody>
         </p:sp>
@@ -42603,7 +42620,7 @@
           <a:lstStyle/>
           <a:p>
             <a:pPr algn="ctr"/>
-            <a:endParaRPr lang="en-US"/>
+            <a:endParaRPr lang="en-US" dirty="0"/>
           </a:p>
         </p:txBody>
       </p:sp>
@@ -42650,12 +42667,12 @@
           <a:lstStyle/>
           <a:p>
             <a:pPr algn="ctr"/>
-            <a:endParaRPr lang="en-US"/>
+            <a:endParaRPr lang="en-US" dirty="0"/>
           </a:p>
         </p:txBody>
       </p:sp>
-      <mc:AlternateContent xmlns:mc="http://schemas.openxmlformats.org/markup-compatibility/2006">
-        <mc:Choice xmlns:a14="http://schemas.microsoft.com/office/drawing/2010/main" Requires="a14">
+      <mc:AlternateContent xmlns:mc="http://schemas.openxmlformats.org/markup-compatibility/2006" xmlns:a14="http://schemas.microsoft.com/office/drawing/2010/main">
+        <mc:Choice Requires="a14">
           <p:sp>
             <p:nvSpPr>
               <p:cNvPr id="19" name="TextBox 18">
@@ -42695,19 +42712,19 @@
                   </m:oMath>
                 </a14:m>
                 <a:r>
-                  <a:rPr lang="en-US" sz="2800"/>
+                  <a:rPr lang="en-US" sz="2800" dirty="0"/>
                   <a:t> </a:t>
                 </a:r>
                 <a:r>
-                  <a:rPr lang="en-US" sz="2800" b="1"/>
+                  <a:rPr lang="en-US" sz="2800" b="1" dirty="0"/>
                   <a:t>k</a:t>
                 </a:r>
-                <a:endParaRPr lang="en-US" sz="2800"/>
+                <a:endParaRPr lang="en-US" sz="2800" dirty="0"/>
               </a:p>
             </p:txBody>
           </p:sp>
         </mc:Choice>
-        <mc:Fallback>
+        <mc:Fallback xmlns="">
           <p:sp>
             <p:nvSpPr>
               <p:cNvPr id="19" name="TextBox 18">
@@ -42752,8 +42769,8 @@
           </p:sp>
         </mc:Fallback>
       </mc:AlternateContent>
-      <mc:AlternateContent xmlns:mc="http://schemas.openxmlformats.org/markup-compatibility/2006">
-        <mc:Choice xmlns:a14="http://schemas.microsoft.com/office/drawing/2010/main" Requires="a14">
+      <mc:AlternateContent xmlns:mc="http://schemas.openxmlformats.org/markup-compatibility/2006" xmlns:a14="http://schemas.microsoft.com/office/drawing/2010/main">
+        <mc:Choice Requires="a14">
           <p:sp>
             <p:nvSpPr>
               <p:cNvPr id="20" name="TextBox 19">
@@ -42793,19 +42810,19 @@
                   </m:oMath>
                 </a14:m>
                 <a:r>
-                  <a:rPr lang="en-US" sz="2800"/>
+                  <a:rPr lang="en-US" sz="2800" dirty="0"/>
                   <a:t> </a:t>
                 </a:r>
                 <a:r>
-                  <a:rPr lang="en-US" sz="2800" b="1"/>
+                  <a:rPr lang="en-US" sz="2800" b="1" dirty="0"/>
                   <a:t>k</a:t>
                 </a:r>
-                <a:endParaRPr lang="en-US" sz="2800"/>
+                <a:endParaRPr lang="en-US" sz="2800" dirty="0"/>
               </a:p>
             </p:txBody>
           </p:sp>
         </mc:Choice>
-        <mc:Fallback>
+        <mc:Fallback xmlns="">
           <p:sp>
             <p:nvSpPr>
               <p:cNvPr id="20" name="TextBox 19">
@@ -42879,7 +42896,7 @@
           <a:lstStyle/>
           <a:p>
             <a:r>
-              <a:rPr lang="en-US"/>
+              <a:rPr lang="en-US" dirty="0"/>
               <a:t>left subtree</a:t>
             </a:r>
           </a:p>
@@ -42914,7 +42931,7 @@
           <a:lstStyle/>
           <a:p>
             <a:r>
-              <a:rPr lang="en-US"/>
+              <a:rPr lang="en-US" dirty="0"/>
               <a:t>right subtree</a:t>
             </a:r>
           </a:p>
@@ -42977,7 +42994,7 @@
           <a:lstStyle/>
           <a:p>
             <a:r>
-              <a:rPr lang="en-US"/>
+              <a:rPr lang="en-US" dirty="0"/>
               <a:t>Binary Search Tree Examples</a:t>
             </a:r>
           </a:p>
@@ -43035,7 +43052,7 @@
             <a:lstStyle/>
             <a:p>
               <a:r>
-                <a:rPr lang="en-US" sz="2800" b="1"/>
+                <a:rPr lang="en-US" sz="2800" b="1" dirty="0"/>
                 <a:t>5</a:t>
               </a:r>
             </a:p>
@@ -43089,7 +43106,7 @@
             <a:lstStyle/>
             <a:p>
               <a:pPr algn="ctr"/>
-              <a:endParaRPr lang="en-US"/>
+              <a:endParaRPr lang="en-US" dirty="0"/>
             </a:p>
           </p:txBody>
         </p:sp>
@@ -43128,7 +43145,7 @@
           <a:lstStyle/>
           <a:p>
             <a:r>
-              <a:rPr lang="en-US"/>
+              <a:rPr lang="en-US" dirty="0"/>
               <a:t> a BST?</a:t>
             </a:r>
           </a:p>
@@ -43197,7 +43214,7 @@
           <a:lstStyle/>
           <a:p>
             <a:r>
-              <a:rPr lang="en-US"/>
+              <a:rPr lang="en-US" dirty="0"/>
               <a:t>Binary Search Tree Examples</a:t>
             </a:r>
           </a:p>
@@ -43255,7 +43272,7 @@
             <a:lstStyle/>
             <a:p>
               <a:r>
-                <a:rPr lang="en-US" sz="2800" b="1"/>
+                <a:rPr lang="en-US" sz="2800" b="1" dirty="0"/>
                 <a:t>5</a:t>
               </a:r>
             </a:p>
@@ -43309,7 +43326,7 @@
             <a:lstStyle/>
             <a:p>
               <a:pPr algn="ctr"/>
-              <a:endParaRPr lang="en-US"/>
+              <a:endParaRPr lang="en-US" dirty="0"/>
             </a:p>
           </p:txBody>
         </p:sp>
@@ -43368,7 +43385,7 @@
             <a:lstStyle/>
             <a:p>
               <a:r>
-                <a:rPr lang="en-US"/>
+                <a:rPr lang="en-US" dirty="0"/>
                 <a:t> a BST</a:t>
               </a:r>
             </a:p>
@@ -43474,7 +43491,7 @@
           <a:lstStyle/>
           <a:p>
             <a:r>
-              <a:rPr lang="en-US"/>
+              <a:rPr lang="en-US" dirty="0"/>
               <a:t>Binary Search Tree Examples</a:t>
             </a:r>
           </a:p>
@@ -43532,7 +43549,7 @@
             <a:lstStyle/>
             <a:p>
               <a:r>
-                <a:rPr lang="en-US" sz="2800" b="1"/>
+                <a:rPr lang="en-US" sz="2800" b="1" dirty="0"/>
                 <a:t>5</a:t>
               </a:r>
             </a:p>
@@ -43586,7 +43603,7 @@
             <a:lstStyle/>
             <a:p>
               <a:pPr algn="ctr"/>
-              <a:endParaRPr lang="en-US"/>
+              <a:endParaRPr lang="en-US" dirty="0"/>
             </a:p>
           </p:txBody>
         </p:sp>
@@ -43663,7 +43680,7 @@
               <a:lstStyle/>
               <a:p>
                 <a:r>
-                  <a:rPr lang="en-US" sz="2800" b="1"/>
+                  <a:rPr lang="en-US" sz="2800" b="1" dirty="0"/>
                   <a:t>5</a:t>
                 </a:r>
               </a:p>
@@ -43717,7 +43734,7 @@
               <a:lstStyle/>
               <a:p>
                 <a:pPr algn="ctr"/>
-                <a:endParaRPr lang="en-US"/>
+                <a:endParaRPr lang="en-US" dirty="0"/>
               </a:p>
             </p:txBody>
           </p:sp>
@@ -43774,7 +43791,7 @@
               <a:lstStyle/>
               <a:p>
                 <a:r>
-                  <a:rPr lang="en-US" sz="2800" b="1"/>
+                  <a:rPr lang="en-US" sz="2800" b="1" dirty="0"/>
                   <a:t>2</a:t>
                 </a:r>
               </a:p>
@@ -43828,7 +43845,7 @@
               <a:lstStyle/>
               <a:p>
                 <a:pPr algn="ctr"/>
-                <a:endParaRPr lang="en-US"/>
+                <a:endParaRPr lang="en-US" dirty="0"/>
               </a:p>
             </p:txBody>
           </p:sp>
@@ -43928,7 +43945,7 @@
             <a:lstStyle/>
             <a:p>
               <a:r>
-                <a:rPr lang="en-US"/>
+                <a:rPr lang="en-US" dirty="0"/>
                 <a:t> a BST</a:t>
               </a:r>
             </a:p>
@@ -44025,7 +44042,7 @@
             <a:lstStyle/>
             <a:p>
               <a:r>
-                <a:rPr lang="en-US"/>
+                <a:rPr lang="en-US" dirty="0"/>
                 <a:t> a BST</a:t>
               </a:r>
             </a:p>
@@ -44131,7 +44148,7 @@
           <a:lstStyle/>
           <a:p>
             <a:r>
-              <a:rPr lang="en-US"/>
+              <a:rPr lang="en-US" dirty="0"/>
               <a:t>Binary Search Tree Examples</a:t>
             </a:r>
           </a:p>
@@ -44189,7 +44206,7 @@
             <a:lstStyle/>
             <a:p>
               <a:r>
-                <a:rPr lang="en-US" sz="2800" b="1"/>
+                <a:rPr lang="en-US" sz="2800" b="1" dirty="0"/>
                 <a:t>5</a:t>
               </a:r>
             </a:p>
@@ -44243,7 +44260,7 @@
             <a:lstStyle/>
             <a:p>
               <a:pPr algn="ctr"/>
-              <a:endParaRPr lang="en-US"/>
+              <a:endParaRPr lang="en-US" dirty="0"/>
             </a:p>
           </p:txBody>
         </p:sp>
@@ -44320,7 +44337,7 @@
               <a:lstStyle/>
               <a:p>
                 <a:r>
-                  <a:rPr lang="en-US" sz="2800" b="1"/>
+                  <a:rPr lang="en-US" sz="2800" b="1" dirty="0"/>
                   <a:t>5</a:t>
                 </a:r>
               </a:p>
@@ -44374,7 +44391,7 @@
               <a:lstStyle/>
               <a:p>
                 <a:pPr algn="ctr"/>
-                <a:endParaRPr lang="en-US"/>
+                <a:endParaRPr lang="en-US" dirty="0"/>
               </a:p>
             </p:txBody>
           </p:sp>
@@ -44431,7 +44448,7 @@
               <a:lstStyle/>
               <a:p>
                 <a:r>
-                  <a:rPr lang="en-US" sz="2800" b="1"/>
+                  <a:rPr lang="en-US" sz="2800" b="1" dirty="0"/>
                   <a:t>2</a:t>
                 </a:r>
               </a:p>
@@ -44485,7 +44502,7 @@
               <a:lstStyle/>
               <a:p>
                 <a:pPr algn="ctr"/>
-                <a:endParaRPr lang="en-US"/>
+                <a:endParaRPr lang="en-US" dirty="0"/>
               </a:p>
             </p:txBody>
           </p:sp>
@@ -44585,7 +44602,7 @@
             <a:lstStyle/>
             <a:p>
               <a:r>
-                <a:rPr lang="en-US"/>
+                <a:rPr lang="en-US" dirty="0"/>
                 <a:t> a BST</a:t>
               </a:r>
             </a:p>
@@ -44662,7 +44679,7 @@
           <a:lstStyle/>
           <a:p>
             <a:r>
-              <a:rPr lang="en-US"/>
+              <a:rPr lang="en-US" dirty="0"/>
               <a:t> a BST?</a:t>
             </a:r>
           </a:p>

--- a/lectures/lecture22/binary_search_trees.pptx
+++ b/lectures/lecture22/binary_search_trees.pptx
@@ -28,15 +28,17 @@
     <p:sldId id="321" r:id="rId22"/>
     <p:sldId id="311" r:id="rId23"/>
     <p:sldId id="312" r:id="rId24"/>
-    <p:sldId id="313" r:id="rId25"/>
-    <p:sldId id="318" r:id="rId26"/>
-    <p:sldId id="322" r:id="rId27"/>
-    <p:sldId id="326" r:id="rId28"/>
-    <p:sldId id="323" r:id="rId29"/>
-    <p:sldId id="324" r:id="rId30"/>
-    <p:sldId id="325" r:id="rId31"/>
-    <p:sldId id="327" r:id="rId32"/>
-    <p:sldId id="328" r:id="rId33"/>
+    <p:sldId id="329" r:id="rId25"/>
+    <p:sldId id="313" r:id="rId26"/>
+    <p:sldId id="330" r:id="rId27"/>
+    <p:sldId id="318" r:id="rId28"/>
+    <p:sldId id="322" r:id="rId29"/>
+    <p:sldId id="326" r:id="rId30"/>
+    <p:sldId id="323" r:id="rId31"/>
+    <p:sldId id="324" r:id="rId32"/>
+    <p:sldId id="325" r:id="rId33"/>
+    <p:sldId id="327" r:id="rId34"/>
+    <p:sldId id="328" r:id="rId35"/>
   </p:sldIdLst>
   <p:sldSz cx="12192000" cy="6858000"/>
   <p:notesSz cx="6858000" cy="9144000"/>
@@ -147,6 +149,7 @@
 <p1510:revInfo xmlns:a="http://schemas.openxmlformats.org/drawingml/2006/main" xmlns:r="http://schemas.openxmlformats.org/officeDocument/2006/relationships" xmlns:p1510="http://schemas.microsoft.com/office/powerpoint/2015/10/main">
   <p1510:revLst>
     <p1510:client id="{6199F45B-FBA4-954B-9312-5019CDB5224B}" v="226" dt="2026-07-06T22:38:43.334"/>
+    <p1510:client id="{64B368CB-38C1-664C-9D36-31CC1583914F}" v="64" dt="2026-07-07T18:28:07.734"/>
   </p1510:revLst>
 </p1510:revInfo>
 </file>
@@ -156,7 +159,7 @@
   <pc:docChgLst>
     <pc:chgData name="Toby Donaldson" userId="2e6e5431-bb17-4c41-9985-d39c50d83c73" providerId="ADAL" clId="{F31BC264-820E-54C4-A6D1-F92AF9CC222E}"/>
     <pc:docChg chg="undo custSel addSld delSld modSld sldOrd">
-      <pc:chgData name="Toby Donaldson" userId="2e6e5431-bb17-4c41-9985-d39c50d83c73" providerId="ADAL" clId="{F31BC264-820E-54C4-A6D1-F92AF9CC222E}" dt="2026-06-11T18:55:40.822" v="6824" actId="20577"/>
+      <pc:chgData name="Toby Donaldson" userId="2e6e5431-bb17-4c41-9985-d39c50d83c73" providerId="ADAL" clId="{F31BC264-820E-54C4-A6D1-F92AF9CC222E}" dt="2026-07-07T18:28:07.734" v="7101" actId="20577"/>
       <pc:docMkLst>
         <pc:docMk/>
       </pc:docMkLst>
@@ -206,23 +209,645 @@
           </ac:spMkLst>
         </pc:spChg>
       </pc:sldChg>
+      <pc:sldChg chg="modSp mod">
+        <pc:chgData name="Toby Donaldson" userId="2e6e5431-bb17-4c41-9985-d39c50d83c73" providerId="ADAL" clId="{F31BC264-820E-54C4-A6D1-F92AF9CC222E}" dt="2026-07-07T18:08:52.723" v="6848" actId="113"/>
+        <pc:sldMkLst>
+          <pc:docMk/>
+          <pc:sldMk cId="340872484" sldId="286"/>
+        </pc:sldMkLst>
+        <pc:spChg chg="mod">
+          <ac:chgData name="Toby Donaldson" userId="2e6e5431-bb17-4c41-9985-d39c50d83c73" providerId="ADAL" clId="{F31BC264-820E-54C4-A6D1-F92AF9CC222E}" dt="2026-07-07T18:08:52.723" v="6848" actId="113"/>
+          <ac:spMkLst>
+            <pc:docMk/>
+            <pc:sldMk cId="340872484" sldId="286"/>
+            <ac:spMk id="3" creationId="{06D16893-CDF4-2AA6-BC4C-1BC87F60153B}"/>
+          </ac:spMkLst>
+        </pc:spChg>
+        <pc:spChg chg="mod">
+          <ac:chgData name="Toby Donaldson" userId="2e6e5431-bb17-4c41-9985-d39c50d83c73" providerId="ADAL" clId="{F31BC264-820E-54C4-A6D1-F92AF9CC222E}" dt="2026-07-07T18:08:19.219" v="6843" actId="20577"/>
+          <ac:spMkLst>
+            <pc:docMk/>
+            <pc:sldMk cId="340872484" sldId="286"/>
+            <ac:spMk id="6" creationId="{6024659C-6021-F980-3B58-784D03DDAB55}"/>
+          </ac:spMkLst>
+        </pc:spChg>
+      </pc:sldChg>
+      <pc:sldChg chg="modSp mod">
+        <pc:chgData name="Toby Donaldson" userId="2e6e5431-bb17-4c41-9985-d39c50d83c73" providerId="ADAL" clId="{F31BC264-820E-54C4-A6D1-F92AF9CC222E}" dt="2026-07-07T18:07:02.495" v="6832" actId="20577"/>
+        <pc:sldMkLst>
+          <pc:docMk/>
+          <pc:sldMk cId="2579258547" sldId="296"/>
+        </pc:sldMkLst>
+        <pc:spChg chg="mod">
+          <ac:chgData name="Toby Donaldson" userId="2e6e5431-bb17-4c41-9985-d39c50d83c73" providerId="ADAL" clId="{F31BC264-820E-54C4-A6D1-F92AF9CC222E}" dt="2026-07-07T18:07:02.495" v="6832" actId="20577"/>
+          <ac:spMkLst>
+            <pc:docMk/>
+            <pc:sldMk cId="2579258547" sldId="296"/>
+            <ac:spMk id="3" creationId="{828EFB7D-8273-2511-FCFF-B838DE0DAD00}"/>
+          </ac:spMkLst>
+        </pc:spChg>
+      </pc:sldChg>
+      <pc:sldChg chg="modSp mod">
+        <pc:chgData name="Toby Donaldson" userId="2e6e5431-bb17-4c41-9985-d39c50d83c73" providerId="ADAL" clId="{F31BC264-820E-54C4-A6D1-F92AF9CC222E}" dt="2026-07-07T18:10:25.391" v="6869" actId="20577"/>
+        <pc:sldMkLst>
+          <pc:docMk/>
+          <pc:sldMk cId="888644859" sldId="297"/>
+        </pc:sldMkLst>
+        <pc:spChg chg="mod">
+          <ac:chgData name="Toby Donaldson" userId="2e6e5431-bb17-4c41-9985-d39c50d83c73" providerId="ADAL" clId="{F31BC264-820E-54C4-A6D1-F92AF9CC222E}" dt="2026-07-07T18:10:25.391" v="6869" actId="20577"/>
+          <ac:spMkLst>
+            <pc:docMk/>
+            <pc:sldMk cId="888644859" sldId="297"/>
+            <ac:spMk id="3" creationId="{AC7810F2-FED9-485D-34EB-2E0F657BA839}"/>
+          </ac:spMkLst>
+        </pc:spChg>
+        <pc:spChg chg="mod">
+          <ac:chgData name="Toby Donaldson" userId="2e6e5431-bb17-4c41-9985-d39c50d83c73" providerId="ADAL" clId="{F31BC264-820E-54C4-A6D1-F92AF9CC222E}" dt="2026-07-07T18:10:12.722" v="6867" actId="1076"/>
+          <ac:spMkLst>
+            <pc:docMk/>
+            <pc:sldMk cId="888644859" sldId="297"/>
+            <ac:spMk id="14" creationId="{CB7ED3A3-B950-AF0F-46A7-C81E3925F1AE}"/>
+          </ac:spMkLst>
+        </pc:spChg>
+        <pc:spChg chg="mod">
+          <ac:chgData name="Toby Donaldson" userId="2e6e5431-bb17-4c41-9985-d39c50d83c73" providerId="ADAL" clId="{F31BC264-820E-54C4-A6D1-F92AF9CC222E}" dt="2026-07-07T18:10:12.722" v="6867" actId="1076"/>
+          <ac:spMkLst>
+            <pc:docMk/>
+            <pc:sldMk cId="888644859" sldId="297"/>
+            <ac:spMk id="15" creationId="{23807AA2-DF9A-6E6C-C6E8-CE47FC91B605}"/>
+          </ac:spMkLst>
+        </pc:spChg>
+        <pc:spChg chg="mod">
+          <ac:chgData name="Toby Donaldson" userId="2e6e5431-bb17-4c41-9985-d39c50d83c73" providerId="ADAL" clId="{F31BC264-820E-54C4-A6D1-F92AF9CC222E}" dt="2026-07-07T18:10:12.722" v="6867" actId="1076"/>
+          <ac:spMkLst>
+            <pc:docMk/>
+            <pc:sldMk cId="888644859" sldId="297"/>
+            <ac:spMk id="19" creationId="{01B03086-D0F0-88C8-AC22-1B00C0CCF8D7}"/>
+          </ac:spMkLst>
+        </pc:spChg>
+        <pc:spChg chg="mod">
+          <ac:chgData name="Toby Donaldson" userId="2e6e5431-bb17-4c41-9985-d39c50d83c73" providerId="ADAL" clId="{F31BC264-820E-54C4-A6D1-F92AF9CC222E}" dt="2026-07-07T18:10:12.722" v="6867" actId="1076"/>
+          <ac:spMkLst>
+            <pc:docMk/>
+            <pc:sldMk cId="888644859" sldId="297"/>
+            <ac:spMk id="20" creationId="{5ADD9CBC-D8BA-055E-2DE6-1AA5CC5070FF}"/>
+          </ac:spMkLst>
+        </pc:spChg>
+        <pc:spChg chg="mod">
+          <ac:chgData name="Toby Donaldson" userId="2e6e5431-bb17-4c41-9985-d39c50d83c73" providerId="ADAL" clId="{F31BC264-820E-54C4-A6D1-F92AF9CC222E}" dt="2026-07-07T18:10:12.722" v="6867" actId="1076"/>
+          <ac:spMkLst>
+            <pc:docMk/>
+            <pc:sldMk cId="888644859" sldId="297"/>
+            <ac:spMk id="21" creationId="{44BA48C2-A136-E70C-07A0-6C4531395DD2}"/>
+          </ac:spMkLst>
+        </pc:spChg>
+        <pc:spChg chg="mod">
+          <ac:chgData name="Toby Donaldson" userId="2e6e5431-bb17-4c41-9985-d39c50d83c73" providerId="ADAL" clId="{F31BC264-820E-54C4-A6D1-F92AF9CC222E}" dt="2026-07-07T18:10:12.722" v="6867" actId="1076"/>
+          <ac:spMkLst>
+            <pc:docMk/>
+            <pc:sldMk cId="888644859" sldId="297"/>
+            <ac:spMk id="22" creationId="{FE16EDF9-8A14-A527-8D0E-EB6576B63E20}"/>
+          </ac:spMkLst>
+        </pc:spChg>
+        <pc:grpChg chg="mod">
+          <ac:chgData name="Toby Donaldson" userId="2e6e5431-bb17-4c41-9985-d39c50d83c73" providerId="ADAL" clId="{F31BC264-820E-54C4-A6D1-F92AF9CC222E}" dt="2026-07-07T18:10:12.722" v="6867" actId="1076"/>
+          <ac:grpSpMkLst>
+            <pc:docMk/>
+            <pc:sldMk cId="888644859" sldId="297"/>
+            <ac:grpSpMk id="5" creationId="{5F969112-C360-BA54-FC44-EBD310066EAA}"/>
+          </ac:grpSpMkLst>
+        </pc:grpChg>
+        <pc:cxnChg chg="mod">
+          <ac:chgData name="Toby Donaldson" userId="2e6e5431-bb17-4c41-9985-d39c50d83c73" providerId="ADAL" clId="{F31BC264-820E-54C4-A6D1-F92AF9CC222E}" dt="2026-07-07T18:10:12.722" v="6867" actId="1076"/>
+          <ac:cxnSpMkLst>
+            <pc:docMk/>
+            <pc:sldMk cId="888644859" sldId="297"/>
+            <ac:cxnSpMk id="11" creationId="{98093DD6-C819-EDBE-8A63-927EDBB17598}"/>
+          </ac:cxnSpMkLst>
+        </pc:cxnChg>
+        <pc:cxnChg chg="mod">
+          <ac:chgData name="Toby Donaldson" userId="2e6e5431-bb17-4c41-9985-d39c50d83c73" providerId="ADAL" clId="{F31BC264-820E-54C4-A6D1-F92AF9CC222E}" dt="2026-07-07T18:10:12.722" v="6867" actId="1076"/>
+          <ac:cxnSpMkLst>
+            <pc:docMk/>
+            <pc:sldMk cId="888644859" sldId="297"/>
+            <ac:cxnSpMk id="12" creationId="{FF834057-1C62-66F5-045C-2C0BC50D7F5C}"/>
+          </ac:cxnSpMkLst>
+        </pc:cxnChg>
+      </pc:sldChg>
+      <pc:sldChg chg="addSp delSp modSp mod">
+        <pc:chgData name="Toby Donaldson" userId="2e6e5431-bb17-4c41-9985-d39c50d83c73" providerId="ADAL" clId="{F31BC264-820E-54C4-A6D1-F92AF9CC222E}" dt="2026-07-07T18:14:43.187" v="6903" actId="21"/>
+        <pc:sldMkLst>
+          <pc:docMk/>
+          <pc:sldMk cId="1965191371" sldId="298"/>
+        </pc:sldMkLst>
+        <pc:picChg chg="add del mod">
+          <ac:chgData name="Toby Donaldson" userId="2e6e5431-bb17-4c41-9985-d39c50d83c73" providerId="ADAL" clId="{F31BC264-820E-54C4-A6D1-F92AF9CC222E}" dt="2026-07-07T18:14:43.187" v="6903" actId="21"/>
+          <ac:picMkLst>
+            <pc:docMk/>
+            <pc:sldMk cId="1965191371" sldId="298"/>
+            <ac:picMk id="3" creationId="{CAD75136-319D-A1FE-0B3E-3E83CAB9EB98}"/>
+          </ac:picMkLst>
+        </pc:picChg>
+        <pc:picChg chg="add mod">
+          <ac:chgData name="Toby Donaldson" userId="2e6e5431-bb17-4c41-9985-d39c50d83c73" providerId="ADAL" clId="{F31BC264-820E-54C4-A6D1-F92AF9CC222E}" dt="2026-07-07T18:14:39.965" v="6902"/>
+          <ac:picMkLst>
+            <pc:docMk/>
+            <pc:sldMk cId="1965191371" sldId="298"/>
+            <ac:picMk id="7" creationId="{AF7EB4E9-BD36-7AC2-C912-9B3D9A98ED0D}"/>
+          </ac:picMkLst>
+        </pc:picChg>
+      </pc:sldChg>
+      <pc:sldChg chg="addSp delSp modSp mod">
+        <pc:chgData name="Toby Donaldson" userId="2e6e5431-bb17-4c41-9985-d39c50d83c73" providerId="ADAL" clId="{F31BC264-820E-54C4-A6D1-F92AF9CC222E}" dt="2026-07-07T18:14:47.924" v="6905" actId="21"/>
+        <pc:sldMkLst>
+          <pc:docMk/>
+          <pc:sldMk cId="1806807581" sldId="299"/>
+        </pc:sldMkLst>
+        <pc:picChg chg="add del mod">
+          <ac:chgData name="Toby Donaldson" userId="2e6e5431-bb17-4c41-9985-d39c50d83c73" providerId="ADAL" clId="{F31BC264-820E-54C4-A6D1-F92AF9CC222E}" dt="2026-07-07T18:14:47.924" v="6905" actId="21"/>
+          <ac:picMkLst>
+            <pc:docMk/>
+            <pc:sldMk cId="1806807581" sldId="299"/>
+            <ac:picMk id="3" creationId="{085ADA24-83C4-4885-716B-0D46169E0D35}"/>
+          </ac:picMkLst>
+        </pc:picChg>
+        <pc:picChg chg="add mod">
+          <ac:chgData name="Toby Donaldson" userId="2e6e5431-bb17-4c41-9985-d39c50d83c73" providerId="ADAL" clId="{F31BC264-820E-54C4-A6D1-F92AF9CC222E}" dt="2026-07-07T18:14:37.450" v="6901"/>
+          <ac:picMkLst>
+            <pc:docMk/>
+            <pc:sldMk cId="1806807581" sldId="299"/>
+            <ac:picMk id="7" creationId="{C91455D2-13FE-F5D7-C00E-0031C56E33D0}"/>
+          </ac:picMkLst>
+        </pc:picChg>
+      </pc:sldChg>
+      <pc:sldChg chg="addSp delSp modSp mod">
+        <pc:chgData name="Toby Donaldson" userId="2e6e5431-bb17-4c41-9985-d39c50d83c73" providerId="ADAL" clId="{F31BC264-820E-54C4-A6D1-F92AF9CC222E}" dt="2026-07-07T18:14:45.808" v="6904" actId="21"/>
+        <pc:sldMkLst>
+          <pc:docMk/>
+          <pc:sldMk cId="4029823130" sldId="300"/>
+        </pc:sldMkLst>
+        <pc:picChg chg="add del mod">
+          <ac:chgData name="Toby Donaldson" userId="2e6e5431-bb17-4c41-9985-d39c50d83c73" providerId="ADAL" clId="{F31BC264-820E-54C4-A6D1-F92AF9CC222E}" dt="2026-07-07T18:14:45.808" v="6904" actId="21"/>
+          <ac:picMkLst>
+            <pc:docMk/>
+            <pc:sldMk cId="4029823130" sldId="300"/>
+            <ac:picMk id="3" creationId="{657773C7-6A85-4751-02D6-1A05F2349E89}"/>
+          </ac:picMkLst>
+        </pc:picChg>
+        <pc:picChg chg="add mod">
+          <ac:chgData name="Toby Donaldson" userId="2e6e5431-bb17-4c41-9985-d39c50d83c73" providerId="ADAL" clId="{F31BC264-820E-54C4-A6D1-F92AF9CC222E}" dt="2026-07-07T18:14:34.581" v="6900"/>
+          <ac:picMkLst>
+            <pc:docMk/>
+            <pc:sldMk cId="4029823130" sldId="300"/>
+            <ac:picMk id="7" creationId="{92A7BB94-7E92-5CCD-89F8-79800A83C481}"/>
+          </ac:picMkLst>
+        </pc:picChg>
+      </pc:sldChg>
+      <pc:sldChg chg="addSp delSp modSp mod">
+        <pc:chgData name="Toby Donaldson" userId="2e6e5431-bb17-4c41-9985-d39c50d83c73" providerId="ADAL" clId="{F31BC264-820E-54C4-A6D1-F92AF9CC222E}" dt="2026-07-07T18:14:55.515" v="6907" actId="21"/>
+        <pc:sldMkLst>
+          <pc:docMk/>
+          <pc:sldMk cId="1800350072" sldId="301"/>
+        </pc:sldMkLst>
+        <pc:picChg chg="add del mod">
+          <ac:chgData name="Toby Donaldson" userId="2e6e5431-bb17-4c41-9985-d39c50d83c73" providerId="ADAL" clId="{F31BC264-820E-54C4-A6D1-F92AF9CC222E}" dt="2026-07-07T18:14:55.515" v="6907" actId="21"/>
+          <ac:picMkLst>
+            <pc:docMk/>
+            <pc:sldMk cId="1800350072" sldId="301"/>
+            <ac:picMk id="3" creationId="{B6197ABD-9FAD-617F-1141-B946F0CF2AF2}"/>
+          </ac:picMkLst>
+        </pc:picChg>
+        <pc:picChg chg="add mod">
+          <ac:chgData name="Toby Donaldson" userId="2e6e5431-bb17-4c41-9985-d39c50d83c73" providerId="ADAL" clId="{F31BC264-820E-54C4-A6D1-F92AF9CC222E}" dt="2026-07-07T18:14:28.675" v="6898"/>
+          <ac:picMkLst>
+            <pc:docMk/>
+            <pc:sldMk cId="1800350072" sldId="301"/>
+            <ac:picMk id="7" creationId="{8B271E39-C1FA-A256-093E-2EFFB36EDB65}"/>
+          </ac:picMkLst>
+        </pc:picChg>
+      </pc:sldChg>
+      <pc:sldChg chg="addSp delSp modSp mod">
+        <pc:chgData name="Toby Donaldson" userId="2e6e5431-bb17-4c41-9985-d39c50d83c73" providerId="ADAL" clId="{F31BC264-820E-54C4-A6D1-F92AF9CC222E}" dt="2026-07-07T18:14:50.747" v="6906" actId="21"/>
+        <pc:sldMkLst>
+          <pc:docMk/>
+          <pc:sldMk cId="1889495731" sldId="302"/>
+        </pc:sldMkLst>
+        <pc:picChg chg="add del mod">
+          <ac:chgData name="Toby Donaldson" userId="2e6e5431-bb17-4c41-9985-d39c50d83c73" providerId="ADAL" clId="{F31BC264-820E-54C4-A6D1-F92AF9CC222E}" dt="2026-07-07T18:14:50.747" v="6906" actId="21"/>
+          <ac:picMkLst>
+            <pc:docMk/>
+            <pc:sldMk cId="1889495731" sldId="302"/>
+            <ac:picMk id="3" creationId="{2D9EFCAC-6C16-8D16-6DE0-BA49A1EF34A8}"/>
+          </ac:picMkLst>
+        </pc:picChg>
+        <pc:picChg chg="add mod">
+          <ac:chgData name="Toby Donaldson" userId="2e6e5431-bb17-4c41-9985-d39c50d83c73" providerId="ADAL" clId="{F31BC264-820E-54C4-A6D1-F92AF9CC222E}" dt="2026-07-07T18:14:31.528" v="6899"/>
+          <ac:picMkLst>
+            <pc:docMk/>
+            <pc:sldMk cId="1889495731" sldId="302"/>
+            <ac:picMk id="7" creationId="{D0A51454-1FD9-4AE1-3F26-C6412087F4CC}"/>
+          </ac:picMkLst>
+        </pc:picChg>
+      </pc:sldChg>
+      <pc:sldChg chg="addSp delSp modSp mod">
+        <pc:chgData name="Toby Donaldson" userId="2e6e5431-bb17-4c41-9985-d39c50d83c73" providerId="ADAL" clId="{F31BC264-820E-54C4-A6D1-F92AF9CC222E}" dt="2026-07-07T18:15:06.867" v="6909" actId="21"/>
+        <pc:sldMkLst>
+          <pc:docMk/>
+          <pc:sldMk cId="3661548543" sldId="303"/>
+        </pc:sldMkLst>
+        <pc:picChg chg="add del mod">
+          <ac:chgData name="Toby Donaldson" userId="2e6e5431-bb17-4c41-9985-d39c50d83c73" providerId="ADAL" clId="{F31BC264-820E-54C4-A6D1-F92AF9CC222E}" dt="2026-07-07T18:15:06.867" v="6909" actId="21"/>
+          <ac:picMkLst>
+            <pc:docMk/>
+            <pc:sldMk cId="3661548543" sldId="303"/>
+            <ac:picMk id="3" creationId="{1F337A0F-A873-2AE9-0630-B806B8A8A5C4}"/>
+          </ac:picMkLst>
+        </pc:picChg>
+        <pc:picChg chg="add mod">
+          <ac:chgData name="Toby Donaldson" userId="2e6e5431-bb17-4c41-9985-d39c50d83c73" providerId="ADAL" clId="{F31BC264-820E-54C4-A6D1-F92AF9CC222E}" dt="2026-07-07T18:14:22.357" v="6896"/>
+          <ac:picMkLst>
+            <pc:docMk/>
+            <pc:sldMk cId="3661548543" sldId="303"/>
+            <ac:picMk id="7" creationId="{871168C6-2CB6-E94B-23CD-9220BA43E701}"/>
+          </ac:picMkLst>
+        </pc:picChg>
+      </pc:sldChg>
+      <pc:sldChg chg="addSp delSp modSp mod">
+        <pc:chgData name="Toby Donaldson" userId="2e6e5431-bb17-4c41-9985-d39c50d83c73" providerId="ADAL" clId="{F31BC264-820E-54C4-A6D1-F92AF9CC222E}" dt="2026-07-07T18:14:58.584" v="6908" actId="21"/>
+        <pc:sldMkLst>
+          <pc:docMk/>
+          <pc:sldMk cId="3973868802" sldId="304"/>
+        </pc:sldMkLst>
+        <pc:picChg chg="add del mod">
+          <ac:chgData name="Toby Donaldson" userId="2e6e5431-bb17-4c41-9985-d39c50d83c73" providerId="ADAL" clId="{F31BC264-820E-54C4-A6D1-F92AF9CC222E}" dt="2026-07-07T18:14:58.584" v="6908" actId="21"/>
+          <ac:picMkLst>
+            <pc:docMk/>
+            <pc:sldMk cId="3973868802" sldId="304"/>
+            <ac:picMk id="3" creationId="{0F35B9CC-052F-140C-2158-0CD556CBC578}"/>
+          </ac:picMkLst>
+        </pc:picChg>
+        <pc:picChg chg="add mod">
+          <ac:chgData name="Toby Donaldson" userId="2e6e5431-bb17-4c41-9985-d39c50d83c73" providerId="ADAL" clId="{F31BC264-820E-54C4-A6D1-F92AF9CC222E}" dt="2026-07-07T18:14:25.593" v="6897"/>
+          <ac:picMkLst>
+            <pc:docMk/>
+            <pc:sldMk cId="3973868802" sldId="304"/>
+            <ac:picMk id="7" creationId="{76958968-8FB5-E37A-EDF9-B43ED94A907D}"/>
+          </ac:picMkLst>
+        </pc:picChg>
+      </pc:sldChg>
+      <pc:sldChg chg="addSp delSp modSp mod">
+        <pc:chgData name="Toby Donaldson" userId="2e6e5431-bb17-4c41-9985-d39c50d83c73" providerId="ADAL" clId="{F31BC264-820E-54C4-A6D1-F92AF9CC222E}" dt="2026-07-07T18:14:06.620" v="6893" actId="21"/>
+        <pc:sldMkLst>
+          <pc:docMk/>
+          <pc:sldMk cId="865677595" sldId="305"/>
+        </pc:sldMkLst>
+        <pc:picChg chg="add del mod">
+          <ac:chgData name="Toby Donaldson" userId="2e6e5431-bb17-4c41-9985-d39c50d83c73" providerId="ADAL" clId="{F31BC264-820E-54C4-A6D1-F92AF9CC222E}" dt="2026-07-07T18:14:06.620" v="6893" actId="21"/>
+          <ac:picMkLst>
+            <pc:docMk/>
+            <pc:sldMk cId="865677595" sldId="305"/>
+            <ac:picMk id="3" creationId="{EFD9E782-3DE4-F7FF-FDA7-C68AA7763FFB}"/>
+          </ac:picMkLst>
+        </pc:picChg>
+        <pc:picChg chg="add mod">
+          <ac:chgData name="Toby Donaldson" userId="2e6e5431-bb17-4c41-9985-d39c50d83c73" providerId="ADAL" clId="{F31BC264-820E-54C4-A6D1-F92AF9CC222E}" dt="2026-07-07T18:13:55.594" v="6891"/>
+          <ac:picMkLst>
+            <pc:docMk/>
+            <pc:sldMk cId="865677595" sldId="305"/>
+            <ac:picMk id="7" creationId="{84ADF516-7741-0EA8-2328-667593665B92}"/>
+          </ac:picMkLst>
+        </pc:picChg>
+        <pc:picChg chg="add mod">
+          <ac:chgData name="Toby Donaldson" userId="2e6e5431-bb17-4c41-9985-d39c50d83c73" providerId="ADAL" clId="{F31BC264-820E-54C4-A6D1-F92AF9CC222E}" dt="2026-07-07T18:14:03.729" v="6892"/>
+          <ac:picMkLst>
+            <pc:docMk/>
+            <pc:sldMk cId="865677595" sldId="305"/>
+            <ac:picMk id="14" creationId="{A363E604-803D-1A38-CFA0-5A366EEC6F5C}"/>
+          </ac:picMkLst>
+        </pc:picChg>
+      </pc:sldChg>
+      <pc:sldChg chg="addSp delSp modSp mod">
+        <pc:chgData name="Toby Donaldson" userId="2e6e5431-bb17-4c41-9985-d39c50d83c73" providerId="ADAL" clId="{F31BC264-820E-54C4-A6D1-F92AF9CC222E}" dt="2026-07-07T18:15:09.278" v="6910" actId="21"/>
+        <pc:sldMkLst>
+          <pc:docMk/>
+          <pc:sldMk cId="3818197671" sldId="306"/>
+        </pc:sldMkLst>
+        <pc:picChg chg="add del mod">
+          <ac:chgData name="Toby Donaldson" userId="2e6e5431-bb17-4c41-9985-d39c50d83c73" providerId="ADAL" clId="{F31BC264-820E-54C4-A6D1-F92AF9CC222E}" dt="2026-07-07T18:15:09.278" v="6910" actId="21"/>
+          <ac:picMkLst>
+            <pc:docMk/>
+            <pc:sldMk cId="3818197671" sldId="306"/>
+            <ac:picMk id="3" creationId="{5C7D8FCD-D48A-2AB1-15D0-482378952661}"/>
+          </ac:picMkLst>
+        </pc:picChg>
+        <pc:picChg chg="add mod">
+          <ac:chgData name="Toby Donaldson" userId="2e6e5431-bb17-4c41-9985-d39c50d83c73" providerId="ADAL" clId="{F31BC264-820E-54C4-A6D1-F92AF9CC222E}" dt="2026-07-07T18:14:11.613" v="6894"/>
+          <ac:picMkLst>
+            <pc:docMk/>
+            <pc:sldMk cId="3818197671" sldId="306"/>
+            <ac:picMk id="7" creationId="{DBB57CBD-7B2E-EBBD-A8DF-6C3A6DE498D4}"/>
+          </ac:picMkLst>
+        </pc:picChg>
+        <pc:picChg chg="add mod">
+          <ac:chgData name="Toby Donaldson" userId="2e6e5431-bb17-4c41-9985-d39c50d83c73" providerId="ADAL" clId="{F31BC264-820E-54C4-A6D1-F92AF9CC222E}" dt="2026-07-07T18:14:19.865" v="6895"/>
+          <ac:picMkLst>
+            <pc:docMk/>
+            <pc:sldMk cId="3818197671" sldId="306"/>
+            <ac:picMk id="14" creationId="{D8B09A94-7168-B3FC-549A-4ECF3D1DA1CD}"/>
+          </ac:picMkLst>
+        </pc:picChg>
+      </pc:sldChg>
+      <pc:sldChg chg="addSp modSp mod">
+        <pc:chgData name="Toby Donaldson" userId="2e6e5431-bb17-4c41-9985-d39c50d83c73" providerId="ADAL" clId="{F31BC264-820E-54C4-A6D1-F92AF9CC222E}" dt="2026-07-07T18:13:30.968" v="6886" actId="14100"/>
+        <pc:sldMkLst>
+          <pc:docMk/>
+          <pc:sldMk cId="1679941472" sldId="307"/>
+        </pc:sldMkLst>
+        <pc:picChg chg="add mod">
+          <ac:chgData name="Toby Donaldson" userId="2e6e5431-bb17-4c41-9985-d39c50d83c73" providerId="ADAL" clId="{F31BC264-820E-54C4-A6D1-F92AF9CC222E}" dt="2026-07-07T18:13:30.968" v="6886" actId="14100"/>
+          <ac:picMkLst>
+            <pc:docMk/>
+            <pc:sldMk cId="1679941472" sldId="307"/>
+            <ac:picMk id="3" creationId="{4CAB23EC-D28E-8DC7-51DD-78453317158E}"/>
+          </ac:picMkLst>
+        </pc:picChg>
+      </pc:sldChg>
+      <pc:sldChg chg="addSp delSp modSp mod">
+        <pc:chgData name="Toby Donaldson" userId="2e6e5431-bb17-4c41-9985-d39c50d83c73" providerId="ADAL" clId="{F31BC264-820E-54C4-A6D1-F92AF9CC222E}" dt="2026-07-07T18:13:51.296" v="6890" actId="21"/>
+        <pc:sldMkLst>
+          <pc:docMk/>
+          <pc:sldMk cId="3653387100" sldId="308"/>
+        </pc:sldMkLst>
+        <pc:picChg chg="add del mod">
+          <ac:chgData name="Toby Donaldson" userId="2e6e5431-bb17-4c41-9985-d39c50d83c73" providerId="ADAL" clId="{F31BC264-820E-54C4-A6D1-F92AF9CC222E}" dt="2026-07-07T18:13:51.296" v="6890" actId="21"/>
+          <ac:picMkLst>
+            <pc:docMk/>
+            <pc:sldMk cId="3653387100" sldId="308"/>
+            <ac:picMk id="3" creationId="{09A01B96-04BA-A419-97AC-69C2C07B26A8}"/>
+          </ac:picMkLst>
+        </pc:picChg>
+        <pc:picChg chg="add mod">
+          <ac:chgData name="Toby Donaldson" userId="2e6e5431-bb17-4c41-9985-d39c50d83c73" providerId="ADAL" clId="{F31BC264-820E-54C4-A6D1-F92AF9CC222E}" dt="2026-07-07T18:13:48.134" v="6889"/>
+          <ac:picMkLst>
+            <pc:docMk/>
+            <pc:sldMk cId="3653387100" sldId="308"/>
+            <ac:picMk id="7" creationId="{A139B0D6-6780-0045-FFAB-B80541603BAC}"/>
+          </ac:picMkLst>
+        </pc:picChg>
+      </pc:sldChg>
+      <pc:sldChg chg="addSp modSp">
+        <pc:chgData name="Toby Donaldson" userId="2e6e5431-bb17-4c41-9985-d39c50d83c73" providerId="ADAL" clId="{F31BC264-820E-54C4-A6D1-F92AF9CC222E}" dt="2026-07-07T18:13:37.198" v="6887"/>
+        <pc:sldMkLst>
+          <pc:docMk/>
+          <pc:sldMk cId="476173012" sldId="309"/>
+        </pc:sldMkLst>
+        <pc:picChg chg="add mod">
+          <ac:chgData name="Toby Donaldson" userId="2e6e5431-bb17-4c41-9985-d39c50d83c73" providerId="ADAL" clId="{F31BC264-820E-54C4-A6D1-F92AF9CC222E}" dt="2026-07-07T18:13:37.198" v="6887"/>
+          <ac:picMkLst>
+            <pc:docMk/>
+            <pc:sldMk cId="476173012" sldId="309"/>
+            <ac:picMk id="3" creationId="{D871619C-4566-3570-DA24-C4E3DC2FBA5B}"/>
+          </ac:picMkLst>
+        </pc:picChg>
+      </pc:sldChg>
+      <pc:sldChg chg="addSp modSp">
+        <pc:chgData name="Toby Donaldson" userId="2e6e5431-bb17-4c41-9985-d39c50d83c73" providerId="ADAL" clId="{F31BC264-820E-54C4-A6D1-F92AF9CC222E}" dt="2026-07-07T18:13:42.026" v="6888"/>
+        <pc:sldMkLst>
+          <pc:docMk/>
+          <pc:sldMk cId="3785476128" sldId="310"/>
+        </pc:sldMkLst>
+        <pc:picChg chg="add mod">
+          <ac:chgData name="Toby Donaldson" userId="2e6e5431-bb17-4c41-9985-d39c50d83c73" providerId="ADAL" clId="{F31BC264-820E-54C4-A6D1-F92AF9CC222E}" dt="2026-07-07T18:13:42.026" v="6888"/>
+          <ac:picMkLst>
+            <pc:docMk/>
+            <pc:sldMk cId="3785476128" sldId="310"/>
+            <ac:picMk id="3" creationId="{7ABED55F-C13C-7A14-F8EE-3EAAA61AD55F}"/>
+          </ac:picMkLst>
+        </pc:picChg>
+      </pc:sldChg>
+      <pc:sldChg chg="modSp mod">
+        <pc:chgData name="Toby Donaldson" userId="2e6e5431-bb17-4c41-9985-d39c50d83c73" providerId="ADAL" clId="{F31BC264-820E-54C4-A6D1-F92AF9CC222E}" dt="2026-07-07T18:16:11.088" v="6912" actId="20577"/>
+        <pc:sldMkLst>
+          <pc:docMk/>
+          <pc:sldMk cId="2031534662" sldId="311"/>
+        </pc:sldMkLst>
+        <pc:spChg chg="mod">
+          <ac:chgData name="Toby Donaldson" userId="2e6e5431-bb17-4c41-9985-d39c50d83c73" providerId="ADAL" clId="{F31BC264-820E-54C4-A6D1-F92AF9CC222E}" dt="2026-07-07T18:16:11.088" v="6912" actId="20577"/>
+          <ac:spMkLst>
+            <pc:docMk/>
+            <pc:sldMk cId="2031534662" sldId="311"/>
+            <ac:spMk id="5" creationId="{4A7E6DB2-7B9C-126F-25EC-4EC9218BAF00}"/>
+          </ac:spMkLst>
+        </pc:spChg>
+      </pc:sldChg>
+      <pc:sldChg chg="delSp mod">
+        <pc:chgData name="Toby Donaldson" userId="2e6e5431-bb17-4c41-9985-d39c50d83c73" providerId="ADAL" clId="{F31BC264-820E-54C4-A6D1-F92AF9CC222E}" dt="2026-07-07T18:16:42.343" v="6915" actId="21"/>
+        <pc:sldMkLst>
+          <pc:docMk/>
+          <pc:sldMk cId="4142904386" sldId="312"/>
+        </pc:sldMkLst>
+        <pc:spChg chg="del">
+          <ac:chgData name="Toby Donaldson" userId="2e6e5431-bb17-4c41-9985-d39c50d83c73" providerId="ADAL" clId="{F31BC264-820E-54C4-A6D1-F92AF9CC222E}" dt="2026-07-07T18:16:42.343" v="6915" actId="21"/>
+          <ac:spMkLst>
+            <pc:docMk/>
+            <pc:sldMk cId="4142904386" sldId="312"/>
+            <ac:spMk id="3" creationId="{82DFDCBA-B3AD-D22A-CC0C-6D0BC866ACA4}"/>
+          </ac:spMkLst>
+        </pc:spChg>
+        <pc:spChg chg="del">
+          <ac:chgData name="Toby Donaldson" userId="2e6e5431-bb17-4c41-9985-d39c50d83c73" providerId="ADAL" clId="{F31BC264-820E-54C4-A6D1-F92AF9CC222E}" dt="2026-07-07T18:16:35.125" v="6914" actId="21"/>
+          <ac:spMkLst>
+            <pc:docMk/>
+            <pc:sldMk cId="4142904386" sldId="312"/>
+            <ac:spMk id="7" creationId="{8D6436CF-74F7-D08A-0731-C38A6B60BEEB}"/>
+          </ac:spMkLst>
+        </pc:spChg>
+        <pc:spChg chg="del">
+          <ac:chgData name="Toby Donaldson" userId="2e6e5431-bb17-4c41-9985-d39c50d83c73" providerId="ADAL" clId="{F31BC264-820E-54C4-A6D1-F92AF9CC222E}" dt="2026-07-07T18:16:35.125" v="6914" actId="21"/>
+          <ac:spMkLst>
+            <pc:docMk/>
+            <pc:sldMk cId="4142904386" sldId="312"/>
+            <ac:spMk id="8" creationId="{422D7868-4FF3-961A-26FB-9FA51F5D510D}"/>
+          </ac:spMkLst>
+        </pc:spChg>
+      </pc:sldChg>
+      <pc:sldChg chg="delSp mod">
+        <pc:chgData name="Toby Donaldson" userId="2e6e5431-bb17-4c41-9985-d39c50d83c73" providerId="ADAL" clId="{F31BC264-820E-54C4-A6D1-F92AF9CC222E}" dt="2026-07-07T18:17:54.060" v="6918" actId="21"/>
+        <pc:sldMkLst>
+          <pc:docMk/>
+          <pc:sldMk cId="1955106547" sldId="313"/>
+        </pc:sldMkLst>
+        <pc:spChg chg="del">
+          <ac:chgData name="Toby Donaldson" userId="2e6e5431-bb17-4c41-9985-d39c50d83c73" providerId="ADAL" clId="{F31BC264-820E-54C4-A6D1-F92AF9CC222E}" dt="2026-07-07T18:17:54.060" v="6918" actId="21"/>
+          <ac:spMkLst>
+            <pc:docMk/>
+            <pc:sldMk cId="1955106547" sldId="313"/>
+            <ac:spMk id="3" creationId="{3ADB69CB-EA4B-4317-273B-3265E665B0D9}"/>
+          </ac:spMkLst>
+        </pc:spChg>
+        <pc:spChg chg="del">
+          <ac:chgData name="Toby Donaldson" userId="2e6e5431-bb17-4c41-9985-d39c50d83c73" providerId="ADAL" clId="{F31BC264-820E-54C4-A6D1-F92AF9CC222E}" dt="2026-07-07T18:17:49.286" v="6917" actId="21"/>
+          <ac:spMkLst>
+            <pc:docMk/>
+            <pc:sldMk cId="1955106547" sldId="313"/>
+            <ac:spMk id="9" creationId="{75257CFA-E4D5-77E0-7CBB-44A71F66C514}"/>
+          </ac:spMkLst>
+        </pc:spChg>
+        <pc:spChg chg="del">
+          <ac:chgData name="Toby Donaldson" userId="2e6e5431-bb17-4c41-9985-d39c50d83c73" providerId="ADAL" clId="{F31BC264-820E-54C4-A6D1-F92AF9CC222E}" dt="2026-07-07T18:17:49.286" v="6917" actId="21"/>
+          <ac:spMkLst>
+            <pc:docMk/>
+            <pc:sldMk cId="1955106547" sldId="313"/>
+            <ac:spMk id="10" creationId="{C839C654-0CE0-8D56-0073-3093C8B08778}"/>
+          </ac:spMkLst>
+        </pc:spChg>
+      </pc:sldChg>
+      <pc:sldChg chg="modSp mod">
+        <pc:chgData name="Toby Donaldson" userId="2e6e5431-bb17-4c41-9985-d39c50d83c73" providerId="ADAL" clId="{F31BC264-820E-54C4-A6D1-F92AF9CC222E}" dt="2026-07-07T18:19:56.718" v="6954" actId="113"/>
+        <pc:sldMkLst>
+          <pc:docMk/>
+          <pc:sldMk cId="1820782728" sldId="323"/>
+        </pc:sldMkLst>
+        <pc:spChg chg="mod">
+          <ac:chgData name="Toby Donaldson" userId="2e6e5431-bb17-4c41-9985-d39c50d83c73" providerId="ADAL" clId="{F31BC264-820E-54C4-A6D1-F92AF9CC222E}" dt="2026-07-07T18:19:56.718" v="6954" actId="113"/>
+          <ac:spMkLst>
+            <pc:docMk/>
+            <pc:sldMk cId="1820782728" sldId="323"/>
+            <ac:spMk id="3" creationId="{D85A67D3-3968-20AD-B53C-8BF9390CA54B}"/>
+          </ac:spMkLst>
+        </pc:spChg>
+      </pc:sldChg>
+      <pc:sldChg chg="addSp delSp modSp mod">
+        <pc:chgData name="Toby Donaldson" userId="2e6e5431-bb17-4c41-9985-d39c50d83c73" providerId="ADAL" clId="{F31BC264-820E-54C4-A6D1-F92AF9CC222E}" dt="2026-07-07T18:20:15.504" v="6959"/>
+        <pc:sldMkLst>
+          <pc:docMk/>
+          <pc:sldMk cId="4279159083" sldId="324"/>
+        </pc:sldMkLst>
+        <pc:spChg chg="del">
+          <ac:chgData name="Toby Donaldson" userId="2e6e5431-bb17-4c41-9985-d39c50d83c73" providerId="ADAL" clId="{F31BC264-820E-54C4-A6D1-F92AF9CC222E}" dt="2026-07-07T18:20:00.519" v="6955" actId="21"/>
+          <ac:spMkLst>
+            <pc:docMk/>
+            <pc:sldMk cId="4279159083" sldId="324"/>
+            <ac:spMk id="3" creationId="{9AA2DB9E-2EA2-AF2A-1592-962F5DE91E99}"/>
+          </ac:spMkLst>
+        </pc:spChg>
+        <pc:spChg chg="add del mod">
+          <ac:chgData name="Toby Donaldson" userId="2e6e5431-bb17-4c41-9985-d39c50d83c73" providerId="ADAL" clId="{F31BC264-820E-54C4-A6D1-F92AF9CC222E}" dt="2026-07-07T18:20:10.163" v="6958" actId="21"/>
+          <ac:spMkLst>
+            <pc:docMk/>
+            <pc:sldMk cId="4279159083" sldId="324"/>
+            <ac:spMk id="7" creationId="{B303EA89-A111-4CE5-ECDD-3EBB86302B73}"/>
+          </ac:spMkLst>
+        </pc:spChg>
+        <pc:spChg chg="add mod">
+          <ac:chgData name="Toby Donaldson" userId="2e6e5431-bb17-4c41-9985-d39c50d83c73" providerId="ADAL" clId="{F31BC264-820E-54C4-A6D1-F92AF9CC222E}" dt="2026-07-07T18:20:07.732" v="6957"/>
+          <ac:spMkLst>
+            <pc:docMk/>
+            <pc:sldMk cId="4279159083" sldId="324"/>
+            <ac:spMk id="8" creationId="{337220B7-5F8A-260D-C807-01FD372B4D59}"/>
+          </ac:spMkLst>
+        </pc:spChg>
+        <pc:spChg chg="add mod">
+          <ac:chgData name="Toby Donaldson" userId="2e6e5431-bb17-4c41-9985-d39c50d83c73" providerId="ADAL" clId="{F31BC264-820E-54C4-A6D1-F92AF9CC222E}" dt="2026-07-07T18:20:15.504" v="6959"/>
+          <ac:spMkLst>
+            <pc:docMk/>
+            <pc:sldMk cId="4279159083" sldId="324"/>
+            <ac:spMk id="9" creationId="{9A73C4B4-FFB5-0AE6-D9E9-206E8CF50BA2}"/>
+          </ac:spMkLst>
+        </pc:spChg>
+      </pc:sldChg>
+      <pc:sldChg chg="modSp mod">
+        <pc:chgData name="Toby Donaldson" userId="2e6e5431-bb17-4c41-9985-d39c50d83c73" providerId="ADAL" clId="{F31BC264-820E-54C4-A6D1-F92AF9CC222E}" dt="2026-07-07T18:20:43.388" v="6967" actId="20577"/>
+        <pc:sldMkLst>
+          <pc:docMk/>
+          <pc:sldMk cId="1237262178" sldId="325"/>
+        </pc:sldMkLst>
+        <pc:spChg chg="mod">
+          <ac:chgData name="Toby Donaldson" userId="2e6e5431-bb17-4c41-9985-d39c50d83c73" providerId="ADAL" clId="{F31BC264-820E-54C4-A6D1-F92AF9CC222E}" dt="2026-07-07T18:20:43.388" v="6967" actId="20577"/>
+          <ac:spMkLst>
+            <pc:docMk/>
+            <pc:sldMk cId="1237262178" sldId="325"/>
+            <ac:spMk id="3" creationId="{864B3A3C-6D91-C9B6-2A55-B5DC61EB6B2D}"/>
+          </ac:spMkLst>
+        </pc:spChg>
+      </pc:sldChg>
+      <pc:sldChg chg="addSp delSp modSp mod">
+        <pc:chgData name="Toby Donaldson" userId="2e6e5431-bb17-4c41-9985-d39c50d83c73" providerId="ADAL" clId="{F31BC264-820E-54C4-A6D1-F92AF9CC222E}" dt="2026-07-07T18:21:06.413" v="6970"/>
+        <pc:sldMkLst>
+          <pc:docMk/>
+          <pc:sldMk cId="687720161" sldId="327"/>
+        </pc:sldMkLst>
+        <pc:spChg chg="del">
+          <ac:chgData name="Toby Donaldson" userId="2e6e5431-bb17-4c41-9985-d39c50d83c73" providerId="ADAL" clId="{F31BC264-820E-54C4-A6D1-F92AF9CC222E}" dt="2026-07-07T18:20:56.359" v="6968" actId="21"/>
+          <ac:spMkLst>
+            <pc:docMk/>
+            <pc:sldMk cId="687720161" sldId="327"/>
+            <ac:spMk id="3" creationId="{D3BA0417-7314-ACF6-6C6F-1805E39E627E}"/>
+          </ac:spMkLst>
+        </pc:spChg>
+        <pc:spChg chg="add del mod">
+          <ac:chgData name="Toby Donaldson" userId="2e6e5431-bb17-4c41-9985-d39c50d83c73" providerId="ADAL" clId="{F31BC264-820E-54C4-A6D1-F92AF9CC222E}" dt="2026-07-07T18:20:58.744" v="6969" actId="21"/>
+          <ac:spMkLst>
+            <pc:docMk/>
+            <pc:sldMk cId="687720161" sldId="327"/>
+            <ac:spMk id="46" creationId="{492AB489-C69F-FE17-9D06-0A7D2EAC8F1E}"/>
+          </ac:spMkLst>
+        </pc:spChg>
+        <pc:spChg chg="add mod">
+          <ac:chgData name="Toby Donaldson" userId="2e6e5431-bb17-4c41-9985-d39c50d83c73" providerId="ADAL" clId="{F31BC264-820E-54C4-A6D1-F92AF9CC222E}" dt="2026-07-07T18:21:06.413" v="6970"/>
+          <ac:spMkLst>
+            <pc:docMk/>
+            <pc:sldMk cId="687720161" sldId="327"/>
+            <ac:spMk id="47" creationId="{CB705E69-F314-105F-9485-C7CD6BE785EC}"/>
+          </ac:spMkLst>
+        </pc:spChg>
+      </pc:sldChg>
+      <pc:sldChg chg="modSp mod">
+        <pc:chgData name="Toby Donaldson" userId="2e6e5431-bb17-4c41-9985-d39c50d83c73" providerId="ADAL" clId="{F31BC264-820E-54C4-A6D1-F92AF9CC222E}" dt="2026-07-07T18:28:07.734" v="7101" actId="20577"/>
+        <pc:sldMkLst>
+          <pc:docMk/>
+          <pc:sldMk cId="1535305635" sldId="328"/>
+        </pc:sldMkLst>
+        <pc:spChg chg="mod">
+          <ac:chgData name="Toby Donaldson" userId="2e6e5431-bb17-4c41-9985-d39c50d83c73" providerId="ADAL" clId="{F31BC264-820E-54C4-A6D1-F92AF9CC222E}" dt="2026-07-07T18:28:07.734" v="7101" actId="20577"/>
+          <ac:spMkLst>
+            <pc:docMk/>
+            <pc:sldMk cId="1535305635" sldId="328"/>
+            <ac:spMk id="3" creationId="{735C4B4B-24C7-7884-A603-002DBEB6AFF5}"/>
+          </ac:spMkLst>
+        </pc:spChg>
+      </pc:sldChg>
+      <pc:sldChg chg="add">
+        <pc:chgData name="Toby Donaldson" userId="2e6e5431-bb17-4c41-9985-d39c50d83c73" providerId="ADAL" clId="{F31BC264-820E-54C4-A6D1-F92AF9CC222E}" dt="2026-07-07T18:16:24.408" v="6913" actId="2890"/>
+        <pc:sldMkLst>
+          <pc:docMk/>
+          <pc:sldMk cId="2328850276" sldId="329"/>
+        </pc:sldMkLst>
+      </pc:sldChg>
+      <pc:sldChg chg="add">
+        <pc:chgData name="Toby Donaldson" userId="2e6e5431-bb17-4c41-9985-d39c50d83c73" providerId="ADAL" clId="{F31BC264-820E-54C4-A6D1-F92AF9CC222E}" dt="2026-07-07T18:17:44.967" v="6916" actId="2890"/>
+        <pc:sldMkLst>
+          <pc:docMk/>
+          <pc:sldMk cId="1229345825" sldId="330"/>
+        </pc:sldMkLst>
+      </pc:sldChg>
     </pc:docChg>
   </pc:docChgLst>
   <pc:docChgLst>
     <pc:chgData name="Toby Donaldson" userId="2e6e5431-bb17-4c41-9985-d39c50d83c73" providerId="ADAL" clId="{7F9681A8-EEE2-56F4-9B39-ECCBEE0471AC}"/>
     <pc:docChg chg="undo redo custSel addSld delSld modSld sldOrd">
-      <pc:chgData name="Toby Donaldson" userId="2e6e5431-bb17-4c41-9985-d39c50d83c73" providerId="ADAL" clId="{7F9681A8-EEE2-56F4-9B39-ECCBEE0471AC}" dt="2026-07-07T04:37:39.190" v="22756" actId="20577"/>
+      <pc:chgData name="Toby Donaldson" userId="2e6e5431-bb17-4c41-9985-d39c50d83c73" providerId="ADAL" clId="{7F9681A8-EEE2-56F4-9B39-ECCBEE0471AC}" dt="2026-07-07T04:38:51.825" v="22763" actId="20577"/>
       <pc:docMkLst>
         <pc:docMk/>
       </pc:docMkLst>
       <pc:sldChg chg="modSp mod">
-        <pc:chgData name="Toby Donaldson" userId="2e6e5431-bb17-4c41-9985-d39c50d83c73" providerId="ADAL" clId="{7F9681A8-EEE2-56F4-9B39-ECCBEE0471AC}" dt="2026-07-06T18:05:26.673" v="19323" actId="20577"/>
+        <pc:chgData name="Toby Donaldson" userId="2e6e5431-bb17-4c41-9985-d39c50d83c73" providerId="ADAL" clId="{7F9681A8-EEE2-56F4-9B39-ECCBEE0471AC}" dt="2026-07-07T04:38:51.825" v="22763" actId="20577"/>
         <pc:sldMkLst>
           <pc:docMk/>
           <pc:sldMk cId="9530373" sldId="256"/>
         </pc:sldMkLst>
         <pc:spChg chg="mod">
-          <ac:chgData name="Toby Donaldson" userId="2e6e5431-bb17-4c41-9985-d39c50d83c73" providerId="ADAL" clId="{7F9681A8-EEE2-56F4-9B39-ECCBEE0471AC}" dt="2026-07-06T18:05:11.998" v="19304" actId="20577"/>
+          <ac:chgData name="Toby Donaldson" userId="2e6e5431-bb17-4c41-9985-d39c50d83c73" providerId="ADAL" clId="{7F9681A8-EEE2-56F4-9B39-ECCBEE0471AC}" dt="2026-07-07T04:38:51.825" v="22763" actId="20577"/>
           <ac:spMkLst>
             <pc:docMk/>
             <pc:sldMk cId="9530373" sldId="256"/>
@@ -4499,7 +5124,7 @@
           <a:p>
             <a:fld id="{889F9635-12D6-CA48-83F0-27F24E8721A6}" type="datetimeFigureOut">
               <a:rPr lang="en-US" smtClean="0"/>
-              <a:t>7/6/26</a:t>
+              <a:t>7/7/26</a:t>
             </a:fld>
             <a:endParaRPr lang="en-US"/>
           </a:p>
@@ -4697,7 +5322,7 @@
           <a:p>
             <a:fld id="{889F9635-12D6-CA48-83F0-27F24E8721A6}" type="datetimeFigureOut">
               <a:rPr lang="en-US" smtClean="0"/>
-              <a:t>7/6/26</a:t>
+              <a:t>7/7/26</a:t>
             </a:fld>
             <a:endParaRPr lang="en-US"/>
           </a:p>
@@ -4905,7 +5530,7 @@
           <a:p>
             <a:fld id="{889F9635-12D6-CA48-83F0-27F24E8721A6}" type="datetimeFigureOut">
               <a:rPr lang="en-US" smtClean="0"/>
-              <a:t>7/6/26</a:t>
+              <a:t>7/7/26</a:t>
             </a:fld>
             <a:endParaRPr lang="en-US"/>
           </a:p>
@@ -5103,7 +5728,7 @@
           <a:p>
             <a:fld id="{889F9635-12D6-CA48-83F0-27F24E8721A6}" type="datetimeFigureOut">
               <a:rPr lang="en-US" smtClean="0"/>
-              <a:t>7/6/26</a:t>
+              <a:t>7/7/26</a:t>
             </a:fld>
             <a:endParaRPr lang="en-US"/>
           </a:p>
@@ -5378,7 +6003,7 @@
           <a:p>
             <a:fld id="{889F9635-12D6-CA48-83F0-27F24E8721A6}" type="datetimeFigureOut">
               <a:rPr lang="en-US" smtClean="0"/>
-              <a:t>7/6/26</a:t>
+              <a:t>7/7/26</a:t>
             </a:fld>
             <a:endParaRPr lang="en-US"/>
           </a:p>
@@ -5643,7 +6268,7 @@
           <a:p>
             <a:fld id="{889F9635-12D6-CA48-83F0-27F24E8721A6}" type="datetimeFigureOut">
               <a:rPr lang="en-US" smtClean="0"/>
-              <a:t>7/6/26</a:t>
+              <a:t>7/7/26</a:t>
             </a:fld>
             <a:endParaRPr lang="en-US"/>
           </a:p>
@@ -6055,7 +6680,7 @@
           <a:p>
             <a:fld id="{889F9635-12D6-CA48-83F0-27F24E8721A6}" type="datetimeFigureOut">
               <a:rPr lang="en-US" smtClean="0"/>
-              <a:t>7/6/26</a:t>
+              <a:t>7/7/26</a:t>
             </a:fld>
             <a:endParaRPr lang="en-US"/>
           </a:p>
@@ -6196,7 +6821,7 @@
           <a:p>
             <a:fld id="{889F9635-12D6-CA48-83F0-27F24E8721A6}" type="datetimeFigureOut">
               <a:rPr lang="en-US" smtClean="0"/>
-              <a:t>7/6/26</a:t>
+              <a:t>7/7/26</a:t>
             </a:fld>
             <a:endParaRPr lang="en-US"/>
           </a:p>
@@ -6309,7 +6934,7 @@
           <a:p>
             <a:fld id="{889F9635-12D6-CA48-83F0-27F24E8721A6}" type="datetimeFigureOut">
               <a:rPr lang="en-US" smtClean="0"/>
-              <a:t>7/6/26</a:t>
+              <a:t>7/7/26</a:t>
             </a:fld>
             <a:endParaRPr lang="en-US"/>
           </a:p>
@@ -6620,7 +7245,7 @@
           <a:p>
             <a:fld id="{889F9635-12D6-CA48-83F0-27F24E8721A6}" type="datetimeFigureOut">
               <a:rPr lang="en-US" smtClean="0"/>
-              <a:t>7/6/26</a:t>
+              <a:t>7/7/26</a:t>
             </a:fld>
             <a:endParaRPr lang="en-US"/>
           </a:p>
@@ -6908,7 +7533,7 @@
           <a:p>
             <a:fld id="{889F9635-12D6-CA48-83F0-27F24E8721A6}" type="datetimeFigureOut">
               <a:rPr lang="en-US" smtClean="0"/>
-              <a:t>7/6/26</a:t>
+              <a:t>7/7/26</a:t>
             </a:fld>
             <a:endParaRPr lang="en-US"/>
           </a:p>
@@ -7149,7 +7774,7 @@
           <a:p>
             <a:fld id="{889F9635-12D6-CA48-83F0-27F24E8721A6}" type="datetimeFigureOut">
               <a:rPr lang="en-US" smtClean="0"/>
-              <a:t>7/6/26</a:t>
+              <a:t>7/7/26</a:t>
             </a:fld>
             <a:endParaRPr lang="en-US"/>
           </a:p>
@@ -7589,7 +8214,7 @@
           <a:p>
             <a:r>
               <a:rPr lang="en-US" dirty="0"/>
-              <a:t>Binary Search Trees</a:t>
+              <a:t>Binary Search Trees (BSTs)</a:t>
             </a:r>
           </a:p>
         </p:txBody>
@@ -8736,6 +9361,36 @@
           </a:p>
         </p:txBody>
       </p:sp>
+      <p:pic>
+        <p:nvPicPr>
+          <p:cNvPr id="7" name="Picture 6">
+            <a:extLst>
+              <a:ext uri="{FF2B5EF4-FFF2-40B4-BE49-F238E27FC236}">
+                <a16:creationId xmlns:a16="http://schemas.microsoft.com/office/drawing/2014/main" id="{8B271E39-C1FA-A256-093E-2EFFB36EDB65}"/>
+              </a:ext>
+            </a:extLst>
+          </p:cNvPr>
+          <p:cNvPicPr>
+            <a:picLocks noChangeAspect="1"/>
+          </p:cNvPicPr>
+          <p:nvPr/>
+        </p:nvPicPr>
+        <p:blipFill>
+          <a:blip r:embed="rId3"/>
+          <a:stretch>
+            <a:fillRect/>
+          </a:stretch>
+        </p:blipFill>
+        <p:spPr>
+          <a:xfrm>
+            <a:off x="7213360" y="4913972"/>
+            <a:ext cx="4442728" cy="1860851"/>
+          </a:xfrm>
+          <a:prstGeom prst="rect">
+            <a:avLst/>
+          </a:prstGeom>
+        </p:spPr>
+      </p:pic>
     </p:spTree>
     <p:extLst>
       <p:ext uri="{BB962C8B-B14F-4D97-AF65-F5344CB8AC3E}">
@@ -9903,6 +10558,36 @@
           </p:spPr>
         </p:pic>
       </p:grpSp>
+      <p:pic>
+        <p:nvPicPr>
+          <p:cNvPr id="7" name="Picture 6">
+            <a:extLst>
+              <a:ext uri="{FF2B5EF4-FFF2-40B4-BE49-F238E27FC236}">
+                <a16:creationId xmlns:a16="http://schemas.microsoft.com/office/drawing/2014/main" id="{76958968-8FB5-E37A-EDF9-B43ED94A907D}"/>
+              </a:ext>
+            </a:extLst>
+          </p:cNvPr>
+          <p:cNvPicPr>
+            <a:picLocks noChangeAspect="1"/>
+          </p:cNvPicPr>
+          <p:nvPr/>
+        </p:nvPicPr>
+        <p:blipFill>
+          <a:blip r:embed="rId3"/>
+          <a:stretch>
+            <a:fillRect/>
+          </a:stretch>
+        </p:blipFill>
+        <p:spPr>
+          <a:xfrm>
+            <a:off x="7213360" y="4913972"/>
+            <a:ext cx="4442728" cy="1860851"/>
+          </a:xfrm>
+          <a:prstGeom prst="rect">
+            <a:avLst/>
+          </a:prstGeom>
+        </p:spPr>
+      </p:pic>
     </p:spTree>
     <p:extLst>
       <p:ext uri="{BB962C8B-B14F-4D97-AF65-F5344CB8AC3E}">
@@ -11393,6 +12078,36 @@
           </a:p>
         </p:txBody>
       </p:sp>
+      <p:pic>
+        <p:nvPicPr>
+          <p:cNvPr id="7" name="Picture 6">
+            <a:extLst>
+              <a:ext uri="{FF2B5EF4-FFF2-40B4-BE49-F238E27FC236}">
+                <a16:creationId xmlns:a16="http://schemas.microsoft.com/office/drawing/2014/main" id="{871168C6-2CB6-E94B-23CD-9220BA43E701}"/>
+              </a:ext>
+            </a:extLst>
+          </p:cNvPr>
+          <p:cNvPicPr>
+            <a:picLocks noChangeAspect="1"/>
+          </p:cNvPicPr>
+          <p:nvPr/>
+        </p:nvPicPr>
+        <p:blipFill>
+          <a:blip r:embed="rId3"/>
+          <a:stretch>
+            <a:fillRect/>
+          </a:stretch>
+        </p:blipFill>
+        <p:spPr>
+          <a:xfrm>
+            <a:off x="7213360" y="4913972"/>
+            <a:ext cx="4442728" cy="1860851"/>
+          </a:xfrm>
+          <a:prstGeom prst="rect">
+            <a:avLst/>
+          </a:prstGeom>
+        </p:spPr>
+      </p:pic>
     </p:spTree>
     <p:extLst>
       <p:ext uri="{BB962C8B-B14F-4D97-AF65-F5344CB8AC3E}">
@@ -12952,6 +13667,36 @@
           </p:spPr>
         </p:pic>
       </p:grpSp>
+      <p:pic>
+        <p:nvPicPr>
+          <p:cNvPr id="14" name="Picture 13">
+            <a:extLst>
+              <a:ext uri="{FF2B5EF4-FFF2-40B4-BE49-F238E27FC236}">
+                <a16:creationId xmlns:a16="http://schemas.microsoft.com/office/drawing/2014/main" id="{D8B09A94-7168-B3FC-549A-4ECF3D1DA1CD}"/>
+              </a:ext>
+            </a:extLst>
+          </p:cNvPr>
+          <p:cNvPicPr>
+            <a:picLocks noChangeAspect="1"/>
+          </p:cNvPicPr>
+          <p:nvPr/>
+        </p:nvPicPr>
+        <p:blipFill>
+          <a:blip r:embed="rId4"/>
+          <a:stretch>
+            <a:fillRect/>
+          </a:stretch>
+        </p:blipFill>
+        <p:spPr>
+          <a:xfrm>
+            <a:off x="7213360" y="4913972"/>
+            <a:ext cx="4442728" cy="1860851"/>
+          </a:xfrm>
+          <a:prstGeom prst="rect">
+            <a:avLst/>
+          </a:prstGeom>
+        </p:spPr>
+      </p:pic>
     </p:spTree>
     <p:extLst>
       <p:ext uri="{BB962C8B-B14F-4D97-AF65-F5344CB8AC3E}">
@@ -14813,6 +15558,36 @@
           </a:p>
         </p:txBody>
       </p:sp>
+      <p:pic>
+        <p:nvPicPr>
+          <p:cNvPr id="14" name="Picture 13">
+            <a:extLst>
+              <a:ext uri="{FF2B5EF4-FFF2-40B4-BE49-F238E27FC236}">
+                <a16:creationId xmlns:a16="http://schemas.microsoft.com/office/drawing/2014/main" id="{A363E604-803D-1A38-CFA0-5A366EEC6F5C}"/>
+              </a:ext>
+            </a:extLst>
+          </p:cNvPr>
+          <p:cNvPicPr>
+            <a:picLocks noChangeAspect="1"/>
+          </p:cNvPicPr>
+          <p:nvPr/>
+        </p:nvPicPr>
+        <p:blipFill>
+          <a:blip r:embed="rId4"/>
+          <a:stretch>
+            <a:fillRect/>
+          </a:stretch>
+        </p:blipFill>
+        <p:spPr>
+          <a:xfrm>
+            <a:off x="7213360" y="4913972"/>
+            <a:ext cx="4442728" cy="1860851"/>
+          </a:xfrm>
+          <a:prstGeom prst="rect">
+            <a:avLst/>
+          </a:prstGeom>
+        </p:spPr>
+      </p:pic>
     </p:spTree>
     <p:extLst>
       <p:ext uri="{BB962C8B-B14F-4D97-AF65-F5344CB8AC3E}">
@@ -16743,6 +17518,36 @@
           </p:spPr>
         </p:pic>
       </p:grpSp>
+      <p:pic>
+        <p:nvPicPr>
+          <p:cNvPr id="7" name="Picture 6">
+            <a:extLst>
+              <a:ext uri="{FF2B5EF4-FFF2-40B4-BE49-F238E27FC236}">
+                <a16:creationId xmlns:a16="http://schemas.microsoft.com/office/drawing/2014/main" id="{A139B0D6-6780-0045-FFAB-B80541603BAC}"/>
+              </a:ext>
+            </a:extLst>
+          </p:cNvPr>
+          <p:cNvPicPr>
+            <a:picLocks noChangeAspect="1"/>
+          </p:cNvPicPr>
+          <p:nvPr/>
+        </p:nvPicPr>
+        <p:blipFill>
+          <a:blip r:embed="rId4"/>
+          <a:stretch>
+            <a:fillRect/>
+          </a:stretch>
+        </p:blipFill>
+        <p:spPr>
+          <a:xfrm>
+            <a:off x="7213360" y="4913972"/>
+            <a:ext cx="4442728" cy="1860851"/>
+          </a:xfrm>
+          <a:prstGeom prst="rect">
+            <a:avLst/>
+          </a:prstGeom>
+        </p:spPr>
+      </p:pic>
     </p:spTree>
     <p:extLst>
       <p:ext uri="{BB962C8B-B14F-4D97-AF65-F5344CB8AC3E}">
@@ -19126,6 +19931,36 @@
           </a:p>
         </p:txBody>
       </p:sp>
+      <p:pic>
+        <p:nvPicPr>
+          <p:cNvPr id="3" name="Picture 2">
+            <a:extLst>
+              <a:ext uri="{FF2B5EF4-FFF2-40B4-BE49-F238E27FC236}">
+                <a16:creationId xmlns:a16="http://schemas.microsoft.com/office/drawing/2014/main" id="{4CAB23EC-D28E-8DC7-51DD-78453317158E}"/>
+              </a:ext>
+            </a:extLst>
+          </p:cNvPr>
+          <p:cNvPicPr>
+            <a:picLocks noChangeAspect="1"/>
+          </p:cNvPicPr>
+          <p:nvPr/>
+        </p:nvPicPr>
+        <p:blipFill>
+          <a:blip r:embed="rId4"/>
+          <a:stretch>
+            <a:fillRect/>
+          </a:stretch>
+        </p:blipFill>
+        <p:spPr>
+          <a:xfrm>
+            <a:off x="7213360" y="4913972"/>
+            <a:ext cx="4442728" cy="1860851"/>
+          </a:xfrm>
+          <a:prstGeom prst="rect">
+            <a:avLst/>
+          </a:prstGeom>
+        </p:spPr>
+      </p:pic>
     </p:spTree>
     <p:extLst>
       <p:ext uri="{BB962C8B-B14F-4D97-AF65-F5344CB8AC3E}">
@@ -21578,6 +22413,36 @@
           </p:spPr>
         </p:pic>
       </p:grpSp>
+      <p:pic>
+        <p:nvPicPr>
+          <p:cNvPr id="3" name="Picture 2">
+            <a:extLst>
+              <a:ext uri="{FF2B5EF4-FFF2-40B4-BE49-F238E27FC236}">
+                <a16:creationId xmlns:a16="http://schemas.microsoft.com/office/drawing/2014/main" id="{7ABED55F-C13C-7A14-F8EE-3EAAA61AD55F}"/>
+              </a:ext>
+            </a:extLst>
+          </p:cNvPr>
+          <p:cNvPicPr>
+            <a:picLocks noChangeAspect="1"/>
+          </p:cNvPicPr>
+          <p:nvPr/>
+        </p:nvPicPr>
+        <p:blipFill>
+          <a:blip r:embed="rId4"/>
+          <a:stretch>
+            <a:fillRect/>
+          </a:stretch>
+        </p:blipFill>
+        <p:spPr>
+          <a:xfrm>
+            <a:off x="7213360" y="4913972"/>
+            <a:ext cx="4442728" cy="1860851"/>
+          </a:xfrm>
+          <a:prstGeom prst="rect">
+            <a:avLst/>
+          </a:prstGeom>
+        </p:spPr>
+      </p:pic>
     </p:spTree>
     <p:extLst>
       <p:ext uri="{BB962C8B-B14F-4D97-AF65-F5344CB8AC3E}">
@@ -24030,6 +24895,36 @@
           </p:spPr>
         </p:pic>
       </p:grpSp>
+      <p:pic>
+        <p:nvPicPr>
+          <p:cNvPr id="3" name="Picture 2">
+            <a:extLst>
+              <a:ext uri="{FF2B5EF4-FFF2-40B4-BE49-F238E27FC236}">
+                <a16:creationId xmlns:a16="http://schemas.microsoft.com/office/drawing/2014/main" id="{D871619C-4566-3570-DA24-C4E3DC2FBA5B}"/>
+              </a:ext>
+            </a:extLst>
+          </p:cNvPr>
+          <p:cNvPicPr>
+            <a:picLocks noChangeAspect="1"/>
+          </p:cNvPicPr>
+          <p:nvPr/>
+        </p:nvPicPr>
+        <p:blipFill>
+          <a:blip r:embed="rId4"/>
+          <a:stretch>
+            <a:fillRect/>
+          </a:stretch>
+        </p:blipFill>
+        <p:spPr>
+          <a:xfrm>
+            <a:off x="7213360" y="4913972"/>
+            <a:ext cx="4442728" cy="1860851"/>
+          </a:xfrm>
+          <a:prstGeom prst="rect">
+            <a:avLst/>
+          </a:prstGeom>
+        </p:spPr>
+      </p:pic>
     </p:spTree>
     <p:extLst>
       <p:ext uri="{BB962C8B-B14F-4D97-AF65-F5344CB8AC3E}">
@@ -24871,8 +25766,20 @@
           <a:lstStyle/>
           <a:p>
             <a:r>
+              <a:rPr lang="en-US" b="1" dirty="0"/>
+              <a:t>Binary search trees </a:t>
+            </a:r>
+            <a:r>
               <a:rPr lang="en-US" dirty="0"/>
-              <a:t>Binary search trees (BSTs) area a variation of binary trees designed for storing date.</a:t>
+              <a:t>(</a:t>
+            </a:r>
+            <a:r>
+              <a:rPr lang="en-US" b="1" dirty="0"/>
+              <a:t>BST</a:t>
+            </a:r>
+            <a:r>
+              <a:rPr lang="en-US" dirty="0"/>
+              <a:t>s) area a variation of binary trees designed for storing data.</a:t>
             </a:r>
           </a:p>
           <a:p>
@@ -28421,7 +29328,7 @@
                     <m:func>
                       <m:funcPr>
                         <m:ctrlPr>
-                          <a:rPr lang="en-US" b="0" i="1" smtClean="0">
+                          <a:rPr lang="en-US" b="0" i="0" smtClean="0">
                             <a:latin typeface="Cambria Math" panose="02040503050406030204" pitchFamily="18" charset="0"/>
                           </a:rPr>
                         </m:ctrlPr>
@@ -28636,7 +29543,7 @@
             <a:pPr algn="ctr"/>
             <a:r>
               <a:rPr lang="en-US" dirty="0"/>
-              <a:t>This tree shows the leaf nodes explicitly. We often implement those as null points and don’t show them in drawings.</a:t>
+              <a:t>This tree shows the leaf nodes explicitly. We often implement those as null pointers and don’t show them in drawings.</a:t>
             </a:r>
           </a:p>
         </p:txBody>
@@ -28789,12 +29696,160 @@
           </a:p>
         </p:txBody>
       </p:sp>
+    </p:spTree>
+    <p:extLst>
+      <p:ext uri="{BB962C8B-B14F-4D97-AF65-F5344CB8AC3E}">
+        <p14:creationId xmlns:p14="http://schemas.microsoft.com/office/powerpoint/2010/main" val="4142904386"/>
+      </p:ext>
+    </p:extLst>
+  </p:cSld>
+  <p:clrMapOvr>
+    <a:masterClrMapping/>
+  </p:clrMapOvr>
+</p:sld>
+</file>
+
+<file path=ppt/slides/slide24.xml><?xml version="1.0" encoding="utf-8"?>
+<p:sld xmlns:a="http://schemas.openxmlformats.org/drawingml/2006/main" xmlns:r="http://schemas.openxmlformats.org/officeDocument/2006/relationships" xmlns:p="http://schemas.openxmlformats.org/presentationml/2006/main">
+  <p:cSld>
+    <p:spTree>
+      <p:nvGrpSpPr>
+        <p:cNvPr id="1" name="">
+          <a:extLst>
+            <a:ext uri="{FF2B5EF4-FFF2-40B4-BE49-F238E27FC236}">
+              <a16:creationId xmlns:a16="http://schemas.microsoft.com/office/drawing/2014/main" id="{D1809742-A7DE-F3B4-C4F3-8B853DA26E8A}"/>
+            </a:ext>
+          </a:extLst>
+        </p:cNvPr>
+        <p:cNvGrpSpPr/>
+        <p:nvPr/>
+      </p:nvGrpSpPr>
+      <p:grpSpPr>
+        <a:xfrm>
+          <a:off x="0" y="0"/>
+          <a:ext cx="0" cy="0"/>
+          <a:chOff x="0" y="0"/>
+          <a:chExt cx="0" cy="0"/>
+        </a:xfrm>
+      </p:grpSpPr>
+      <p:sp>
+        <p:nvSpPr>
+          <p:cNvPr id="2" name="Title 1">
+            <a:extLst>
+              <a:ext uri="{FF2B5EF4-FFF2-40B4-BE49-F238E27FC236}">
+                <a16:creationId xmlns:a16="http://schemas.microsoft.com/office/drawing/2014/main" id="{16030E0B-03CD-D283-C86C-88101C0A7673}"/>
+              </a:ext>
+            </a:extLst>
+          </p:cNvPr>
+          <p:cNvSpPr>
+            <a:spLocks noGrp="1"/>
+          </p:cNvSpPr>
+          <p:nvPr>
+            <p:ph type="title"/>
+          </p:nvPr>
+        </p:nvSpPr>
+        <p:spPr>
+          <a:xfrm>
+            <a:off x="838200" y="365125"/>
+            <a:ext cx="3683558" cy="1325563"/>
+          </a:xfrm>
+        </p:spPr>
+        <p:txBody>
+          <a:bodyPr/>
+          <a:lstStyle/>
+          <a:p>
+            <a:r>
+              <a:rPr lang="en-US" dirty="0"/>
+              <a:t>BST Example</a:t>
+            </a:r>
+          </a:p>
+        </p:txBody>
+      </p:sp>
+      <p:pic>
+        <p:nvPicPr>
+          <p:cNvPr id="4" name="Picture 3">
+            <a:extLst>
+              <a:ext uri="{FF2B5EF4-FFF2-40B4-BE49-F238E27FC236}">
+                <a16:creationId xmlns:a16="http://schemas.microsoft.com/office/drawing/2014/main" id="{E45AE74C-9E7D-6C18-0D67-C57DF7E2DEAB}"/>
+              </a:ext>
+            </a:extLst>
+          </p:cNvPr>
+          <p:cNvPicPr>
+            <a:picLocks noChangeAspect="1"/>
+          </p:cNvPicPr>
+          <p:nvPr/>
+        </p:nvPicPr>
+        <p:blipFill>
+          <a:blip r:embed="rId2"/>
+          <a:stretch>
+            <a:fillRect/>
+          </a:stretch>
+        </p:blipFill>
+        <p:spPr>
+          <a:xfrm>
+            <a:off x="3877826" y="1027906"/>
+            <a:ext cx="7772400" cy="5280566"/>
+          </a:xfrm>
+          <a:prstGeom prst="rect">
+            <a:avLst/>
+          </a:prstGeom>
+        </p:spPr>
+      </p:pic>
+      <p:sp>
+        <p:nvSpPr>
+          <p:cNvPr id="5" name="TextBox 4">
+            <a:extLst>
+              <a:ext uri="{FF2B5EF4-FFF2-40B4-BE49-F238E27FC236}">
+                <a16:creationId xmlns:a16="http://schemas.microsoft.com/office/drawing/2014/main" id="{EE8590EF-4747-4143-2B81-09DAFF0765EA}"/>
+              </a:ext>
+            </a:extLst>
+          </p:cNvPr>
+          <p:cNvSpPr txBox="1"/>
+          <p:nvPr/>
+        </p:nvSpPr>
+        <p:spPr>
+          <a:xfrm>
+            <a:off x="786536" y="2030303"/>
+            <a:ext cx="2459276" cy="646331"/>
+          </a:xfrm>
+          <a:prstGeom prst="rect">
+            <a:avLst/>
+          </a:prstGeom>
+          <a:solidFill>
+            <a:schemeClr val="accent2">
+              <a:lumMod val="40000"/>
+              <a:lumOff val="60000"/>
+            </a:schemeClr>
+          </a:solidFill>
+        </p:spPr>
+        <p:txBody>
+          <a:bodyPr wrap="square" rtlCol="0">
+            <a:spAutoFit/>
+          </a:bodyPr>
+          <a:lstStyle/>
+          <a:p>
+            <a:pPr algn="ctr"/>
+            <a:r>
+              <a:rPr lang="en-US" dirty="0"/>
+              <a:t>Where is the </a:t>
+            </a:r>
+            <a:r>
+              <a:rPr lang="en-US" b="1" dirty="0"/>
+              <a:t>min value </a:t>
+            </a:r>
+            <a:r>
+              <a:rPr lang="en-US" dirty="0"/>
+              <a:t>of a BST?</a:t>
+            </a:r>
+          </a:p>
+        </p:txBody>
+      </p:sp>
       <p:sp>
         <p:nvSpPr>
           <p:cNvPr id="3" name="Oval 2">
             <a:extLst>
               <a:ext uri="{FF2B5EF4-FFF2-40B4-BE49-F238E27FC236}">
-                <a16:creationId xmlns:a16="http://schemas.microsoft.com/office/drawing/2014/main" id="{82DFDCBA-B3AD-D22A-CC0C-6D0BC866ACA4}"/>
+                <a16:creationId xmlns:a16="http://schemas.microsoft.com/office/drawing/2014/main" id="{A14EEAA2-E0D3-CA7D-C979-DB669E0F69EC}"/>
               </a:ext>
             </a:extLst>
           </p:cNvPr>
@@ -28846,7 +29901,7 @@
           <p:cNvPr id="7" name="TextBox 6">
             <a:extLst>
               <a:ext uri="{FF2B5EF4-FFF2-40B4-BE49-F238E27FC236}">
-                <a16:creationId xmlns:a16="http://schemas.microsoft.com/office/drawing/2014/main" id="{8D6436CF-74F7-D08A-0731-C38A6B60BEEB}"/>
+                <a16:creationId xmlns:a16="http://schemas.microsoft.com/office/drawing/2014/main" id="{2542FBD9-6652-FDCA-FC23-142DF6EAF5F0}"/>
               </a:ext>
             </a:extLst>
           </p:cNvPr>
@@ -28905,7 +29960,7 @@
               <p:cNvPr id="8" name="TextBox 7">
                 <a:extLst>
                   <a:ext uri="{FF2B5EF4-FFF2-40B4-BE49-F238E27FC236}">
-                    <a16:creationId xmlns:a16="http://schemas.microsoft.com/office/drawing/2014/main" id="{422D7868-4FF3-961A-26FB-9FA51F5D510D}"/>
+                    <a16:creationId xmlns:a16="http://schemas.microsoft.com/office/drawing/2014/main" id="{539C6B4C-FACE-984C-6706-B841A281AF10}"/>
                   </a:ext>
                 </a:extLst>
               </p:cNvPr>
@@ -28960,7 +30015,7 @@
                       <a:rPr lang="en-US" i="1" dirty="0" smtClean="0">
                         <a:latin typeface="Cambria Math" panose="02040503050406030204" pitchFamily="18" charset="0"/>
                       </a:rPr>
-                      <m:t>h𝑒𝑖𝑔h𝑡</m:t>
+                      <m:t>ℎ𝑒𝑖𝑔ℎ𝑡</m:t>
                     </m:r>
                     <m:r>
                       <a:rPr lang="en-US" i="1" dirty="0" smtClean="0">
@@ -28991,7 +30046,7 @@
                     <m:func>
                       <m:funcPr>
                         <m:ctrlPr>
-                          <a:rPr lang="en-US" i="1" dirty="0" smtClean="0">
+                          <a:rPr lang="en-US" i="0" dirty="0" smtClean="0">
                             <a:latin typeface="Cambria Math" panose="02040503050406030204" pitchFamily="18" charset="0"/>
                           </a:rPr>
                         </m:ctrlPr>
@@ -29070,7 +30125,7 @@
               <p:cNvPr id="8" name="TextBox 7">
                 <a:extLst>
                   <a:ext uri="{FF2B5EF4-FFF2-40B4-BE49-F238E27FC236}">
-                    <a16:creationId xmlns:a16="http://schemas.microsoft.com/office/drawing/2014/main" id="{422D7868-4FF3-961A-26FB-9FA51F5D510D}"/>
+                    <a16:creationId xmlns:a16="http://schemas.microsoft.com/office/drawing/2014/main" id="{539C6B4C-FACE-984C-6706-B841A281AF10}"/>
                   </a:ext>
                 </a:extLst>
               </p:cNvPr>
@@ -29112,7 +30167,7 @@
     </p:spTree>
     <p:extLst>
       <p:ext uri="{BB962C8B-B14F-4D97-AF65-F5344CB8AC3E}">
-        <p14:creationId xmlns:p14="http://schemas.microsoft.com/office/powerpoint/2010/main" val="4142904386"/>
+        <p14:creationId xmlns:p14="http://schemas.microsoft.com/office/powerpoint/2010/main" val="2328850276"/>
       </p:ext>
     </p:extLst>
   </p:cSld>
@@ -29122,7 +30177,7 @@
 </p:sld>
 </file>
 
-<file path=ppt/slides/slide24.xml><?xml version="1.0" encoding="utf-8"?>
+<file path=ppt/slides/slide25.xml><?xml version="1.0" encoding="utf-8"?>
 <p:sld xmlns:a="http://schemas.openxmlformats.org/drawingml/2006/main" xmlns:r="http://schemas.openxmlformats.org/officeDocument/2006/relationships" xmlns:p="http://schemas.openxmlformats.org/presentationml/2006/main">
   <p:cSld>
     <p:spTree>
@@ -29210,10 +30265,158 @@
       </p:pic>
       <p:sp>
         <p:nvSpPr>
+          <p:cNvPr id="8" name="TextBox 7">
+            <a:extLst>
+              <a:ext uri="{FF2B5EF4-FFF2-40B4-BE49-F238E27FC236}">
+                <a16:creationId xmlns:a16="http://schemas.microsoft.com/office/drawing/2014/main" id="{AD6DD4B2-4DD1-084D-1EAF-8607A109A2E3}"/>
+              </a:ext>
+            </a:extLst>
+          </p:cNvPr>
+          <p:cNvSpPr txBox="1"/>
+          <p:nvPr/>
+        </p:nvSpPr>
+        <p:spPr>
+          <a:xfrm>
+            <a:off x="786536" y="2030303"/>
+            <a:ext cx="2459276" cy="646331"/>
+          </a:xfrm>
+          <a:prstGeom prst="rect">
+            <a:avLst/>
+          </a:prstGeom>
+          <a:solidFill>
+            <a:schemeClr val="accent2">
+              <a:lumMod val="40000"/>
+              <a:lumOff val="60000"/>
+            </a:schemeClr>
+          </a:solidFill>
+        </p:spPr>
+        <p:txBody>
+          <a:bodyPr wrap="square" rtlCol="0">
+            <a:spAutoFit/>
+          </a:bodyPr>
+          <a:lstStyle/>
+          <a:p>
+            <a:pPr algn="ctr"/>
+            <a:r>
+              <a:rPr lang="en-US" dirty="0"/>
+              <a:t>Where is the </a:t>
+            </a:r>
+            <a:r>
+              <a:rPr lang="en-US" b="1" dirty="0"/>
+              <a:t>max value </a:t>
+            </a:r>
+            <a:r>
+              <a:rPr lang="en-US" dirty="0"/>
+              <a:t>of a BST?</a:t>
+            </a:r>
+          </a:p>
+        </p:txBody>
+      </p:sp>
+    </p:spTree>
+    <p:extLst>
+      <p:ext uri="{BB962C8B-B14F-4D97-AF65-F5344CB8AC3E}">
+        <p14:creationId xmlns:p14="http://schemas.microsoft.com/office/powerpoint/2010/main" val="1955106547"/>
+      </p:ext>
+    </p:extLst>
+  </p:cSld>
+  <p:clrMapOvr>
+    <a:masterClrMapping/>
+  </p:clrMapOvr>
+</p:sld>
+</file>
+
+<file path=ppt/slides/slide26.xml><?xml version="1.0" encoding="utf-8"?>
+<p:sld xmlns:a="http://schemas.openxmlformats.org/drawingml/2006/main" xmlns:r="http://schemas.openxmlformats.org/officeDocument/2006/relationships" xmlns:p="http://schemas.openxmlformats.org/presentationml/2006/main">
+  <p:cSld>
+    <p:spTree>
+      <p:nvGrpSpPr>
+        <p:cNvPr id="1" name="">
+          <a:extLst>
+            <a:ext uri="{FF2B5EF4-FFF2-40B4-BE49-F238E27FC236}">
+              <a16:creationId xmlns:a16="http://schemas.microsoft.com/office/drawing/2014/main" id="{F6DDE564-97FE-7462-54CB-35BF8CC84950}"/>
+            </a:ext>
+          </a:extLst>
+        </p:cNvPr>
+        <p:cNvGrpSpPr/>
+        <p:nvPr/>
+      </p:nvGrpSpPr>
+      <p:grpSpPr>
+        <a:xfrm>
+          <a:off x="0" y="0"/>
+          <a:ext cx="0" cy="0"/>
+          <a:chOff x="0" y="0"/>
+          <a:chExt cx="0" cy="0"/>
+        </a:xfrm>
+      </p:grpSpPr>
+      <p:sp>
+        <p:nvSpPr>
+          <p:cNvPr id="2" name="Title 1">
+            <a:extLst>
+              <a:ext uri="{FF2B5EF4-FFF2-40B4-BE49-F238E27FC236}">
+                <a16:creationId xmlns:a16="http://schemas.microsoft.com/office/drawing/2014/main" id="{4AF68B30-4DCD-B836-53CA-85C6267A0A51}"/>
+              </a:ext>
+            </a:extLst>
+          </p:cNvPr>
+          <p:cNvSpPr>
+            <a:spLocks noGrp="1"/>
+          </p:cNvSpPr>
+          <p:nvPr>
+            <p:ph type="title"/>
+          </p:nvPr>
+        </p:nvSpPr>
+        <p:spPr>
+          <a:xfrm>
+            <a:off x="838200" y="365125"/>
+            <a:ext cx="3683558" cy="1325563"/>
+          </a:xfrm>
+        </p:spPr>
+        <p:txBody>
+          <a:bodyPr/>
+          <a:lstStyle/>
+          <a:p>
+            <a:r>
+              <a:rPr lang="en-US" dirty="0"/>
+              <a:t>BST Example</a:t>
+            </a:r>
+          </a:p>
+        </p:txBody>
+      </p:sp>
+      <p:pic>
+        <p:nvPicPr>
+          <p:cNvPr id="4" name="Picture 3">
+            <a:extLst>
+              <a:ext uri="{FF2B5EF4-FFF2-40B4-BE49-F238E27FC236}">
+                <a16:creationId xmlns:a16="http://schemas.microsoft.com/office/drawing/2014/main" id="{88EDF342-E7D8-74B9-D83F-8C369B7BBF70}"/>
+              </a:ext>
+            </a:extLst>
+          </p:cNvPr>
+          <p:cNvPicPr>
+            <a:picLocks noChangeAspect="1"/>
+          </p:cNvPicPr>
+          <p:nvPr/>
+        </p:nvPicPr>
+        <p:blipFill>
+          <a:blip r:embed="rId2"/>
+          <a:stretch>
+            <a:fillRect/>
+          </a:stretch>
+        </p:blipFill>
+        <p:spPr>
+          <a:xfrm>
+            <a:off x="3877826" y="1027906"/>
+            <a:ext cx="7772400" cy="5280566"/>
+          </a:xfrm>
+          <a:prstGeom prst="rect">
+            <a:avLst/>
+          </a:prstGeom>
+        </p:spPr>
+      </p:pic>
+      <p:sp>
+        <p:nvSpPr>
           <p:cNvPr id="3" name="Oval 2">
             <a:extLst>
               <a:ext uri="{FF2B5EF4-FFF2-40B4-BE49-F238E27FC236}">
-                <a16:creationId xmlns:a16="http://schemas.microsoft.com/office/drawing/2014/main" id="{3ADB69CB-EA4B-4317-273B-3265E665B0D9}"/>
+                <a16:creationId xmlns:a16="http://schemas.microsoft.com/office/drawing/2014/main" id="{529D7532-BCDC-9524-6E6F-C03B467BA9C9}"/>
               </a:ext>
             </a:extLst>
           </p:cNvPr>
@@ -29265,7 +30468,7 @@
           <p:cNvPr id="8" name="TextBox 7">
             <a:extLst>
               <a:ext uri="{FF2B5EF4-FFF2-40B4-BE49-F238E27FC236}">
-                <a16:creationId xmlns:a16="http://schemas.microsoft.com/office/drawing/2014/main" id="{AD6DD4B2-4DD1-084D-1EAF-8607A109A2E3}"/>
+                <a16:creationId xmlns:a16="http://schemas.microsoft.com/office/drawing/2014/main" id="{51E729E4-9E99-5E54-FE1E-40E968C20A3A}"/>
               </a:ext>
             </a:extLst>
           </p:cNvPr>
@@ -29314,7 +30517,7 @@
           <p:cNvPr id="9" name="TextBox 8">
             <a:extLst>
               <a:ext uri="{FF2B5EF4-FFF2-40B4-BE49-F238E27FC236}">
-                <a16:creationId xmlns:a16="http://schemas.microsoft.com/office/drawing/2014/main" id="{75257CFA-E4D5-77E0-7CBB-44A71F66C514}"/>
+                <a16:creationId xmlns:a16="http://schemas.microsoft.com/office/drawing/2014/main" id="{8BFCAB73-3F1C-E99B-E457-278BF15DF341}"/>
               </a:ext>
             </a:extLst>
           </p:cNvPr>
@@ -29373,7 +30576,7 @@
               <p:cNvPr id="10" name="TextBox 9">
                 <a:extLst>
                   <a:ext uri="{FF2B5EF4-FFF2-40B4-BE49-F238E27FC236}">
-                    <a16:creationId xmlns:a16="http://schemas.microsoft.com/office/drawing/2014/main" id="{C839C654-0CE0-8D56-0073-3093C8B08778}"/>
+                    <a16:creationId xmlns:a16="http://schemas.microsoft.com/office/drawing/2014/main" id="{9C6CDBF1-6C39-8A6C-8660-CA866F30E087}"/>
                   </a:ext>
                 </a:extLst>
               </p:cNvPr>
@@ -29428,7 +30631,7 @@
                       <a:rPr lang="en-US" i="1" dirty="0" smtClean="0">
                         <a:latin typeface="Cambria Math" panose="02040503050406030204" pitchFamily="18" charset="0"/>
                       </a:rPr>
-                      <m:t>h𝑒𝑖𝑔h𝑡</m:t>
+                      <m:t>ℎ𝑒𝑖𝑔ℎ𝑡</m:t>
                     </m:r>
                     <m:r>
                       <a:rPr lang="en-US" i="1" dirty="0" smtClean="0">
@@ -29459,7 +30662,7 @@
                     <m:func>
                       <m:funcPr>
                         <m:ctrlPr>
-                          <a:rPr lang="en-US" i="1" dirty="0" smtClean="0">
+                          <a:rPr lang="en-US" i="0" dirty="0" smtClean="0">
                             <a:latin typeface="Cambria Math" panose="02040503050406030204" pitchFamily="18" charset="0"/>
                           </a:rPr>
                         </m:ctrlPr>
@@ -29538,7 +30741,7 @@
               <p:cNvPr id="10" name="TextBox 9">
                 <a:extLst>
                   <a:ext uri="{FF2B5EF4-FFF2-40B4-BE49-F238E27FC236}">
-                    <a16:creationId xmlns:a16="http://schemas.microsoft.com/office/drawing/2014/main" id="{C839C654-0CE0-8D56-0073-3093C8B08778}"/>
+                    <a16:creationId xmlns:a16="http://schemas.microsoft.com/office/drawing/2014/main" id="{9C6CDBF1-6C39-8A6C-8660-CA866F30E087}"/>
                   </a:ext>
                 </a:extLst>
               </p:cNvPr>
@@ -29580,7 +30783,7 @@
     </p:spTree>
     <p:extLst>
       <p:ext uri="{BB962C8B-B14F-4D97-AF65-F5344CB8AC3E}">
-        <p14:creationId xmlns:p14="http://schemas.microsoft.com/office/powerpoint/2010/main" val="1955106547"/>
+        <p14:creationId xmlns:p14="http://schemas.microsoft.com/office/powerpoint/2010/main" val="1229345825"/>
       </p:ext>
     </p:extLst>
   </p:cSld>
@@ -29590,7 +30793,7 @@
 </p:sld>
 </file>
 
-<file path=ppt/slides/slide25.xml><?xml version="1.0" encoding="utf-8"?>
+<file path=ppt/slides/slide27.xml><?xml version="1.0" encoding="utf-8"?>
 <p:sld xmlns:a="http://schemas.openxmlformats.org/drawingml/2006/main" xmlns:r="http://schemas.openxmlformats.org/officeDocument/2006/relationships" xmlns:p="http://schemas.openxmlformats.org/presentationml/2006/main">
   <p:cSld>
     <p:spTree>
@@ -31276,7 +32479,7 @@
 </p:sld>
 </file>
 
-<file path=ppt/slides/slide26.xml><?xml version="1.0" encoding="utf-8"?>
+<file path=ppt/slides/slide28.xml><?xml version="1.0" encoding="utf-8"?>
 <p:sld xmlns:a="http://schemas.openxmlformats.org/drawingml/2006/main" xmlns:r="http://schemas.openxmlformats.org/officeDocument/2006/relationships" xmlns:p="http://schemas.openxmlformats.org/presentationml/2006/main">
   <p:cSld>
     <p:spTree>
@@ -33124,7 +34327,7 @@
 </p:sld>
 </file>
 
-<file path=ppt/slides/slide27.xml><?xml version="1.0" encoding="utf-8"?>
+<file path=ppt/slides/slide29.xml><?xml version="1.0" encoding="utf-8"?>
 <p:sld xmlns:a="http://schemas.openxmlformats.org/drawingml/2006/main" xmlns:r="http://schemas.openxmlformats.org/officeDocument/2006/relationships" xmlns:p="http://schemas.openxmlformats.org/presentationml/2006/main">
   <p:cSld>
     <p:spTree>
@@ -36596,733 +37799,6 @@
     <p:extLst>
       <p:ext uri="{BB962C8B-B14F-4D97-AF65-F5344CB8AC3E}">
         <p14:creationId xmlns:p14="http://schemas.microsoft.com/office/powerpoint/2010/main" val="1717794979"/>
-      </p:ext>
-    </p:extLst>
-  </p:cSld>
-  <p:clrMapOvr>
-    <a:masterClrMapping/>
-  </p:clrMapOvr>
-</p:sld>
-</file>
-
-<file path=ppt/slides/slide28.xml><?xml version="1.0" encoding="utf-8"?>
-<p:sld xmlns:a="http://schemas.openxmlformats.org/drawingml/2006/main" xmlns:r="http://schemas.openxmlformats.org/officeDocument/2006/relationships" xmlns:p="http://schemas.openxmlformats.org/presentationml/2006/main">
-  <p:cSld>
-    <p:spTree>
-      <p:nvGrpSpPr>
-        <p:cNvPr id="1" name=""/>
-        <p:cNvGrpSpPr/>
-        <p:nvPr/>
-      </p:nvGrpSpPr>
-      <p:grpSpPr>
-        <a:xfrm>
-          <a:off x="0" y="0"/>
-          <a:ext cx="0" cy="0"/>
-          <a:chOff x="0" y="0"/>
-          <a:chExt cx="0" cy="0"/>
-        </a:xfrm>
-      </p:grpSpPr>
-      <p:pic>
-        <p:nvPicPr>
-          <p:cNvPr id="4" name="Picture 3">
-            <a:extLst>
-              <a:ext uri="{FF2B5EF4-FFF2-40B4-BE49-F238E27FC236}">
-                <a16:creationId xmlns:a16="http://schemas.microsoft.com/office/drawing/2014/main" id="{82B3A06D-A3E1-B1F3-5716-DBF3E0EC6B5B}"/>
-              </a:ext>
-            </a:extLst>
-          </p:cNvPr>
-          <p:cNvPicPr>
-            <a:picLocks noChangeAspect="1"/>
-          </p:cNvPicPr>
-          <p:nvPr/>
-        </p:nvPicPr>
-        <p:blipFill>
-          <a:blip r:embed="rId2"/>
-          <a:stretch>
-            <a:fillRect/>
-          </a:stretch>
-        </p:blipFill>
-        <p:spPr>
-          <a:xfrm>
-            <a:off x="7165386" y="360380"/>
-            <a:ext cx="5095096" cy="3461607"/>
-          </a:xfrm>
-          <a:prstGeom prst="rect">
-            <a:avLst/>
-          </a:prstGeom>
-        </p:spPr>
-      </p:pic>
-      <p:sp>
-        <p:nvSpPr>
-          <p:cNvPr id="2" name="Title 1">
-            <a:extLst>
-              <a:ext uri="{FF2B5EF4-FFF2-40B4-BE49-F238E27FC236}">
-                <a16:creationId xmlns:a16="http://schemas.microsoft.com/office/drawing/2014/main" id="{EC7171E4-D4FA-93F1-7615-9C65F113B9B3}"/>
-              </a:ext>
-            </a:extLst>
-          </p:cNvPr>
-          <p:cNvSpPr>
-            <a:spLocks noGrp="1"/>
-          </p:cNvSpPr>
-          <p:nvPr>
-            <p:ph type="title"/>
-          </p:nvPr>
-        </p:nvSpPr>
-        <p:spPr/>
-        <p:txBody>
-          <a:bodyPr/>
-          <a:lstStyle/>
-          <a:p>
-            <a:r>
-              <a:rPr lang="en-US" dirty="0"/>
-              <a:t>Searching a BST</a:t>
-            </a:r>
-          </a:p>
-        </p:txBody>
-      </p:sp>
-      <p:sp>
-        <p:nvSpPr>
-          <p:cNvPr id="3" name="Content Placeholder 2">
-            <a:extLst>
-              <a:ext uri="{FF2B5EF4-FFF2-40B4-BE49-F238E27FC236}">
-                <a16:creationId xmlns:a16="http://schemas.microsoft.com/office/drawing/2014/main" id="{D85A67D3-3968-20AD-B53C-8BF9390CA54B}"/>
-              </a:ext>
-            </a:extLst>
-          </p:cNvPr>
-          <p:cNvSpPr>
-            <a:spLocks noGrp="1"/>
-          </p:cNvSpPr>
-          <p:nvPr>
-            <p:ph idx="1"/>
-          </p:nvPr>
-        </p:nvSpPr>
-        <p:spPr/>
-        <p:txBody>
-          <a:bodyPr/>
-          <a:lstStyle/>
-          <a:p>
-            <a:pPr marL="0" indent="0">
-              <a:buNone/>
-            </a:pPr>
-            <a:r>
-              <a:rPr lang="en-US" dirty="0" err="1"/>
-              <a:t>RecursiveSearch</a:t>
-            </a:r>
-            <a:r>
-              <a:rPr lang="en-US" dirty="0"/>
-              <a:t>(v, k)</a:t>
-            </a:r>
-            <a:br>
-              <a:rPr lang="en-US" dirty="0"/>
-            </a:br>
-            <a:r>
-              <a:rPr lang="en-US" dirty="0"/>
-              <a:t>   if </a:t>
-            </a:r>
-            <a:r>
-              <a:rPr lang="en-US" dirty="0" err="1"/>
-              <a:t>isLeaf</a:t>
-            </a:r>
-            <a:r>
-              <a:rPr lang="en-US" dirty="0"/>
-              <a:t>(v):</a:t>
-            </a:r>
-            <a:br>
-              <a:rPr lang="en-US" dirty="0"/>
-            </a:br>
-            <a:r>
-              <a:rPr lang="en-US" dirty="0"/>
-              <a:t>       return v if </a:t>
-            </a:r>
-            <a:r>
-              <a:rPr lang="en-US" dirty="0" err="1"/>
-              <a:t>v.key</a:t>
-            </a:r>
-            <a:r>
-              <a:rPr lang="en-US" dirty="0"/>
-              <a:t> == k, otherwise null</a:t>
-            </a:r>
-            <a:br>
-              <a:rPr lang="en-US" dirty="0"/>
-            </a:br>
-            <a:r>
-              <a:rPr lang="en-US" dirty="0"/>
-              <a:t>   else if </a:t>
-            </a:r>
-            <a:r>
-              <a:rPr lang="en-US" b="1" dirty="0"/>
-              <a:t>k &lt; </a:t>
-            </a:r>
-            <a:r>
-              <a:rPr lang="en-US" b="1" dirty="0" err="1"/>
-              <a:t>v.key</a:t>
-            </a:r>
-            <a:r>
-              <a:rPr lang="en-US" dirty="0"/>
-              <a:t>:</a:t>
-            </a:r>
-            <a:br>
-              <a:rPr lang="en-US" dirty="0"/>
-            </a:br>
-            <a:r>
-              <a:rPr lang="en-US" dirty="0"/>
-              <a:t>       return </a:t>
-            </a:r>
-            <a:r>
-              <a:rPr lang="en-US" dirty="0" err="1"/>
-              <a:t>RecursiveSearch</a:t>
-            </a:r>
-            <a:r>
-              <a:rPr lang="en-US" dirty="0"/>
-              <a:t>(k, </a:t>
-            </a:r>
-            <a:r>
-              <a:rPr lang="en-US" b="1" dirty="0" err="1"/>
-              <a:t>left_subtree</a:t>
-            </a:r>
-            <a:r>
-              <a:rPr lang="en-US" dirty="0"/>
-              <a:t>(v))</a:t>
-            </a:r>
-            <a:br>
-              <a:rPr lang="en-US" dirty="0"/>
-            </a:br>
-            <a:r>
-              <a:rPr lang="en-US" dirty="0"/>
-              <a:t>   else if </a:t>
-            </a:r>
-            <a:r>
-              <a:rPr lang="en-US" b="1" dirty="0"/>
-              <a:t>k &gt; </a:t>
-            </a:r>
-            <a:r>
-              <a:rPr lang="en-US" b="1" dirty="0" err="1"/>
-              <a:t>v.key</a:t>
-            </a:r>
-            <a:r>
-              <a:rPr lang="en-US" dirty="0"/>
-              <a:t>:</a:t>
-            </a:r>
-            <a:br>
-              <a:rPr lang="en-US" dirty="0"/>
-            </a:br>
-            <a:r>
-              <a:rPr lang="en-US" dirty="0"/>
-              <a:t>       return </a:t>
-            </a:r>
-            <a:r>
-              <a:rPr lang="en-US" dirty="0" err="1"/>
-              <a:t>RecursiveSearch</a:t>
-            </a:r>
-            <a:r>
-              <a:rPr lang="en-US" dirty="0"/>
-              <a:t>(k, </a:t>
-            </a:r>
-            <a:r>
-              <a:rPr lang="en-US" b="1" dirty="0" err="1"/>
-              <a:t>right_subtree</a:t>
-            </a:r>
-            <a:r>
-              <a:rPr lang="en-US" dirty="0"/>
-              <a:t>(v))</a:t>
-            </a:r>
-            <a:br>
-              <a:rPr lang="en-US" dirty="0"/>
-            </a:br>
-            <a:r>
-              <a:rPr lang="en-US" dirty="0"/>
-              <a:t>   else:</a:t>
-            </a:r>
-            <a:br>
-              <a:rPr lang="en-US" dirty="0"/>
-            </a:br>
-            <a:r>
-              <a:rPr lang="en-US" dirty="0"/>
-              <a:t>       return v  // found it</a:t>
-            </a:r>
-            <a:br>
-              <a:rPr lang="en-US" dirty="0"/>
-            </a:br>
-            <a:endParaRPr lang="en-US" dirty="0"/>
-          </a:p>
-        </p:txBody>
-      </p:sp>
-    </p:spTree>
-    <p:extLst>
-      <p:ext uri="{BB962C8B-B14F-4D97-AF65-F5344CB8AC3E}">
-        <p14:creationId xmlns:p14="http://schemas.microsoft.com/office/powerpoint/2010/main" val="1820782728"/>
-      </p:ext>
-    </p:extLst>
-  </p:cSld>
-  <p:clrMapOvr>
-    <a:masterClrMapping/>
-  </p:clrMapOvr>
-</p:sld>
-</file>
-
-<file path=ppt/slides/slide29.xml><?xml version="1.0" encoding="utf-8"?>
-<p:sld xmlns:a="http://schemas.openxmlformats.org/drawingml/2006/main" xmlns:r="http://schemas.openxmlformats.org/officeDocument/2006/relationships" xmlns:p="http://schemas.openxmlformats.org/presentationml/2006/main">
-  <p:cSld>
-    <p:spTree>
-      <p:nvGrpSpPr>
-        <p:cNvPr id="1" name="">
-          <a:extLst>
-            <a:ext uri="{FF2B5EF4-FFF2-40B4-BE49-F238E27FC236}">
-              <a16:creationId xmlns:a16="http://schemas.microsoft.com/office/drawing/2014/main" id="{C9C019DB-9098-3092-5574-2B04AB764D9E}"/>
-            </a:ext>
-          </a:extLst>
-        </p:cNvPr>
-        <p:cNvGrpSpPr/>
-        <p:nvPr/>
-      </p:nvGrpSpPr>
-      <p:grpSpPr>
-        <a:xfrm>
-          <a:off x="0" y="0"/>
-          <a:ext cx="0" cy="0"/>
-          <a:chOff x="0" y="0"/>
-          <a:chExt cx="0" cy="0"/>
-        </a:xfrm>
-      </p:grpSpPr>
-      <p:pic>
-        <p:nvPicPr>
-          <p:cNvPr id="4" name="Picture 3">
-            <a:extLst>
-              <a:ext uri="{FF2B5EF4-FFF2-40B4-BE49-F238E27FC236}">
-                <a16:creationId xmlns:a16="http://schemas.microsoft.com/office/drawing/2014/main" id="{81958FE7-4F45-6BF1-5311-2DE3AF6ADE58}"/>
-              </a:ext>
-            </a:extLst>
-          </p:cNvPr>
-          <p:cNvPicPr>
-            <a:picLocks noChangeAspect="1"/>
-          </p:cNvPicPr>
-          <p:nvPr/>
-        </p:nvPicPr>
-        <p:blipFill>
-          <a:blip r:embed="rId2"/>
-          <a:stretch>
-            <a:fillRect/>
-          </a:stretch>
-        </p:blipFill>
-        <p:spPr>
-          <a:xfrm>
-            <a:off x="7165386" y="360380"/>
-            <a:ext cx="5095096" cy="3461607"/>
-          </a:xfrm>
-          <a:prstGeom prst="rect">
-            <a:avLst/>
-          </a:prstGeom>
-        </p:spPr>
-      </p:pic>
-      <p:sp>
-        <p:nvSpPr>
-          <p:cNvPr id="2" name="Title 1">
-            <a:extLst>
-              <a:ext uri="{FF2B5EF4-FFF2-40B4-BE49-F238E27FC236}">
-                <a16:creationId xmlns:a16="http://schemas.microsoft.com/office/drawing/2014/main" id="{0AC60E24-CFF9-0D10-6840-1C5508A5F14A}"/>
-              </a:ext>
-            </a:extLst>
-          </p:cNvPr>
-          <p:cNvSpPr>
-            <a:spLocks noGrp="1"/>
-          </p:cNvSpPr>
-          <p:nvPr>
-            <p:ph type="title"/>
-          </p:nvPr>
-        </p:nvSpPr>
-        <p:spPr/>
-        <p:txBody>
-          <a:bodyPr/>
-          <a:lstStyle/>
-          <a:p>
-            <a:r>
-              <a:rPr lang="en-US" dirty="0"/>
-              <a:t>Searching a BST</a:t>
-            </a:r>
-          </a:p>
-        </p:txBody>
-      </p:sp>
-      <p:sp>
-        <p:nvSpPr>
-          <p:cNvPr id="3" name="Content Placeholder 2">
-            <a:extLst>
-              <a:ext uri="{FF2B5EF4-FFF2-40B4-BE49-F238E27FC236}">
-                <a16:creationId xmlns:a16="http://schemas.microsoft.com/office/drawing/2014/main" id="{9AA2DB9E-2EA2-AF2A-1592-962F5DE91E99}"/>
-              </a:ext>
-            </a:extLst>
-          </p:cNvPr>
-          <p:cNvSpPr>
-            <a:spLocks noGrp="1"/>
-          </p:cNvSpPr>
-          <p:nvPr>
-            <p:ph idx="1"/>
-          </p:nvPr>
-        </p:nvSpPr>
-        <p:spPr/>
-        <p:txBody>
-          <a:bodyPr/>
-          <a:lstStyle/>
-          <a:p>
-            <a:pPr marL="0" indent="0">
-              <a:buNone/>
-            </a:pPr>
-            <a:r>
-              <a:rPr lang="en-US" dirty="0" err="1"/>
-              <a:t>RecursiveSearch</a:t>
-            </a:r>
-            <a:r>
-              <a:rPr lang="en-US" dirty="0"/>
-              <a:t>(v, k)</a:t>
-            </a:r>
-            <a:br>
-              <a:rPr lang="en-US" dirty="0"/>
-            </a:br>
-            <a:r>
-              <a:rPr lang="en-US" dirty="0"/>
-              <a:t>   if </a:t>
-            </a:r>
-            <a:r>
-              <a:rPr lang="en-US" dirty="0" err="1"/>
-              <a:t>isLeaf</a:t>
-            </a:r>
-            <a:r>
-              <a:rPr lang="en-US" dirty="0"/>
-              <a:t>(v):</a:t>
-            </a:r>
-            <a:br>
-              <a:rPr lang="en-US" dirty="0"/>
-            </a:br>
-            <a:r>
-              <a:rPr lang="en-US" dirty="0"/>
-              <a:t>       return v if </a:t>
-            </a:r>
-            <a:r>
-              <a:rPr lang="en-US" dirty="0" err="1"/>
-              <a:t>v.key</a:t>
-            </a:r>
-            <a:r>
-              <a:rPr lang="en-US" dirty="0"/>
-              <a:t> == k, otherwise null</a:t>
-            </a:r>
-            <a:br>
-              <a:rPr lang="en-US" dirty="0"/>
-            </a:br>
-            <a:r>
-              <a:rPr lang="en-US" dirty="0"/>
-              <a:t>   else if </a:t>
-            </a:r>
-            <a:r>
-              <a:rPr lang="en-US" b="1" dirty="0"/>
-              <a:t>k &lt; </a:t>
-            </a:r>
-            <a:r>
-              <a:rPr lang="en-US" b="1" dirty="0" err="1"/>
-              <a:t>v.key</a:t>
-            </a:r>
-            <a:r>
-              <a:rPr lang="en-US" dirty="0"/>
-              <a:t>:</a:t>
-            </a:r>
-            <a:br>
-              <a:rPr lang="en-US" dirty="0"/>
-            </a:br>
-            <a:r>
-              <a:rPr lang="en-US" dirty="0"/>
-              <a:t>       return </a:t>
-            </a:r>
-            <a:r>
-              <a:rPr lang="en-US" dirty="0" err="1"/>
-              <a:t>RecursiveSearch</a:t>
-            </a:r>
-            <a:r>
-              <a:rPr lang="en-US" dirty="0"/>
-              <a:t>(k, </a:t>
-            </a:r>
-            <a:r>
-              <a:rPr lang="en-US" b="1" dirty="0" err="1"/>
-              <a:t>left_subtree</a:t>
-            </a:r>
-            <a:r>
-              <a:rPr lang="en-US" dirty="0"/>
-              <a:t>(v))</a:t>
-            </a:r>
-            <a:br>
-              <a:rPr lang="en-US" dirty="0"/>
-            </a:br>
-            <a:r>
-              <a:rPr lang="en-US" dirty="0"/>
-              <a:t>   else if </a:t>
-            </a:r>
-            <a:r>
-              <a:rPr lang="en-US" b="1" dirty="0"/>
-              <a:t>k &gt; </a:t>
-            </a:r>
-            <a:r>
-              <a:rPr lang="en-US" b="1" dirty="0" err="1"/>
-              <a:t>v.key</a:t>
-            </a:r>
-            <a:r>
-              <a:rPr lang="en-US" dirty="0"/>
-              <a:t>:</a:t>
-            </a:r>
-            <a:br>
-              <a:rPr lang="en-US" dirty="0"/>
-            </a:br>
-            <a:r>
-              <a:rPr lang="en-US" dirty="0"/>
-              <a:t>       return </a:t>
-            </a:r>
-            <a:r>
-              <a:rPr lang="en-US" dirty="0" err="1"/>
-              <a:t>RecursiveSearch</a:t>
-            </a:r>
-            <a:r>
-              <a:rPr lang="en-US" dirty="0"/>
-              <a:t>(k, </a:t>
-            </a:r>
-            <a:r>
-              <a:rPr lang="en-US" b="1" dirty="0" err="1"/>
-              <a:t>right_subtree</a:t>
-            </a:r>
-            <a:r>
-              <a:rPr lang="en-US" dirty="0"/>
-              <a:t>(v))</a:t>
-            </a:r>
-            <a:br>
-              <a:rPr lang="en-US" dirty="0"/>
-            </a:br>
-            <a:r>
-              <a:rPr lang="en-US" dirty="0"/>
-              <a:t>   else:</a:t>
-            </a:r>
-            <a:br>
-              <a:rPr lang="en-US" dirty="0"/>
-            </a:br>
-            <a:r>
-              <a:rPr lang="en-US" dirty="0"/>
-              <a:t>       return v  // found it</a:t>
-            </a:r>
-            <a:br>
-              <a:rPr lang="en-US" dirty="0"/>
-            </a:br>
-            <a:endParaRPr lang="en-US" dirty="0"/>
-          </a:p>
-        </p:txBody>
-      </p:sp>
-      <mc:AlternateContent xmlns:mc="http://schemas.openxmlformats.org/markup-compatibility/2006" xmlns:a14="http://schemas.microsoft.com/office/drawing/2010/main">
-        <mc:Choice Requires="a14">
-          <p:sp>
-            <p:nvSpPr>
-              <p:cNvPr id="5" name="TextBox 4">
-                <a:extLst>
-                  <a:ext uri="{FF2B5EF4-FFF2-40B4-BE49-F238E27FC236}">
-                    <a16:creationId xmlns:a16="http://schemas.microsoft.com/office/drawing/2014/main" id="{B9859070-BA0A-1A38-A2B6-67CBDF6881CF}"/>
-                  </a:ext>
-                </a:extLst>
-              </p:cNvPr>
-              <p:cNvSpPr txBox="1"/>
-              <p:nvPr/>
-            </p:nvSpPr>
-            <p:spPr>
-              <a:xfrm>
-                <a:off x="8129521" y="4747932"/>
-                <a:ext cx="3431122" cy="1200329"/>
-              </a:xfrm>
-              <a:prstGeom prst="rect">
-                <a:avLst/>
-              </a:prstGeom>
-              <a:solidFill>
-                <a:schemeClr val="accent2">
-                  <a:lumMod val="40000"/>
-                  <a:lumOff val="60000"/>
-                </a:schemeClr>
-              </a:solidFill>
-            </p:spPr>
-            <p:txBody>
-              <a:bodyPr wrap="square" rtlCol="0">
-                <a:spAutoFit/>
-              </a:bodyPr>
-              <a:lstStyle/>
-              <a:p>
-                <a:pPr algn="ctr"/>
-                <a:r>
-                  <a:rPr lang="en-US" b="1" dirty="0"/>
-                  <a:t>Finding a given value </a:t>
-                </a:r>
-                <a:r>
-                  <a:rPr lang="en-US" dirty="0"/>
-                  <a:t>takes </a:t>
-                </a:r>
-                <a14:m>
-                  <m:oMath xmlns:m="http://schemas.openxmlformats.org/officeDocument/2006/math">
-                    <m:r>
-                      <a:rPr lang="en-US" i="1" dirty="0" smtClean="0">
-                        <a:latin typeface="Cambria Math" panose="02040503050406030204" pitchFamily="18" charset="0"/>
-                      </a:rPr>
-                      <m:t>𝑂</m:t>
-                    </m:r>
-                    <m:r>
-                      <a:rPr lang="en-US" i="1" dirty="0" smtClean="0">
-                        <a:latin typeface="Cambria Math" panose="02040503050406030204" pitchFamily="18" charset="0"/>
-                      </a:rPr>
-                      <m:t>(</m:t>
-                    </m:r>
-                    <m:r>
-                      <a:rPr lang="en-US" i="1" dirty="0" smtClean="0">
-                        <a:latin typeface="Cambria Math" panose="02040503050406030204" pitchFamily="18" charset="0"/>
-                      </a:rPr>
-                      <m:t>h𝑒𝑖𝑔h𝑡</m:t>
-                    </m:r>
-                    <m:r>
-                      <a:rPr lang="en-US" i="1" dirty="0" smtClean="0">
-                        <a:latin typeface="Cambria Math" panose="02040503050406030204" pitchFamily="18" charset="0"/>
-                      </a:rPr>
-                      <m:t>)</m:t>
-                    </m:r>
-                  </m:oMath>
-                </a14:m>
-                <a:r>
-                  <a:rPr lang="en-US" dirty="0"/>
-                  <a:t> time, i.e. between </a:t>
-                </a:r>
-                <a14:m>
-                  <m:oMath xmlns:m="http://schemas.openxmlformats.org/officeDocument/2006/math">
-                    <m:r>
-                      <a:rPr lang="en-US" i="1" dirty="0" smtClean="0">
-                        <a:latin typeface="Cambria Math" panose="02040503050406030204" pitchFamily="18" charset="0"/>
-                      </a:rPr>
-                      <m:t>𝑂</m:t>
-                    </m:r>
-                    <m:r>
-                      <a:rPr lang="en-US" i="1" dirty="0" smtClean="0">
-                        <a:latin typeface="Cambria Math" panose="02040503050406030204" pitchFamily="18" charset="0"/>
-                      </a:rPr>
-                      <m:t>(</m:t>
-                    </m:r>
-                    <m:func>
-                      <m:funcPr>
-                        <m:ctrlPr>
-                          <a:rPr lang="en-US" i="1" dirty="0" smtClean="0">
-                            <a:latin typeface="Cambria Math" panose="02040503050406030204" pitchFamily="18" charset="0"/>
-                          </a:rPr>
-                        </m:ctrlPr>
-                      </m:funcPr>
-                      <m:fName>
-                        <m:r>
-                          <m:rPr>
-                            <m:sty m:val="p"/>
-                          </m:rPr>
-                          <a:rPr lang="en-US" i="0" dirty="0" smtClean="0">
-                            <a:latin typeface="Cambria Math" panose="02040503050406030204" pitchFamily="18" charset="0"/>
-                          </a:rPr>
-                          <m:t>log</m:t>
-                        </m:r>
-                      </m:fName>
-                      <m:e>
-                        <m:r>
-                          <a:rPr lang="en-CA" b="0" i="1" dirty="0" smtClean="0">
-                            <a:latin typeface="Cambria Math" panose="02040503050406030204" pitchFamily="18" charset="0"/>
-                          </a:rPr>
-                          <m:t>𝑛</m:t>
-                        </m:r>
-                      </m:e>
-                    </m:func>
-                    <m:r>
-                      <a:rPr lang="en-US" i="1" dirty="0" smtClean="0">
-                        <a:latin typeface="Cambria Math" panose="02040503050406030204" pitchFamily="18" charset="0"/>
-                      </a:rPr>
-                      <m:t>)</m:t>
-                    </m:r>
-                  </m:oMath>
-                </a14:m>
-                <a:r>
-                  <a:rPr lang="en-US" dirty="0"/>
-                  <a:t> and </a:t>
-                </a:r>
-                <a14:m>
-                  <m:oMath xmlns:m="http://schemas.openxmlformats.org/officeDocument/2006/math">
-                    <m:r>
-                      <a:rPr lang="en-US" i="1" dirty="0" smtClean="0">
-                        <a:latin typeface="Cambria Math" panose="02040503050406030204" pitchFamily="18" charset="0"/>
-                      </a:rPr>
-                      <m:t>𝑂</m:t>
-                    </m:r>
-                    <m:r>
-                      <a:rPr lang="en-US" i="1" dirty="0" smtClean="0">
-                        <a:latin typeface="Cambria Math" panose="02040503050406030204" pitchFamily="18" charset="0"/>
-                      </a:rPr>
-                      <m:t>(</m:t>
-                    </m:r>
-                    <m:r>
-                      <a:rPr lang="en-US" i="1" dirty="0" smtClean="0">
-                        <a:latin typeface="Cambria Math" panose="02040503050406030204" pitchFamily="18" charset="0"/>
-                      </a:rPr>
-                      <m:t>𝑛</m:t>
-                    </m:r>
-                    <m:r>
-                      <a:rPr lang="en-US" i="1" dirty="0" smtClean="0">
-                        <a:latin typeface="Cambria Math" panose="02040503050406030204" pitchFamily="18" charset="0"/>
-                      </a:rPr>
-                      <m:t>)</m:t>
-                    </m:r>
-                  </m:oMath>
-                </a14:m>
-                <a:r>
-                  <a:rPr lang="en-US" dirty="0"/>
-                  <a:t> depending on tree shape.</a:t>
-                </a:r>
-              </a:p>
-            </p:txBody>
-          </p:sp>
-        </mc:Choice>
-        <mc:Fallback xmlns="">
-          <p:sp>
-            <p:nvSpPr>
-              <p:cNvPr id="5" name="TextBox 4">
-                <a:extLst>
-                  <a:ext uri="{FF2B5EF4-FFF2-40B4-BE49-F238E27FC236}">
-                    <a16:creationId xmlns:a16="http://schemas.microsoft.com/office/drawing/2014/main" id="{B9859070-BA0A-1A38-A2B6-67CBDF6881CF}"/>
-                  </a:ext>
-                </a:extLst>
-              </p:cNvPr>
-              <p:cNvSpPr txBox="1">
-                <a:spLocks noRot="1" noChangeAspect="1" noMove="1" noResize="1" noEditPoints="1" noAdjustHandles="1" noChangeArrowheads="1" noChangeShapeType="1" noTextEdit="1"/>
-              </p:cNvSpPr>
-              <p:nvPr/>
-            </p:nvSpPr>
-            <p:spPr>
-              <a:xfrm>
-                <a:off x="8129521" y="4747932"/>
-                <a:ext cx="3431122" cy="1200329"/>
-              </a:xfrm>
-              <a:prstGeom prst="rect">
-                <a:avLst/>
-              </a:prstGeom>
-              <a:blipFill>
-                <a:blip r:embed="rId3"/>
-                <a:stretch>
-                  <a:fillRect t="-2083" r="-1476" b="-6250"/>
-                </a:stretch>
-              </a:blipFill>
-            </p:spPr>
-            <p:txBody>
-              <a:bodyPr/>
-              <a:lstStyle/>
-              <a:p>
-                <a:r>
-                  <a:rPr lang="en-US">
-                    <a:noFill/>
-                  </a:rPr>
-                  <a:t> </a:t>
-                </a:r>
-              </a:p>
-            </p:txBody>
-          </p:sp>
-        </mc:Fallback>
-      </mc:AlternateContent>
-    </p:spTree>
-    <p:extLst>
-      <p:ext uri="{BB962C8B-B14F-4D97-AF65-F5344CB8AC3E}">
-        <p14:creationId xmlns:p14="http://schemas.microsoft.com/office/powerpoint/2010/main" val="4279159083"/>
       </p:ext>
     </p:extLst>
   </p:cSld>
@@ -37595,6 +38071,783 @@
           <a:chExt cx="0" cy="0"/>
         </a:xfrm>
       </p:grpSpPr>
+      <p:pic>
+        <p:nvPicPr>
+          <p:cNvPr id="4" name="Picture 3">
+            <a:extLst>
+              <a:ext uri="{FF2B5EF4-FFF2-40B4-BE49-F238E27FC236}">
+                <a16:creationId xmlns:a16="http://schemas.microsoft.com/office/drawing/2014/main" id="{82B3A06D-A3E1-B1F3-5716-DBF3E0EC6B5B}"/>
+              </a:ext>
+            </a:extLst>
+          </p:cNvPr>
+          <p:cNvPicPr>
+            <a:picLocks noChangeAspect="1"/>
+          </p:cNvPicPr>
+          <p:nvPr/>
+        </p:nvPicPr>
+        <p:blipFill>
+          <a:blip r:embed="rId2"/>
+          <a:stretch>
+            <a:fillRect/>
+          </a:stretch>
+        </p:blipFill>
+        <p:spPr>
+          <a:xfrm>
+            <a:off x="7165386" y="360380"/>
+            <a:ext cx="5095096" cy="3461607"/>
+          </a:xfrm>
+          <a:prstGeom prst="rect">
+            <a:avLst/>
+          </a:prstGeom>
+        </p:spPr>
+      </p:pic>
+      <p:sp>
+        <p:nvSpPr>
+          <p:cNvPr id="2" name="Title 1">
+            <a:extLst>
+              <a:ext uri="{FF2B5EF4-FFF2-40B4-BE49-F238E27FC236}">
+                <a16:creationId xmlns:a16="http://schemas.microsoft.com/office/drawing/2014/main" id="{EC7171E4-D4FA-93F1-7615-9C65F113B9B3}"/>
+              </a:ext>
+            </a:extLst>
+          </p:cNvPr>
+          <p:cNvSpPr>
+            <a:spLocks noGrp="1"/>
+          </p:cNvSpPr>
+          <p:nvPr>
+            <p:ph type="title"/>
+          </p:nvPr>
+        </p:nvSpPr>
+        <p:spPr/>
+        <p:txBody>
+          <a:bodyPr/>
+          <a:lstStyle/>
+          <a:p>
+            <a:r>
+              <a:rPr lang="en-US" dirty="0"/>
+              <a:t>Searching a BST</a:t>
+            </a:r>
+          </a:p>
+        </p:txBody>
+      </p:sp>
+      <p:sp>
+        <p:nvSpPr>
+          <p:cNvPr id="3" name="Content Placeholder 2">
+            <a:extLst>
+              <a:ext uri="{FF2B5EF4-FFF2-40B4-BE49-F238E27FC236}">
+                <a16:creationId xmlns:a16="http://schemas.microsoft.com/office/drawing/2014/main" id="{D85A67D3-3968-20AD-B53C-8BF9390CA54B}"/>
+              </a:ext>
+            </a:extLst>
+          </p:cNvPr>
+          <p:cNvSpPr>
+            <a:spLocks noGrp="1"/>
+          </p:cNvSpPr>
+          <p:nvPr>
+            <p:ph idx="1"/>
+          </p:nvPr>
+        </p:nvSpPr>
+        <p:spPr>
+          <a:xfrm>
+            <a:off x="526701" y="1845721"/>
+            <a:ext cx="10515600" cy="4351338"/>
+          </a:xfrm>
+        </p:spPr>
+        <p:txBody>
+          <a:bodyPr/>
+          <a:lstStyle/>
+          <a:p>
+            <a:pPr marL="0" indent="0">
+              <a:buNone/>
+            </a:pPr>
+            <a:r>
+              <a:rPr lang="en-US" dirty="0" err="1"/>
+              <a:t>RecursiveSearch</a:t>
+            </a:r>
+            <a:r>
+              <a:rPr lang="en-US" dirty="0"/>
+              <a:t>(p, k)</a:t>
+            </a:r>
+            <a:br>
+              <a:rPr lang="en-US" dirty="0"/>
+            </a:br>
+            <a:r>
+              <a:rPr lang="en-US" dirty="0"/>
+              <a:t>   if </a:t>
+            </a:r>
+            <a:r>
+              <a:rPr lang="en-US" dirty="0" err="1"/>
+              <a:t>isLeaf</a:t>
+            </a:r>
+            <a:r>
+              <a:rPr lang="en-US" dirty="0"/>
+              <a:t>(p):</a:t>
+            </a:r>
+            <a:br>
+              <a:rPr lang="en-US" dirty="0"/>
+            </a:br>
+            <a:r>
+              <a:rPr lang="en-US" dirty="0"/>
+              <a:t>       return </a:t>
+            </a:r>
+            <a:r>
+              <a:rPr lang="en-US" b="1" dirty="0"/>
+              <a:t>true</a:t>
+            </a:r>
+            <a:r>
+              <a:rPr lang="en-US" dirty="0"/>
+              <a:t> if </a:t>
+            </a:r>
+            <a:r>
+              <a:rPr lang="en-US" dirty="0" err="1"/>
+              <a:t>p.key</a:t>
+            </a:r>
+            <a:r>
+              <a:rPr lang="en-US" dirty="0"/>
+              <a:t> == k, otherwise </a:t>
+            </a:r>
+            <a:r>
+              <a:rPr lang="en-US" b="1" dirty="0"/>
+              <a:t>false</a:t>
+            </a:r>
+            <a:br>
+              <a:rPr lang="en-US" dirty="0"/>
+            </a:br>
+            <a:r>
+              <a:rPr lang="en-US" dirty="0"/>
+              <a:t>   else if </a:t>
+            </a:r>
+            <a:r>
+              <a:rPr lang="en-US" b="1" dirty="0"/>
+              <a:t>k &lt; </a:t>
+            </a:r>
+            <a:r>
+              <a:rPr lang="en-US" b="1" dirty="0" err="1"/>
+              <a:t>p.key</a:t>
+            </a:r>
+            <a:r>
+              <a:rPr lang="en-US" dirty="0"/>
+              <a:t>:</a:t>
+            </a:r>
+            <a:br>
+              <a:rPr lang="en-US" dirty="0"/>
+            </a:br>
+            <a:r>
+              <a:rPr lang="en-US" dirty="0"/>
+              <a:t>       return </a:t>
+            </a:r>
+            <a:r>
+              <a:rPr lang="en-US" dirty="0" err="1"/>
+              <a:t>RecursiveSearch</a:t>
+            </a:r>
+            <a:r>
+              <a:rPr lang="en-US" dirty="0"/>
+              <a:t>(k, </a:t>
+            </a:r>
+            <a:r>
+              <a:rPr lang="en-US" b="1" dirty="0" err="1"/>
+              <a:t>left_subtree</a:t>
+            </a:r>
+            <a:r>
+              <a:rPr lang="en-US" dirty="0"/>
+              <a:t>(p))</a:t>
+            </a:r>
+            <a:br>
+              <a:rPr lang="en-US" dirty="0"/>
+            </a:br>
+            <a:r>
+              <a:rPr lang="en-US" dirty="0"/>
+              <a:t>   else if </a:t>
+            </a:r>
+            <a:r>
+              <a:rPr lang="en-US" b="1" dirty="0"/>
+              <a:t>k &gt; </a:t>
+            </a:r>
+            <a:r>
+              <a:rPr lang="en-US" b="1" dirty="0" err="1"/>
+              <a:t>p.key</a:t>
+            </a:r>
+            <a:r>
+              <a:rPr lang="en-US" dirty="0"/>
+              <a:t>:</a:t>
+            </a:r>
+            <a:br>
+              <a:rPr lang="en-US" dirty="0"/>
+            </a:br>
+            <a:r>
+              <a:rPr lang="en-US" dirty="0"/>
+              <a:t>       return </a:t>
+            </a:r>
+            <a:r>
+              <a:rPr lang="en-US" dirty="0" err="1"/>
+              <a:t>RecursiveSearch</a:t>
+            </a:r>
+            <a:r>
+              <a:rPr lang="en-US" dirty="0"/>
+              <a:t>(k, </a:t>
+            </a:r>
+            <a:r>
+              <a:rPr lang="en-US" b="1" dirty="0" err="1"/>
+              <a:t>right_subtree</a:t>
+            </a:r>
+            <a:r>
+              <a:rPr lang="en-US" dirty="0"/>
+              <a:t>(p))</a:t>
+            </a:r>
+            <a:br>
+              <a:rPr lang="en-US" dirty="0"/>
+            </a:br>
+            <a:r>
+              <a:rPr lang="en-US" dirty="0"/>
+              <a:t>   else:</a:t>
+            </a:r>
+            <a:br>
+              <a:rPr lang="en-US" dirty="0"/>
+            </a:br>
+            <a:r>
+              <a:rPr lang="en-US" dirty="0"/>
+              <a:t>       return </a:t>
+            </a:r>
+            <a:r>
+              <a:rPr lang="en-US" b="1" dirty="0"/>
+              <a:t>true</a:t>
+            </a:r>
+            <a:r>
+              <a:rPr lang="en-US" dirty="0"/>
+              <a:t>  // found it</a:t>
+            </a:r>
+            <a:br>
+              <a:rPr lang="en-US" dirty="0"/>
+            </a:br>
+            <a:endParaRPr lang="en-US" dirty="0"/>
+          </a:p>
+        </p:txBody>
+      </p:sp>
+    </p:spTree>
+    <p:extLst>
+      <p:ext uri="{BB962C8B-B14F-4D97-AF65-F5344CB8AC3E}">
+        <p14:creationId xmlns:p14="http://schemas.microsoft.com/office/powerpoint/2010/main" val="1820782728"/>
+      </p:ext>
+    </p:extLst>
+  </p:cSld>
+  <p:clrMapOvr>
+    <a:masterClrMapping/>
+  </p:clrMapOvr>
+</p:sld>
+</file>
+
+<file path=ppt/slides/slide31.xml><?xml version="1.0" encoding="utf-8"?>
+<p:sld xmlns:a="http://schemas.openxmlformats.org/drawingml/2006/main" xmlns:r="http://schemas.openxmlformats.org/officeDocument/2006/relationships" xmlns:p="http://schemas.openxmlformats.org/presentationml/2006/main">
+  <p:cSld>
+    <p:spTree>
+      <p:nvGrpSpPr>
+        <p:cNvPr id="1" name="">
+          <a:extLst>
+            <a:ext uri="{FF2B5EF4-FFF2-40B4-BE49-F238E27FC236}">
+              <a16:creationId xmlns:a16="http://schemas.microsoft.com/office/drawing/2014/main" id="{C9C019DB-9098-3092-5574-2B04AB764D9E}"/>
+            </a:ext>
+          </a:extLst>
+        </p:cNvPr>
+        <p:cNvGrpSpPr/>
+        <p:nvPr/>
+      </p:nvGrpSpPr>
+      <p:grpSpPr>
+        <a:xfrm>
+          <a:off x="0" y="0"/>
+          <a:ext cx="0" cy="0"/>
+          <a:chOff x="0" y="0"/>
+          <a:chExt cx="0" cy="0"/>
+        </a:xfrm>
+      </p:grpSpPr>
+      <p:pic>
+        <p:nvPicPr>
+          <p:cNvPr id="4" name="Picture 3">
+            <a:extLst>
+              <a:ext uri="{FF2B5EF4-FFF2-40B4-BE49-F238E27FC236}">
+                <a16:creationId xmlns:a16="http://schemas.microsoft.com/office/drawing/2014/main" id="{81958FE7-4F45-6BF1-5311-2DE3AF6ADE58}"/>
+              </a:ext>
+            </a:extLst>
+          </p:cNvPr>
+          <p:cNvPicPr>
+            <a:picLocks noChangeAspect="1"/>
+          </p:cNvPicPr>
+          <p:nvPr/>
+        </p:nvPicPr>
+        <p:blipFill>
+          <a:blip r:embed="rId2"/>
+          <a:stretch>
+            <a:fillRect/>
+          </a:stretch>
+        </p:blipFill>
+        <p:spPr>
+          <a:xfrm>
+            <a:off x="7165386" y="360380"/>
+            <a:ext cx="5095096" cy="3461607"/>
+          </a:xfrm>
+          <a:prstGeom prst="rect">
+            <a:avLst/>
+          </a:prstGeom>
+        </p:spPr>
+      </p:pic>
+      <p:sp>
+        <p:nvSpPr>
+          <p:cNvPr id="2" name="Title 1">
+            <a:extLst>
+              <a:ext uri="{FF2B5EF4-FFF2-40B4-BE49-F238E27FC236}">
+                <a16:creationId xmlns:a16="http://schemas.microsoft.com/office/drawing/2014/main" id="{0AC60E24-CFF9-0D10-6840-1C5508A5F14A}"/>
+              </a:ext>
+            </a:extLst>
+          </p:cNvPr>
+          <p:cNvSpPr>
+            <a:spLocks noGrp="1"/>
+          </p:cNvSpPr>
+          <p:nvPr>
+            <p:ph type="title"/>
+          </p:nvPr>
+        </p:nvSpPr>
+        <p:spPr/>
+        <p:txBody>
+          <a:bodyPr/>
+          <a:lstStyle/>
+          <a:p>
+            <a:r>
+              <a:rPr lang="en-US" dirty="0"/>
+              <a:t>Searching a BST</a:t>
+            </a:r>
+          </a:p>
+        </p:txBody>
+      </p:sp>
+      <mc:AlternateContent xmlns:mc="http://schemas.openxmlformats.org/markup-compatibility/2006" xmlns:a14="http://schemas.microsoft.com/office/drawing/2010/main">
+        <mc:Choice Requires="a14">
+          <p:sp>
+            <p:nvSpPr>
+              <p:cNvPr id="5" name="TextBox 4">
+                <a:extLst>
+                  <a:ext uri="{FF2B5EF4-FFF2-40B4-BE49-F238E27FC236}">
+                    <a16:creationId xmlns:a16="http://schemas.microsoft.com/office/drawing/2014/main" id="{B9859070-BA0A-1A38-A2B6-67CBDF6881CF}"/>
+                  </a:ext>
+                </a:extLst>
+              </p:cNvPr>
+              <p:cNvSpPr txBox="1"/>
+              <p:nvPr/>
+            </p:nvSpPr>
+            <p:spPr>
+              <a:xfrm>
+                <a:off x="8129521" y="4747932"/>
+                <a:ext cx="3431122" cy="1200329"/>
+              </a:xfrm>
+              <a:prstGeom prst="rect">
+                <a:avLst/>
+              </a:prstGeom>
+              <a:solidFill>
+                <a:schemeClr val="accent2">
+                  <a:lumMod val="40000"/>
+                  <a:lumOff val="60000"/>
+                </a:schemeClr>
+              </a:solidFill>
+            </p:spPr>
+            <p:txBody>
+              <a:bodyPr wrap="square" rtlCol="0">
+                <a:spAutoFit/>
+              </a:bodyPr>
+              <a:lstStyle/>
+              <a:p>
+                <a:pPr algn="ctr"/>
+                <a:r>
+                  <a:rPr lang="en-US" b="1" dirty="0"/>
+                  <a:t>Finding a given value </a:t>
+                </a:r>
+                <a:r>
+                  <a:rPr lang="en-US" dirty="0"/>
+                  <a:t>takes </a:t>
+                </a:r>
+                <a14:m>
+                  <m:oMath xmlns:m="http://schemas.openxmlformats.org/officeDocument/2006/math">
+                    <m:r>
+                      <a:rPr lang="en-US" i="1" dirty="0" smtClean="0">
+                        <a:latin typeface="Cambria Math" panose="02040503050406030204" pitchFamily="18" charset="0"/>
+                      </a:rPr>
+                      <m:t>𝑂</m:t>
+                    </m:r>
+                    <m:r>
+                      <a:rPr lang="en-US" i="1" dirty="0" smtClean="0">
+                        <a:latin typeface="Cambria Math" panose="02040503050406030204" pitchFamily="18" charset="0"/>
+                      </a:rPr>
+                      <m:t>(</m:t>
+                    </m:r>
+                    <m:r>
+                      <a:rPr lang="en-US" i="1" dirty="0" smtClean="0">
+                        <a:latin typeface="Cambria Math" panose="02040503050406030204" pitchFamily="18" charset="0"/>
+                      </a:rPr>
+                      <m:t>ℎ𝑒𝑖𝑔ℎ𝑡</m:t>
+                    </m:r>
+                    <m:r>
+                      <a:rPr lang="en-US" i="1" dirty="0" smtClean="0">
+                        <a:latin typeface="Cambria Math" panose="02040503050406030204" pitchFamily="18" charset="0"/>
+                      </a:rPr>
+                      <m:t>)</m:t>
+                    </m:r>
+                  </m:oMath>
+                </a14:m>
+                <a:r>
+                  <a:rPr lang="en-US" dirty="0"/>
+                  <a:t> time, i.e. between </a:t>
+                </a:r>
+                <a14:m>
+                  <m:oMath xmlns:m="http://schemas.openxmlformats.org/officeDocument/2006/math">
+                    <m:r>
+                      <a:rPr lang="en-US" i="1" dirty="0" smtClean="0">
+                        <a:latin typeface="Cambria Math" panose="02040503050406030204" pitchFamily="18" charset="0"/>
+                      </a:rPr>
+                      <m:t>𝑂</m:t>
+                    </m:r>
+                    <m:r>
+                      <a:rPr lang="en-US" i="1" dirty="0" smtClean="0">
+                        <a:latin typeface="Cambria Math" panose="02040503050406030204" pitchFamily="18" charset="0"/>
+                      </a:rPr>
+                      <m:t>(</m:t>
+                    </m:r>
+                    <m:func>
+                      <m:funcPr>
+                        <m:ctrlPr>
+                          <a:rPr lang="en-US" i="0" dirty="0" smtClean="0">
+                            <a:latin typeface="Cambria Math" panose="02040503050406030204" pitchFamily="18" charset="0"/>
+                          </a:rPr>
+                        </m:ctrlPr>
+                      </m:funcPr>
+                      <m:fName>
+                        <m:r>
+                          <m:rPr>
+                            <m:sty m:val="p"/>
+                          </m:rPr>
+                          <a:rPr lang="en-US" i="0" dirty="0" smtClean="0">
+                            <a:latin typeface="Cambria Math" panose="02040503050406030204" pitchFamily="18" charset="0"/>
+                          </a:rPr>
+                          <m:t>log</m:t>
+                        </m:r>
+                      </m:fName>
+                      <m:e>
+                        <m:r>
+                          <a:rPr lang="en-CA" b="0" i="1" dirty="0" smtClean="0">
+                            <a:latin typeface="Cambria Math" panose="02040503050406030204" pitchFamily="18" charset="0"/>
+                          </a:rPr>
+                          <m:t>𝑛</m:t>
+                        </m:r>
+                      </m:e>
+                    </m:func>
+                    <m:r>
+                      <a:rPr lang="en-US" i="1" dirty="0" smtClean="0">
+                        <a:latin typeface="Cambria Math" panose="02040503050406030204" pitchFamily="18" charset="0"/>
+                      </a:rPr>
+                      <m:t>)</m:t>
+                    </m:r>
+                  </m:oMath>
+                </a14:m>
+                <a:r>
+                  <a:rPr lang="en-US" dirty="0"/>
+                  <a:t> and </a:t>
+                </a:r>
+                <a14:m>
+                  <m:oMath xmlns:m="http://schemas.openxmlformats.org/officeDocument/2006/math">
+                    <m:r>
+                      <a:rPr lang="en-US" i="1" dirty="0" smtClean="0">
+                        <a:latin typeface="Cambria Math" panose="02040503050406030204" pitchFamily="18" charset="0"/>
+                      </a:rPr>
+                      <m:t>𝑂</m:t>
+                    </m:r>
+                    <m:r>
+                      <a:rPr lang="en-US" i="1" dirty="0" smtClean="0">
+                        <a:latin typeface="Cambria Math" panose="02040503050406030204" pitchFamily="18" charset="0"/>
+                      </a:rPr>
+                      <m:t>(</m:t>
+                    </m:r>
+                    <m:r>
+                      <a:rPr lang="en-US" i="1" dirty="0" smtClean="0">
+                        <a:latin typeface="Cambria Math" panose="02040503050406030204" pitchFamily="18" charset="0"/>
+                      </a:rPr>
+                      <m:t>𝑛</m:t>
+                    </m:r>
+                    <m:r>
+                      <a:rPr lang="en-US" i="1" dirty="0" smtClean="0">
+                        <a:latin typeface="Cambria Math" panose="02040503050406030204" pitchFamily="18" charset="0"/>
+                      </a:rPr>
+                      <m:t>)</m:t>
+                    </m:r>
+                  </m:oMath>
+                </a14:m>
+                <a:r>
+                  <a:rPr lang="en-US" dirty="0"/>
+                  <a:t> depending on tree shape.</a:t>
+                </a:r>
+              </a:p>
+            </p:txBody>
+          </p:sp>
+        </mc:Choice>
+        <mc:Fallback xmlns="">
+          <p:sp>
+            <p:nvSpPr>
+              <p:cNvPr id="5" name="TextBox 4">
+                <a:extLst>
+                  <a:ext uri="{FF2B5EF4-FFF2-40B4-BE49-F238E27FC236}">
+                    <a16:creationId xmlns:a16="http://schemas.microsoft.com/office/drawing/2014/main" id="{B9859070-BA0A-1A38-A2B6-67CBDF6881CF}"/>
+                  </a:ext>
+                </a:extLst>
+              </p:cNvPr>
+              <p:cNvSpPr txBox="1">
+                <a:spLocks noRot="1" noChangeAspect="1" noMove="1" noResize="1" noEditPoints="1" noAdjustHandles="1" noChangeArrowheads="1" noChangeShapeType="1" noTextEdit="1"/>
+              </p:cNvSpPr>
+              <p:nvPr/>
+            </p:nvSpPr>
+            <p:spPr>
+              <a:xfrm>
+                <a:off x="8129521" y="4747932"/>
+                <a:ext cx="3431122" cy="1200329"/>
+              </a:xfrm>
+              <a:prstGeom prst="rect">
+                <a:avLst/>
+              </a:prstGeom>
+              <a:blipFill>
+                <a:blip r:embed="rId3"/>
+                <a:stretch>
+                  <a:fillRect t="-2083" r="-1476" b="-6250"/>
+                </a:stretch>
+              </a:blipFill>
+            </p:spPr>
+            <p:txBody>
+              <a:bodyPr/>
+              <a:lstStyle/>
+              <a:p>
+                <a:r>
+                  <a:rPr lang="en-US">
+                    <a:noFill/>
+                  </a:rPr>
+                  <a:t> </a:t>
+                </a:r>
+              </a:p>
+            </p:txBody>
+          </p:sp>
+        </mc:Fallback>
+      </mc:AlternateContent>
+      <p:sp>
+        <p:nvSpPr>
+          <p:cNvPr id="9" name="Content Placeholder 2">
+            <a:extLst>
+              <a:ext uri="{FF2B5EF4-FFF2-40B4-BE49-F238E27FC236}">
+                <a16:creationId xmlns:a16="http://schemas.microsoft.com/office/drawing/2014/main" id="{9A73C4B4-FFB5-0AE6-D9E9-206E8CF50BA2}"/>
+              </a:ext>
+            </a:extLst>
+          </p:cNvPr>
+          <p:cNvSpPr>
+            <a:spLocks noGrp="1"/>
+          </p:cNvSpPr>
+          <p:nvPr>
+            <p:ph idx="1"/>
+          </p:nvPr>
+        </p:nvSpPr>
+        <p:spPr>
+          <a:xfrm>
+            <a:off x="526701" y="1845721"/>
+            <a:ext cx="10515600" cy="4351338"/>
+          </a:xfrm>
+        </p:spPr>
+        <p:txBody>
+          <a:bodyPr/>
+          <a:lstStyle/>
+          <a:p>
+            <a:pPr marL="0" indent="0">
+              <a:buNone/>
+            </a:pPr>
+            <a:r>
+              <a:rPr lang="en-US" dirty="0" err="1"/>
+              <a:t>RecursiveSearch</a:t>
+            </a:r>
+            <a:r>
+              <a:rPr lang="en-US" dirty="0"/>
+              <a:t>(p, k)</a:t>
+            </a:r>
+            <a:br>
+              <a:rPr lang="en-US" dirty="0"/>
+            </a:br>
+            <a:r>
+              <a:rPr lang="en-US" dirty="0"/>
+              <a:t>   if </a:t>
+            </a:r>
+            <a:r>
+              <a:rPr lang="en-US" dirty="0" err="1"/>
+              <a:t>isLeaf</a:t>
+            </a:r>
+            <a:r>
+              <a:rPr lang="en-US" dirty="0"/>
+              <a:t>(p):</a:t>
+            </a:r>
+            <a:br>
+              <a:rPr lang="en-US" dirty="0"/>
+            </a:br>
+            <a:r>
+              <a:rPr lang="en-US" dirty="0"/>
+              <a:t>       return </a:t>
+            </a:r>
+            <a:r>
+              <a:rPr lang="en-US" b="1" dirty="0"/>
+              <a:t>true</a:t>
+            </a:r>
+            <a:r>
+              <a:rPr lang="en-US" dirty="0"/>
+              <a:t> if </a:t>
+            </a:r>
+            <a:r>
+              <a:rPr lang="en-US" dirty="0" err="1"/>
+              <a:t>p.key</a:t>
+            </a:r>
+            <a:r>
+              <a:rPr lang="en-US" dirty="0"/>
+              <a:t> == k, otherwise </a:t>
+            </a:r>
+            <a:r>
+              <a:rPr lang="en-US" b="1" dirty="0"/>
+              <a:t>false</a:t>
+            </a:r>
+            <a:br>
+              <a:rPr lang="en-US" dirty="0"/>
+            </a:br>
+            <a:r>
+              <a:rPr lang="en-US" dirty="0"/>
+              <a:t>   else if </a:t>
+            </a:r>
+            <a:r>
+              <a:rPr lang="en-US" b="1" dirty="0"/>
+              <a:t>k &lt; </a:t>
+            </a:r>
+            <a:r>
+              <a:rPr lang="en-US" b="1" dirty="0" err="1"/>
+              <a:t>p.key</a:t>
+            </a:r>
+            <a:r>
+              <a:rPr lang="en-US" dirty="0"/>
+              <a:t>:</a:t>
+            </a:r>
+            <a:br>
+              <a:rPr lang="en-US" dirty="0"/>
+            </a:br>
+            <a:r>
+              <a:rPr lang="en-US" dirty="0"/>
+              <a:t>       return </a:t>
+            </a:r>
+            <a:r>
+              <a:rPr lang="en-US" dirty="0" err="1"/>
+              <a:t>RecursiveSearch</a:t>
+            </a:r>
+            <a:r>
+              <a:rPr lang="en-US" dirty="0"/>
+              <a:t>(k, </a:t>
+            </a:r>
+            <a:r>
+              <a:rPr lang="en-US" b="1" dirty="0" err="1"/>
+              <a:t>left_subtree</a:t>
+            </a:r>
+            <a:r>
+              <a:rPr lang="en-US" dirty="0"/>
+              <a:t>(p))</a:t>
+            </a:r>
+            <a:br>
+              <a:rPr lang="en-US" dirty="0"/>
+            </a:br>
+            <a:r>
+              <a:rPr lang="en-US" dirty="0"/>
+              <a:t>   else if </a:t>
+            </a:r>
+            <a:r>
+              <a:rPr lang="en-US" b="1" dirty="0"/>
+              <a:t>k &gt; </a:t>
+            </a:r>
+            <a:r>
+              <a:rPr lang="en-US" b="1" dirty="0" err="1"/>
+              <a:t>p.key</a:t>
+            </a:r>
+            <a:r>
+              <a:rPr lang="en-US" dirty="0"/>
+              <a:t>:</a:t>
+            </a:r>
+            <a:br>
+              <a:rPr lang="en-US" dirty="0"/>
+            </a:br>
+            <a:r>
+              <a:rPr lang="en-US" dirty="0"/>
+              <a:t>       return </a:t>
+            </a:r>
+            <a:r>
+              <a:rPr lang="en-US" dirty="0" err="1"/>
+              <a:t>RecursiveSearch</a:t>
+            </a:r>
+            <a:r>
+              <a:rPr lang="en-US" dirty="0"/>
+              <a:t>(k, </a:t>
+            </a:r>
+            <a:r>
+              <a:rPr lang="en-US" b="1" dirty="0" err="1"/>
+              <a:t>right_subtree</a:t>
+            </a:r>
+            <a:r>
+              <a:rPr lang="en-US" dirty="0"/>
+              <a:t>(p))</a:t>
+            </a:r>
+            <a:br>
+              <a:rPr lang="en-US" dirty="0"/>
+            </a:br>
+            <a:r>
+              <a:rPr lang="en-US" dirty="0"/>
+              <a:t>   else:</a:t>
+            </a:r>
+            <a:br>
+              <a:rPr lang="en-US" dirty="0"/>
+            </a:br>
+            <a:r>
+              <a:rPr lang="en-US" dirty="0"/>
+              <a:t>       return </a:t>
+            </a:r>
+            <a:r>
+              <a:rPr lang="en-US" b="1" dirty="0"/>
+              <a:t>true</a:t>
+            </a:r>
+            <a:r>
+              <a:rPr lang="en-US" dirty="0"/>
+              <a:t>  // found it</a:t>
+            </a:r>
+            <a:br>
+              <a:rPr lang="en-US" dirty="0"/>
+            </a:br>
+            <a:endParaRPr lang="en-US" dirty="0"/>
+          </a:p>
+        </p:txBody>
+      </p:sp>
+    </p:spTree>
+    <p:extLst>
+      <p:ext uri="{BB962C8B-B14F-4D97-AF65-F5344CB8AC3E}">
+        <p14:creationId xmlns:p14="http://schemas.microsoft.com/office/powerpoint/2010/main" val="4279159083"/>
+      </p:ext>
+    </p:extLst>
+  </p:cSld>
+  <p:clrMapOvr>
+    <a:masterClrMapping/>
+  </p:clrMapOvr>
+</p:sld>
+</file>
+
+<file path=ppt/slides/slide32.xml><?xml version="1.0" encoding="utf-8"?>
+<p:sld xmlns:a="http://schemas.openxmlformats.org/drawingml/2006/main" xmlns:r="http://schemas.openxmlformats.org/officeDocument/2006/relationships" xmlns:p="http://schemas.openxmlformats.org/presentationml/2006/main">
+  <p:cSld>
+    <p:spTree>
+      <p:nvGrpSpPr>
+        <p:cNvPr id="1" name=""/>
+        <p:cNvGrpSpPr/>
+        <p:nvPr/>
+      </p:nvGrpSpPr>
+      <p:grpSpPr>
+        <a:xfrm>
+          <a:off x="0" y="0"/>
+          <a:ext cx="0" cy="0"/>
+          <a:chOff x="0" y="0"/>
+          <a:chExt cx="0" cy="0"/>
+        </a:xfrm>
+      </p:grpSpPr>
       <p:sp>
         <p:nvSpPr>
           <p:cNvPr id="2" name="Title 1">
@@ -37628,8 +38881,8 @@
           </a:p>
         </p:txBody>
       </p:sp>
-      <mc:AlternateContent xmlns:mc="http://schemas.openxmlformats.org/markup-compatibility/2006" xmlns:a14="http://schemas.microsoft.com/office/drawing/2010/main">
-        <mc:Choice Requires="a14">
+      <mc:AlternateContent xmlns:mc="http://schemas.openxmlformats.org/markup-compatibility/2006">
+        <mc:Choice xmlns:a14="http://schemas.microsoft.com/office/drawing/2010/main" Requires="a14">
           <p:sp>
             <p:nvSpPr>
               <p:cNvPr id="3" name="Content Placeholder 2">
@@ -37667,7 +38920,7 @@
                 </a:r>
                 <a:r>
                   <a:rPr lang="en-US" b="1" dirty="0"/>
-                  <a:t>BST insertion </a:t>
+                  <a:t>BST leaf insertion </a:t>
                 </a:r>
                 <a:r>
                   <a:rPr lang="en-US" dirty="0"/>
@@ -37677,7 +38930,7 @@
               <a:p>
                 <a:r>
                   <a:rPr lang="en-US" dirty="0"/>
-                  <a:t>After insertion, it must still be a BST</a:t>
+                  <a:t>After insertion, it is still a BST</a:t>
                 </a:r>
               </a:p>
               <a:p>
@@ -37703,7 +38956,7 @@
                       <a:rPr lang="en-US" i="1" dirty="0" smtClean="0">
                         <a:latin typeface="Cambria Math" panose="02040503050406030204" pitchFamily="18" charset="0"/>
                       </a:rPr>
-                      <m:t>h𝑒𝑖𝑔h𝑡</m:t>
+                      <m:t>ℎ𝑒𝑖𝑔ℎ𝑡</m:t>
                     </m:r>
                     <m:r>
                       <a:rPr lang="en-US" i="1" dirty="0" smtClean="0">
@@ -37721,7 +38974,7 @@
             </p:txBody>
           </p:sp>
         </mc:Choice>
-        <mc:Fallback xmlns="">
+        <mc:Fallback>
           <p:sp>
             <p:nvSpPr>
               <p:cNvPr id="3" name="Content Placeholder 2">
@@ -37746,7 +38999,7 @@
               <a:blipFill>
                 <a:blip r:embed="rId2"/>
                 <a:stretch>
-                  <a:fillRect l="-3215" t="-3198" r="-1608"/>
+                  <a:fillRect l="-3215" t="-3198" r="-4502"/>
                 </a:stretch>
               </a:blipFill>
             </p:spPr>
@@ -39394,7 +40647,7 @@
 </p:sld>
 </file>
 
-<file path=ppt/slides/slide31.xml><?xml version="1.0" encoding="utf-8"?>
+<file path=ppt/slides/slide33.xml><?xml version="1.0" encoding="utf-8"?>
 <p:sld xmlns:a="http://schemas.openxmlformats.org/drawingml/2006/main" xmlns:r="http://schemas.openxmlformats.org/officeDocument/2006/relationships" xmlns:p="http://schemas.openxmlformats.org/presentationml/2006/main">
   <p:cSld>
     <p:spTree>
@@ -39450,143 +40703,6 @@
           </a:p>
         </p:txBody>
       </p:sp>
-      <mc:AlternateContent xmlns:mc="http://schemas.openxmlformats.org/markup-compatibility/2006" xmlns:a14="http://schemas.microsoft.com/office/drawing/2010/main">
-        <mc:Choice Requires="a14">
-          <p:sp>
-            <p:nvSpPr>
-              <p:cNvPr id="3" name="Content Placeholder 2">
-                <a:extLst>
-                  <a:ext uri="{FF2B5EF4-FFF2-40B4-BE49-F238E27FC236}">
-                    <a16:creationId xmlns:a16="http://schemas.microsoft.com/office/drawing/2014/main" id="{D3BA0417-7314-ACF6-6C6F-1805E39E627E}"/>
-                  </a:ext>
-                </a:extLst>
-              </p:cNvPr>
-              <p:cNvSpPr>
-                <a:spLocks noGrp="1"/>
-              </p:cNvSpPr>
-              <p:nvPr>
-                <p:ph idx="1"/>
-              </p:nvPr>
-            </p:nvSpPr>
-            <p:spPr>
-              <a:xfrm>
-                <a:off x="838200" y="1825625"/>
-                <a:ext cx="3949557" cy="4351338"/>
-              </a:xfrm>
-            </p:spPr>
-            <p:txBody>
-              <a:bodyPr>
-                <a:normAutofit lnSpcReduction="10000"/>
-              </a:bodyPr>
-              <a:lstStyle/>
-              <a:p>
-                <a:pPr marL="0" indent="0">
-                  <a:buNone/>
-                </a:pPr>
-                <a:r>
-                  <a:rPr lang="en-US" dirty="0"/>
-                  <a:t>Basic </a:t>
-                </a:r>
-                <a:r>
-                  <a:rPr lang="en-US" b="1" dirty="0"/>
-                  <a:t>BST insertion </a:t>
-                </a:r>
-                <a:r>
-                  <a:rPr lang="en-US" dirty="0"/>
-                  <a:t>inserts a new key at the top and traces form the root down to the leaf where the key goes</a:t>
-                </a:r>
-              </a:p>
-              <a:p>
-                <a:r>
-                  <a:rPr lang="en-US" dirty="0"/>
-                  <a:t>After insertion, it must still be a BST</a:t>
-                </a:r>
-              </a:p>
-              <a:p>
-                <a:r>
-                  <a:rPr lang="en-US" dirty="0"/>
-                  <a:t>Like search, this is a root-to-leaf operation, so </a:t>
-                </a:r>
-                <a14:m>
-                  <m:oMath xmlns:m="http://schemas.openxmlformats.org/officeDocument/2006/math">
-                    <m:r>
-                      <a:rPr lang="en-US" i="1" dirty="0">
-                        <a:latin typeface="Cambria Math" panose="02040503050406030204" pitchFamily="18" charset="0"/>
-                      </a:rPr>
-                      <m:t>𝑂</m:t>
-                    </m:r>
-                    <m:r>
-                      <a:rPr lang="en-US" i="1" dirty="0">
-                        <a:latin typeface="Cambria Math" panose="02040503050406030204" pitchFamily="18" charset="0"/>
-                      </a:rPr>
-                      <m:t>(</m:t>
-                    </m:r>
-                    <m:r>
-                      <a:rPr lang="en-US" i="1" dirty="0">
-                        <a:latin typeface="Cambria Math" panose="02040503050406030204" pitchFamily="18" charset="0"/>
-                      </a:rPr>
-                      <m:t>h𝑒𝑖𝑔h𝑡</m:t>
-                    </m:r>
-                    <m:r>
-                      <a:rPr lang="en-US" i="1" dirty="0">
-                        <a:latin typeface="Cambria Math" panose="02040503050406030204" pitchFamily="18" charset="0"/>
-                      </a:rPr>
-                      <m:t>)</m:t>
-                    </m:r>
-                  </m:oMath>
-                </a14:m>
-                <a:r>
-                  <a:rPr lang="en-US" dirty="0"/>
-                  <a:t> time in the worst case</a:t>
-                </a:r>
-              </a:p>
-            </p:txBody>
-          </p:sp>
-        </mc:Choice>
-        <mc:Fallback xmlns="">
-          <p:sp>
-            <p:nvSpPr>
-              <p:cNvPr id="3" name="Content Placeholder 2">
-                <a:extLst>
-                  <a:ext uri="{FF2B5EF4-FFF2-40B4-BE49-F238E27FC236}">
-                    <a16:creationId xmlns:a16="http://schemas.microsoft.com/office/drawing/2014/main" id="{D3BA0417-7314-ACF6-6C6F-1805E39E627E}"/>
-                  </a:ext>
-                </a:extLst>
-              </p:cNvPr>
-              <p:cNvSpPr>
-                <a:spLocks noGrp="1" noRot="1" noChangeAspect="1" noMove="1" noResize="1" noEditPoints="1" noAdjustHandles="1" noChangeArrowheads="1" noChangeShapeType="1" noTextEdit="1"/>
-              </p:cNvSpPr>
-              <p:nvPr>
-                <p:ph idx="1"/>
-              </p:nvPr>
-            </p:nvSpPr>
-            <p:spPr>
-              <a:xfrm>
-                <a:off x="838200" y="1825625"/>
-                <a:ext cx="3949557" cy="4351338"/>
-              </a:xfrm>
-              <a:blipFill>
-                <a:blip r:embed="rId2"/>
-                <a:stretch>
-                  <a:fillRect l="-3215" t="-3198" r="-1608"/>
-                </a:stretch>
-              </a:blipFill>
-            </p:spPr>
-            <p:txBody>
-              <a:bodyPr/>
-              <a:lstStyle/>
-              <a:p>
-                <a:r>
-                  <a:rPr lang="en-US">
-                    <a:noFill/>
-                  </a:rPr>
-                  <a:t> </a:t>
-                </a:r>
-              </a:p>
-            </p:txBody>
-          </p:sp>
-        </mc:Fallback>
-      </mc:AlternateContent>
       <p:grpSp>
         <p:nvGrpSpPr>
           <p:cNvPr id="4" name="Group 3">
@@ -41469,6 +42585,143 @@
           </a:fontRef>
         </p:style>
       </p:cxnSp>
+      <mc:AlternateContent xmlns:mc="http://schemas.openxmlformats.org/markup-compatibility/2006">
+        <mc:Choice xmlns:a14="http://schemas.microsoft.com/office/drawing/2010/main" Requires="a14">
+          <p:sp>
+            <p:nvSpPr>
+              <p:cNvPr id="47" name="Content Placeholder 2">
+                <a:extLst>
+                  <a:ext uri="{FF2B5EF4-FFF2-40B4-BE49-F238E27FC236}">
+                    <a16:creationId xmlns:a16="http://schemas.microsoft.com/office/drawing/2014/main" id="{CB705E69-F314-105F-9485-C7CD6BE785EC}"/>
+                  </a:ext>
+                </a:extLst>
+              </p:cNvPr>
+              <p:cNvSpPr>
+                <a:spLocks noGrp="1"/>
+              </p:cNvSpPr>
+              <p:nvPr>
+                <p:ph idx="1"/>
+              </p:nvPr>
+            </p:nvSpPr>
+            <p:spPr>
+              <a:xfrm>
+                <a:off x="838200" y="1825625"/>
+                <a:ext cx="3949557" cy="4351338"/>
+              </a:xfrm>
+            </p:spPr>
+            <p:txBody>
+              <a:bodyPr>
+                <a:normAutofit lnSpcReduction="10000"/>
+              </a:bodyPr>
+              <a:lstStyle/>
+              <a:p>
+                <a:pPr marL="0" indent="0">
+                  <a:buNone/>
+                </a:pPr>
+                <a:r>
+                  <a:rPr lang="en-US" dirty="0"/>
+                  <a:t>Basic </a:t>
+                </a:r>
+                <a:r>
+                  <a:rPr lang="en-US" b="1" dirty="0"/>
+                  <a:t>BST leaf insertion </a:t>
+                </a:r>
+                <a:r>
+                  <a:rPr lang="en-US" dirty="0"/>
+                  <a:t>inserts a new key at the top and traces form the root down to the leaf where the key goes</a:t>
+                </a:r>
+              </a:p>
+              <a:p>
+                <a:r>
+                  <a:rPr lang="en-US" dirty="0"/>
+                  <a:t>After insertion, it is still a BST</a:t>
+                </a:r>
+              </a:p>
+              <a:p>
+                <a:r>
+                  <a:rPr lang="en-US" dirty="0"/>
+                  <a:t>Like search, this is a root-to-leaf operation, so </a:t>
+                </a:r>
+                <a14:m>
+                  <m:oMath xmlns:m="http://schemas.openxmlformats.org/officeDocument/2006/math">
+                    <m:r>
+                      <a:rPr lang="en-US" i="1" dirty="0" smtClean="0">
+                        <a:latin typeface="Cambria Math" panose="02040503050406030204" pitchFamily="18" charset="0"/>
+                      </a:rPr>
+                      <m:t>𝑂</m:t>
+                    </m:r>
+                    <m:r>
+                      <a:rPr lang="en-US" i="1" dirty="0" smtClean="0">
+                        <a:latin typeface="Cambria Math" panose="02040503050406030204" pitchFamily="18" charset="0"/>
+                      </a:rPr>
+                      <m:t>(</m:t>
+                    </m:r>
+                    <m:r>
+                      <a:rPr lang="en-US" i="1" dirty="0" smtClean="0">
+                        <a:latin typeface="Cambria Math" panose="02040503050406030204" pitchFamily="18" charset="0"/>
+                      </a:rPr>
+                      <m:t>ℎ𝑒𝑖𝑔ℎ𝑡</m:t>
+                    </m:r>
+                    <m:r>
+                      <a:rPr lang="en-US" i="1" dirty="0" smtClean="0">
+                        <a:latin typeface="Cambria Math" panose="02040503050406030204" pitchFamily="18" charset="0"/>
+                      </a:rPr>
+                      <m:t>)</m:t>
+                    </m:r>
+                  </m:oMath>
+                </a14:m>
+                <a:r>
+                  <a:rPr lang="en-US" dirty="0"/>
+                  <a:t> time in the worst case</a:t>
+                </a:r>
+              </a:p>
+            </p:txBody>
+          </p:sp>
+        </mc:Choice>
+        <mc:Fallback>
+          <p:sp>
+            <p:nvSpPr>
+              <p:cNvPr id="47" name="Content Placeholder 2">
+                <a:extLst>
+                  <a:ext uri="{FF2B5EF4-FFF2-40B4-BE49-F238E27FC236}">
+                    <a16:creationId xmlns:a16="http://schemas.microsoft.com/office/drawing/2014/main" id="{CB705E69-F314-105F-9485-C7CD6BE785EC}"/>
+                  </a:ext>
+                </a:extLst>
+              </p:cNvPr>
+              <p:cNvSpPr>
+                <a:spLocks noGrp="1" noRot="1" noChangeAspect="1" noMove="1" noResize="1" noEditPoints="1" noAdjustHandles="1" noChangeArrowheads="1" noChangeShapeType="1" noTextEdit="1"/>
+              </p:cNvSpPr>
+              <p:nvPr>
+                <p:ph idx="1"/>
+              </p:nvPr>
+            </p:nvSpPr>
+            <p:spPr>
+              <a:xfrm>
+                <a:off x="838200" y="1825625"/>
+                <a:ext cx="3949557" cy="4351338"/>
+              </a:xfrm>
+              <a:blipFill>
+                <a:blip r:embed="rId2"/>
+                <a:stretch>
+                  <a:fillRect l="-3215" t="-3198" r="-4502"/>
+                </a:stretch>
+              </a:blipFill>
+            </p:spPr>
+            <p:txBody>
+              <a:bodyPr/>
+              <a:lstStyle/>
+              <a:p>
+                <a:r>
+                  <a:rPr lang="en-US">
+                    <a:noFill/>
+                  </a:rPr>
+                  <a:t> </a:t>
+                </a:r>
+              </a:p>
+            </p:txBody>
+          </p:sp>
+        </mc:Fallback>
+      </mc:AlternateContent>
     </p:spTree>
     <p:extLst>
       <p:ext uri="{BB962C8B-B14F-4D97-AF65-F5344CB8AC3E}">
@@ -41482,7 +42735,7 @@
 </p:sld>
 </file>
 
-<file path=ppt/slides/slide32.xml><?xml version="1.0" encoding="utf-8"?>
+<file path=ppt/slides/slide34.xml><?xml version="1.0" encoding="utf-8"?>
 <p:sld xmlns:a="http://schemas.openxmlformats.org/drawingml/2006/main" xmlns:r="http://schemas.openxmlformats.org/officeDocument/2006/relationships" xmlns:p="http://schemas.openxmlformats.org/presentationml/2006/main">
   <p:cSld>
     <p:spTree>
@@ -41592,7 +42845,7 @@
                       <a:rPr lang="en-US" i="1" dirty="0" smtClean="0">
                         <a:latin typeface="Cambria Math" panose="02040503050406030204" pitchFamily="18" charset="0"/>
                       </a:rPr>
-                      <m:t>h𝑒𝑖𝑔h𝑡</m:t>
+                      <m:t>ℎ𝑒𝑖𝑔ℎ𝑡</m:t>
                     </m:r>
                     <m:r>
                       <a:rPr lang="en-US" i="1" dirty="0" smtClean="0">
@@ -41602,6 +42855,43 @@
                     </m:r>
                   </m:oMath>
                 </a14:m>
+                <a:endParaRPr lang="en-US" dirty="0"/>
+              </a:p>
+              <a:p>
+                <a:pPr lvl="1"/>
+                <a:r>
+                  <a:rPr lang="en-US" dirty="0"/>
+                  <a:t>We’ve skipped remove: see the textbook if you are curious, it is a little more involved to avoid “gaps”, but still </a:t>
+                </a:r>
+                <a14:m>
+                  <m:oMath xmlns:m="http://schemas.openxmlformats.org/officeDocument/2006/math">
+                    <m:r>
+                      <a:rPr lang="en-US" i="1" dirty="0">
+                        <a:latin typeface="Cambria Math" panose="02040503050406030204" pitchFamily="18" charset="0"/>
+                      </a:rPr>
+                      <m:t>𝑂</m:t>
+                    </m:r>
+                    <m:r>
+                      <a:rPr lang="en-US" i="1" dirty="0">
+                        <a:latin typeface="Cambria Math" panose="02040503050406030204" pitchFamily="18" charset="0"/>
+                      </a:rPr>
+                      <m:t>(</m:t>
+                    </m:r>
+                    <m:r>
+                      <a:rPr lang="en-US" i="1" dirty="0">
+                        <a:latin typeface="Cambria Math" panose="02040503050406030204" pitchFamily="18" charset="0"/>
+                      </a:rPr>
+                      <m:t>ℎ𝑒𝑖𝑔ℎ𝑡</m:t>
+                    </m:r>
+                    <m:r>
+                      <a:rPr lang="en-US" i="1" dirty="0">
+                        <a:latin typeface="Cambria Math" panose="02040503050406030204" pitchFamily="18" charset="0"/>
+                      </a:rPr>
+                      <m:t>)</m:t>
+                    </m:r>
+                  </m:oMath>
+                </a14:m>
+                <a:endParaRPr lang="en-US" dirty="0"/>
               </a:p>
               <a:p>
                 <a:r>
@@ -41625,7 +42915,7 @@
                     <m:func>
                       <m:funcPr>
                         <m:ctrlPr>
-                          <a:rPr lang="en-US" i="1" dirty="0" smtClean="0">
+                          <a:rPr lang="en-US" i="0" dirty="0" smtClean="0">
                             <a:latin typeface="Cambria Math" panose="02040503050406030204" pitchFamily="18" charset="0"/>
                           </a:rPr>
                         </m:ctrlPr>
@@ -41775,13 +43065,8 @@
                 <a:pPr lvl="1"/>
                 <a:r>
                   <a:rPr lang="en-US" dirty="0"/>
-                  <a:t>We’ll see how to do this by modifying insert to re-balance the tree after each insertion (</a:t>
+                  <a:t>We’ll see how to do this by modifying insert to re-balance the tree after each insertion (AVL trees)</a:t>
                 </a:r>
-                <a:r>
-                  <a:rPr lang="en-US"/>
-                  <a:t>AVL trees)</a:t>
-                </a:r>
-                <a:endParaRPr lang="en-US" dirty="0"/>
               </a:p>
             </p:txBody>
           </p:sp>
@@ -41933,7 +43218,11 @@
             </a:pPr>
             <a:r>
               <a:rPr lang="en-US" dirty="0"/>
-              <a:t>Every node has at most children</a:t>
+              <a:t>Every node has at most </a:t>
+            </a:r>
+            <a:r>
+              <a:rPr lang="en-US" b="1" dirty="0"/>
+              <a:t>2 children</a:t>
             </a:r>
           </a:p>
           <a:p>
@@ -41943,7 +43232,19 @@
             </a:pPr>
             <a:r>
               <a:rPr lang="en-US" dirty="0"/>
-              <a:t>Each child is labelled as left or right</a:t>
+              <a:t>Each child is labelled as </a:t>
+            </a:r>
+            <a:r>
+              <a:rPr lang="en-US" b="1" dirty="0"/>
+              <a:t>left</a:t>
+            </a:r>
+            <a:r>
+              <a:rPr lang="en-US" dirty="0"/>
+              <a:t> or </a:t>
+            </a:r>
+            <a:r>
+              <a:rPr lang="en-US" b="1" dirty="0"/>
+              <a:t>right</a:t>
             </a:r>
           </a:p>
           <a:p>
@@ -42028,7 +43329,7 @@
             </a:r>
             <a:r>
               <a:rPr lang="en-US" dirty="0"/>
-              <a:t> means that the order of the children of a node matters.</a:t>
+              <a:t> means that the order of the node’s children matters.</a:t>
             </a:r>
           </a:p>
         </p:txBody>
@@ -42186,8 +43487,8 @@
           </a:p>
         </p:txBody>
       </p:sp>
-      <mc:AlternateContent xmlns:mc="http://schemas.openxmlformats.org/markup-compatibility/2006" xmlns:a14="http://schemas.microsoft.com/office/drawing/2010/main">
-        <mc:Choice Requires="a14">
+      <mc:AlternateContent xmlns:mc="http://schemas.openxmlformats.org/markup-compatibility/2006">
+        <mc:Choice xmlns:a14="http://schemas.microsoft.com/office/drawing/2010/main" Requires="a14">
           <p:sp>
             <p:nvSpPr>
               <p:cNvPr id="3" name="Content Placeholder 2">
@@ -42237,23 +43538,7 @@
                 </a:r>
                 <a:r>
                   <a:rPr lang="en-US" dirty="0"/>
-                  <a:t>) is a binary tree </a:t>
-                </a:r>
-                <a:r>
-                  <a:rPr lang="en-US" b="1" dirty="0"/>
-                  <a:t>T</a:t>
-                </a:r>
-                <a:r>
-                  <a:rPr lang="en-US" dirty="0"/>
-                  <a:t> where each node </a:t>
-                </a:r>
-                <a:r>
-                  <a:rPr lang="en-US" b="1" dirty="0"/>
-                  <a:t>v</a:t>
-                </a:r>
-                <a:r>
-                  <a:rPr lang="en-US" dirty="0"/>
-                  <a:t> has a </a:t>
+                  <a:t>) is a binary tree where each node has a key </a:t>
                 </a:r>
                 <a:r>
                   <a:rPr lang="en-US" b="1" dirty="0"/>
@@ -42267,15 +43552,7 @@
               <a:p>
                 <a:r>
                   <a:rPr lang="en-US" dirty="0"/>
-                  <a:t>All keys in the left subtree of </a:t>
-                </a:r>
-                <a:r>
-                  <a:rPr lang="en-US" b="1" dirty="0"/>
-                  <a:t>v</a:t>
-                </a:r>
-                <a:r>
-                  <a:rPr lang="en-US" dirty="0"/>
-                  <a:t> are </a:t>
+                  <a:t>All keys in the left subtree are </a:t>
                 </a:r>
                 <a14:m>
                   <m:oMath xmlns:m="http://schemas.openxmlformats.org/officeDocument/2006/math">
@@ -42299,15 +43576,7 @@
               <a:p>
                 <a:r>
                   <a:rPr lang="en-US" dirty="0"/>
-                  <a:t>All keys in the right subtree of </a:t>
-                </a:r>
-                <a:r>
-                  <a:rPr lang="en-US" b="1" dirty="0"/>
-                  <a:t>v</a:t>
-                </a:r>
-                <a:r>
-                  <a:rPr lang="en-US" dirty="0"/>
-                  <a:t> are </a:t>
+                  <a:t>All keys in the right subtree are </a:t>
                 </a:r>
                 <a14:m>
                   <m:oMath xmlns:m="http://schemas.openxmlformats.org/officeDocument/2006/math">
@@ -42332,7 +43601,7 @@
             </p:txBody>
           </p:sp>
         </mc:Choice>
-        <mc:Fallback xmlns="">
+        <mc:Fallback>
           <p:sp>
             <p:nvSpPr>
               <p:cNvPr id="3" name="Content Placeholder 2">
@@ -42357,7 +43626,7 @@
               <a:blipFill>
                 <a:blip r:embed="rId2"/>
                 <a:stretch>
-                  <a:fillRect l="-2793" t="-2326" r="-3631"/>
+                  <a:fillRect l="-2793" t="-2326" r="-3352"/>
                 </a:stretch>
               </a:blipFill>
             </p:spPr>
@@ -42390,7 +43659,7 @@
         </p:nvGrpSpPr>
         <p:grpSpPr>
           <a:xfrm>
-            <a:off x="8869663" y="814349"/>
+            <a:off x="8628236" y="1461464"/>
             <a:ext cx="783771" cy="728321"/>
             <a:chOff x="8711921" y="1497204"/>
             <a:chExt cx="783771" cy="728321"/>
@@ -42505,7 +43774,7 @@
         </p:nvCxnSpPr>
         <p:spPr>
           <a:xfrm flipH="1">
-            <a:off x="8079278" y="1436010"/>
+            <a:off x="7837851" y="2083125"/>
             <a:ext cx="905166" cy="580178"/>
           </a:xfrm>
           <a:prstGeom prst="line">
@@ -42550,7 +43819,7 @@
         </p:nvCxnSpPr>
         <p:spPr>
           <a:xfrm>
-            <a:off x="9538653" y="1436010"/>
+            <a:off x="9297226" y="2083125"/>
             <a:ext cx="861163" cy="580178"/>
           </a:xfrm>
           <a:prstGeom prst="line">
@@ -42591,7 +43860,7 @@
         </p:nvSpPr>
         <p:spPr>
           <a:xfrm>
-            <a:off x="9378099" y="2016188"/>
+            <a:off x="9136672" y="2663303"/>
             <a:ext cx="2043434" cy="2755149"/>
           </a:xfrm>
           <a:prstGeom prst="triangle">
@@ -42638,7 +43907,7 @@
         </p:nvSpPr>
         <p:spPr>
           <a:xfrm>
-            <a:off x="7057561" y="2016188"/>
+            <a:off x="6816134" y="2663303"/>
             <a:ext cx="2043434" cy="2755149"/>
           </a:xfrm>
           <a:prstGeom prst="triangle">
@@ -42671,8 +43940,8 @@
           </a:p>
         </p:txBody>
       </p:sp>
-      <mc:AlternateContent xmlns:mc="http://schemas.openxmlformats.org/markup-compatibility/2006" xmlns:a14="http://schemas.microsoft.com/office/drawing/2010/main">
-        <mc:Choice Requires="a14">
+      <mc:AlternateContent xmlns:mc="http://schemas.openxmlformats.org/markup-compatibility/2006">
+        <mc:Choice xmlns:a14="http://schemas.microsoft.com/office/drawing/2010/main" Requires="a14">
           <p:sp>
             <p:nvSpPr>
               <p:cNvPr id="19" name="TextBox 18">
@@ -42687,7 +43956,7 @@
             </p:nvSpPr>
             <p:spPr>
               <a:xfrm>
-                <a:off x="7704977" y="3396274"/>
+                <a:off x="7463550" y="4043389"/>
                 <a:ext cx="748602" cy="523220"/>
               </a:xfrm>
               <a:prstGeom prst="rect">
@@ -42724,7 +43993,7 @@
             </p:txBody>
           </p:sp>
         </mc:Choice>
-        <mc:Fallback xmlns="">
+        <mc:Fallback>
           <p:sp>
             <p:nvSpPr>
               <p:cNvPr id="19" name="TextBox 18">
@@ -42741,7 +44010,7 @@
             </p:nvSpPr>
             <p:spPr>
               <a:xfrm>
-                <a:off x="7704977" y="3396274"/>
+                <a:off x="7463550" y="4043389"/>
                 <a:ext cx="748602" cy="523220"/>
               </a:xfrm>
               <a:prstGeom prst="rect">
@@ -42769,8 +44038,8 @@
           </p:sp>
         </mc:Fallback>
       </mc:AlternateContent>
-      <mc:AlternateContent xmlns:mc="http://schemas.openxmlformats.org/markup-compatibility/2006" xmlns:a14="http://schemas.microsoft.com/office/drawing/2010/main">
-        <mc:Choice Requires="a14">
+      <mc:AlternateContent xmlns:mc="http://schemas.openxmlformats.org/markup-compatibility/2006">
+        <mc:Choice xmlns:a14="http://schemas.microsoft.com/office/drawing/2010/main" Requires="a14">
           <p:sp>
             <p:nvSpPr>
               <p:cNvPr id="20" name="TextBox 19">
@@ -42785,7 +44054,7 @@
             </p:nvSpPr>
             <p:spPr>
               <a:xfrm>
-                <a:off x="10034086" y="3393762"/>
+                <a:off x="9792659" y="4040877"/>
                 <a:ext cx="748602" cy="523220"/>
               </a:xfrm>
               <a:prstGeom prst="rect">
@@ -42822,7 +44091,7 @@
             </p:txBody>
           </p:sp>
         </mc:Choice>
-        <mc:Fallback xmlns="">
+        <mc:Fallback>
           <p:sp>
             <p:nvSpPr>
               <p:cNvPr id="20" name="TextBox 19">
@@ -42839,7 +44108,7 @@
             </p:nvSpPr>
             <p:spPr>
               <a:xfrm>
-                <a:off x="10034086" y="3393762"/>
+                <a:off x="9792659" y="4040877"/>
                 <a:ext cx="748602" cy="523220"/>
               </a:xfrm>
               <a:prstGeom prst="rect">
@@ -42848,7 +44117,7 @@
               <a:blipFill>
                 <a:blip r:embed="rId4"/>
                 <a:stretch>
-                  <a:fillRect l="-5000" t="-11905" r="-11667" b="-33333"/>
+                  <a:fillRect l="-3333" t="-14286" r="-13333" b="-30952"/>
                 </a:stretch>
               </a:blipFill>
             </p:spPr>
@@ -42881,7 +44150,7 @@
         </p:nvSpPr>
         <p:spPr>
           <a:xfrm>
-            <a:off x="7418776" y="4804998"/>
+            <a:off x="7177349" y="5452113"/>
             <a:ext cx="1321003" cy="369332"/>
           </a:xfrm>
           <a:prstGeom prst="rect">
@@ -42916,7 +44185,7 @@
         </p:nvSpPr>
         <p:spPr>
           <a:xfrm>
-            <a:off x="9688446" y="4771337"/>
+            <a:off x="9447019" y="5418452"/>
             <a:ext cx="1439881" cy="369332"/>
           </a:xfrm>
           <a:prstGeom prst="rect">
@@ -43151,6 +44420,36 @@
           </a:p>
         </p:txBody>
       </p:sp>
+      <p:pic>
+        <p:nvPicPr>
+          <p:cNvPr id="7" name="Picture 6">
+            <a:extLst>
+              <a:ext uri="{FF2B5EF4-FFF2-40B4-BE49-F238E27FC236}">
+                <a16:creationId xmlns:a16="http://schemas.microsoft.com/office/drawing/2014/main" id="{AF7EB4E9-BD36-7AC2-C912-9B3D9A98ED0D}"/>
+              </a:ext>
+            </a:extLst>
+          </p:cNvPr>
+          <p:cNvPicPr>
+            <a:picLocks noChangeAspect="1"/>
+          </p:cNvPicPr>
+          <p:nvPr/>
+        </p:nvPicPr>
+        <p:blipFill>
+          <a:blip r:embed="rId2"/>
+          <a:stretch>
+            <a:fillRect/>
+          </a:stretch>
+        </p:blipFill>
+        <p:spPr>
+          <a:xfrm>
+            <a:off x="7213360" y="4913972"/>
+            <a:ext cx="4442728" cy="1860851"/>
+          </a:xfrm>
+          <a:prstGeom prst="rect">
+            <a:avLst/>
+          </a:prstGeom>
+        </p:spPr>
+      </p:pic>
     </p:spTree>
     <p:extLst>
       <p:ext uri="{BB962C8B-B14F-4D97-AF65-F5344CB8AC3E}">
@@ -43428,6 +44727,36 @@
           </p:spPr>
         </p:pic>
       </p:grpSp>
+      <p:pic>
+        <p:nvPicPr>
+          <p:cNvPr id="7" name="Picture 6">
+            <a:extLst>
+              <a:ext uri="{FF2B5EF4-FFF2-40B4-BE49-F238E27FC236}">
+                <a16:creationId xmlns:a16="http://schemas.microsoft.com/office/drawing/2014/main" id="{92A7BB94-7E92-5CCD-89F8-79800A83C481}"/>
+              </a:ext>
+            </a:extLst>
+          </p:cNvPr>
+          <p:cNvPicPr>
+            <a:picLocks noChangeAspect="1"/>
+          </p:cNvPicPr>
+          <p:nvPr/>
+        </p:nvPicPr>
+        <p:blipFill>
+          <a:blip r:embed="rId3"/>
+          <a:stretch>
+            <a:fillRect/>
+          </a:stretch>
+        </p:blipFill>
+        <p:spPr>
+          <a:xfrm>
+            <a:off x="7213360" y="4913972"/>
+            <a:ext cx="4442728" cy="1860851"/>
+          </a:xfrm>
+          <a:prstGeom prst="rect">
+            <a:avLst/>
+          </a:prstGeom>
+        </p:spPr>
+      </p:pic>
     </p:spTree>
     <p:extLst>
       <p:ext uri="{BB962C8B-B14F-4D97-AF65-F5344CB8AC3E}">
@@ -44085,6 +45414,36 @@
           </p:spPr>
         </p:pic>
       </p:grpSp>
+      <p:pic>
+        <p:nvPicPr>
+          <p:cNvPr id="7" name="Picture 6">
+            <a:extLst>
+              <a:ext uri="{FF2B5EF4-FFF2-40B4-BE49-F238E27FC236}">
+                <a16:creationId xmlns:a16="http://schemas.microsoft.com/office/drawing/2014/main" id="{C91455D2-13FE-F5D7-C00E-0031C56E33D0}"/>
+              </a:ext>
+            </a:extLst>
+          </p:cNvPr>
+          <p:cNvPicPr>
+            <a:picLocks noChangeAspect="1"/>
+          </p:cNvPicPr>
+          <p:nvPr/>
+        </p:nvPicPr>
+        <p:blipFill>
+          <a:blip r:embed="rId3"/>
+          <a:stretch>
+            <a:fillRect/>
+          </a:stretch>
+        </p:blipFill>
+        <p:spPr>
+          <a:xfrm>
+            <a:off x="7213360" y="4913972"/>
+            <a:ext cx="4442728" cy="1860851"/>
+          </a:xfrm>
+          <a:prstGeom prst="rect">
+            <a:avLst/>
+          </a:prstGeom>
+        </p:spPr>
+      </p:pic>
     </p:spTree>
     <p:extLst>
       <p:ext uri="{BB962C8B-B14F-4D97-AF65-F5344CB8AC3E}">
@@ -44685,6 +46044,36 @@
           </a:p>
         </p:txBody>
       </p:sp>
+      <p:pic>
+        <p:nvPicPr>
+          <p:cNvPr id="7" name="Picture 6">
+            <a:extLst>
+              <a:ext uri="{FF2B5EF4-FFF2-40B4-BE49-F238E27FC236}">
+                <a16:creationId xmlns:a16="http://schemas.microsoft.com/office/drawing/2014/main" id="{D0A51454-1FD9-4AE1-3F26-C6412087F4CC}"/>
+              </a:ext>
+            </a:extLst>
+          </p:cNvPr>
+          <p:cNvPicPr>
+            <a:picLocks noChangeAspect="1"/>
+          </p:cNvPicPr>
+          <p:nvPr/>
+        </p:nvPicPr>
+        <p:blipFill>
+          <a:blip r:embed="rId3"/>
+          <a:stretch>
+            <a:fillRect/>
+          </a:stretch>
+        </p:blipFill>
+        <p:spPr>
+          <a:xfrm>
+            <a:off x="7213360" y="4913972"/>
+            <a:ext cx="4442728" cy="1860851"/>
+          </a:xfrm>
+          <a:prstGeom prst="rect">
+            <a:avLst/>
+          </a:prstGeom>
+        </p:spPr>
+      </p:pic>
     </p:spTree>
     <p:extLst>
       <p:ext uri="{BB962C8B-B14F-4D97-AF65-F5344CB8AC3E}">

--- a/lectures/lecture22/binary_search_trees.pptx
+++ b/lectures/lecture22/binary_search_trees.pptx
@@ -159,7 +159,7 @@
   <pc:docChgLst>
     <pc:chgData name="Toby Donaldson" userId="2e6e5431-bb17-4c41-9985-d39c50d83c73" providerId="ADAL" clId="{F31BC264-820E-54C4-A6D1-F92AF9CC222E}"/>
     <pc:docChg chg="undo custSel addSld delSld modSld sldOrd">
-      <pc:chgData name="Toby Donaldson" userId="2e6e5431-bb17-4c41-9985-d39c50d83c73" providerId="ADAL" clId="{F31BC264-820E-54C4-A6D1-F92AF9CC222E}" dt="2026-07-07T18:28:07.734" v="7101" actId="20577"/>
+      <pc:chgData name="Toby Donaldson" userId="2e6e5431-bb17-4c41-9985-d39c50d83c73" providerId="ADAL" clId="{F31BC264-820E-54C4-A6D1-F92AF9CC222E}" dt="2026-07-07T20:16:32.712" v="7175" actId="20577"/>
       <pc:docMkLst>
         <pc:docMk/>
       </pc:docMkLst>
@@ -233,13 +233,13 @@
         </pc:spChg>
       </pc:sldChg>
       <pc:sldChg chg="modSp mod">
-        <pc:chgData name="Toby Donaldson" userId="2e6e5431-bb17-4c41-9985-d39c50d83c73" providerId="ADAL" clId="{F31BC264-820E-54C4-A6D1-F92AF9CC222E}" dt="2026-07-07T18:07:02.495" v="6832" actId="20577"/>
+        <pc:chgData name="Toby Donaldson" userId="2e6e5431-bb17-4c41-9985-d39c50d83c73" providerId="ADAL" clId="{F31BC264-820E-54C4-A6D1-F92AF9CC222E}" dt="2026-07-07T20:16:32.712" v="7175" actId="20577"/>
         <pc:sldMkLst>
           <pc:docMk/>
           <pc:sldMk cId="2579258547" sldId="296"/>
         </pc:sldMkLst>
         <pc:spChg chg="mod">
-          <ac:chgData name="Toby Donaldson" userId="2e6e5431-bb17-4c41-9985-d39c50d83c73" providerId="ADAL" clId="{F31BC264-820E-54C4-A6D1-F92AF9CC222E}" dt="2026-07-07T18:07:02.495" v="6832" actId="20577"/>
+          <ac:chgData name="Toby Donaldson" userId="2e6e5431-bb17-4c41-9985-d39c50d83c73" providerId="ADAL" clId="{F31BC264-820E-54C4-A6D1-F92AF9CC222E}" dt="2026-07-07T20:16:32.712" v="7175" actId="20577"/>
           <ac:spMkLst>
             <pc:docMk/>
             <pc:sldMk cId="2579258547" sldId="296"/>
@@ -25786,6 +25786,21 @@
             <a:r>
               <a:rPr lang="en-US" dirty="0"/>
               <a:t>If implemented well, they can be efficient ways to store ordered data as a map.</a:t>
+            </a:r>
+          </a:p>
+          <a:p>
+            <a:pPr lvl="1"/>
+            <a:r>
+              <a:rPr lang="en-US" dirty="0"/>
+              <a:t>E.g. the </a:t>
+            </a:r>
+            <a:r>
+              <a:rPr lang="en-US"/>
+              <a:t>Linux kernel </a:t>
+            </a:r>
+            <a:r>
+              <a:rPr lang="en-US" dirty="0"/>
+              <a:t>uses red-black BSTs for its scheduling system</a:t>
             </a:r>
           </a:p>
         </p:txBody>

--- a/lectures/lecture22/binary_search_trees.pptx
+++ b/lectures/lecture22/binary_search_trees.pptx
@@ -149,7 +149,7 @@
 <p1510:revInfo xmlns:a="http://schemas.openxmlformats.org/drawingml/2006/main" xmlns:r="http://schemas.openxmlformats.org/officeDocument/2006/relationships" xmlns:p1510="http://schemas.microsoft.com/office/powerpoint/2015/10/main">
   <p1510:revLst>
     <p1510:client id="{6199F45B-FBA4-954B-9312-5019CDB5224B}" v="226" dt="2026-07-06T22:38:43.334"/>
-    <p1510:client id="{64B368CB-38C1-664C-9D36-31CC1583914F}" v="64" dt="2026-07-07T18:28:07.734"/>
+    <p1510:client id="{64B368CB-38C1-664C-9D36-31CC1583914F}" v="68" dt="2026-07-07T21:16:37.337"/>
   </p1510:revLst>
 </p1510:revInfo>
 </file>
@@ -159,7 +159,7 @@
   <pc:docChgLst>
     <pc:chgData name="Toby Donaldson" userId="2e6e5431-bb17-4c41-9985-d39c50d83c73" providerId="ADAL" clId="{F31BC264-820E-54C4-A6D1-F92AF9CC222E}"/>
     <pc:docChg chg="undo custSel addSld delSld modSld sldOrd">
-      <pc:chgData name="Toby Donaldson" userId="2e6e5431-bb17-4c41-9985-d39c50d83c73" providerId="ADAL" clId="{F31BC264-820E-54C4-A6D1-F92AF9CC222E}" dt="2026-07-07T20:16:32.712" v="7175" actId="20577"/>
+      <pc:chgData name="Toby Donaldson" userId="2e6e5431-bb17-4c41-9985-d39c50d83c73" providerId="ADAL" clId="{F31BC264-820E-54C4-A6D1-F92AF9CC222E}" dt="2026-07-07T21:16:37.333" v="7179"/>
       <pc:docMkLst>
         <pc:docMk/>
       </pc:docMkLst>
@@ -625,8 +625,8 @@
           </ac:picMkLst>
         </pc:picChg>
       </pc:sldChg>
-      <pc:sldChg chg="modSp mod">
-        <pc:chgData name="Toby Donaldson" userId="2e6e5431-bb17-4c41-9985-d39c50d83c73" providerId="ADAL" clId="{F31BC264-820E-54C4-A6D1-F92AF9CC222E}" dt="2026-07-07T18:16:11.088" v="6912" actId="20577"/>
+      <pc:sldChg chg="addSp modSp mod">
+        <pc:chgData name="Toby Donaldson" userId="2e6e5431-bb17-4c41-9985-d39c50d83c73" providerId="ADAL" clId="{F31BC264-820E-54C4-A6D1-F92AF9CC222E}" dt="2026-07-07T20:47:28.678" v="7176"/>
         <pc:sldMkLst>
           <pc:docMk/>
           <pc:sldMk cId="2031534662" sldId="311"/>
@@ -639,9 +639,17 @@
             <ac:spMk id="5" creationId="{4A7E6DB2-7B9C-126F-25EC-4EC9218BAF00}"/>
           </ac:spMkLst>
         </pc:spChg>
+        <pc:inkChg chg="add">
+          <ac:chgData name="Toby Donaldson" userId="2e6e5431-bb17-4c41-9985-d39c50d83c73" providerId="ADAL" clId="{F31BC264-820E-54C4-A6D1-F92AF9CC222E}" dt="2026-07-07T20:47:28.678" v="7176"/>
+          <ac:inkMkLst>
+            <pc:docMk/>
+            <pc:sldMk cId="2031534662" sldId="311"/>
+            <ac:inkMk id="3" creationId="{E173D4EC-53F0-6D0B-1A2B-27C15635AE3C}"/>
+          </ac:inkMkLst>
+        </pc:inkChg>
       </pc:sldChg>
-      <pc:sldChg chg="delSp mod">
-        <pc:chgData name="Toby Donaldson" userId="2e6e5431-bb17-4c41-9985-d39c50d83c73" providerId="ADAL" clId="{F31BC264-820E-54C4-A6D1-F92AF9CC222E}" dt="2026-07-07T18:16:42.343" v="6915" actId="21"/>
+      <pc:sldChg chg="addSp delSp mod">
+        <pc:chgData name="Toby Donaldson" userId="2e6e5431-bb17-4c41-9985-d39c50d83c73" providerId="ADAL" clId="{F31BC264-820E-54C4-A6D1-F92AF9CC222E}" dt="2026-07-07T20:47:28.678" v="7176"/>
         <pc:sldMkLst>
           <pc:docMk/>
           <pc:sldMk cId="4142904386" sldId="312"/>
@@ -670,6 +678,14 @@
             <ac:spMk id="8" creationId="{422D7868-4FF3-961A-26FB-9FA51F5D510D}"/>
           </ac:spMkLst>
         </pc:spChg>
+        <pc:inkChg chg="add">
+          <ac:chgData name="Toby Donaldson" userId="2e6e5431-bb17-4c41-9985-d39c50d83c73" providerId="ADAL" clId="{F31BC264-820E-54C4-A6D1-F92AF9CC222E}" dt="2026-07-07T20:47:28.678" v="7176"/>
+          <ac:inkMkLst>
+            <pc:docMk/>
+            <pc:sldMk cId="4142904386" sldId="312"/>
+            <ac:inkMk id="6" creationId="{CE95D2F6-C2E6-9C47-99E1-81992E2D03FA}"/>
+          </ac:inkMkLst>
+        </pc:inkChg>
       </pc:sldChg>
       <pc:sldChg chg="delSp mod">
         <pc:chgData name="Toby Donaldson" userId="2e6e5431-bb17-4c41-9985-d39c50d83c73" providerId="ADAL" clId="{F31BC264-820E-54C4-A6D1-F92AF9CC222E}" dt="2026-07-07T18:17:54.060" v="6918" actId="21"/>
@@ -702,8 +718,38 @@
           </ac:spMkLst>
         </pc:spChg>
       </pc:sldChg>
-      <pc:sldChg chg="modSp mod">
-        <pc:chgData name="Toby Donaldson" userId="2e6e5431-bb17-4c41-9985-d39c50d83c73" providerId="ADAL" clId="{F31BC264-820E-54C4-A6D1-F92AF9CC222E}" dt="2026-07-07T18:19:56.718" v="6954" actId="113"/>
+      <pc:sldChg chg="addSp">
+        <pc:chgData name="Toby Donaldson" userId="2e6e5431-bb17-4c41-9985-d39c50d83c73" providerId="ADAL" clId="{F31BC264-820E-54C4-A6D1-F92AF9CC222E}" dt="2026-07-07T20:57:30.087" v="7177"/>
+        <pc:sldMkLst>
+          <pc:docMk/>
+          <pc:sldMk cId="3746489490" sldId="318"/>
+        </pc:sldMkLst>
+        <pc:inkChg chg="add">
+          <ac:chgData name="Toby Donaldson" userId="2e6e5431-bb17-4c41-9985-d39c50d83c73" providerId="ADAL" clId="{F31BC264-820E-54C4-A6D1-F92AF9CC222E}" dt="2026-07-07T20:57:30.087" v="7177"/>
+          <ac:inkMkLst>
+            <pc:docMk/>
+            <pc:sldMk cId="3746489490" sldId="318"/>
+            <ac:inkMk id="6" creationId="{54DD4913-DB18-A1BD-DAFE-6399726CBC1A}"/>
+          </ac:inkMkLst>
+        </pc:inkChg>
+      </pc:sldChg>
+      <pc:sldChg chg="addSp">
+        <pc:chgData name="Toby Donaldson" userId="2e6e5431-bb17-4c41-9985-d39c50d83c73" providerId="ADAL" clId="{F31BC264-820E-54C4-A6D1-F92AF9CC222E}" dt="2026-07-07T20:47:28.678" v="7176"/>
+        <pc:sldMkLst>
+          <pc:docMk/>
+          <pc:sldMk cId="106105616" sldId="321"/>
+        </pc:sldMkLst>
+        <pc:inkChg chg="add">
+          <ac:chgData name="Toby Donaldson" userId="2e6e5431-bb17-4c41-9985-d39c50d83c73" providerId="ADAL" clId="{F31BC264-820E-54C4-A6D1-F92AF9CC222E}" dt="2026-07-07T20:47:28.678" v="7176"/>
+          <ac:inkMkLst>
+            <pc:docMk/>
+            <pc:sldMk cId="106105616" sldId="321"/>
+            <ac:inkMk id="65" creationId="{41E52916-1BBD-4F8E-4690-D55D415128BC}"/>
+          </ac:inkMkLst>
+        </pc:inkChg>
+      </pc:sldChg>
+      <pc:sldChg chg="addSp modSp mod">
+        <pc:chgData name="Toby Donaldson" userId="2e6e5431-bb17-4c41-9985-d39c50d83c73" providerId="ADAL" clId="{F31BC264-820E-54C4-A6D1-F92AF9CC222E}" dt="2026-07-07T21:04:52.660" v="7178"/>
         <pc:sldMkLst>
           <pc:docMk/>
           <pc:sldMk cId="1820782728" sldId="323"/>
@@ -716,6 +762,14 @@
             <ac:spMk id="3" creationId="{D85A67D3-3968-20AD-B53C-8BF9390CA54B}"/>
           </ac:spMkLst>
         </pc:spChg>
+        <pc:inkChg chg="add">
+          <ac:chgData name="Toby Donaldson" userId="2e6e5431-bb17-4c41-9985-d39c50d83c73" providerId="ADAL" clId="{F31BC264-820E-54C4-A6D1-F92AF9CC222E}" dt="2026-07-07T21:04:52.660" v="7178"/>
+          <ac:inkMkLst>
+            <pc:docMk/>
+            <pc:sldMk cId="1820782728" sldId="323"/>
+            <ac:inkMk id="5" creationId="{02BAB44A-ABD5-B2FC-EB1C-74EDBE3B9110}"/>
+          </ac:inkMkLst>
+        </pc:inkChg>
       </pc:sldChg>
       <pc:sldChg chg="addSp delSp modSp mod">
         <pc:chgData name="Toby Donaldson" userId="2e6e5431-bb17-4c41-9985-d39c50d83c73" providerId="ADAL" clId="{F31BC264-820E-54C4-A6D1-F92AF9CC222E}" dt="2026-07-07T18:20:15.504" v="6959"/>
@@ -756,8 +810,8 @@
           </ac:spMkLst>
         </pc:spChg>
       </pc:sldChg>
-      <pc:sldChg chg="modSp mod">
-        <pc:chgData name="Toby Donaldson" userId="2e6e5431-bb17-4c41-9985-d39c50d83c73" providerId="ADAL" clId="{F31BC264-820E-54C4-A6D1-F92AF9CC222E}" dt="2026-07-07T18:20:43.388" v="6967" actId="20577"/>
+      <pc:sldChg chg="addSp modSp mod">
+        <pc:chgData name="Toby Donaldson" userId="2e6e5431-bb17-4c41-9985-d39c50d83c73" providerId="ADAL" clId="{F31BC264-820E-54C4-A6D1-F92AF9CC222E}" dt="2026-07-07T21:16:37.333" v="7179"/>
         <pc:sldMkLst>
           <pc:docMk/>
           <pc:sldMk cId="1237262178" sldId="325"/>
@@ -770,6 +824,29 @@
             <ac:spMk id="3" creationId="{864B3A3C-6D91-C9B6-2A55-B5DC61EB6B2D}"/>
           </ac:spMkLst>
         </pc:spChg>
+        <pc:inkChg chg="add">
+          <ac:chgData name="Toby Donaldson" userId="2e6e5431-bb17-4c41-9985-d39c50d83c73" providerId="ADAL" clId="{F31BC264-820E-54C4-A6D1-F92AF9CC222E}" dt="2026-07-07T21:16:37.333" v="7179"/>
+          <ac:inkMkLst>
+            <pc:docMk/>
+            <pc:sldMk cId="1237262178" sldId="325"/>
+            <ac:inkMk id="45" creationId="{A5C47341-887A-05B9-6B25-34D9F1097DAE}"/>
+          </ac:inkMkLst>
+        </pc:inkChg>
+      </pc:sldChg>
+      <pc:sldChg chg="addSp">
+        <pc:chgData name="Toby Donaldson" userId="2e6e5431-bb17-4c41-9985-d39c50d83c73" providerId="ADAL" clId="{F31BC264-820E-54C4-A6D1-F92AF9CC222E}" dt="2026-07-07T20:57:30.087" v="7177"/>
+        <pc:sldMkLst>
+          <pc:docMk/>
+          <pc:sldMk cId="1717794979" sldId="326"/>
+        </pc:sldMkLst>
+        <pc:inkChg chg="add">
+          <ac:chgData name="Toby Donaldson" userId="2e6e5431-bb17-4c41-9985-d39c50d83c73" providerId="ADAL" clId="{F31BC264-820E-54C4-A6D1-F92AF9CC222E}" dt="2026-07-07T20:57:30.087" v="7177"/>
+          <ac:inkMkLst>
+            <pc:docMk/>
+            <pc:sldMk cId="1717794979" sldId="326"/>
+            <ac:inkMk id="17" creationId="{0012B3CC-55FC-035F-AE50-78C8B5498A84}"/>
+          </ac:inkMkLst>
+        </pc:inkChg>
       </pc:sldChg>
       <pc:sldChg chg="addSp delSp modSp mod">
         <pc:chgData name="Toby Donaldson" userId="2e6e5431-bb17-4c41-9985-d39c50d83c73" providerId="ADAL" clId="{F31BC264-820E-54C4-A6D1-F92AF9CC222E}" dt="2026-07-07T18:21:06.413" v="6970"/>
@@ -4975,6 +5052,232 @@
     </pc:docChg>
   </pc:docChgLst>
 </pc:chgInfo>
+</file>
+
+<file path=ppt/ink/ink1.xml><?xml version="1.0" encoding="utf-8"?>
+<inkml:ink xmlns:inkml="http://www.w3.org/2003/InkML">
+  <inkml:definitions>
+    <inkml:context xml:id="ctx0">
+      <inkml:inkSource xml:id="inkSrc0">
+        <inkml:traceFormat>
+          <inkml:channel name="X" type="integer" min="-2.14748E9" max="2.14748E9" units="cm"/>
+          <inkml:channel name="Y" type="integer" min="-2.14748E9" max="2.14748E9" units="cm"/>
+          <inkml:channel name="F" type="integer" max="32767" units="dev"/>
+        </inkml:traceFormat>
+        <inkml:channelProperties>
+          <inkml:channelProperty channel="X" name="resolution" value="1000" units="1/cm"/>
+          <inkml:channelProperty channel="Y" name="resolution" value="1000" units="1/cm"/>
+          <inkml:channelProperty channel="F" name="resolution" value="0" units="1/dev"/>
+        </inkml:channelProperties>
+      </inkml:inkSource>
+      <inkml:timestamp xml:id="ts0" timeString="2026-07-07T20:42:14.798"/>
+    </inkml:context>
+    <inkml:brush xml:id="br0">
+      <inkml:brushProperty name="width" value="0.05292" units="cm"/>
+      <inkml:brushProperty name="height" value="0.05292" units="cm"/>
+      <inkml:brushProperty name="color" value="#FF0000"/>
+    </inkml:brush>
+  </inkml:definitions>
+  <inkml:trace contextRef="#ctx0" brushRef="#br0">14446 17903 24575,'34'0'0,"-1"0"0,13 0 0,6 0 0,-13 0 0,5 0 0,1 0 0,1 0-656,-3 0 1,1 0-1,2 0 1,-1 0 0,1 0 219,0 0 1,1 0 0,1 0 0,-1 0 0,0 0 435,0 0 0,1 0 0,-1 0 0,0 0 0,-1 0 0,-3 0 0,-1 0 0,0 0 0,0 0 0,-1 0-130,7 0 1,-2 0 0,1 0 0,0 0 129,1 0 0,1 0 0,-1 0 0,-1 0 0,-6 0 0,0 0 0,-2 0 0,1 0 24,9 0 0,1 0 0,0 0-24,-10 1 0,1-1 0,2 0 0,3-1 0,-1 0 0,4-1 0,3-1 0,0 0 0,-1 0 0,-2 0 0,-6 0 0,-2 0 0,-1-1 0,1 1 0,1-1 0,2 1-352,-1 1 0,3-1 0,2 0 1,1 1-1,-1 0 0,0-1 1,-3 1-1,-2 0 352,9-2 0,-3 1 0,-2-1 0,0 1 0,1 1 0,-4 1 0,-1 1 0,1 0 0,0 0 0,0 1 0,0-1 0,1 0 0,0 0 0,0 1 0,0-1 0,0 0 0,0-1 0,2-1 0,1-1 0,-1 0 0,0 0 0,1 0 0,0 1 0,0 1 0,1 0 0,0 1 0,0 0 0,0-1 0,1 0 0,-7 0 0,0-2 0,1 1 0,0-1 0,0 0 0,-1 1 0,1 1-162,1 0 1,0 0 0,0 2-1,0-1 1,0 0 0,0 0-1,1 1 162,1-1 0,0 0 0,0 0 0,0 0 0,1 0 0,-1 0 0,-1 0 0,-1 0 0,0 0 0,0 0 0,-1 0 0,1 0 0,0 0 0,0 0-172,1 0 0,2 0 1,-1 0-1,0 0 0,0 0 1,0 0-1,-2 0 172,3 0 0,-1 0 0,-1 0 0,0 0 0,-1 0 0,1 0-113,1 0 0,-1 0 0,0 0 0,0 0 0,-1 0 1,0 0 112,2 0 0,-1 0 0,0 0 0,-1 0 0,0 0 156,-1 0 1,-1 0 0,0 0 0,0 0 0,0 0-157,6 0 0,1 0 0,-2 0 0,1 0 428,-4 0 0,0 0 0,0 0 0,0 0-428,0 0 0,1 0 0,-1 0 0,-1 0 0,-3-1 0,-1 1 0,-1-1 0,0 3 680,7 2 0,-1 2 0,1-1-680,-8-3 0,1-3 0,-1 2 0,0 1 0,9 8 0,0 2 0,0-2 196,-8-8 1,1-1-1,1-1 1,0 1-197,4 2 0,1 2 0,1-1 0,-1-1 0,-1-2 0,0-1 0,-1 0 0,0-1 0,-1 1 0,-1 0 0,0 0 0,0 0 215,-2 0 0,-1 0 0,0 0 0,0 0-215,9 1 0,-1-1 0,-1-1 0,-4-3 0,-1-1 0,1-1 0,4 0 0,0 0 0,0-2 0,-2-3 0,0-1 0,1 0 0,-6 2 0,0 1 0,2 0 0,-1 1 0,-2 3 0,0 0 0,0 1 0,0-1 0,5-3 0,1-1 0,0 1 0,-2 1 0,7 5 0,-1 2 0,0-2 0,-8-1 0,0-2 0,0 1 0,-3 1 446,-2 2 1,-1 1 0,-1 1-447,20 1 0,-6-4 956,-16-14-956,16 12 1780,-43-27-1780,12 19 1365,-16-21-1365,-1 5 0,2-3 0,4-11 0,5-6-820,0 7 1,1-5 0,3-4 0,2-1 664,-1 10 1,3-2 0,1-1 0,2-2 0,0-2-1,1-1 1,-1-2-120,-4 12 1,0-1 0,0-2 0,0 0 0,1-1 0,1-1 0,-1-1 0,0-1 0,1 0 0,0 0 0,-1-1 0,1 0 137,-2 4 1,0-2-1,1 1 1,0-1 0,0-1-1,0 0 1,0-1-1,0 0 1,0 0 0,-1 0-1,1-1 1,-1 0 0,0 0-1,0 0 1,0-1-58,-2 4 0,-1 0 0,1-1 1,0 0-1,-1-1 0,1 0 0,-1 0 1,0 0-1,0 0 0,0 0 0,-1 0 1,0-1-1,0 1 0,0 0 0,0 0 1,-1 0-1,0 1 175,0-2 1,0-1 0,0 1 0,-1 0 0,1-1 0,-1 1 0,0-1 0,0 1 0,-1 0 0,0 0 0,0 0 0,-1 1 0,0 0 0,0 1 0,-1 0 0,-1 0-166,1-3 0,0 0 1,-2 0-1,1 0 1,-1 1-1,-1 0 0,0 1 1,0 0-1,-1 1 1,1 0-1,-1 0 1,0 1-1,0 1 183,1-6 0,0 0 0,-1 2 0,1-1 0,-1 2 0,0 0 0,-1 0 0,-1 2 0,-2 1 0,-1 0 28,-1-6 1,-3 0-1,-1 2 1,-1 1-1,-1 1 1,-1 0-1,-1 2-28,0-1 0,-1 2 0,-1 0 0,-1 1 0,-1 1 0,0 0 269,-4-5 0,-2 0 0,-1 0 0,0 2 0,-1-1-269,-1 1 0,-2-1 0,0 2 0,1-1 0,1 1 0,5 2 0,2 2 0,0-1 0,1 1 0,-2 0 452,0 1 1,0 1 0,-1 0-1,1 0 1,0 1-453,-2-4 0,1 1 0,1 0 0,0 1 819,3 2 0,2 0 0,-1 1 0,-3 0-807,-2 0 0,-3-1 1,-1 1-1,1 0-12,3 2 0,0 0 0,0 0 0,-2-1 0,-5-4 0,-2-1 0,-1 0 0,2 0 0,3 5 0,0 1 0,1-1 0,0-2 137,1 1 1,0-2-1,1-2 1,-1 1-1,2-1-137,0 0 0,1 1 0,0-1 0,0 0 0,1-2-61,0 3 1,2-2 0,-1 0 0,0 0-1,-1-1 1,0 1 60,-3-1 0,0-1 0,-1 1 0,0 0 0,1-1 0,2 0 0,2 0 0,2-1 0,0-1 0,1 1 0,-1 1 0,-1 1-107,-5-4 0,0 2 0,-1 1 0,0-1 0,1 1 107,2-1 0,0 1 0,2-1 0,-1 2 0,0 2-44,-2-1 1,1 2 0,-1 0 0,0 1 43,-2-2 0,-1 0 0,0 0 0,1 1 0,3 4 0,0 1 0,1 0 0,-1 0 0,1-2 0,-1 0 0,0 0 0,1-1 0,-1-3 0,1 0 0,0-1 0,-2 1 0,-2-1 0,-1-1 0,0 1 0,1 0 0,4 2 0,0 1 0,1-1 0,-1-2 0,1 4 0,-1-2 0,-1 0 0,1 0 0,1 2 0,0 0 0,0 1 0,1 1 0,-1-2 0,-1-7 0,0-1 0,-1 0 0,0 3 0,-4-4 0,-2 4 0,-1 1 0,-1 3 0,-3 2 0,-2 1 0,3 8 0,-1-1 0,-2 2 0,-2 1 0,-5 0 0,-2 1 0,-2 2 0,1-1 0,-1 1 0,-1 1 0,0 0 0,-2-1 34,5 1 0,-1-1 0,-1 0 1,1 1-1,0 2-34,-7 0 0,2 1 0,-1 2 0,-1-2 0,10 3 0,-2-1 0,1 1 0,0 0 0,-1 1 0,-7-2 0,-1 1 0,0 2 0,-1 2 0,10 4 0,-1 1 0,0 2 0,0 0 0,-1 0 0,-8-1 0,1-1 0,-1 1 0,-2 2 0,10 0 0,0 2 0,-1-1 0,-1 2 0,1-1 0,0 2-44,0-1 0,1 1 0,0 0 1,-1 1-1,0 1 0,-1-1 44,1 1 0,-2 0 0,1 0 0,-2 1 0,1 0 0,0 1 0,0 1-152,0 2 1,1 0 0,0 1 0,-1 0 0,1 1 0,0 0 0,-1 0 151,0 0 0,-1 0 0,0 0 0,1 1 0,-1 0 0,2 0 0,0 1 0,-4 3 0,0 1 0,1 0 0,1 1 0,0 0 0,0 0-184,1 0 1,0 1-1,0-1 1,1 1 0,0 1-1,1 0 184,1 0 0,1 1 0,0 0 0,0 0 0,1 0 0,-1 0 0,1 0 0,0 0 0,0 0 0,1 0 0,0 0 0,0 0-2,-4 3 1,1 1 0,1-1-1,0 1 1,-1-2 1,2-1 0,0-1 0,1 0 0,0 0 0,2 0 394,0 2 0,1-1 1,2 1-1,0-1-394,-9 7 0,2-1 0,1 2 0,3-1 0,3 2 0,0 3 0,6-6 0,2 2 0,-2 1 0,0 3-56,3-4 0,-1 2 1,-1 1-1,-1 1 0,0 1 1,-1 1 55,2-3 0,0 0 0,-1 1 0,0 1 0,-1 0 0,0 2 0,-1 0 0,1 1-191,0-1 0,1 0 0,-1 1 0,0 1 1,0 1-1,-1 0 0,1 0 0,-2 2 0,1-1 1,-1 1 190,4-5 0,0 0 0,-1 0 0,1 1 0,-1 0 0,-1 0 0,1 1 0,-1 0 0,1 1 0,-1-1 0,1 2 0,-1-1 0,1 1-136,1-3 1,0 2 0,0-1 0,1 1 0,-1 0 0,0 1 0,0-1 0,0 1 0,0 1 0,0-1 0,0 0 0,0 1 0,-1-1 0,1 1 0,0-1 135,0 0 0,-1-1 0,1 1 0,0 0 0,-1-1 0,0 1 0,1 0 0,-1 0 0,0 1 0,0-1 0,1 0 0,-1 1 0,1-1 0,-1 1 0,1 0 0,0 0-113,2-2 0,-1 1 0,1 0 1,-1 0-1,1 0 0,-1 1 1,1 0-1,0-1 0,0 1 0,0-1 1,0 1-1,0-1 0,0 0 1,1-1-1,-1 0 0,0 0 1,1 0 112,-4 3 0,0 0 0,1 0 0,-1 0 0,0-1 0,0 0 0,1 0 0,-1 0 0,1-1 0,1 0 0,-1 0 0,1 0 0,0 0 0,1 0-37,-1 2 0,-1 0 0,1 1 0,1-1 0,-1 0 0,2 0 0,-1-1 0,1 0 1,0 0-1,1-1 0,1-1 0,0-1 37,-2 5 0,1-2 0,0 1 0,1-2 0,1 0 0,0-1 0,1-1 0,0 0 0,1-1 205,-4 8 0,0-2 1,2-1-1,0 0 1,2-2-1,0 0-205,1 3 0,0-1 0,2-1 0,0-1 0,1-3 579,-1 0 1,2-3 0,-1-1 0,1 0-580,-4 8 0,0-2 0,0 0 0,0-2 0,1-1 0,-2 1 0,2-4 0,-1 1 0,-1 0 0,-2 1 558,-4 1 1,-3 0-1,-1 1 1,1 2-559,5 0 0,1 1 0,0 1 0,0 1 0,-3-1 322,0-5 1,-2 0 0,0 0-1,-1 0 1,1 1 0,2 0-323,2 0 0,2 1 0,0 0 0,1 1 0,-1-1 0,-1-1 0,-1-1 0,-2 0 0,0 0 0,0-1 0,1 0 0,1 0 122,1 4 0,1-1 1,1 0-1,0-1 0,0-2-122,-3 2 0,-1-2 0,2 0 0,1-1 107,-1 12 1,4 0-1,0-3-107,-2 2 0,3-2 1043,7-8 1,2-2-1044,-1-4 0,0-1 1590,6-3 1,1 1-1591,-7 11 0,0 2 0,-1 5 0,2 1 0,6-12 0,1 1 0,-3 1 340,-6 4 0,-4 1 0,4 0-340,6 0 0,4 1 0,-3 0 0,-7 5 0,-4 1 0,4-1 0,6-5 0,3 1 0,-1-3 0,-6 10 0,-2-2 130,3-14 1,1 0-1,0-2-130,3 1 0,0 1 0,-3-1 0,-1 2 0,2-2 0,3 5 0,2-1 0,-1 6 0,0 0 0,0 1 0,0-2 0,0-12 0,0-1 0,0 13 0,0-1 0,0-2 0,-1-14 0,2 1 422,6 0 1,1-1-423,-4 14 34,12-13 0,0-1-34,-12-6 0,11 13 0,1-28 0,-12 27 0,27-19 0,-21 10 0,0 5 0,14 3 0,3 2 0,-7 11 0,-1 5-330,3-9 0,1 2 0,-1 0 330,-8-4 0,-2 0 0,1-1 0,3 0 0,2 0 0,-1-2 0,1 3 0,-1-4 0,3 3 0,-5-5 0,-7-27 0,-6 12 0,6-32-820,-8 12 1,0-12 0,0 16 0</inkml:trace>
+  <inkml:trace contextRef="#ctx0" brushRef="#br0" timeOffset="32166">26211 6826 24575,'36'0'0,"-1"0"0,7 0 0,2 0 0,-5 0 0,1-1 0,3 2-820,-7 2 1,2 0 0,1 2 0,1 0 671,7 2 0,2 1 0,0 2 0,0 0 148,-2 2 0,-1 2 0,1 0 0,1 1-351,-7-1 0,0 0 0,1 1 0,0-1 0,-1 0 351,-1-3 0,-1 0 0,1 0 0,-1-1 0,-1 2 0,10 2 0,-2 2 0,1-1 0,1-2 0,-8-4 0,2-1 0,-1-2 0,1 1 0,-2 1 0,8 2 0,-2 0 0,1 1 0,1 1 0,-7-2 0,2 0 0,-1 1 0,1-1 0,-1 0 0,8 0 0,-1-1 0,0 0 0,-1 2-36,-1 1 0,0 1 1,-2 1-1,0-2 36,-4-3 0,-1 0 0,0-1 0,-2 1-186,8 3 1,-2 1 0,-1-3 185,-1-2 0,0-2 0,-4 0 781,0 2 0,-2 0-781,7 0 0,-3-1 2291,-1-3-2291,-13 4 0,-1 0 1696,10-8-1696,0 0 774,1 0-774,-11 7 0,1 2 0,1-7 0,1-1 0,7 6 0,0 2 0,12 7 0,-14-15 0,-1 2 0,-9 12 0,1 1 0,18-6 0,2 0 0,-6 7 0,-1 1 0,-2-8 0,0 0 0,0 5 0,-3 1 0,7 4 0,-4-1 0,-3-3 0,-28-16 0,11 0 0,1 0 0,-12 0 0,27 16 0,-11-13 0,4 13 0,3 0 0,0-14 0,1 0 0,-1 12 0,0 3 0,0-7 0,-3 0 0,12 9 0,-17-3 0,-3 0 0,-16-12 0,0 11 0,0-15 0,0 16 0,0-12 0,0 12 0,-16-1 0,12-11 0,-27 27 0,11-11 0,-4-4 0,-3 3 0,0 9 0,0 3 0,4-8 0,-1 1 0,0 2-316,-5 5 1,0 2 0,1 1 315,3 1 0,2 1 0,-4-2 0,-6-2 0,-2-3 0,1 1 0,8-1 0,3 1 0,-2-3 0,-10 2 0,-1-3 0,2 0 0,2-1 0,12-7 0,1-1 0,-7 0 0,1 1 0,3 8 0,0-1 0,-3-5 0,-2-1 473,-4 7 0,-1-1-473,-3-7 0,-1 0 0,8-2 0,-1 1 0,0 1 0,0-4 0,-1 1 0,-1 3-397,1 4 1,0 4 0,-1 0 0,0 0 396,1-5 0,-1 0 0,-1 0 0,0 2-393,1 2 0,0 3 0,-1 1 0,0-1 0,1-1 393,-4 2 0,1-1 0,0-1 0,0-1 0,2-3 0,1 0 0,0 0 0,2-2 0,-5 3 0,3-2 0,1-1 0,1-2 0,4-3 0,-11 3 0,5-3 1420,-4-16-1420,8-1 0,-1 2 1065,1 7 0,-1 0-1065,-6-7 0,1 2 0,6 12 0,-1 1 0,-6-13 0,-2-2 0,0 7 0,1 0 0,7-8 0,1 0 0,0 0 0,3 0 0,5 0 0,3 0 0,16 0 0,0 0 0,0 0 0</inkml:trace>
+  <inkml:trace contextRef="#ctx0" brushRef="#br0" timeOffset="34899">28011 9948 24575,'25'0'0,"1"0"0,7 0 0,4 0 0,-4 0 0,3-1 0,1 2-1039,8 3 0,2 3 0,2-2 1039,-8-2 0,1-2 0,1 2 0,0 2 0,1 5 0,0 3 0,1 1 0,0-2-362,1-4 1,0-2 0,1 1-1,-2 3 362,0 5 0,-1 2 0,0 1 0,0-1 0,-4-3 0,1-1 0,-1 0 0,-1 2-48,1 1 1,0 2 0,-1 0 0,-1 0 47,-4-1 0,-2 1 0,1 0 0,1 0 0,7 2 0,2 1 0,1 1 0,-1 1-485,-9-3 1,0 1 0,0 0 0,0 1 0,2 0 484,0-2 0,2 0 0,1 1 0,0 0 0,0 0 0,-2 1 0,4 6 0,-2 0 0,0 2 0,1-2 0,1-1 0,1-2 0,1-1 0,1-1 0,0-1 0,-2 2 0,-2 0 0,-2 0 0,0 0 0,1 0 0,0 0 0,4-1 0,0-1 0,2 1 0,-1-1 0,1 1-237,-7-3 1,0 1 0,1 0 0,0 0 0,-1 0-1,1 1 237,1 1 0,-1 0 0,1 1 0,0 0 0,0 0 0,0-1 0,1-2 0,0 0 0,1-1 0,-1 0 0,0 1 0,-2 1 0,4 5 0,-1 2 0,-1-1 0,0 0 0,0-3 63,-2-4 1,1-2-1,-1-1 1,-1 0-1,-2 0-63,-2 5 0,-2 0 0,-2-1 0,-1-3 475,17 1 1,-6-5-476,-4 1 2393,-21-16-2393,-15 7 3276,16-5-3200,-12 22 1502,12-4-1578,-1-1 0,-11 12 0,12-27 0,-16 28 0,0-28 0,0 11 0,-16 1 0,-3-12 0,-5 17 0,-3 5 0,0-7 0,-1 1 0,1 6 0,-1 4 0,-3 0-808,-1-4 1,-2 0 0,-1 0-1,-2 2 808,3 1 0,-1 2 0,-1 1 0,-1 1 0,-1-1-469,6-6 1,-1 0 0,-1 1 0,-1-1 0,0 1 0,0 1 0,0 0 375,2-1 1,1 1 0,-1 1 0,0 0 0,0 0 0,0 0-1,-1 1 1,0-1-318,-1 0 0,-1 1 1,-1 0-1,1-1 1,-1 1-1,1 0 0,-1 0 1,1 1 389,1-1 0,0 1 1,1-1-1,-1 1 1,1 0-1,-1 0 0,0 1 1,0-1 19,-2 0 0,0 1 0,0 0 0,-1 0 0,1 0 0,0 0 0,0 0 0,1-1 0,-2 3 0,1-1 0,-1 1 0,2-1 0,-1 0 0,1 0 0,-1 1-258,1-1 1,0 1 0,0 1-1,1-1 1,-1 0 0,2-1 0,1-1 257,-1-1 0,2 0 0,1 0 0,0-1 0,0-1 0,1-1 184,-2 2 0,-1-1 1,1-1-1,2-1 0,3 0-184,-4 10 0,5-2 0,0-5 1353,-1-9 1,3-3-1354,6 8 0,5-5 3276,9-17-2477,-12 28 2477,1-28-3017,-5 27 983,-15-12-1242,16 2 0,2 2 0,-2 14 0,2-16 0,3 1 0,10 13 0,-12-15 0,16 11 0,0-27 0,0 12 0,-16-16 0,12 0 0,-11 0 0,-1 0 0,-8-1 0,-3 2 0,-1 6 0,-3 1 0,-12 1 0,0 2 0,7 7 0,1-1 0,8-6 0,0-2 0,0 0 0,3-2 0,4-7 0,-11 0 0,27 0 0,-12 0 0,16 0 0,-16-16 0,12 12 0,-11-27 0,15 27 0,0-28 0,0 28 0,0-27 0,0 27 0,0-11 0</inkml:trace>
+</inkml:ink>
+</file>
+
+<file path=ppt/ink/ink2.xml><?xml version="1.0" encoding="utf-8"?>
+<inkml:ink xmlns:inkml="http://www.w3.org/2003/InkML">
+  <inkml:definitions>
+    <inkml:context xml:id="ctx0">
+      <inkml:inkSource xml:id="inkSrc0">
+        <inkml:traceFormat>
+          <inkml:channel name="X" type="integer" min="-2.14748E9" max="2.14748E9" units="cm"/>
+          <inkml:channel name="Y" type="integer" min="-2.14748E9" max="2.14748E9" units="cm"/>
+          <inkml:channel name="F" type="integer" max="32767" units="dev"/>
+        </inkml:traceFormat>
+        <inkml:channelProperties>
+          <inkml:channelProperty channel="X" name="resolution" value="1000" units="1/cm"/>
+          <inkml:channelProperty channel="Y" name="resolution" value="1000" units="1/cm"/>
+          <inkml:channelProperty channel="F" name="resolution" value="0" units="1/dev"/>
+        </inkml:channelProperties>
+      </inkml:inkSource>
+      <inkml:timestamp xml:id="ts0" timeString="2026-07-07T20:43:57.080"/>
+    </inkml:context>
+    <inkml:brush xml:id="br0">
+      <inkml:brushProperty name="width" value="0.05292" units="cm"/>
+      <inkml:brushProperty name="height" value="0.05292" units="cm"/>
+      <inkml:brushProperty name="color" value="#FF0000"/>
+    </inkml:brush>
+  </inkml:definitions>
+  <inkml:trace contextRef="#ctx0" brushRef="#br0">11501 9243 24575,'19'0'0,"13"0"0,-29 0 0,29 0 0,-28 0 0,11 0 0,1 0 0,-12 0 0,12 0 0,-1 0 0,-11 0 0,28 0 0,-28 0 0,27 0 0,-19 0 0,37 0 0,-18 0 0,-6 0 0,1 0 0,9 0 0,-15 0 0,11 0 0,-11 0 0,-1-16 0,-3 12 0,0-11 0,-12 15 0,11 0 0,-15 0 0</inkml:trace>
+  <inkml:trace contextRef="#ctx0" brushRef="#br0" timeOffset="1817">16034 11077 24575,'34'0'0,"0"0"0,0 0 0,2 0 0,0 0 0,1 0 0,7 0 0,1 0 0,0 0-424,-4 0 0,1 0 0,-2 0 424,-1 0 0,-1 0 0,-1 0 0,9 0 0,-2 0 207,-8 0 1,-1 0-208,-1 0 0,-2 0 211,7 0-211,-14 0 0,1 0 0,0 0 0,-1 0 0,14 0 323,-5 0 0,-1 0-323,6 0 0,-13 0 0,-1 0 0,11 0 0,-17 0 0,-3 0 0,-16 0 0,16 0 0,-13 16 0,13-12 0,-16 12 0,0-1 0,0-11 0,0 27 0,0-27 0,0 12 0,0-16 0,0 0 0,0 0 0</inkml:trace>
+  <inkml:trace contextRef="#ctx0" brushRef="#br0" timeOffset="3668">11254 14093 24575,'35'0'0,"0"0"0,0 0 0,1 0 0,6 0 0,2 0 0,-1 0 0,4 0 0,-10 0 0,4 0 0,2 0 0,-3 0 0,5 1 0,-1-1 0,2-1-416,-5-1 1,1-2 0,0 0 0,-2-1 415,2-1 0,-1-1 0,-3 0 0,8-3 0,-2 1 179,-9 2 0,0 2 1,-3 1-180,-2 4 0,-1 0 137,20-8 1,0 0-138,-19 6 0,-1 0 0,7-6 0,-2 1 0,2 7 848,-21 0-848,-15 0 0,-15 0 0,11 0 0,-12 0 0</inkml:trace>
+  <inkml:trace contextRef="#ctx0" brushRef="#br0" timeOffset="4900">13988 15628 24575,'33'0'0,"0"0"0,3 0 0,3 0 0,3 0 0,5 0 0,1 0-1010,0 0 1,0 0 0,1 0 1009,-8 0 0,1 0 0,1 0 0,0 0 0,0 0 0,1 0 0,-1 0 0,1 0 0,-2 0 0,1 0 0,-1 0 0,0 0 0,-2 0 0,0 0 0,0 0 0,0 0 21,0 0 0,1 0 0,-1 0 0,-4 0-21,13 0 0,-4 0 346,0 0 1,-8 0-347,-17 0 0,-4 0 0,-16 0 0</inkml:trace>
+  <inkml:trace contextRef="#ctx0" brushRef="#br0" timeOffset="6018">16104 15628 24575,'34'0'0,"-1"0"0,0 0 0,3 0 0,1 0 0,2 0 0,1 0 0,2 0 0,4 0 0,3 0 0,-1 0 0,-5 0 0,6 0 0,-3 0 0,-1 0 0,3 0 0,-12 0 0,-13 0 0,9 0 0,-32 0 0,0 16 0,0-12 0,0 11 0</inkml:trace>
+  <inkml:trace contextRef="#ctx0" brushRef="#br0" timeOffset="78067">17180 5292 8191,'-19'0'0,"66"0"1638,-18 0 0,4 0-1166,7 0 0,5 0 0,0 0-472,-4 0 0,-1 1 0,2-2 335,-2-2 0,1-1 0,1-1 0,0 1-335,2 1 0,1 1 0,0-1 0,1-1 0,-4-1 0,0-2 0,1 0 0,0 0 0,-1 0 0,6 0 0,0 0 0,-2 0 0,0 0 0,-5 2 0,0 0 0,-2 1 0,-1-1 649,2-1 1,-2 0 0,-3 2-650,3 4 0,-5 0 0,2 0 0,-19 0 0</inkml:trace>
+  <inkml:trace contextRef="#ctx0" brushRef="#br0" timeOffset="91784">12365 7444 24575,'35'0'0,"-4"0"0,5 0 0,11 0 0,4 0-765,-10 0 1,1 0-1,2 0 765,5 0 0,1 0 0,0 0 0,-11 0 0,1 0 0,-1 0 0,0 0 0,10 0 0,-1 0 0,0 0 0,0 0 0,-1 0 0,-1 0 0,-4 0 0,0 0 0,-4 0 367,0 1 1,-2-2-368,-1-7 0,-3 0 378,3 4-378,-15-12 0,3 16 0,-5 0 590,8 0 1,6 0-591,11 1 0,5-2 0,-8-3 0,3-2 0,-1 1 0,-5 4 0,0 1 0,-1-3 0,0-7 0,-1-2 0,-4 2 0,8 6 0,8-11 0,-59 15 0,24 0 0,-28 0 0,16 0 0</inkml:trace>
+  <inkml:trace contextRef="#ctx0" brushRef="#br0" timeOffset="95566">14552 9349 24575,'29'0'0,"1"0"0,12 0 0,4 0 0,-8 0 0,2 0 0,0 0-449,1 0 1,1 0 0,0 0 448,0 0 0,-1 0 0,-2 0 0,-1 0 0,-2 0 219,-1 0 0,-3 0-219,3 0 223,-15 0-223,11 0 0,-27 0 0,27 0 684,-27 0-684,28 0 0,-13 0 0,6-8 0,1 0 0,13 4 0,4-12 0,-25 16 0,6 0 0,-21 0 0,13 0 0,-16 16 0,0-12 0,16 12 0,-12-16 0,11 0 0,-15 0 0,0 0 0,16 0 0,-12 0 0,27 0 0,-27 0 0,12 0 0,-16 0 0</inkml:trace>
+  <inkml:trace contextRef="#ctx0" brushRef="#br0" timeOffset="100534">12841 11536 24575,'20'0'0,"27"0"0,-8 0 0,-12 0 0,1 0 0,-2 0 0,-1 0 0,10 0 0,0 0 0,-15 0 0,-4 0 0,-16 0 0,62 0 0,-32-8 0,3 0 0,1 6 0,5 3 0,2-1 0,-2-3-373,2-6 1,-2-3-1,2 2 373,-3 4 0,3 1 0,-2 1 0,-2-1 0,-1-1 0,-2-1 0,-2 1 0,13-3 0,-4 2 0,-13 6 0,-5 2 0,-3-1 0,-4 0 0</inkml:trace>
+  <inkml:trace contextRef="#ctx0" brushRef="#br0" timeOffset="103349">15575 13617 24575,'0'0'0</inkml:trace>
+  <inkml:trace contextRef="#ctx0" brushRef="#br0" timeOffset="107601">26035 7444 24575,'44'0'0,"1"0"0,-1 0 0,-3 0 0,4 0 0,1 0 0,2 0 0,0 0 0,-3 0 0,1 0 0,2 0 0,0 0 0,1 0 0,1 0-410,-8 0 0,2 0 1,0 0-1,1 0 1,0 0-1,0 0 0,-2 0 1,0 0-138,5 0 1,-1 0 0,0 0 0,-1 0 0,-1 0 0,0 0 399,6 0 0,0 0 1,-2 0-1,-1 0 1,-4 0 840,5 0 0,-4 0 1,-2 0-695,12-3 0,-10 6 1161,-18 12-1161,-11-11 0,-16 28 0,0-29 3276,0 13-3085,0-16 1,0 0 0,0 0 0</inkml:trace>
+  <inkml:trace contextRef="#ctx0" brushRef="#br0" timeOffset="108933">29633 9137 24575,'34'0'0,"0"0"0,0 0 0,6 0 0,2 0 0,3 0 0,1 0 0,-2 0 0,2 0 0,1 0 0,2 0 0,0 0-547,-2 0 1,1 0 0,2 0 0,-1 0 0,1 0 0,0 0-1,0 0 1,0 0 0,0 0 0,0 0 0,0 0 0,0 0 429,-1 0 1,0 0-1,1 0 1,-2 0 0,0 0-1,-2 0 207,0 0 0,-1 0 0,-1 0 1,-1 0-1,-2 0-90,5-1 0,0 0 0,-3 1 0,-5 2 726,4 4 0,-6 4-726,-8-2 0,-7 3 0,-9 25 0,4-1 819,-16-16 0,0-3 0,0-16 0</inkml:trace>
+  <inkml:trace contextRef="#ctx0" brushRef="#br0" timeOffset="114618">23001 9631 24575,'46'0'0,"0"0"0,0 0 0,4 0 0,3 0 0,-13 0 0,3 0 0,0 0 0,2 0 0,0 0-547,-4 0 1,2 0 0,0 1 0,1-1 0,-1 0 0,1-1-1,3-1 1,0-1 0,0 0 0,0 0 0,0 0 0,-1 1 542,4 1 0,-1 0 0,0 1 1,-1 0-1,-1-2 100,-3 0 1,0-2-1,-1 0 1,-2 1-1,-2 1-96,12 1 0,-4 1 0,-3 1 664,2-1 0,-6 0-664,-5 0 0,-4 0 0,-27 0 3276,12 0-3257,-16 15 1,0-11 0,0 12 0</inkml:trace>
+  <inkml:trace contextRef="#ctx0" brushRef="#br0" timeOffset="116368">19191 11748 24575,'35'0'0,"9"0"0,-11 0 0,2 0 0,-3 0 0,3 0 0,2 0 0,3 0 0,0 0-516,-4 0 0,0 0 0,2 0 516,-1 0 0,3 0 0,0 0 0,0 0 0,0-1 0,0 2 0,1-2 0,-1 2 0,-2-1 0,1 0 0,-1 0 0,-1 0 0,11 0 0,-2 0 0,0 0 0,-4 0 0,1 0 0,1 0 0,-2 0 0,2 0 0,0 0 0,-2 0 0,5 0 0,-2 0 0,1 0 0,1 0 0,1-1 0,-6 2 188,-5-1 0,-8 0-188,-9 0 0,-4 0 0,-16 0 0,-16 0 0,12 0 0,-12 0 0</inkml:trace>
+  <inkml:trace contextRef="#ctx0" brushRef="#br0" timeOffset="123185">25559 11853 24575,'35'0'0,"0"0"0,2 0 0,-3 0 0,5 0 0,8 0 0,-43 0 0,27 0 0,-27 0 0,12 0 0,0-15 0,27 11 0,-9-11 0,4-2 0,-2 10 0,3 2 0,0-2-206,-2-4 0,-1-2 0,1 2 206,3 3 0,2 3 0,-3-2 0,8-10 0,-4 3 0,-6 11 0,-3 2 0,-7-8 0,-3 2 0,11 7 0,0 0 0,-15 0 0,11 0 618,-27 0-618,28 0 0,3 0 0,-5 0 0,3 0 0,-5 0 0,1 0 0,1 0 0,-2 0 0,8 0 0,-17 0 0,-3 0 0</inkml:trace>
+  <inkml:trace contextRef="#ctx0" brushRef="#br0" timeOffset="128685">23442 13917 24575,'33'0'0,"1"0"0,9 0 0,4 0 0,-11 0 0,1 0 0,0 0 0,-2 0 0,1 0 0,-2 0 0,11 0 0,-3 0 0,-10 0 0,-2 0 0,-3 0 0,-1 0 0,17 0 0,-23 0 0,11 0 0,-27 0 0,28 0 0,-28 0 0,27 0 0,-27 0 0,27 0 0,-27 0 0,12 16 0,-16-12 0,0 11 0,16-15 0,-13 0 0,13 0 0,-16 0 0,0 0 0,0 0 0</inkml:trace>
+  <inkml:trace contextRef="#ctx0" brushRef="#br0" timeOffset="130001">25241 16034 24575,'20'0'0,"27"0"0,-8 0 0,-12 0 0,1 0 0,6 0 0,-1 0 0,6 0 0,-14 0 0,1 0 0,9 0 0,0 0 0,-15 0 0,-4 0 0,-16 0 0</inkml:trace>
+</inkml:ink>
+</file>
+
+<file path=ppt/ink/ink3.xml><?xml version="1.0" encoding="utf-8"?>
+<inkml:ink xmlns:inkml="http://www.w3.org/2003/InkML">
+  <inkml:definitions>
+    <inkml:context xml:id="ctx0">
+      <inkml:inkSource xml:id="inkSrc0">
+        <inkml:traceFormat>
+          <inkml:channel name="X" type="integer" min="-2.14748E9" max="2.14748E9" units="cm"/>
+          <inkml:channel name="Y" type="integer" min="-2.14748E9" max="2.14748E9" units="cm"/>
+          <inkml:channel name="F" type="integer" max="32767" units="dev"/>
+        </inkml:traceFormat>
+        <inkml:channelProperties>
+          <inkml:channelProperty channel="X" name="resolution" value="1000" units="1/cm"/>
+          <inkml:channelProperty channel="Y" name="resolution" value="1000" units="1/cm"/>
+          <inkml:channelProperty channel="F" name="resolution" value="0" units="1/dev"/>
+        </inkml:channelProperties>
+      </inkml:inkSource>
+      <inkml:timestamp xml:id="ts0" timeString="2026-07-07T20:46:48.096"/>
+    </inkml:context>
+    <inkml:brush xml:id="br0">
+      <inkml:brushProperty name="width" value="0.05292" units="cm"/>
+      <inkml:brushProperty name="height" value="0.05292" units="cm"/>
+      <inkml:brushProperty name="color" value="#FF0000"/>
+    </inkml:brush>
+  </inkml:definitions>
+  <inkml:trace contextRef="#ctx0" brushRef="#br0">12541 5398 24575,'-19'0'0,"3"15"0,16 20 0,1-9 0,-2 3 0,-7 14 0,0 1 0,7-7 0,-2 0 0,-12 6 0,-1 0 0,13-7 0,2-1 0,-6 1 0,-2-2 0,1-6 0,1-1 0,5-1 0,0-1 0,-6 1 0,0-1 0,7 2 0,2 1 0,-1 11 0,0 0 0,1-3 0,-2 1 0,-6 10 0,-2 0 0,8-10 0,-1 1 0,-7 5 0,2 0 0,6-8 0,2 0 0,-1 1 0,0-1 0,0-7 0,0-1 0,0-1 0,0-1 0,0 10 0,0 0 0,-1-9 0,2-1 0,15 14 0,-16-5 0,3-1 0,12-12 0,2-3 0,2 18 0,17-5 0,-1-12 0,0 1 0,-10-7 0,1-2 0,21-9 0,-21 2 0,1-1 0,2-2 0,1-2 0,-2 1 0,-1 0 0,0 0 0,1 0 0,-2 0 0,-1 0 0,10 0 0,-10 0 0,1 0 0,1 0 0,1 0 0,7 0 0,0 0 0,0 0 0,1 0 0,7 0 0,0 0 0,-6 0 0,1 0 0,-5 1 0,2-1 0,-1-1 0,3-2 0,0-1 0,10 3 0,0 0 0,-2-10 0,-2-2 0,-2 4 0,1-2 0,-9 1 0,2-2 0,-2-1 0,5-4 0,-1-1 0,8 1 0,-4-1 0,-20 0 0,-3 0 0,9 1 0,-7-1 0,-16-17 0,4 10 0,0-1 0,-7-1 0,-2-1 0,0-6 0,2-3 0,3 5 0,2-2 0,0-1-406,0-6 0,0-1 0,1-1 406,4-5 0,1 0 0,1-1 0,-5 12 0,1-1 0,0 1 0,0 0 0,2-11 0,1 1 0,0 3 0,0 9 0,1 2 0,-3-1 0,-2-1 0,-2 0 0,0 3 0,3 3 0,-2 3 0,-7-9 0,0 4 0,0 11 0,0 0 1218,-16-11-1218,12 27 0,-12-27 0,1 27 0,11-12 0,-28 0 0,13-3 0,-16-16 0,10 2 0,-1-1 0,-1 5 0,-1-1 0,5 2 0,-1-2 0,0 2 0,-11-4 0,0 1 0,0-4 0,-1 2 0,0 9 0,2 1 0,6-3 0,1 1 0,-7 6 0,1 2 0,13-1 0,1 1 0,-24-3 0,9 5 0,7 15 0,-8 0 0,-1 0 0,1 0 0,0 0 0,0 0 0,-1 0 0,11 0 0,-1 0 0,-13 0 0,6-2 0,-1 4 0,-5 13 0,14-12 0,-1-2 0,1 7 0,-1 0 0,-8 0 0,-2 0 0,-1 1 0,-1 1 0,5 1 0,-3 1 0,3 1 0,-1 5 0,2-1 0,-4-7 0,3 0 0,10 6 0,3-1 0,0-11 0,5 27 0,15-27 0,0 20 0,0-22 0,0 21 0,0-19 0,0 12 0,-16-16 0,12 15 0,-11-11 0,15 12 0,0 0 0,0-12 0,0 27 0,0-27 0,0 27 0,0-27 0,0 12 0,0-1 0,0-11 0,0 12 0,0-16 0,-16 0 0,12 0 0,-12 0 0</inkml:trace>
+</inkml:ink>
+</file>
+
+<file path=ppt/ink/ink4.xml><?xml version="1.0" encoding="utf-8"?>
+<inkml:ink xmlns:inkml="http://www.w3.org/2003/InkML">
+  <inkml:definitions>
+    <inkml:context xml:id="ctx0">
+      <inkml:inkSource xml:id="inkSrc0">
+        <inkml:traceFormat>
+          <inkml:channel name="X" type="integer" min="-2.14748E9" max="2.14748E9" units="cm"/>
+          <inkml:channel name="Y" type="integer" min="-2.14748E9" max="2.14748E9" units="cm"/>
+          <inkml:channel name="F" type="integer" max="32767" units="dev"/>
+        </inkml:traceFormat>
+        <inkml:channelProperties>
+          <inkml:channelProperty channel="X" name="resolution" value="1000" units="1/cm"/>
+          <inkml:channelProperty channel="Y" name="resolution" value="1000" units="1/cm"/>
+          <inkml:channelProperty channel="F" name="resolution" value="0" units="1/dev"/>
+        </inkml:channelProperties>
+      </inkml:inkSource>
+      <inkml:timestamp xml:id="ts0" timeString="2026-07-07T20:54:47.594"/>
+    </inkml:context>
+    <inkml:brush xml:id="br0">
+      <inkml:brushProperty name="width" value="0.05292" units="cm"/>
+      <inkml:brushProperty name="height" value="0.05292" units="cm"/>
+      <inkml:brushProperty name="color" value="#FF0000"/>
+    </inkml:brush>
+  </inkml:definitions>
+  <inkml:trace contextRef="#ctx0" brushRef="#br0">14305 6826 24575,'35'0'0,"1"0"0,-1 0 0,14 0 0,0 0 0,-10 0 0,2 0 0,-1 0-498,-6 0 1,-1 0-1,1 0 498,11 0 0,2 0 0,-1 0 0,-9 0 0,-1 0 0,0 0 0,5 0 0,0 0 0,-1 0 104,5 0 1,0 0-105,-10 0 0,0 0 0,-3 0 156,-2 0 1,-1 0-157,12 0 0,0 0 0,6 0 0,-13 0 0,1 0 376,-4 0 0,0 0-376,4 0 0,1 0 109,0 0 1,-1 0-110,-7 1 0,-2-2 0,1-6 0,-3-1 0,12 4 0,-1-12 0,-15 16 0,-5 0 0,-15 16 0,0-12 0,0 11 0,0-15 0,0 0 0</inkml:trace>
+  <inkml:trace contextRef="#ctx0" brushRef="#br0" timeOffset="4135">15134 12876 24575,'41'0'0,"0"0"0,5 0 0,3 0 0,-11 0 0,1 0 0,1 0 0,1 0 0,0 0 0,-3 0 0,-3 0 0,-4 0 0,-3 0 0,-5 0 0,-7 0 0,-16 0 0,0 0 0</inkml:trace>
+  <inkml:trace contextRef="#ctx0" brushRef="#br0" timeOffset="5951">12841 15699 24575,'35'0'0,"1"0"0,-11 0 0,1 0 0,13 0 0,-14 0 0,1 0 0,-1 0 0,1 0 0,0 0 0,3 0 0,12 0 0,4 0 0,-1 0 0,2 0-198,-6-1 0,1 1 1,0 1 197,-7 1 0,-1 1 0,1-1 0,7-1 0,0-1 0,-3 1 0,-3 3 0,-3 0 0,2-3 0,-2-2 0,4 1 0,-17 0 0,-3 16 0,-16-12 0,0 12 0,0-16 0</inkml:trace>
+</inkml:ink>
+</file>
+
+<file path=ppt/ink/ink5.xml><?xml version="1.0" encoding="utf-8"?>
+<inkml:ink xmlns:inkml="http://www.w3.org/2003/InkML">
+  <inkml:definitions>
+    <inkml:context xml:id="ctx0">
+      <inkml:inkSource xml:id="inkSrc0">
+        <inkml:traceFormat>
+          <inkml:channel name="X" type="integer" min="-2.14748E9" max="2.14748E9" units="cm"/>
+          <inkml:channel name="Y" type="integer" min="-2.14748E9" max="2.14748E9" units="cm"/>
+          <inkml:channel name="F" type="integer" max="32767" units="dev"/>
+        </inkml:traceFormat>
+        <inkml:channelProperties>
+          <inkml:channelProperty channel="X" name="resolution" value="1000" units="1/cm"/>
+          <inkml:channelProperty channel="Y" name="resolution" value="1000" units="1/cm"/>
+          <inkml:channelProperty channel="F" name="resolution" value="0" units="1/dev"/>
+        </inkml:channelProperties>
+      </inkml:inkSource>
+      <inkml:timestamp xml:id="ts0" timeString="2026-07-07T20:56:37.505"/>
+    </inkml:context>
+    <inkml:brush xml:id="br0">
+      <inkml:brushProperty name="width" value="0.05292" units="cm"/>
+      <inkml:brushProperty name="height" value="0.05292" units="cm"/>
+      <inkml:brushProperty name="color" value="#FF0000"/>
+    </inkml:brush>
+  </inkml:definitions>
+  <inkml:trace contextRef="#ctx0" brushRef="#br0">24342 6262 8191,'0'19'0,"15"-3"3276,5-16-1489,15 0 1031,1 0-2818,-1 0 1719,0 0-1719,0 0 3276,-15 0 0,11 0-3044,-27 0-232,28 0 0,-13 0 0,16 0 0,1 0 0,-11 0 0,1 0 0,1 0 0,1 0 0,3 0 0,0 0 0,-4 0 0,-1 0 0,17 0 0,-7 0 0,-17 0 0,13 0 0,-13 0 0,1 0 0,-5 0 0,-15 0 0,0 0 0,0 0 0</inkml:trace>
+  <inkml:trace contextRef="#ctx0" brushRef="#br0" timeOffset="2640">24271 11889 24575,'20'9'0,"11"-1"0,-7-7 0,3-2 0,8 1 0,5 0 0,2 0 0,5 0 0,1 0-596,0 0 1,0 0 0,1 0 595,-11 0 0,0 0 0,1 0 0,-1 0 0,9 0 0,-1 0 0,0 0 52,-2 0 0,1 0 0,-5 0-52,0 0 0,-2 0 0,7 0 0,-7 0 0,-19 0 0,-3 0 0,-16 0 1335,0 0-1335,0 16 295,0-12-295,0 27 0,0-27 0,0 12 0</inkml:trace>
+  <inkml:trace contextRef="#ctx0" brushRef="#br0" timeOffset="5674">21678 15593 24575,'26'0'0,"-1"0"0,2 0 0,1 0 0,-1 0 0,1 0 0,5 0 0,1 0 0,-7 0 0,0 0 0,8 0 0,1 0 0,3 0 0,0 0 0,4 0 0,3 0-222,-10 0 1,3 0 0,-1 0 221,-1 0 0,-1 0 0,1 0 0,4 0 0,0 0 0,-1 0 0,6 0 0,-2 0 0,-8 0 0,-2 0 0,-7-1 0,-3 2 0,11 14 0,-15-11 0,-4 12 0,-16-16 664,0 16-664,15-12 0,-11 11 0,28-15 0,3 16 0,8-13 0,8-2 0,-15 2 0,3 2 0,3-1 0,0 0-545,-3-2 1,2 0 0,1-1 0,1 0 0,0 0 544,2 0 0,1-1 0,1-1 0,0 2 0,-1 0 0,-1 3 0,0 1 0,-1 1 0,0-1 0,-3-1-189,2-2 0,-2-2 0,-1 0 1,-1 2 188,7 2 0,-1 1 0,-7 2 0,-9 1 0,-3-1 0,21-3 0,-43 12 0,12-1 2605,-16-11-2605,0 12 217,-16-16 1,12 0 0,-11 0 0</inkml:trace>
+</inkml:ink>
+</file>
+
+<file path=ppt/ink/ink6.xml><?xml version="1.0" encoding="utf-8"?>
+<inkml:ink xmlns:inkml="http://www.w3.org/2003/InkML">
+  <inkml:definitions>
+    <inkml:context xml:id="ctx0">
+      <inkml:inkSource xml:id="inkSrc0">
+        <inkml:traceFormat>
+          <inkml:channel name="X" type="integer" min="-2.14748E9" max="2.14748E9" units="cm"/>
+          <inkml:channel name="Y" type="integer" min="-2.14748E9" max="2.14748E9" units="cm"/>
+          <inkml:channel name="F" type="integer" max="32767" units="dev"/>
+        </inkml:traceFormat>
+        <inkml:channelProperties>
+          <inkml:channelProperty channel="X" name="resolution" value="1000" units="1/cm"/>
+          <inkml:channelProperty channel="Y" name="resolution" value="1000" units="1/cm"/>
+          <inkml:channelProperty channel="F" name="resolution" value="0" units="1/dev"/>
+        </inkml:channelProperties>
+      </inkml:inkSource>
+      <inkml:timestamp xml:id="ts0" timeString="2026-07-07T21:03:34.060"/>
+    </inkml:context>
+    <inkml:brush xml:id="br0">
+      <inkml:brushProperty name="width" value="0.05292" units="cm"/>
+      <inkml:brushProperty name="height" value="0.05292" units="cm"/>
+      <inkml:brushProperty name="color" value="#FF0000"/>
+    </inkml:brush>
+  </inkml:definitions>
+  <inkml:trace contextRef="#ctx0" brushRef="#br0">8996 6509 24575,'35'0'0,"-11"0"0,3 0 0,8 0 0,1 0 0,0 0 0,2 0 0,6 0 0,-2 0 0,-13-1 0,-3 2 0,1 6 0,-3 1 0,-4-4 0,11 12 0,-27-16 0,12 0 0,-16 0 0,0 16 0,0-12 0,0 11 0,0-15 0,0 0 0</inkml:trace>
+  <inkml:trace contextRef="#ctx0" brushRef="#br0" timeOffset="7335">10142 6544 24575,'36'0'0,"-1"0"0,1 0 0,-2 0 0,-5-1 0,-3 2 0,1 7 0,-3 0 0,12-4 0,-1 11 0,-16-15 0,13 0 0,-28 16 0,11-12 0,-15 12 0,0-16 0,0 0 0,0 0 0</inkml:trace>
+  <inkml:trace contextRef="#ctx0" brushRef="#br0" timeOffset="14252">3228 7585 24575,'35'0'0,"8"0"0,-18 0 0,3 0 0,19 0 0,0 0 0,-15 0 0,-1 0 0,18 0 0,0 0 0,-21 0 0,-1 0 0,0 0 0,1 0 0,5 0 0,0 0 0,-5 0 0,-1 0 0,8 0 0,1 0 0,7 0 0,0 0 0,-7 0 0,3 0 0,1 0 0,4 0 0,-3 0 0,-1 0 0,0 0 0,-3 0 0,1 0 0,-3 0 0,2 0 0,-3 0 0,-7 0 0,1 0 0,6 0 0,-2 0 0,7 0 0,-6 0 0,1 0 0,-7 0 0,1 0 0,6 0 0,2 0 0,7 0 0,1 0 0,0 0 0,2 0 0,3 0 0,0 0 0,-4 0 0,-2 0 0,-3 0 0,-2 0 0,-9 0 0,-3 0 0,0 0 0,-1 0 0,11 0 0,-1 0 0,0 0 0,0 0 0,1 0 0,-11 0 0,1 0 0,13 0 0,-7 0 0,2 0 0,-6 0 0,-1 0 0,8 0 0,1 0 0,-1 0 0,0 0 0,9 0 0,-1 0 0,-10 0 0,0 0 0,17 0 0,0 0 0,-16 0 0,-1 0 0,3 0 0,-2 0 0,-7 0 0,-3 0 0,12 0 0,-17 0 0,13 15 0,-13-11 0,16 12 0,1-16 0,-1 0 0,-15 0 0,-5 0 0,-15 0 0</inkml:trace>
+  <inkml:trace contextRef="#ctx0" brushRef="#br0" timeOffset="19001">8731 8661 24575,'34'0'0,"0"0"0,0 0 0,0 0 0,-1 0 0,2 0 0,9 0 0,3 0 0,1 0 0,-4 0 0,2 0 0,0 0 0,-1 0 0,-7 0 0,0 0 0,0 0 0,0 0 0,5 0 0,0 0 0,1 0 0,-1 0 0,-2 0 0,1 0 0,-2 0 0,-2 0 0,12 1 0,0-2 0,-8-4 0,2-1 0,-5 1 0,-10 3 0,-3 0 0,8-6 0,-2 0 0,8 8 0,-8 2 0,2-4 0,-7-5 0,1-1 0,14 6 0,2 0 0,-7-6 0,1 0 0,-5 7 0,2 3 0,-1-3 0,11-6 0,0-2 0,-11 8 0,2 0 0,0 0-263,1-4 0,1-2 0,0 3 263,3 3 0,1 1 0,-1 1 0,-2-1 0,0 0 0,1 0 0,5 0 0,2 0 0,-2 0 0,-8 0 0,0 0 0,-2 0 0,2 0 0,-1 0 0,-3 0 0,4 0 0,-3 0 0,-8 0 0,-1 0 0,10 0 0,0 0 0,1 0 394,-12 0 1,3 0-395,3 0 0,2 0 0,4 0 0,1 0 0,2 0 0,0 0 0,-3 0 0,-1 0 0,1 0 0,-2 0 0,-6 0 0,-1 0 0,-1 0 0,-1 0 0,10 0 0,1 0 0,-1 0 0,-15 0 0,-5 0 0,-15 0 0</inkml:trace>
+  <inkml:trace contextRef="#ctx0" brushRef="#br0" timeOffset="35002">5062 9525 24575,'26'0'0,"-1"0"0,6 0 0,1 0 0,10 0 0,4 0-435,-9 0 0,2 0 0,-1 0 435,-2 0 0,1 0 0,0 0 0,3 0 0,1 0 0,-1 0 0,-4 0 0,-1 0 0,0 0 0,0 0 0,1 0 0,-1 0 0,0 0 0,1 0 0,-1 0 212,11 0 1,-2 0-213,-12 0 0,-1 0 108,2-2 0,-2 4-108,1 14 0,0-14 0,2 0 0,5 13 332,-14-14 0,1-2-332,0 1 0,-1 0 0,15 0 0,-15 0 0,0 0 0,11 0 0,-11 0 0,1 0 0,13 0 0,-6 0 0,1 0 0,-7 0 0,0 0 0,1 0 0,-1 0 0,7-1 0,-1 2 0,6 15 0,-13-14 0,-1 0 0,10 14 0,8-16 0,-10 0 0,3 0 0,5-1 0,0 2 0,4 6 0,1 1 0,-13-6 0,2-2 0,-2 2 0,12 6 0,1 0 0,-11-7 0,0-2 0,0 1 0,11 0 0,-1 0 0,-2 0 0,0 0 0,-8-1 0,0 2 0,9 6 0,-1 2 0,-10-8 0,0 1 0,2 7 0,-1-2 0,9-7 0,-17 0 0,-1 0 0,14 0 0,-13 0 0,-1 0 0,10 0 0,-9 0 0,-1 0 0,15 0 0,-7 0 0,0 0 0,6 0 0,-13 8 0,-1 0 0,11-4 0,-17 11 0,13-15 0,-29 0 0,13 0 0,-16 0 0,16 0 0,-12 0 0,11 0 0,-15 16 0,0-12 0,16 12 0,-12-16 0,27 0 0,-11 0 0,4 0 0,3 0 0,12 0 0,-12 0 0,-3 0 0,-4 0 0,11 0 0,-27 0 0,12 0 0,-16 0 0</inkml:trace>
+  <inkml:trace contextRef="#ctx0" brushRef="#br0" timeOffset="51117">4957 11712 24575,'36'0'0,"1"0"0,-1 0 0,5 0 0,1 0 0,3 0 0,-2 0 0,2 0 0,3 0 0,0 0-656,-4 0 1,1 0-1,1 0 1,0 0 0,0 0 164,1 0 1,-1 0-1,1 0 1,0 0-1,1 0 18,-2 0 1,1 0-1,1 0 1,0 0-1,1 0 1,0 0 472,-5 0 0,0 0 0,1 0 0,0 0 0,1 0 0,-1 0 0,1 0-232,2 0 0,0 0 0,1 0 0,-1 0 0,1 0 0,1 0 0,-1 0 232,-3 0 0,0 0 0,1 0 0,0 0 0,0 0 0,-1 0 0,0 0 0,0 0 0,2 0 0,-1 0 0,1 0 0,-1 0 0,-1 0 0,1 0 0,-1 0-279,-2 0 1,0 0 0,0-1 0,0 1-1,0 0 1,-1 0 0,0 1 278,4 1 0,1 1 0,-1 0 0,-1 0 0,0 0 0,0-1 17,4-1 1,-2 0-1,0-1 1,1 0-1,-1 2-17,1 0 0,1 2 0,-1 0 0,0-1 0,-3 0 403,1-3 0,-1-1 0,-2 1 1,-1 1-404,9 3 0,-2 2 0,-3-1 1090,-10-4 0,-2 0 1,-3 1-1091,1 6 0,-3 0 1554,-3-9 0,-3 2-1554,-5 14 2728,-3-11-2728,-16 12 1330,0-16-1330,0 0 0,0 0 0</inkml:trace>
+</inkml:ink>
+</file>
+
+<file path=ppt/ink/ink7.xml><?xml version="1.0" encoding="utf-8"?>
+<inkml:ink xmlns:inkml="http://www.w3.org/2003/InkML">
+  <inkml:definitions>
+    <inkml:context xml:id="ctx0">
+      <inkml:inkSource xml:id="inkSrc0">
+        <inkml:traceFormat>
+          <inkml:channel name="X" type="integer" min="-2.14748E9" max="2.14748E9" units="cm"/>
+          <inkml:channel name="Y" type="integer" min="-2.14748E9" max="2.14748E9" units="cm"/>
+          <inkml:channel name="F" type="integer" max="32767" units="dev"/>
+        </inkml:traceFormat>
+        <inkml:channelProperties>
+          <inkml:channelProperty channel="X" name="resolution" value="1000" units="1/cm"/>
+          <inkml:channelProperty channel="Y" name="resolution" value="1000" units="1/cm"/>
+          <inkml:channelProperty channel="F" name="resolution" value="0" units="1/dev"/>
+        </inkml:channelProperties>
+      </inkml:inkSource>
+      <inkml:timestamp xml:id="ts0" timeString="2026-07-07T21:15:42.643"/>
+    </inkml:context>
+    <inkml:brush xml:id="br0">
+      <inkml:brushProperty name="width" value="0.05292" units="cm"/>
+      <inkml:brushProperty name="height" value="0.05292" units="cm"/>
+      <inkml:brushProperty name="color" value="#FF0000"/>
+    </inkml:brush>
+  </inkml:definitions>
+  <inkml:trace contextRef="#ctx0" brushRef="#br0">20285 3916 24575,'33'0'0,"0"0"0,3 0 0,3 0 0,-1 0 0,4 0 0,-1 0-542,1 0 0,0 0 1,0 0 541,0 0 0,0 0 0,-1 0 0,1 0 0,-1 0 0,-2 0 263,-1 0 1,-2 0-264,-1-2 0,-3 4 268,3 14-268,-15-13 0,-5 13 0,-15-16 0,0 0 0,0 0 0</inkml:trace>
+  <inkml:trace contextRef="#ctx0" brushRef="#br0" timeOffset="10849">24994 3263 24575,'20'0'0,"11"16"0,-11-12 0,15 27 0,-15-27 0,11 20 0,-11-22 0,15 21 0,-10-13 0,1 0 0,13 9 0,-14-3 0,1 0 0,0-6 0,-1-1 0,14 11 0,-3 11 0,-5-27 0,-12 12 0,17-1 0,-17-11 0,-3 28 0,-16-28 0,0 11 0,16-15 0,-12 16 0,11-12 0,-15 27 0,0-27 0,0 28 0,16-29 0,-12 13 0,12 0 0,-16-12 0,0 11 0,15-15 0,-11 0 0,12 0 0,-16 0 0,16 0 0,-13 16 0,13-12 0,-16 12 0,0-16 0,0 0 0,0 15 0,16-11 0,-12 28 0,27-13 0,-11 17 0,-1-1 0,13 0 0,-21 0 0,7-15 0,6 11 0,-5-11 0,1 0 0,11 11 0,-27-27 0,27 12 0,-27-1 0,12-11 0,0 12 0,-12-16 0,11 15 0,1-11 0,-12 12 0,12-16 0,-16 0 0,15 16 0,-11-12 0,28 11 0,-13 1 0,1-4 0,3-4 0,1 1 0,-1 15 0,1-7 0,3 1 0,0 0 0,-3 3 0,-5 12 0,1 1 0,14-7 0,-1 1 0,-13 7 0,-1 0 0,7-7 0,-1-1 0,-7 7 0,-1-1 0,2-13 0,-2-1 0,-7 7 0,-1-1 0,23 10 0,-28-15 0,11 11 0,-15-27 0,16 12 0,-28-16 0,24 0 0,-28 0 0,1 0 0,11 16 0,-12 3 0,8 4 0,0 5 0,-8 14 0,-3 2 0,7-10 0,-1 0 0,-1 0-277,-8 7 0,-2 0 0,3 1 277,7-4 0,2 1 0,-1-2 0,-4-6 0,-2-1 0,4-1 0,5 7 0,0-2 0,-5-6 0,-1-5 0,-3-3 0,-1 11 0,4-11 0,8 3 0,1 5 415,-2-2 1,-2 3-416,-4-2 0,-3 2 0,0 1 0,0-1 0,0 1 0,-1 1-137,-4 4 0,-1 1 1,1-1 136,-6 6 0,3 0 0,-2 2 0,5-2 0,13-16 0,0-3 0,-7 5 0,3-3 0,10-4 0,-12-4 0,16-16 0,-16 0 410,13 0-410,-13 15 0,8-11 0,0 17 0,-2 5 0,-10-7 0,-3 1 0,5 7 0,1 3 0,-3 0 0,-2-5 0,-3 0 0,2-1 0,-5 12 0,1-1 0,0-8 0,3-3 0,4-5 0,5-3 0,15 0 0,0-12 0,0 11 0,-16-15 0,12 0 0,-12 0 0,16 16 0,-31 4 0,20 4 0,-1 2 0,-21 1 0,-1 1 0,14 7 0,1 1 0,-8-3 0,3-3 0,4 7 0,5 2 0,-1-19 0,14 2 0,0 7 0,-10 6 0,-6 5 0,1 2-633,7-7 1,0 2 0,1 0 0,-1 3 632,-3 3 0,-1 2 0,0 2 0,-1 0 0,0-1 0,1-4 0,-1 0 0,1-1 0,0 0 0,1 0 0,1-1 0,0 0 0,1 0 0,1-2 0,0-2-31,-3 12 0,1-4 0,1-2 31,-2 4 0,3-6 0,8-5 0,2-19 0,2-16 0,6 0 2515,7 0-2515,-11 0 107,28 0-107,-13 0 0,1 0 0,11 0 0,5 0 0,-10 6 0,2 3 0,8 7 0,-1 4 0,1 6 0,-1 3 0,0-2 0,0 0 0,0 0 0,1-3 0,-1-5 0,0-2 0,-7 0 0,-1 1 0,-1 0 0,-1-1 0,0 0 0,1 2 0,8 15 0,3-2 0,0-18 0,0 0 0,-4 17 0,-3 0 0,3-11 0,-9 0 0,-5-5 0,1 1 0,11 3 0,-11 1 0,15 4 0,0-7 0,1 11 0,-19-4 0,1 3 0,-1-8 0,1 1 0,0 6 0,-1-1 0,19 10 0,-17-15 0,13 11 0,-13-27 0,1 27 0,11-11 0,-11 15 0,-11-9 0,1-1 0,6-5 0,0-1 0,-7 7 0,1-1 0,26 11 0,-17-1 0,13 0 0,-29 0 0,29 1 0,-22-12 0,-1 3 0,7 0 0,4 1 0,5-1 0,1 0 0,-7 0 0,1-3 0,6-9 0,-1-2 0,2 20 0,-9-21 0,5 19 0,-19-11 0,28-1 0,-28 13 0,27-28 0,-11 27 0,-1-27 0,-3 27 0,0-27 0,-13 12 0,13 0 0,0-12 0,-12 11 0,11 1 0,1-12 0,-12 11 0,12-15 0,-16 0 0,0 0 0,15 16 0,-11 4 0,28-1 0,-13 13 0,1-13 0,11 1 0,-27-4 0,12-16 0,-16 0 0</inkml:trace>
+  <inkml:trace contextRef="#ctx0" brushRef="#br0" timeOffset="20600">27217 10425 24575,'17'25'0,"1"1"0,0 1 0,-1 0 0,1 1 0,0-1 0,-1 0 0,1-3 0,17 12 0,-15-1 0,11-16 0,-11 13 0,-1-28 0,-3 27 0,0-27 0,-12 27 0,11-27 0,-15 12 0,16 0 0,-12-12 0,12 11 0,-32-15 0,12 0 0,-12 0 0,16 0 0,-15 0 0,11 16 0,-12-12 0,16 11 0,-16-15 0,12 0 0,-11 0 0,-1 0 0,12 0 0,-12 0 0,1 0 0,11 0 0,-27 16 0,11 12 0,-4 3 0,-3 6 0,9-6 0,0 2 0,-1 1-326,-4 2 1,-1 1 0,1 0 325,-2 3 0,2 1 0,0-1 0,4-3 0,1-2 0,0-1 0,1-3 0,-1-1 0,2-1 0,-2 8 0,1-3 0,-1-7 0,1-3 0,-3 11 0,-11 1 0,27-1 976,-12-16-976,0 13 0,12-28 0,-11 27 0,15-19 0,0 5 0,-8 7 0,6-20 0,-6 27 0,8-11 0,-16 15 0,15-9 0,-1-1 0,-14-6 0,0 1 0,14 12 0,0 3 0,-12-1 0,-3 2 0,5-3 0,1 3 0,-1 1-387,-1-3 1,0 2-1,-1 0 1,-1-1 386,-2 2 0,-2-1 0,1 0 0,1 0 0,2 1 0,2 1 0,0-1 0,-1 0 0,-3 11 0,-1-1 0,2-2-86,4-10 1,1-2 0,-1 0 85,1 3 0,-1-1 0,0-4 0,-6-2 0,1-3 0,6 0 0,2-1 0,-7 10 0,1 1 1525,11-1-1525,-28 0 277,28 1-277,-27-1 0,11 0 0,1 0 0,-13 1 0,29-17 0,-29 13 0,28-13 0,-11 1 0,-1 11 0,-4-11 0,3 5 0,-1 1 0,-17 5 0,16-6 0,2-1 0,-2 4 0,-13-9 0,29 12 0,-13-27 0,8 12 0,6 0 0,-6-12 0,-7 27 0,11-27 0,-12 27 0,0-11 0,12 0 0,-11-5 0,15 1 0,0-12 0,0-20 0,0 8 0,0-23 0,0 31 0,0-16 0,0 12 0,-16-11 0,12 15 0,-12 0 0,1 0 0,11 31 0,-17-6 0,-5 5 0,8 1 0,0 6 0,-1 1-557,-2-1 1,-1 3 0,-1 0-1,-1-1 557,-2-1 0,-2-1 0,1 0 0,2 0 0,4 3 0,3 1 0,1-1 0,-2-4 0,-4-1 0,-1-3 0,5-1 0,8 6 0,2-5 0,-6-5 0,15-11 0,-16 0 0,12-12 0,-17 22 0,-5 10 0,6-1 0,1 5 151,2-8 0,0 3 0,-2 2 1,1 0-152,0-1 0,0 0 0,1 0 0,0 1 0,0 2 0,2 2 0,-1-2 0,1-1-4,-4 0 1,1-2-1,2-1 4,2 11 0,1-5 0,-5-18 0,4-3 0,10-3 0,-11-9 0,15 8 1621,0-12-1621,0 12 11,0-16-11,0 15 0,0-11 0,-16 12 0,12-1 0,-27 21 0,18-4 0,3 9 0,-3 3-656,-1-6 1,-3 3-1,-1 3 1,-1 0 0,1 1 599,2-3 1,1 2 0,-1 0 0,1 1 0,-1 1-1,0 0 56,1-4 0,-1 1 0,1 1 0,-1-1 0,1 1 0,0-2 0,1-1 0,-1 10 0,0-2 0,1 0 0,1-3 0,0-1-105,-1-2 0,0-2 1,1-2-1,3-2 105,2 1 0,3-3 0,-2-6 0,-9 6 0,16-19 0,0-32 0,0 13 3276,0-29-3033,0 13 266,0-1-509,0-11 0,0 27 0,0-28 0,0 28 0,0-11 0,0-1 0,0-4 0,-15 1 0,-5 3 0,-15 16 0,0 0 0,-1 0 0,17 0 0,-28 0 0,7 0 0,-3 11 0,-8 10 0,18-4 0,-1 4 0,-2 2 0,0 2-650,3-2 0,-2 2 0,1 0 1,-1 3-1,0 0 650,2 1 0,0 1 0,0 1 0,1 1 0,-1 0 0,1-2 0,-5 4 0,1-1 0,0-1 0,1 0 0,2 0-204,-1 2 0,2 0 1,1-1-1,3-1 204,-1 5 0,2-2 0,5-5 0,2-10 0,6-1 0,6 28 0,8-43 0,0 28 3095,0-28-3095,0 27 969,0-27-969,0 27 0,0-11 0,0 15 0,0 0 0,0 1 0,0-1 0,0 0 0,0 1 0,8-1 0,-6 0 0,22 0 0,-20 1 0,27-1 0,-14-9 0,1-1 0,1-9 0,1-1 0,6 10 0,-1-1 0,11 4 0,-1 7 0,0 0 0,1-15 0,-17-4 0,12-16 0,-11 0 0,4 0 0,3 0 0,12 0 0,-14 0 0,1 0 0,0 0 0,-1 0 0,14 0 0,-6 0 0,1 0 0,-7-1 0,1 2 0,7 6 0,0 1 0,-3-6 0,-1 0 0,3 6 0,1 0 0,-4-7 0,0-2 0,4 1 0,1 0 0,-1 0 0,1 0 0,7 1 0,0-2 0,-6-7 0,0 0 0,7 7 0,-1-2 0,-7-11 0,-2-3 0,-6 7 0,-1 0 0,7-6 0,-1-3 0,-14 2 0,1-1 0,12-4 0,2 1 0,-6 2 0,-1 0 0,5-1 0,-1-3 0,-4-2 0,-1-1 0,-4 7 0,-1-1 0,-3-6 0,-1 1 0,19-10 0,-17 0 0,-3 15 0,-16-11 0,0 11 0,0 0 0,0-11 0,0 11 0,0-15 0,0 16 0,0-13 0,-16 28 0,12-11 0,-27-1 0,27 12 0,-27-12 0,27 1 0,-28 11 0,28-12 0,-11 0 0,7-3 0,6-17 0,-6 17 0,-8-12 0,13 27 0,-13-28 0,16 28 0,0-27 0,-16 11 0,12-15 0,-27 0 0,27-8 0,-27 5 0,29 9 0,0 0 0,-13 9 0,-2 0 0,7-5 0,1 0 0,-11-11 0,-11 1 0,27 0 0,-28-1 0,13 17 0,-1-13 0,-11 29 0,27-13 0,-27 16 0,27 0 0,-12 0 0,0 0 0,12 0 0,-11 0 0,-1 0 0,12 0 0,-11 0 0,-1 0 0,12 0 0,-12 0 0,1 0 0,11-16 0,-28 12 0,28-11 0,-11 15 0</inkml:trace>
+  <inkml:trace contextRef="#ctx0" brushRef="#br0" timeOffset="24783">24024 17657 24575,'-8'35'0,"0"0"0,3 8 0,-1 0 0,-10 2 0,-2 0-389,9-10 0,0 1 0,0-1 389,-3 1 0,0-1 0,1 0 0,0 11 0,2-2 190,0-7 1,2-3-191,7-7 0,0-3 194,0-5-194,0 13 0,0-28 0,0 11 592,0-15-592,0 16 0,-15 4 0,11-1 0,-12 13 0,16-28 0,0 11 0,16 1 0,-12-12 0,11 11 0,-15-15 0,16 0 0,-12 0 0,27 0 0,-27 0 0,28 0 0,-28 0 0,19 0 0,-21 0 0,6 0 0,-8 0 0,16 0 0,-13 0 0,29 0 0,-28 0 0,27 0 0,-27-15 0,12 11 0,-1-12 0,-11 16 0,28 0 0,-28-15 0,27 11 0,-27-12 0,12 0 0,-16 12 0,15-11 0,-11 15 0,12 0 0,-16-16 0,16 12 0,-13-12 0,13 1 0,-16 11 0,0-12 0,0 0 0,0 12 0,0-11 0,0-1 0,0-3 0,0-17 0,0 17 0,0-13 0,0 13 0,0-1 0,-16-11 0,-3 27 0,-16-12 0,15 16 0,-11 0 0,27 0 0,-28 0 0,28 0 0,-11 0 0,15 0 0,-16 0 0,12 0 0,-12 0 0,1 0 0,11 16 0,-12-12 0,16 11 0,0-15 0,-16 16 0,13-12 0,-13 12 0,8-16 0,6 0 0,-6 15 0,8-11 0,-15 12 0,11-16 0,-12 0 0,0 0 0,12 0 0,-11 0 0,15 0 0,0 0 0,0 16 0,-16-12 0,12 11 0,-12-30 0,16 11 0,0-12 0,0 16 0</inkml:trace>
+</inkml:ink>
 </file>
 
 <file path=ppt/slideLayouts/slideLayout1.xml><?xml version="1.0" encoding="utf-8"?>
@@ -25792,15 +26095,7 @@
             <a:pPr lvl="1"/>
             <a:r>
               <a:rPr lang="en-US" dirty="0"/>
-              <a:t>E.g. the </a:t>
-            </a:r>
-            <a:r>
-              <a:rPr lang="en-US"/>
-              <a:t>Linux kernel </a:t>
-            </a:r>
-            <a:r>
-              <a:rPr lang="en-US" dirty="0"/>
-              <a:t>uses red-black BSTs for its scheduling system</a:t>
+              <a:t>E.g. the Linux kernel uses red-black BSTs for its scheduling system</a:t>
             </a:r>
           </a:p>
         </p:txBody>
@@ -29429,6 +29724,57 @@
           </p:sp>
         </mc:Fallback>
       </mc:AlternateContent>
+      <mc:AlternateContent xmlns:mc="http://schemas.openxmlformats.org/markup-compatibility/2006">
+        <mc:Choice xmlns:p14="http://schemas.microsoft.com/office/powerpoint/2010/main" Requires="p14">
+          <p:contentPart p14:bwMode="auto" r:id="rId5">
+            <p14:nvContentPartPr>
+              <p14:cNvPr id="65" name="Ink 64">
+                <a:extLst>
+                  <a:ext uri="{FF2B5EF4-FFF2-40B4-BE49-F238E27FC236}">
+                    <a16:creationId xmlns:a16="http://schemas.microsoft.com/office/drawing/2014/main" id="{41E52916-1BBD-4F8E-4690-D55D415128BC}"/>
+                  </a:ext>
+                </a:extLst>
+              </p14:cNvPr>
+              <p14:cNvContentPartPr/>
+              <p14:nvPr/>
+            </p14:nvContentPartPr>
+            <p14:xfrm>
+              <a:off x="5086080" y="2457000"/>
+              <a:ext cx="6572880" cy="4128480"/>
+            </p14:xfrm>
+          </p:contentPart>
+        </mc:Choice>
+        <mc:Fallback>
+          <p:pic>
+            <p:nvPicPr>
+              <p:cNvPr id="65" name="Ink 64">
+                <a:extLst>
+                  <a:ext uri="{FF2B5EF4-FFF2-40B4-BE49-F238E27FC236}">
+                    <a16:creationId xmlns:a16="http://schemas.microsoft.com/office/drawing/2014/main" id="{41E52916-1BBD-4F8E-4690-D55D415128BC}"/>
+                  </a:ext>
+                </a:extLst>
+              </p:cNvPr>
+              <p:cNvPicPr/>
+              <p:nvPr/>
+            </p:nvPicPr>
+            <p:blipFill>
+              <a:blip r:embed="rId6"/>
+              <a:stretch>
+                <a:fillRect/>
+              </a:stretch>
+            </p:blipFill>
+            <p:spPr>
+              <a:xfrm>
+                <a:off x="5076720" y="2447640"/>
+                <a:ext cx="6591600" cy="4147200"/>
+              </a:xfrm>
+              <a:prstGeom prst="rect">
+                <a:avLst/>
+              </a:prstGeom>
+            </p:spPr>
+          </p:pic>
+        </mc:Fallback>
+      </mc:AlternateContent>
     </p:spTree>
     <p:extLst>
       <p:ext uri="{BB962C8B-B14F-4D97-AF65-F5344CB8AC3E}">
@@ -29563,6 +29909,57 @@
           </a:p>
         </p:txBody>
       </p:sp>
+      <mc:AlternateContent xmlns:mc="http://schemas.openxmlformats.org/markup-compatibility/2006">
+        <mc:Choice xmlns:p14="http://schemas.microsoft.com/office/powerpoint/2010/main" Requires="p14">
+          <p:contentPart p14:bwMode="auto" r:id="rId3">
+            <p14:nvContentPartPr>
+              <p14:cNvPr id="3" name="Ink 2">
+                <a:extLst>
+                  <a:ext uri="{FF2B5EF4-FFF2-40B4-BE49-F238E27FC236}">
+                    <a16:creationId xmlns:a16="http://schemas.microsoft.com/office/drawing/2014/main" id="{E173D4EC-53F0-6D0B-1A2B-27C15635AE3C}"/>
+                  </a:ext>
+                </a:extLst>
+              </p14:cNvPr>
+              <p14:cNvContentPartPr/>
+              <p14:nvPr/>
+            </p14:nvContentPartPr>
+            <p14:xfrm>
+              <a:off x="4051440" y="1860480"/>
+              <a:ext cx="7315560" cy="3912120"/>
+            </p14:xfrm>
+          </p:contentPart>
+        </mc:Choice>
+        <mc:Fallback>
+          <p:pic>
+            <p:nvPicPr>
+              <p:cNvPr id="3" name="Ink 2">
+                <a:extLst>
+                  <a:ext uri="{FF2B5EF4-FFF2-40B4-BE49-F238E27FC236}">
+                    <a16:creationId xmlns:a16="http://schemas.microsoft.com/office/drawing/2014/main" id="{E173D4EC-53F0-6D0B-1A2B-27C15635AE3C}"/>
+                  </a:ext>
+                </a:extLst>
+              </p:cNvPr>
+              <p:cNvPicPr/>
+              <p:nvPr/>
+            </p:nvPicPr>
+            <p:blipFill>
+              <a:blip r:embed="rId4"/>
+              <a:stretch>
+                <a:fillRect/>
+              </a:stretch>
+            </p:blipFill>
+            <p:spPr>
+              <a:xfrm>
+                <a:off x="4042080" y="1851120"/>
+                <a:ext cx="7334280" cy="3930840"/>
+              </a:xfrm>
+              <a:prstGeom prst="rect">
+                <a:avLst/>
+              </a:prstGeom>
+            </p:spPr>
+          </p:pic>
+        </mc:Fallback>
+      </mc:AlternateContent>
     </p:spTree>
     <p:extLst>
       <p:ext uri="{BB962C8B-B14F-4D97-AF65-F5344CB8AC3E}">
@@ -29711,6 +30108,57 @@
           </a:p>
         </p:txBody>
       </p:sp>
+      <mc:AlternateContent xmlns:mc="http://schemas.openxmlformats.org/markup-compatibility/2006">
+        <mc:Choice xmlns:p14="http://schemas.microsoft.com/office/powerpoint/2010/main" Requires="p14">
+          <p:contentPart p14:bwMode="auto" r:id="rId3">
+            <p14:nvContentPartPr>
+              <p14:cNvPr id="6" name="Ink 5">
+                <a:extLst>
+                  <a:ext uri="{FF2B5EF4-FFF2-40B4-BE49-F238E27FC236}">
+                    <a16:creationId xmlns:a16="http://schemas.microsoft.com/office/drawing/2014/main" id="{CE95D2F6-C2E6-9C47-99E1-81992E2D03FA}"/>
+                  </a:ext>
+                </a:extLst>
+              </p14:cNvPr>
+              <p14:cNvContentPartPr/>
+              <p14:nvPr/>
+            </p14:nvContentPartPr>
+            <p14:xfrm>
+              <a:off x="4451040" y="1796400"/>
+              <a:ext cx="724680" cy="782280"/>
+            </p14:xfrm>
+          </p:contentPart>
+        </mc:Choice>
+        <mc:Fallback>
+          <p:pic>
+            <p:nvPicPr>
+              <p:cNvPr id="6" name="Ink 5">
+                <a:extLst>
+                  <a:ext uri="{FF2B5EF4-FFF2-40B4-BE49-F238E27FC236}">
+                    <a16:creationId xmlns:a16="http://schemas.microsoft.com/office/drawing/2014/main" id="{CE95D2F6-C2E6-9C47-99E1-81992E2D03FA}"/>
+                  </a:ext>
+                </a:extLst>
+              </p:cNvPr>
+              <p:cNvPicPr/>
+              <p:nvPr/>
+            </p:nvPicPr>
+            <p:blipFill>
+              <a:blip r:embed="rId4"/>
+              <a:stretch>
+                <a:fillRect/>
+              </a:stretch>
+            </p:blipFill>
+            <p:spPr>
+              <a:xfrm>
+                <a:off x="4441680" y="1787040"/>
+                <a:ext cx="743400" cy="801000"/>
+              </a:xfrm>
+              <a:prstGeom prst="rect">
+                <a:avLst/>
+              </a:prstGeom>
+            </p:spPr>
+          </p:pic>
+        </mc:Fallback>
+      </mc:AlternateContent>
     </p:spTree>
     <p:extLst>
       <p:ext uri="{BB962C8B-B14F-4D97-AF65-F5344CB8AC3E}">
@@ -32481,6 +32929,57 @@
           </a:p>
         </p:txBody>
       </p:sp>
+      <mc:AlternateContent xmlns:mc="http://schemas.openxmlformats.org/markup-compatibility/2006">
+        <mc:Choice xmlns:p14="http://schemas.microsoft.com/office/powerpoint/2010/main" Requires="p14">
+          <p:contentPart p14:bwMode="auto" r:id="rId2">
+            <p14:nvContentPartPr>
+              <p14:cNvPr id="6" name="Ink 5">
+                <a:extLst>
+                  <a:ext uri="{FF2B5EF4-FFF2-40B4-BE49-F238E27FC236}">
+                    <a16:creationId xmlns:a16="http://schemas.microsoft.com/office/drawing/2014/main" id="{54DD4913-DB18-A1BD-DAFE-6399726CBC1A}"/>
+                  </a:ext>
+                </a:extLst>
+              </p14:cNvPr>
+              <p14:cNvContentPartPr/>
+              <p14:nvPr/>
+            </p14:nvContentPartPr>
+            <p14:xfrm>
+              <a:off x="4622760" y="2444760"/>
+              <a:ext cx="1124280" cy="3226320"/>
+            </p14:xfrm>
+          </p:contentPart>
+        </mc:Choice>
+        <mc:Fallback>
+          <p:pic>
+            <p:nvPicPr>
+              <p:cNvPr id="6" name="Ink 5">
+                <a:extLst>
+                  <a:ext uri="{FF2B5EF4-FFF2-40B4-BE49-F238E27FC236}">
+                    <a16:creationId xmlns:a16="http://schemas.microsoft.com/office/drawing/2014/main" id="{54DD4913-DB18-A1BD-DAFE-6399726CBC1A}"/>
+                  </a:ext>
+                </a:extLst>
+              </p:cNvPr>
+              <p:cNvPicPr/>
+              <p:nvPr/>
+            </p:nvPicPr>
+            <p:blipFill>
+              <a:blip r:embed="rId3"/>
+              <a:stretch>
+                <a:fillRect/>
+              </a:stretch>
+            </p:blipFill>
+            <p:spPr>
+              <a:xfrm>
+                <a:off x="4613400" y="2435400"/>
+                <a:ext cx="1143000" cy="3245040"/>
+              </a:xfrm>
+              <a:prstGeom prst="rect">
+                <a:avLst/>
+              </a:prstGeom>
+            </p:spPr>
+          </p:pic>
+        </mc:Fallback>
+      </mc:AlternateContent>
     </p:spTree>
     <p:extLst>
       <p:ext uri="{BB962C8B-B14F-4D97-AF65-F5344CB8AC3E}">
@@ -37810,6 +38309,57 @@
           </p:spPr>
         </p:pic>
       </p:grpSp>
+      <mc:AlternateContent xmlns:mc="http://schemas.openxmlformats.org/markup-compatibility/2006">
+        <mc:Choice xmlns:p14="http://schemas.microsoft.com/office/powerpoint/2010/main" Requires="p14">
+          <p:contentPart p14:bwMode="auto" r:id="rId4">
+            <p14:nvContentPartPr>
+              <p14:cNvPr id="17" name="Ink 16">
+                <a:extLst>
+                  <a:ext uri="{FF2B5EF4-FFF2-40B4-BE49-F238E27FC236}">
+                    <a16:creationId xmlns:a16="http://schemas.microsoft.com/office/drawing/2014/main" id="{0012B3CC-55FC-035F-AE50-78C8B5498A84}"/>
+                  </a:ext>
+                </a:extLst>
+              </p14:cNvPr>
+              <p14:cNvContentPartPr/>
+              <p14:nvPr/>
+            </p14:nvContentPartPr>
+            <p14:xfrm>
+              <a:off x="7804080" y="2254320"/>
+              <a:ext cx="1321200" cy="3441960"/>
+            </p14:xfrm>
+          </p:contentPart>
+        </mc:Choice>
+        <mc:Fallback>
+          <p:pic>
+            <p:nvPicPr>
+              <p:cNvPr id="17" name="Ink 16">
+                <a:extLst>
+                  <a:ext uri="{FF2B5EF4-FFF2-40B4-BE49-F238E27FC236}">
+                    <a16:creationId xmlns:a16="http://schemas.microsoft.com/office/drawing/2014/main" id="{0012B3CC-55FC-035F-AE50-78C8B5498A84}"/>
+                  </a:ext>
+                </a:extLst>
+              </p:cNvPr>
+              <p:cNvPicPr/>
+              <p:nvPr/>
+            </p:nvPicPr>
+            <p:blipFill>
+              <a:blip r:embed="rId5"/>
+              <a:stretch>
+                <a:fillRect/>
+              </a:stretch>
+            </p:blipFill>
+            <p:spPr>
+              <a:xfrm>
+                <a:off x="7794720" y="2244960"/>
+                <a:ext cx="1339920" cy="3460680"/>
+              </a:xfrm>
+              <a:prstGeom prst="rect">
+                <a:avLst/>
+              </a:prstGeom>
+            </p:spPr>
+          </p:pic>
+        </mc:Fallback>
+      </mc:AlternateContent>
     </p:spTree>
     <p:extLst>
       <p:ext uri="{BB962C8B-B14F-4D97-AF65-F5344CB8AC3E}">
@@ -38336,6 +38886,57 @@
           </a:p>
         </p:txBody>
       </p:sp>
+      <mc:AlternateContent xmlns:mc="http://schemas.openxmlformats.org/markup-compatibility/2006">
+        <mc:Choice xmlns:p14="http://schemas.microsoft.com/office/powerpoint/2010/main" Requires="p14">
+          <p:contentPart p14:bwMode="auto" r:id="rId3">
+            <p14:nvContentPartPr>
+              <p14:cNvPr id="5" name="Ink 4">
+                <a:extLst>
+                  <a:ext uri="{FF2B5EF4-FFF2-40B4-BE49-F238E27FC236}">
+                    <a16:creationId xmlns:a16="http://schemas.microsoft.com/office/drawing/2014/main" id="{02BAB44A-ABD5-B2FC-EB1C-74EDBE3B9110}"/>
+                  </a:ext>
+                </a:extLst>
+              </p14:cNvPr>
+              <p14:cNvContentPartPr/>
+              <p14:nvPr/>
+            </p14:nvContentPartPr>
+            <p14:xfrm>
+              <a:off x="1162080" y="2342880"/>
+              <a:ext cx="3264120" cy="1911960"/>
+            </p14:xfrm>
+          </p:contentPart>
+        </mc:Choice>
+        <mc:Fallback>
+          <p:pic>
+            <p:nvPicPr>
+              <p:cNvPr id="5" name="Ink 4">
+                <a:extLst>
+                  <a:ext uri="{FF2B5EF4-FFF2-40B4-BE49-F238E27FC236}">
+                    <a16:creationId xmlns:a16="http://schemas.microsoft.com/office/drawing/2014/main" id="{02BAB44A-ABD5-B2FC-EB1C-74EDBE3B9110}"/>
+                  </a:ext>
+                </a:extLst>
+              </p:cNvPr>
+              <p:cNvPicPr/>
+              <p:nvPr/>
+            </p:nvPicPr>
+            <p:blipFill>
+              <a:blip r:embed="rId4"/>
+              <a:stretch>
+                <a:fillRect/>
+              </a:stretch>
+            </p:blipFill>
+            <p:spPr>
+              <a:xfrm>
+                <a:off x="1152720" y="2333520"/>
+                <a:ext cx="3282840" cy="1930680"/>
+              </a:xfrm>
+              <a:prstGeom prst="rect">
+                <a:avLst/>
+              </a:prstGeom>
+            </p:spPr>
+          </p:pic>
+        </mc:Fallback>
+      </mc:AlternateContent>
     </p:spTree>
     <p:extLst>
       <p:ext uri="{BB962C8B-B14F-4D97-AF65-F5344CB8AC3E}">
@@ -40649,6 +41250,57 @@
           </a:p>
         </p:txBody>
       </p:sp>
+      <mc:AlternateContent xmlns:mc="http://schemas.openxmlformats.org/markup-compatibility/2006">
+        <mc:Choice xmlns:p14="http://schemas.microsoft.com/office/powerpoint/2010/main" Requires="p14">
+          <p:contentPart p14:bwMode="auto" r:id="rId3">
+            <p14:nvContentPartPr>
+              <p14:cNvPr id="45" name="Ink 44">
+                <a:extLst>
+                  <a:ext uri="{FF2B5EF4-FFF2-40B4-BE49-F238E27FC236}">
+                    <a16:creationId xmlns:a16="http://schemas.microsoft.com/office/drawing/2014/main" id="{A5C47341-887A-05B9-6B25-34D9F1097DAE}"/>
+                  </a:ext>
+                </a:extLst>
+              </p14:cNvPr>
+              <p14:cNvContentPartPr/>
+              <p14:nvPr/>
+            </p14:nvContentPartPr>
+            <p14:xfrm>
+              <a:off x="7302600" y="1174680"/>
+              <a:ext cx="2622960" cy="5582520"/>
+            </p14:xfrm>
+          </p:contentPart>
+        </mc:Choice>
+        <mc:Fallback>
+          <p:pic>
+            <p:nvPicPr>
+              <p:cNvPr id="45" name="Ink 44">
+                <a:extLst>
+                  <a:ext uri="{FF2B5EF4-FFF2-40B4-BE49-F238E27FC236}">
+                    <a16:creationId xmlns:a16="http://schemas.microsoft.com/office/drawing/2014/main" id="{A5C47341-887A-05B9-6B25-34D9F1097DAE}"/>
+                  </a:ext>
+                </a:extLst>
+              </p:cNvPr>
+              <p:cNvPicPr/>
+              <p:nvPr/>
+            </p:nvPicPr>
+            <p:blipFill>
+              <a:blip r:embed="rId4"/>
+              <a:stretch>
+                <a:fillRect/>
+              </a:stretch>
+            </p:blipFill>
+            <p:spPr>
+              <a:xfrm>
+                <a:off x="7293240" y="1165320"/>
+                <a:ext cx="2641680" cy="5601240"/>
+              </a:xfrm>
+              <a:prstGeom prst="rect">
+                <a:avLst/>
+              </a:prstGeom>
+            </p:spPr>
+          </p:pic>
+        </mc:Fallback>
+      </mc:AlternateContent>
     </p:spTree>
     <p:extLst>
       <p:ext uri="{BB962C8B-B14F-4D97-AF65-F5344CB8AC3E}">
